--- a/PPTs/Lecture 3 - Links Exercises ANS.pptx
+++ b/PPTs/Lecture 3 - Links Exercises ANS.pptx
@@ -5,47 +5,57 @@
     <p:sldMasterId id="2147483670" r:id="rId1"/>
   </p:sldMasterIdLst>
   <p:notesMasterIdLst>
-    <p:notesMasterId r:id="rId8"/>
+    <p:notesMasterId r:id="rId18"/>
   </p:notesMasterIdLst>
   <p:sldIdLst>
     <p:sldId id="257" r:id="rId2"/>
     <p:sldId id="1004" r:id="rId3"/>
-    <p:sldId id="1263" r:id="rId4"/>
-    <p:sldId id="1266" r:id="rId5"/>
-    <p:sldId id="1259" r:id="rId6"/>
-    <p:sldId id="1265" r:id="rId7"/>
+    <p:sldId id="276" r:id="rId4"/>
+    <p:sldId id="1268" r:id="rId5"/>
+    <p:sldId id="1269" r:id="rId6"/>
+    <p:sldId id="1270" r:id="rId7"/>
+    <p:sldId id="1271" r:id="rId8"/>
+    <p:sldId id="1272" r:id="rId9"/>
+    <p:sldId id="1273" r:id="rId10"/>
+    <p:sldId id="1274" r:id="rId11"/>
+    <p:sldId id="1275" r:id="rId12"/>
+    <p:sldId id="1276" r:id="rId13"/>
+    <p:sldId id="1277" r:id="rId14"/>
+    <p:sldId id="1278" r:id="rId15"/>
+    <p:sldId id="1279" r:id="rId16"/>
+    <p:sldId id="1280" r:id="rId17"/>
   </p:sldIdLst>
   <p:sldSz cx="9144000" cy="5143500" type="screen16x9"/>
   <p:notesSz cx="6858000" cy="9144000"/>
   <p:embeddedFontLst>
     <p:embeddedFont>
       <p:font typeface="ＭＳ Ｐゴシック" panose="020B0600070205080204" pitchFamily="34" charset="-128"/>
-      <p:regular r:id="rId9"/>
+      <p:regular r:id="rId19"/>
     </p:embeddedFont>
     <p:embeddedFont>
       <p:font typeface="Cambria Math" panose="02040503050406030204" pitchFamily="18" charset="0"/>
-      <p:regular r:id="rId10"/>
+      <p:regular r:id="rId20"/>
     </p:embeddedFont>
     <p:embeddedFont>
       <p:font typeface="Roboto" panose="02000000000000000000" pitchFamily="2" charset="0"/>
-      <p:regular r:id="rId11"/>
-      <p:bold r:id="rId12"/>
-      <p:italic r:id="rId13"/>
-      <p:boldItalic r:id="rId14"/>
+      <p:regular r:id="rId21"/>
+      <p:bold r:id="rId22"/>
+      <p:italic r:id="rId23"/>
+      <p:boldItalic r:id="rId24"/>
     </p:embeddedFont>
     <p:embeddedFont>
       <p:font typeface="Roboto Light" panose="02000000000000000000" pitchFamily="2" charset="0"/>
-      <p:regular r:id="rId15"/>
-      <p:bold r:id="rId16"/>
-      <p:italic r:id="rId17"/>
-      <p:boldItalic r:id="rId18"/>
+      <p:regular r:id="rId25"/>
+      <p:bold r:id="rId26"/>
+      <p:italic r:id="rId27"/>
+      <p:boldItalic r:id="rId28"/>
     </p:embeddedFont>
     <p:embeddedFont>
       <p:font typeface="Roboto Medium" panose="02000000000000000000" pitchFamily="2" charset="0"/>
-      <p:regular r:id="rId19"/>
-      <p:bold r:id="rId20"/>
-      <p:italic r:id="rId21"/>
-      <p:boldItalic r:id="rId22"/>
+      <p:regular r:id="rId29"/>
+      <p:bold r:id="rId30"/>
+      <p:italic r:id="rId31"/>
+      <p:boldItalic r:id="rId32"/>
     </p:embeddedFont>
   </p:embeddedFontLst>
   <p:defaultTextStyle>
@@ -288,7 +298,7 @@
 <file path=ppt/revisionInfo.xml><?xml version="1.0" encoding="utf-8"?>
 <p1510:revInfo xmlns:a="http://schemas.openxmlformats.org/drawingml/2006/main" xmlns:r="http://schemas.openxmlformats.org/officeDocument/2006/relationships" xmlns:p1510="http://schemas.microsoft.com/office/powerpoint/2015/10/main">
   <p1510:revLst>
-    <p1510:client id="{C039B89F-B73B-4A52-B89B-C3185D261259}" v="40" dt="2026-01-30T02:11:47.646"/>
+    <p1510:client id="{C039B89F-B73B-4A52-B89B-C3185D261259}" v="138" dt="2026-01-31T20:28:34.917"/>
   </p1510:revLst>
 </p1510:revInfo>
 </file>
@@ -297,8 +307,8 @@
 <pc:chgInfo xmlns:a="http://schemas.openxmlformats.org/drawingml/2006/main" xmlns:r="http://schemas.openxmlformats.org/officeDocument/2006/relationships" xmlns:ac="http://schemas.microsoft.com/office/drawing/2013/main/command" xmlns:pc="http://schemas.microsoft.com/office/powerpoint/2013/main/command">
   <pc:docChgLst>
     <pc:chgData name="Zonghua Gu" userId="9a7e1853e1951ef5" providerId="LiveId" clId="{CF1FAA12-072C-4ED5-BA76-0FFFAEFDB88A}"/>
-    <pc:docChg chg="undo custSel addSld delSld modSld">
-      <pc:chgData name="Zonghua Gu" userId="9a7e1853e1951ef5" providerId="LiveId" clId="{CF1FAA12-072C-4ED5-BA76-0FFFAEFDB88A}" dt="2026-01-30T02:14:01.754" v="340" actId="47"/>
+    <pc:docChg chg="undo redo custSel addSld delSld modSld">
+      <pc:chgData name="Zonghua Gu" userId="9a7e1853e1951ef5" providerId="LiveId" clId="{CF1FAA12-072C-4ED5-BA76-0FFFAEFDB88A}" dt="2026-01-31T21:33:34.221" v="1015" actId="1076"/>
       <pc:docMkLst>
         <pc:docMk/>
       </pc:docMkLst>
@@ -437,12 +447,116 @@
           <pc:sldMk cId="0" sldId="275"/>
         </pc:sldMkLst>
       </pc:sldChg>
-      <pc:sldChg chg="del">
-        <pc:chgData name="Zonghua Gu" userId="9a7e1853e1951ef5" providerId="LiveId" clId="{CF1FAA12-072C-4ED5-BA76-0FFFAEFDB88A}" dt="2026-01-30T01:51:02.624" v="1" actId="47"/>
+      <pc:sldChg chg="addSp delSp modSp add del mod">
+        <pc:chgData name="Zonghua Gu" userId="9a7e1853e1951ef5" providerId="LiveId" clId="{CF1FAA12-072C-4ED5-BA76-0FFFAEFDB88A}" dt="2026-01-31T19:48:31.719" v="368" actId="1076"/>
         <pc:sldMkLst>
           <pc:docMk/>
           <pc:sldMk cId="0" sldId="276"/>
         </pc:sldMkLst>
+        <pc:spChg chg="mod">
+          <ac:chgData name="Zonghua Gu" userId="9a7e1853e1951ef5" providerId="LiveId" clId="{CF1FAA12-072C-4ED5-BA76-0FFFAEFDB88A}" dt="2026-01-31T19:47:38.150" v="344"/>
+          <ac:spMkLst>
+            <pc:docMk/>
+            <pc:sldMk cId="0" sldId="276"/>
+            <ac:spMk id="1601" creationId="{00000000-0000-0000-0000-000000000000}"/>
+          </ac:spMkLst>
+        </pc:spChg>
+        <pc:spChg chg="mod">
+          <ac:chgData name="Zonghua Gu" userId="9a7e1853e1951ef5" providerId="LiveId" clId="{CF1FAA12-072C-4ED5-BA76-0FFFAEFDB88A}" dt="2026-01-31T19:48:14.043" v="363" actId="20577"/>
+          <ac:spMkLst>
+            <pc:docMk/>
+            <pc:sldMk cId="0" sldId="276"/>
+            <ac:spMk id="1602" creationId="{00000000-0000-0000-0000-000000000000}"/>
+          </ac:spMkLst>
+        </pc:spChg>
+        <pc:spChg chg="del">
+          <ac:chgData name="Zonghua Gu" userId="9a7e1853e1951ef5" providerId="LiveId" clId="{CF1FAA12-072C-4ED5-BA76-0FFFAEFDB88A}" dt="2026-01-31T19:48:21.416" v="364" actId="478"/>
+          <ac:spMkLst>
+            <pc:docMk/>
+            <pc:sldMk cId="0" sldId="276"/>
+            <ac:spMk id="1603" creationId="{00000000-0000-0000-0000-000000000000}"/>
+          </ac:spMkLst>
+        </pc:spChg>
+        <pc:spChg chg="del">
+          <ac:chgData name="Zonghua Gu" userId="9a7e1853e1951ef5" providerId="LiveId" clId="{CF1FAA12-072C-4ED5-BA76-0FFFAEFDB88A}" dt="2026-01-31T19:48:21.416" v="364" actId="478"/>
+          <ac:spMkLst>
+            <pc:docMk/>
+            <pc:sldMk cId="0" sldId="276"/>
+            <ac:spMk id="1604" creationId="{00000000-0000-0000-0000-000000000000}"/>
+          </ac:spMkLst>
+        </pc:spChg>
+        <pc:spChg chg="del">
+          <ac:chgData name="Zonghua Gu" userId="9a7e1853e1951ef5" providerId="LiveId" clId="{CF1FAA12-072C-4ED5-BA76-0FFFAEFDB88A}" dt="2026-01-31T19:48:21.416" v="364" actId="478"/>
+          <ac:spMkLst>
+            <pc:docMk/>
+            <pc:sldMk cId="0" sldId="276"/>
+            <ac:spMk id="1614" creationId="{00000000-0000-0000-0000-000000000000}"/>
+          </ac:spMkLst>
+        </pc:spChg>
+        <pc:spChg chg="del">
+          <ac:chgData name="Zonghua Gu" userId="9a7e1853e1951ef5" providerId="LiveId" clId="{CF1FAA12-072C-4ED5-BA76-0FFFAEFDB88A}" dt="2026-01-31T19:48:21.416" v="364" actId="478"/>
+          <ac:spMkLst>
+            <pc:docMk/>
+            <pc:sldMk cId="0" sldId="276"/>
+            <ac:spMk id="1615" creationId="{00000000-0000-0000-0000-000000000000}"/>
+          </ac:spMkLst>
+        </pc:spChg>
+        <pc:spChg chg="del">
+          <ac:chgData name="Zonghua Gu" userId="9a7e1853e1951ef5" providerId="LiveId" clId="{CF1FAA12-072C-4ED5-BA76-0FFFAEFDB88A}" dt="2026-01-31T19:48:21.416" v="364" actId="478"/>
+          <ac:spMkLst>
+            <pc:docMk/>
+            <pc:sldMk cId="0" sldId="276"/>
+            <ac:spMk id="1616" creationId="{00000000-0000-0000-0000-000000000000}"/>
+          </ac:spMkLst>
+        </pc:spChg>
+        <pc:spChg chg="del">
+          <ac:chgData name="Zonghua Gu" userId="9a7e1853e1951ef5" providerId="LiveId" clId="{CF1FAA12-072C-4ED5-BA76-0FFFAEFDB88A}" dt="2026-01-31T19:48:21.416" v="364" actId="478"/>
+          <ac:spMkLst>
+            <pc:docMk/>
+            <pc:sldMk cId="0" sldId="276"/>
+            <ac:spMk id="1617" creationId="{00000000-0000-0000-0000-000000000000}"/>
+          </ac:spMkLst>
+        </pc:spChg>
+        <pc:spChg chg="del">
+          <ac:chgData name="Zonghua Gu" userId="9a7e1853e1951ef5" providerId="LiveId" clId="{CF1FAA12-072C-4ED5-BA76-0FFFAEFDB88A}" dt="2026-01-31T19:48:21.416" v="364" actId="478"/>
+          <ac:spMkLst>
+            <pc:docMk/>
+            <pc:sldMk cId="0" sldId="276"/>
+            <ac:spMk id="1618" creationId="{00000000-0000-0000-0000-000000000000}"/>
+          </ac:spMkLst>
+        </pc:spChg>
+        <pc:spChg chg="del">
+          <ac:chgData name="Zonghua Gu" userId="9a7e1853e1951ef5" providerId="LiveId" clId="{CF1FAA12-072C-4ED5-BA76-0FFFAEFDB88A}" dt="2026-01-31T19:48:21.416" v="364" actId="478"/>
+          <ac:spMkLst>
+            <pc:docMk/>
+            <pc:sldMk cId="0" sldId="276"/>
+            <ac:spMk id="1619" creationId="{00000000-0000-0000-0000-000000000000}"/>
+          </ac:spMkLst>
+        </pc:spChg>
+        <pc:spChg chg="del">
+          <ac:chgData name="Zonghua Gu" userId="9a7e1853e1951ef5" providerId="LiveId" clId="{CF1FAA12-072C-4ED5-BA76-0FFFAEFDB88A}" dt="2026-01-31T19:48:21.416" v="364" actId="478"/>
+          <ac:spMkLst>
+            <pc:docMk/>
+            <pc:sldMk cId="0" sldId="276"/>
+            <ac:spMk id="1620" creationId="{00000000-0000-0000-0000-000000000000}"/>
+          </ac:spMkLst>
+        </pc:spChg>
+        <pc:spChg chg="del">
+          <ac:chgData name="Zonghua Gu" userId="9a7e1853e1951ef5" providerId="LiveId" clId="{CF1FAA12-072C-4ED5-BA76-0FFFAEFDB88A}" dt="2026-01-31T19:48:21.416" v="364" actId="478"/>
+          <ac:spMkLst>
+            <pc:docMk/>
+            <pc:sldMk cId="0" sldId="276"/>
+            <ac:spMk id="1621" creationId="{00000000-0000-0000-0000-000000000000}"/>
+          </ac:spMkLst>
+        </pc:spChg>
+        <pc:picChg chg="add mod">
+          <ac:chgData name="Zonghua Gu" userId="9a7e1853e1951ef5" providerId="LiveId" clId="{CF1FAA12-072C-4ED5-BA76-0FFFAEFDB88A}" dt="2026-01-31T19:48:31.719" v="368" actId="1076"/>
+          <ac:picMkLst>
+            <pc:docMk/>
+            <pc:sldMk cId="0" sldId="276"/>
+            <ac:picMk id="3" creationId="{9633A34F-1978-7574-E3B7-AE9705F992F7}"/>
+          </ac:picMkLst>
+        </pc:picChg>
       </pc:sldChg>
       <pc:sldChg chg="del">
         <pc:chgData name="Zonghua Gu" userId="9a7e1853e1951ef5" providerId="LiveId" clId="{CF1FAA12-072C-4ED5-BA76-0FFFAEFDB88A}" dt="2026-01-30T01:51:02.624" v="1" actId="47"/>
@@ -573,8 +687,8 @@
           <pc:sldMk cId="3098061888" sldId="1006"/>
         </pc:sldMkLst>
       </pc:sldChg>
-      <pc:sldChg chg="addSp delSp modSp add mod">
-        <pc:chgData name="Zonghua Gu" userId="9a7e1853e1951ef5" providerId="LiveId" clId="{CF1FAA12-072C-4ED5-BA76-0FFFAEFDB88A}" dt="2026-01-30T02:05:33.921" v="261" actId="20577"/>
+      <pc:sldChg chg="addSp delSp modSp add del mod">
+        <pc:chgData name="Zonghua Gu" userId="9a7e1853e1951ef5" providerId="LiveId" clId="{CF1FAA12-072C-4ED5-BA76-0FFFAEFDB88A}" dt="2026-01-31T19:51:29.779" v="429" actId="47"/>
         <pc:sldMkLst>
           <pc:docMk/>
           <pc:sldMk cId="1533311895" sldId="1259"/>
@@ -628,8 +742,8 @@
           </ac:picMkLst>
         </pc:picChg>
       </pc:sldChg>
-      <pc:sldChg chg="addSp delSp modSp add mod modNotes">
-        <pc:chgData name="Zonghua Gu" userId="9a7e1853e1951ef5" providerId="LiveId" clId="{CF1FAA12-072C-4ED5-BA76-0FFFAEFDB88A}" dt="2026-01-30T02:05:53.011" v="267" actId="1076"/>
+      <pc:sldChg chg="addSp delSp modSp add del mod modNotes">
+        <pc:chgData name="Zonghua Gu" userId="9a7e1853e1951ef5" providerId="LiveId" clId="{CF1FAA12-072C-4ED5-BA76-0FFFAEFDB88A}" dt="2026-01-31T19:48:46.745" v="371" actId="47"/>
         <pc:sldMkLst>
           <pc:docMk/>
           <pc:sldMk cId="1660582021" sldId="1263"/>
@@ -690,8 +804,8 @@
           </ac:spMkLst>
         </pc:spChg>
       </pc:sldChg>
-      <pc:sldChg chg="addSp delSp modSp new mod modNotes">
-        <pc:chgData name="Zonghua Gu" userId="9a7e1853e1951ef5" providerId="LiveId" clId="{CF1FAA12-072C-4ED5-BA76-0FFFAEFDB88A}" dt="2026-01-30T02:12:05.260" v="339" actId="20577"/>
+      <pc:sldChg chg="addSp delSp modSp new del mod modNotes">
+        <pc:chgData name="Zonghua Gu" userId="9a7e1853e1951ef5" providerId="LiveId" clId="{CF1FAA12-072C-4ED5-BA76-0FFFAEFDB88A}" dt="2026-01-31T19:52:31.150" v="456" actId="47"/>
         <pc:sldMkLst>
           <pc:docMk/>
           <pc:sldMk cId="547263288" sldId="1265"/>
@@ -705,7 +819,7 @@
           </ac:spMkLst>
         </pc:spChg>
         <pc:spChg chg="mod">
-          <ac:chgData name="Zonghua Gu" userId="9a7e1853e1951ef5" providerId="LiveId" clId="{CF1FAA12-072C-4ED5-BA76-0FFFAEFDB88A}" dt="2026-01-30T02:12:05.260" v="339" actId="20577"/>
+          <ac:chgData name="Zonghua Gu" userId="9a7e1853e1951ef5" providerId="LiveId" clId="{CF1FAA12-072C-4ED5-BA76-0FFFAEFDB88A}" dt="2026-01-31T19:51:40.701" v="433" actId="21"/>
           <ac:spMkLst>
             <pc:docMk/>
             <pc:sldMk cId="547263288" sldId="1265"/>
@@ -737,7 +851,7 @@
           </ac:spMkLst>
         </pc:spChg>
         <pc:spChg chg="add mod">
-          <ac:chgData name="Zonghua Gu" userId="9a7e1853e1951ef5" providerId="LiveId" clId="{CF1FAA12-072C-4ED5-BA76-0FFFAEFDB88A}" dt="2026-01-30T02:02:30.905" v="147" actId="14100"/>
+          <ac:chgData name="Zonghua Gu" userId="9a7e1853e1951ef5" providerId="LiveId" clId="{CF1FAA12-072C-4ED5-BA76-0FFFAEFDB88A}" dt="2026-01-31T19:46:50.529" v="341" actId="20577"/>
           <ac:spMkLst>
             <pc:docMk/>
             <pc:sldMk cId="547263288" sldId="1265"/>
@@ -745,8 +859,8 @@
           </ac:spMkLst>
         </pc:spChg>
       </pc:sldChg>
-      <pc:sldChg chg="addSp delSp modSp add mod">
-        <pc:chgData name="Zonghua Gu" userId="9a7e1853e1951ef5" providerId="LiveId" clId="{CF1FAA12-072C-4ED5-BA76-0FFFAEFDB88A}" dt="2026-01-30T02:09:56.091" v="300" actId="27636"/>
+      <pc:sldChg chg="addSp delSp modSp add del mod">
+        <pc:chgData name="Zonghua Gu" userId="9a7e1853e1951ef5" providerId="LiveId" clId="{CF1FAA12-072C-4ED5-BA76-0FFFAEFDB88A}" dt="2026-01-31T19:50:03.864" v="389" actId="47"/>
         <pc:sldMkLst>
           <pc:docMk/>
           <pc:sldMk cId="1519989677" sldId="1266"/>
@@ -776,7 +890,7 @@
           </ac:spMkLst>
         </pc:spChg>
         <pc:spChg chg="mod">
-          <ac:chgData name="Zonghua Gu" userId="9a7e1853e1951ef5" providerId="LiveId" clId="{CF1FAA12-072C-4ED5-BA76-0FFFAEFDB88A}" dt="2026-01-30T02:09:56.091" v="300" actId="27636"/>
+          <ac:chgData name="Zonghua Gu" userId="9a7e1853e1951ef5" providerId="LiveId" clId="{CF1FAA12-072C-4ED5-BA76-0FFFAEFDB88A}" dt="2026-01-31T19:49:34.174" v="382" actId="20577"/>
           <ac:spMkLst>
             <pc:docMk/>
             <pc:sldMk cId="1519989677" sldId="1266"/>
@@ -797,6 +911,21 @@
             <pc:docMk/>
             <pc:sldMk cId="1519989677" sldId="1266"/>
             <ac:spMk id="9" creationId="{2CEBB505-7C7F-0132-5A2E-70DEB47F8ECF}"/>
+          </ac:spMkLst>
+        </pc:spChg>
+      </pc:sldChg>
+      <pc:sldChg chg="modSp new del mod">
+        <pc:chgData name="Zonghua Gu" userId="9a7e1853e1951ef5" providerId="LiveId" clId="{CF1FAA12-072C-4ED5-BA76-0FFFAEFDB88A}" dt="2026-01-31T19:52:35.282" v="457" actId="47"/>
+        <pc:sldMkLst>
+          <pc:docMk/>
+          <pc:sldMk cId="3484712235" sldId="1267"/>
+        </pc:sldMkLst>
+        <pc:spChg chg="mod">
+          <ac:chgData name="Zonghua Gu" userId="9a7e1853e1951ef5" providerId="LiveId" clId="{CF1FAA12-072C-4ED5-BA76-0FFFAEFDB88A}" dt="2026-01-31T19:47:38.232" v="345" actId="27636"/>
+          <ac:spMkLst>
+            <pc:docMk/>
+            <pc:sldMk cId="3484712235" sldId="1267"/>
+            <ac:spMk id="2" creationId="{8AF3E2BA-2A72-20A1-C4AE-9D113A1EA50A}"/>
           </ac:spMkLst>
         </pc:spChg>
       </pc:sldChg>
@@ -830,6 +959,705 @@
             <ac:spMk id="5" creationId="{D29273D3-6711-26DF-E974-BA7412969180}"/>
           </ac:spMkLst>
         </pc:spChg>
+      </pc:sldChg>
+      <pc:sldChg chg="modSp new mod">
+        <pc:chgData name="Zonghua Gu" userId="9a7e1853e1951ef5" providerId="LiveId" clId="{CF1FAA12-072C-4ED5-BA76-0FFFAEFDB88A}" dt="2026-01-31T19:49:56.169" v="388" actId="20577"/>
+        <pc:sldMkLst>
+          <pc:docMk/>
+          <pc:sldMk cId="3467535441" sldId="1268"/>
+        </pc:sldMkLst>
+        <pc:spChg chg="mod">
+          <ac:chgData name="Zonghua Gu" userId="9a7e1853e1951ef5" providerId="LiveId" clId="{CF1FAA12-072C-4ED5-BA76-0FFFAEFDB88A}" dt="2026-01-31T19:49:47.134" v="385" actId="20577"/>
+          <ac:spMkLst>
+            <pc:docMk/>
+            <pc:sldMk cId="3467535441" sldId="1268"/>
+            <ac:spMk id="2" creationId="{8E07A7B8-5F5E-9C46-A02A-45A4953A2C5E}"/>
+          </ac:spMkLst>
+        </pc:spChg>
+        <pc:spChg chg="mod">
+          <ac:chgData name="Zonghua Gu" userId="9a7e1853e1951ef5" providerId="LiveId" clId="{CF1FAA12-072C-4ED5-BA76-0FFFAEFDB88A}" dt="2026-01-31T19:49:56.169" v="388" actId="20577"/>
+          <ac:spMkLst>
+            <pc:docMk/>
+            <pc:sldMk cId="3467535441" sldId="1268"/>
+            <ac:spMk id="3" creationId="{063C74B7-C656-C241-21CB-F1DEC9FF912D}"/>
+          </ac:spMkLst>
+        </pc:spChg>
+      </pc:sldChg>
+      <pc:sldChg chg="addSp modSp new mod">
+        <pc:chgData name="Zonghua Gu" userId="9a7e1853e1951ef5" providerId="LiveId" clId="{CF1FAA12-072C-4ED5-BA76-0FFFAEFDB88A}" dt="2026-01-31T19:51:24.151" v="428" actId="14100"/>
+        <pc:sldMkLst>
+          <pc:docMk/>
+          <pc:sldMk cId="2452000653" sldId="1269"/>
+        </pc:sldMkLst>
+        <pc:spChg chg="mod">
+          <ac:chgData name="Zonghua Gu" userId="9a7e1853e1951ef5" providerId="LiveId" clId="{CF1FAA12-072C-4ED5-BA76-0FFFAEFDB88A}" dt="2026-01-31T19:50:12.115" v="392" actId="20577"/>
+          <ac:spMkLst>
+            <pc:docMk/>
+            <pc:sldMk cId="2452000653" sldId="1269"/>
+            <ac:spMk id="2" creationId="{EB1D09C4-5A46-5A12-632F-94F7DD6A4680}"/>
+          </ac:spMkLst>
+        </pc:spChg>
+        <pc:spChg chg="mod">
+          <ac:chgData name="Zonghua Gu" userId="9a7e1853e1951ef5" providerId="LiveId" clId="{CF1FAA12-072C-4ED5-BA76-0FFFAEFDB88A}" dt="2026-01-31T19:51:24.151" v="428" actId="14100"/>
+          <ac:spMkLst>
+            <pc:docMk/>
+            <pc:sldMk cId="2452000653" sldId="1269"/>
+            <ac:spMk id="3" creationId="{F556D2C4-EF61-AAE9-7C6B-5EA12DEB7D4D}"/>
+          </ac:spMkLst>
+        </pc:spChg>
+        <pc:picChg chg="add mod">
+          <ac:chgData name="Zonghua Gu" userId="9a7e1853e1951ef5" providerId="LiveId" clId="{CF1FAA12-072C-4ED5-BA76-0FFFAEFDB88A}" dt="2026-01-31T19:50:43.067" v="398" actId="1076"/>
+          <ac:picMkLst>
+            <pc:docMk/>
+            <pc:sldMk cId="2452000653" sldId="1269"/>
+            <ac:picMk id="5" creationId="{93081B88-98BE-0B42-A066-2BC3243648F2}"/>
+          </ac:picMkLst>
+        </pc:picChg>
+        <pc:inkChg chg="add mod">
+          <ac:chgData name="Zonghua Gu" userId="9a7e1853e1951ef5" providerId="LiveId" clId="{CF1FAA12-072C-4ED5-BA76-0FFFAEFDB88A}" dt="2026-01-31T19:50:43.067" v="398" actId="1076"/>
+          <ac:inkMkLst>
+            <pc:docMk/>
+            <pc:sldMk cId="2452000653" sldId="1269"/>
+            <ac:inkMk id="4" creationId="{454AEAF8-F473-455B-BC8D-93520F3D869D}"/>
+          </ac:inkMkLst>
+        </pc:inkChg>
+      </pc:sldChg>
+      <pc:sldChg chg="modSp new mod">
+        <pc:chgData name="Zonghua Gu" userId="9a7e1853e1951ef5" providerId="LiveId" clId="{CF1FAA12-072C-4ED5-BA76-0FFFAEFDB88A}" dt="2026-01-31T19:52:23.418" v="455" actId="20577"/>
+        <pc:sldMkLst>
+          <pc:docMk/>
+          <pc:sldMk cId="2009370128" sldId="1270"/>
+        </pc:sldMkLst>
+        <pc:spChg chg="mod">
+          <ac:chgData name="Zonghua Gu" userId="9a7e1853e1951ef5" providerId="LiveId" clId="{CF1FAA12-072C-4ED5-BA76-0FFFAEFDB88A}" dt="2026-01-31T19:51:37.048" v="432" actId="20577"/>
+          <ac:spMkLst>
+            <pc:docMk/>
+            <pc:sldMk cId="2009370128" sldId="1270"/>
+            <ac:spMk id="2" creationId="{1CF72EB5-4F43-2195-7F16-4D7C32E0D553}"/>
+          </ac:spMkLst>
+        </pc:spChg>
+        <pc:spChg chg="mod">
+          <ac:chgData name="Zonghua Gu" userId="9a7e1853e1951ef5" providerId="LiveId" clId="{CF1FAA12-072C-4ED5-BA76-0FFFAEFDB88A}" dt="2026-01-31T19:52:23.418" v="455" actId="20577"/>
+          <ac:spMkLst>
+            <pc:docMk/>
+            <pc:sldMk cId="2009370128" sldId="1270"/>
+            <ac:spMk id="3" creationId="{FF8F2B28-F620-3212-5941-AABA6E623EC4}"/>
+          </ac:spMkLst>
+        </pc:spChg>
+      </pc:sldChg>
+      <pc:sldChg chg="addSp modSp new mod">
+        <pc:chgData name="Zonghua Gu" userId="9a7e1853e1951ef5" providerId="LiveId" clId="{CF1FAA12-072C-4ED5-BA76-0FFFAEFDB88A}" dt="2026-01-31T20:01:15.554" v="510" actId="20577"/>
+        <pc:sldMkLst>
+          <pc:docMk/>
+          <pc:sldMk cId="2368817847" sldId="1271"/>
+        </pc:sldMkLst>
+        <pc:spChg chg="mod">
+          <ac:chgData name="Zonghua Gu" userId="9a7e1853e1951ef5" providerId="LiveId" clId="{CF1FAA12-072C-4ED5-BA76-0FFFAEFDB88A}" dt="2026-01-31T20:01:15.554" v="510" actId="20577"/>
+          <ac:spMkLst>
+            <pc:docMk/>
+            <pc:sldMk cId="2368817847" sldId="1271"/>
+            <ac:spMk id="2" creationId="{6147EF64-7949-83C0-0604-F9FF057C8563}"/>
+          </ac:spMkLst>
+        </pc:spChg>
+        <pc:spChg chg="mod">
+          <ac:chgData name="Zonghua Gu" userId="9a7e1853e1951ef5" providerId="LiveId" clId="{CF1FAA12-072C-4ED5-BA76-0FFFAEFDB88A}" dt="2026-01-31T20:00:17.192" v="491" actId="20577"/>
+          <ac:spMkLst>
+            <pc:docMk/>
+            <pc:sldMk cId="2368817847" sldId="1271"/>
+            <ac:spMk id="3" creationId="{F290FA34-8079-10F5-B27C-4818DB98B73E}"/>
+          </ac:spMkLst>
+        </pc:spChg>
+        <pc:picChg chg="add mod">
+          <ac:chgData name="Zonghua Gu" userId="9a7e1853e1951ef5" providerId="LiveId" clId="{CF1FAA12-072C-4ED5-BA76-0FFFAEFDB88A}" dt="2026-01-31T19:59:11.424" v="472" actId="1076"/>
+          <ac:picMkLst>
+            <pc:docMk/>
+            <pc:sldMk cId="2368817847" sldId="1271"/>
+            <ac:picMk id="5" creationId="{14960E0B-7C86-DD16-04C2-A7258E9CFCB7}"/>
+          </ac:picMkLst>
+        </pc:picChg>
+        <pc:picChg chg="add mod">
+          <ac:chgData name="Zonghua Gu" userId="9a7e1853e1951ef5" providerId="LiveId" clId="{CF1FAA12-072C-4ED5-BA76-0FFFAEFDB88A}" dt="2026-01-31T19:59:11.424" v="472" actId="1076"/>
+          <ac:picMkLst>
+            <pc:docMk/>
+            <pc:sldMk cId="2368817847" sldId="1271"/>
+            <ac:picMk id="7" creationId="{BF21AC61-E5A9-5EDB-833D-82CF0D156426}"/>
+          </ac:picMkLst>
+        </pc:picChg>
+      </pc:sldChg>
+      <pc:sldChg chg="addSp modSp new mod">
+        <pc:chgData name="Zonghua Gu" userId="9a7e1853e1951ef5" providerId="LiveId" clId="{CF1FAA12-072C-4ED5-BA76-0FFFAEFDB88A}" dt="2026-01-31T20:01:18.731" v="512" actId="20577"/>
+        <pc:sldMkLst>
+          <pc:docMk/>
+          <pc:sldMk cId="1216499002" sldId="1272"/>
+        </pc:sldMkLst>
+        <pc:spChg chg="mod">
+          <ac:chgData name="Zonghua Gu" userId="9a7e1853e1951ef5" providerId="LiveId" clId="{CF1FAA12-072C-4ED5-BA76-0FFFAEFDB88A}" dt="2026-01-31T20:01:18.731" v="512" actId="20577"/>
+          <ac:spMkLst>
+            <pc:docMk/>
+            <pc:sldMk cId="1216499002" sldId="1272"/>
+            <ac:spMk id="2" creationId="{D376C843-1D5A-2E2C-E4D6-4818C73AE3FA}"/>
+          </ac:spMkLst>
+        </pc:spChg>
+        <pc:picChg chg="add">
+          <ac:chgData name="Zonghua Gu" userId="9a7e1853e1951ef5" providerId="LiveId" clId="{CF1FAA12-072C-4ED5-BA76-0FFFAEFDB88A}" dt="2026-01-31T20:00:44.724" v="493" actId="22"/>
+          <ac:picMkLst>
+            <pc:docMk/>
+            <pc:sldMk cId="1216499002" sldId="1272"/>
+            <ac:picMk id="5" creationId="{E5B00580-102C-DEF3-8A7A-36A03E13916F}"/>
+          </ac:picMkLst>
+        </pc:picChg>
+      </pc:sldChg>
+      <pc:sldChg chg="addSp delSp modSp new mod">
+        <pc:chgData name="Zonghua Gu" userId="9a7e1853e1951ef5" providerId="LiveId" clId="{CF1FAA12-072C-4ED5-BA76-0FFFAEFDB88A}" dt="2026-01-31T20:03:06.918" v="556" actId="22"/>
+        <pc:sldMkLst>
+          <pc:docMk/>
+          <pc:sldMk cId="3511070162" sldId="1273"/>
+        </pc:sldMkLst>
+        <pc:spChg chg="mod">
+          <ac:chgData name="Zonghua Gu" userId="9a7e1853e1951ef5" providerId="LiveId" clId="{CF1FAA12-072C-4ED5-BA76-0FFFAEFDB88A}" dt="2026-01-31T20:01:29.932" v="518" actId="20577"/>
+          <ac:spMkLst>
+            <pc:docMk/>
+            <pc:sldMk cId="3511070162" sldId="1273"/>
+            <ac:spMk id="2" creationId="{4ACDFEBF-4EE6-5F37-EA61-D00D7CD5B76F}"/>
+          </ac:spMkLst>
+        </pc:spChg>
+        <pc:spChg chg="mod">
+          <ac:chgData name="Zonghua Gu" userId="9a7e1853e1951ef5" providerId="LiveId" clId="{CF1FAA12-072C-4ED5-BA76-0FFFAEFDB88A}" dt="2026-01-31T20:02:49.175" v="554"/>
+          <ac:spMkLst>
+            <pc:docMk/>
+            <pc:sldMk cId="3511070162" sldId="1273"/>
+            <ac:spMk id="3" creationId="{B430C32A-C044-33BA-A0B9-58AD8EBDEFE5}"/>
+          </ac:spMkLst>
+        </pc:spChg>
+        <pc:picChg chg="add del">
+          <ac:chgData name="Zonghua Gu" userId="9a7e1853e1951ef5" providerId="LiveId" clId="{CF1FAA12-072C-4ED5-BA76-0FFFAEFDB88A}" dt="2026-01-31T20:03:06.918" v="556" actId="22"/>
+          <ac:picMkLst>
+            <pc:docMk/>
+            <pc:sldMk cId="3511070162" sldId="1273"/>
+            <ac:picMk id="5" creationId="{C800A452-6ACD-D55E-406F-3B2994D076EE}"/>
+          </ac:picMkLst>
+        </pc:picChg>
+      </pc:sldChg>
+      <pc:sldChg chg="addSp modSp new mod">
+        <pc:chgData name="Zonghua Gu" userId="9a7e1853e1951ef5" providerId="LiveId" clId="{CF1FAA12-072C-4ED5-BA76-0FFFAEFDB88A}" dt="2026-01-31T20:04:04.075" v="579" actId="14100"/>
+        <pc:sldMkLst>
+          <pc:docMk/>
+          <pc:sldMk cId="1143496153" sldId="1274"/>
+        </pc:sldMkLst>
+        <pc:spChg chg="mod">
+          <ac:chgData name="Zonghua Gu" userId="9a7e1853e1951ef5" providerId="LiveId" clId="{CF1FAA12-072C-4ED5-BA76-0FFFAEFDB88A}" dt="2026-01-31T20:03:13.815" v="563" actId="20577"/>
+          <ac:spMkLst>
+            <pc:docMk/>
+            <pc:sldMk cId="1143496153" sldId="1274"/>
+            <ac:spMk id="2" creationId="{58CB1762-CCC1-782A-571E-70717F9D62EA}"/>
+          </ac:spMkLst>
+        </pc:spChg>
+        <pc:spChg chg="mod">
+          <ac:chgData name="Zonghua Gu" userId="9a7e1853e1951ef5" providerId="LiveId" clId="{CF1FAA12-072C-4ED5-BA76-0FFFAEFDB88A}" dt="2026-01-31T20:04:00.296" v="578" actId="14100"/>
+          <ac:spMkLst>
+            <pc:docMk/>
+            <pc:sldMk cId="1143496153" sldId="1274"/>
+            <ac:spMk id="3" creationId="{FFEA292F-B1D7-7C8C-3291-EBAC5C2C9788}"/>
+          </ac:spMkLst>
+        </pc:spChg>
+        <pc:picChg chg="add mod">
+          <ac:chgData name="Zonghua Gu" userId="9a7e1853e1951ef5" providerId="LiveId" clId="{CF1FAA12-072C-4ED5-BA76-0FFFAEFDB88A}" dt="2026-01-31T20:03:57.028" v="577" actId="1076"/>
+          <ac:picMkLst>
+            <pc:docMk/>
+            <pc:sldMk cId="1143496153" sldId="1274"/>
+            <ac:picMk id="5" creationId="{0E3D6AB7-1900-7F4E-275F-B8B4CA004272}"/>
+          </ac:picMkLst>
+        </pc:picChg>
+        <pc:picChg chg="add mod ord">
+          <ac:chgData name="Zonghua Gu" userId="9a7e1853e1951ef5" providerId="LiveId" clId="{CF1FAA12-072C-4ED5-BA76-0FFFAEFDB88A}" dt="2026-01-31T20:04:04.075" v="579" actId="14100"/>
+          <ac:picMkLst>
+            <pc:docMk/>
+            <pc:sldMk cId="1143496153" sldId="1274"/>
+            <ac:picMk id="7" creationId="{ADC47DEC-E55F-0CD3-997A-606765A0DEEE}"/>
+          </ac:picMkLst>
+        </pc:picChg>
+      </pc:sldChg>
+      <pc:sldChg chg="addSp delSp modSp new mod">
+        <pc:chgData name="Zonghua Gu" userId="9a7e1853e1951ef5" providerId="LiveId" clId="{CF1FAA12-072C-4ED5-BA76-0FFFAEFDB88A}" dt="2026-01-31T20:15:18.917" v="729" actId="20577"/>
+        <pc:sldMkLst>
+          <pc:docMk/>
+          <pc:sldMk cId="567678026" sldId="1275"/>
+        </pc:sldMkLst>
+        <pc:spChg chg="mod">
+          <ac:chgData name="Zonghua Gu" userId="9a7e1853e1951ef5" providerId="LiveId" clId="{CF1FAA12-072C-4ED5-BA76-0FFFAEFDB88A}" dt="2026-01-31T20:04:37.506" v="584" actId="20577"/>
+          <ac:spMkLst>
+            <pc:docMk/>
+            <pc:sldMk cId="567678026" sldId="1275"/>
+            <ac:spMk id="2" creationId="{37A2676D-09E5-4F4A-9DA3-CF738CBC3F4B}"/>
+          </ac:spMkLst>
+        </pc:spChg>
+        <pc:spChg chg="mod">
+          <ac:chgData name="Zonghua Gu" userId="9a7e1853e1951ef5" providerId="LiveId" clId="{CF1FAA12-072C-4ED5-BA76-0FFFAEFDB88A}" dt="2026-01-31T20:15:18.917" v="729" actId="20577"/>
+          <ac:spMkLst>
+            <pc:docMk/>
+            <pc:sldMk cId="567678026" sldId="1275"/>
+            <ac:spMk id="3" creationId="{6445057F-C8B5-F039-C0A2-F1FFE1D4B024}"/>
+          </ac:spMkLst>
+        </pc:spChg>
+        <pc:picChg chg="add del">
+          <ac:chgData name="Zonghua Gu" userId="9a7e1853e1951ef5" providerId="LiveId" clId="{CF1FAA12-072C-4ED5-BA76-0FFFAEFDB88A}" dt="2026-01-31T20:07:05.826" v="609" actId="22"/>
+          <ac:picMkLst>
+            <pc:docMk/>
+            <pc:sldMk cId="567678026" sldId="1275"/>
+            <ac:picMk id="5" creationId="{3014BCB6-F6B8-D5C2-AA0A-CCC9ACAC4017}"/>
+          </ac:picMkLst>
+        </pc:picChg>
+      </pc:sldChg>
+      <pc:sldChg chg="addSp delSp modSp new mod">
+        <pc:chgData name="Zonghua Gu" userId="9a7e1853e1951ef5" providerId="LiveId" clId="{CF1FAA12-072C-4ED5-BA76-0FFFAEFDB88A}" dt="2026-01-31T20:21:12.253" v="870" actId="1035"/>
+        <pc:sldMkLst>
+          <pc:docMk/>
+          <pc:sldMk cId="984938217" sldId="1276"/>
+        </pc:sldMkLst>
+        <pc:spChg chg="mod">
+          <ac:chgData name="Zonghua Gu" userId="9a7e1853e1951ef5" providerId="LiveId" clId="{CF1FAA12-072C-4ED5-BA76-0FFFAEFDB88A}" dt="2026-01-31T20:07:11.551" v="616" actId="20577"/>
+          <ac:spMkLst>
+            <pc:docMk/>
+            <pc:sldMk cId="984938217" sldId="1276"/>
+            <ac:spMk id="2" creationId="{49150401-4851-F7D7-E1BA-319CF046615B}"/>
+          </ac:spMkLst>
+        </pc:spChg>
+        <pc:spChg chg="add mod">
+          <ac:chgData name="Zonghua Gu" userId="9a7e1853e1951ef5" providerId="LiveId" clId="{CF1FAA12-072C-4ED5-BA76-0FFFAEFDB88A}" dt="2026-01-31T20:19:32.438" v="857" actId="1076"/>
+          <ac:spMkLst>
+            <pc:docMk/>
+            <pc:sldMk cId="984938217" sldId="1276"/>
+            <ac:spMk id="10" creationId="{862069DA-1AB7-D39C-51B2-1D7851BCCC5C}"/>
+          </ac:spMkLst>
+        </pc:spChg>
+        <pc:spChg chg="add del mod">
+          <ac:chgData name="Zonghua Gu" userId="9a7e1853e1951ef5" providerId="LiveId" clId="{CF1FAA12-072C-4ED5-BA76-0FFFAEFDB88A}" dt="2026-01-31T20:14:53.912" v="726" actId="478"/>
+          <ac:spMkLst>
+            <pc:docMk/>
+            <pc:sldMk cId="984938217" sldId="1276"/>
+            <ac:spMk id="11" creationId="{7C721454-3FCB-B2BE-8DE4-22D74C8B263B}"/>
+          </ac:spMkLst>
+        </pc:spChg>
+        <pc:spChg chg="add del mod">
+          <ac:chgData name="Zonghua Gu" userId="9a7e1853e1951ef5" providerId="LiveId" clId="{CF1FAA12-072C-4ED5-BA76-0FFFAEFDB88A}" dt="2026-01-31T20:20:22.199" v="868" actId="478"/>
+          <ac:spMkLst>
+            <pc:docMk/>
+            <pc:sldMk cId="984938217" sldId="1276"/>
+            <ac:spMk id="12" creationId="{395B6785-2150-FB42-794B-DA63BBB63446}"/>
+          </ac:spMkLst>
+        </pc:spChg>
+        <pc:spChg chg="add del mod">
+          <ac:chgData name="Zonghua Gu" userId="9a7e1853e1951ef5" providerId="LiveId" clId="{CF1FAA12-072C-4ED5-BA76-0FFFAEFDB88A}" dt="2026-01-31T20:20:22.199" v="868" actId="478"/>
+          <ac:spMkLst>
+            <pc:docMk/>
+            <pc:sldMk cId="984938217" sldId="1276"/>
+            <ac:spMk id="13" creationId="{2AF0D72A-BB62-42C3-1238-AF61E329B525}"/>
+          </ac:spMkLst>
+        </pc:spChg>
+        <pc:spChg chg="add del mod">
+          <ac:chgData name="Zonghua Gu" userId="9a7e1853e1951ef5" providerId="LiveId" clId="{CF1FAA12-072C-4ED5-BA76-0FFFAEFDB88A}" dt="2026-01-31T20:19:17.971" v="850" actId="478"/>
+          <ac:spMkLst>
+            <pc:docMk/>
+            <pc:sldMk cId="984938217" sldId="1276"/>
+            <ac:spMk id="14" creationId="{2F2FBDE1-1EFD-20E6-06A3-954F0C667F45}"/>
+          </ac:spMkLst>
+        </pc:spChg>
+        <pc:spChg chg="add mod">
+          <ac:chgData name="Zonghua Gu" userId="9a7e1853e1951ef5" providerId="LiveId" clId="{CF1FAA12-072C-4ED5-BA76-0FFFAEFDB88A}" dt="2026-01-31T20:19:15.251" v="849" actId="1076"/>
+          <ac:spMkLst>
+            <pc:docMk/>
+            <pc:sldMk cId="984938217" sldId="1276"/>
+            <ac:spMk id="18" creationId="{812818A7-84BA-AD2E-B180-44E5001177CD}"/>
+          </ac:spMkLst>
+        </pc:spChg>
+        <pc:spChg chg="add mod">
+          <ac:chgData name="Zonghua Gu" userId="9a7e1853e1951ef5" providerId="LiveId" clId="{CF1FAA12-072C-4ED5-BA76-0FFFAEFDB88A}" dt="2026-01-31T20:19:37.437" v="859" actId="20577"/>
+          <ac:spMkLst>
+            <pc:docMk/>
+            <pc:sldMk cId="984938217" sldId="1276"/>
+            <ac:spMk id="19" creationId="{98D2B209-437A-C414-0CC4-52B5739E4710}"/>
+          </ac:spMkLst>
+        </pc:spChg>
+        <pc:spChg chg="add mod">
+          <ac:chgData name="Zonghua Gu" userId="9a7e1853e1951ef5" providerId="LiveId" clId="{CF1FAA12-072C-4ED5-BA76-0FFFAEFDB88A}" dt="2026-01-31T20:19:47.157" v="860"/>
+          <ac:spMkLst>
+            <pc:docMk/>
+            <pc:sldMk cId="984938217" sldId="1276"/>
+            <ac:spMk id="20" creationId="{1E5040AB-144C-CC75-7E9A-7B3D0DF4CE8E}"/>
+          </ac:spMkLst>
+        </pc:spChg>
+        <pc:spChg chg="add mod">
+          <ac:chgData name="Zonghua Gu" userId="9a7e1853e1951ef5" providerId="LiveId" clId="{CF1FAA12-072C-4ED5-BA76-0FFFAEFDB88A}" dt="2026-01-31T20:19:47.157" v="860"/>
+          <ac:spMkLst>
+            <pc:docMk/>
+            <pc:sldMk cId="984938217" sldId="1276"/>
+            <ac:spMk id="23" creationId="{9B7BDC74-F54F-C7AA-F0EE-CA0941E4679B}"/>
+          </ac:spMkLst>
+        </pc:spChg>
+        <pc:spChg chg="add mod">
+          <ac:chgData name="Zonghua Gu" userId="9a7e1853e1951ef5" providerId="LiveId" clId="{CF1FAA12-072C-4ED5-BA76-0FFFAEFDB88A}" dt="2026-01-31T20:20:11.815" v="866" actId="20577"/>
+          <ac:spMkLst>
+            <pc:docMk/>
+            <pc:sldMk cId="984938217" sldId="1276"/>
+            <ac:spMk id="24" creationId="{2D64191C-E83A-4D6C-4464-5B8C0FDBDFB1}"/>
+          </ac:spMkLst>
+        </pc:spChg>
+        <pc:spChg chg="add mod">
+          <ac:chgData name="Zonghua Gu" userId="9a7e1853e1951ef5" providerId="LiveId" clId="{CF1FAA12-072C-4ED5-BA76-0FFFAEFDB88A}" dt="2026-01-31T20:20:14.754" v="867" actId="20577"/>
+          <ac:spMkLst>
+            <pc:docMk/>
+            <pc:sldMk cId="984938217" sldId="1276"/>
+            <ac:spMk id="27" creationId="{C9C8429B-A74A-1FEF-3DDF-138393CA9189}"/>
+          </ac:spMkLst>
+        </pc:spChg>
+        <pc:picChg chg="add mod">
+          <ac:chgData name="Zonghua Gu" userId="9a7e1853e1951ef5" providerId="LiveId" clId="{CF1FAA12-072C-4ED5-BA76-0FFFAEFDB88A}" dt="2026-01-31T20:09:25.138" v="626" actId="1076"/>
+          <ac:picMkLst>
+            <pc:docMk/>
+            <pc:sldMk cId="984938217" sldId="1276"/>
+            <ac:picMk id="5" creationId="{69EFC8D3-3FE6-C337-D8FB-C47D1581280A}"/>
+          </ac:picMkLst>
+        </pc:picChg>
+        <pc:picChg chg="add del mod">
+          <ac:chgData name="Zonghua Gu" userId="9a7e1853e1951ef5" providerId="LiveId" clId="{CF1FAA12-072C-4ED5-BA76-0FFFAEFDB88A}" dt="2026-01-31T20:08:21.275" v="622" actId="478"/>
+          <ac:picMkLst>
+            <pc:docMk/>
+            <pc:sldMk cId="984938217" sldId="1276"/>
+            <ac:picMk id="7" creationId="{920D7DB6-66CF-4216-55C5-F09C5AE36506}"/>
+          </ac:picMkLst>
+        </pc:picChg>
+        <pc:picChg chg="add mod">
+          <ac:chgData name="Zonghua Gu" userId="9a7e1853e1951ef5" providerId="LiveId" clId="{CF1FAA12-072C-4ED5-BA76-0FFFAEFDB88A}" dt="2026-01-31T20:15:44.953" v="731" actId="1076"/>
+          <ac:picMkLst>
+            <pc:docMk/>
+            <pc:sldMk cId="984938217" sldId="1276"/>
+            <ac:picMk id="9" creationId="{4659066D-83A4-F707-33E2-92C33805BBA1}"/>
+          </ac:picMkLst>
+        </pc:picChg>
+        <pc:cxnChg chg="add mod">
+          <ac:chgData name="Zonghua Gu" userId="9a7e1853e1951ef5" providerId="LiveId" clId="{CF1FAA12-072C-4ED5-BA76-0FFFAEFDB88A}" dt="2026-01-31T20:21:12.253" v="870" actId="1035"/>
+          <ac:cxnSpMkLst>
+            <pc:docMk/>
+            <pc:sldMk cId="984938217" sldId="1276"/>
+            <ac:cxnSpMk id="16" creationId="{64F9513F-361C-079C-E7DC-917D6AE0054E}"/>
+          </ac:cxnSpMkLst>
+        </pc:cxnChg>
+        <pc:cxnChg chg="add mod">
+          <ac:chgData name="Zonghua Gu" userId="9a7e1853e1951ef5" providerId="LiveId" clId="{CF1FAA12-072C-4ED5-BA76-0FFFAEFDB88A}" dt="2026-01-31T20:14:51.716" v="725" actId="571"/>
+          <ac:cxnSpMkLst>
+            <pc:docMk/>
+            <pc:sldMk cId="984938217" sldId="1276"/>
+            <ac:cxnSpMk id="17" creationId="{29B5E608-8FE1-B957-0F39-AD5E4088891A}"/>
+          </ac:cxnSpMkLst>
+        </pc:cxnChg>
+        <pc:cxnChg chg="add mod">
+          <ac:chgData name="Zonghua Gu" userId="9a7e1853e1951ef5" providerId="LiveId" clId="{CF1FAA12-072C-4ED5-BA76-0FFFAEFDB88A}" dt="2026-01-31T20:19:47.157" v="860"/>
+          <ac:cxnSpMkLst>
+            <pc:docMk/>
+            <pc:sldMk cId="984938217" sldId="1276"/>
+            <ac:cxnSpMk id="21" creationId="{EA24BE09-BD8B-FDB7-DDA4-5383BBEE2EE2}"/>
+          </ac:cxnSpMkLst>
+        </pc:cxnChg>
+        <pc:cxnChg chg="add mod">
+          <ac:chgData name="Zonghua Gu" userId="9a7e1853e1951ef5" providerId="LiveId" clId="{CF1FAA12-072C-4ED5-BA76-0FFFAEFDB88A}" dt="2026-01-31T20:19:47.157" v="860"/>
+          <ac:cxnSpMkLst>
+            <pc:docMk/>
+            <pc:sldMk cId="984938217" sldId="1276"/>
+            <ac:cxnSpMk id="22" creationId="{8BD13FCC-48E5-7C4F-FFFD-9DE6262C06FC}"/>
+          </ac:cxnSpMkLst>
+        </pc:cxnChg>
+        <pc:cxnChg chg="add mod">
+          <ac:chgData name="Zonghua Gu" userId="9a7e1853e1951ef5" providerId="LiveId" clId="{CF1FAA12-072C-4ED5-BA76-0FFFAEFDB88A}" dt="2026-01-31T20:20:08.247" v="865" actId="1076"/>
+          <ac:cxnSpMkLst>
+            <pc:docMk/>
+            <pc:sldMk cId="984938217" sldId="1276"/>
+            <ac:cxnSpMk id="25" creationId="{45C5E587-9DF1-D543-4542-E01DACFC4FF9}"/>
+          </ac:cxnSpMkLst>
+        </pc:cxnChg>
+        <pc:cxnChg chg="add mod">
+          <ac:chgData name="Zonghua Gu" userId="9a7e1853e1951ef5" providerId="LiveId" clId="{CF1FAA12-072C-4ED5-BA76-0FFFAEFDB88A}" dt="2026-01-31T20:20:08.247" v="865" actId="1076"/>
+          <ac:cxnSpMkLst>
+            <pc:docMk/>
+            <pc:sldMk cId="984938217" sldId="1276"/>
+            <ac:cxnSpMk id="26" creationId="{069E87CE-CB6E-33FE-0BB6-04245114AF64}"/>
+          </ac:cxnSpMkLst>
+        </pc:cxnChg>
+      </pc:sldChg>
+      <pc:sldChg chg="addSp delSp modSp new mod">
+        <pc:chgData name="Zonghua Gu" userId="9a7e1853e1951ef5" providerId="LiveId" clId="{CF1FAA12-072C-4ED5-BA76-0FFFAEFDB88A}" dt="2026-01-31T20:22:28.269" v="886" actId="21"/>
+        <pc:sldMkLst>
+          <pc:docMk/>
+          <pc:sldMk cId="3667235539" sldId="1277"/>
+        </pc:sldMkLst>
+        <pc:spChg chg="mod">
+          <ac:chgData name="Zonghua Gu" userId="9a7e1853e1951ef5" providerId="LiveId" clId="{CF1FAA12-072C-4ED5-BA76-0FFFAEFDB88A}" dt="2026-01-31T20:21:52.590" v="875" actId="20577"/>
+          <ac:spMkLst>
+            <pc:docMk/>
+            <pc:sldMk cId="3667235539" sldId="1277"/>
+            <ac:spMk id="2" creationId="{BB4C8372-AB9E-EDBC-4908-264C9CE9C5A8}"/>
+          </ac:spMkLst>
+        </pc:spChg>
+        <pc:spChg chg="mod">
+          <ac:chgData name="Zonghua Gu" userId="9a7e1853e1951ef5" providerId="LiveId" clId="{CF1FAA12-072C-4ED5-BA76-0FFFAEFDB88A}" dt="2026-01-31T20:21:45.961" v="872"/>
+          <ac:spMkLst>
+            <pc:docMk/>
+            <pc:sldMk cId="3667235539" sldId="1277"/>
+            <ac:spMk id="3" creationId="{7338710D-4DD3-2A35-EE10-58E7B7432179}"/>
+          </ac:spMkLst>
+        </pc:spChg>
+        <pc:spChg chg="add mod">
+          <ac:chgData name="Zonghua Gu" userId="9a7e1853e1951ef5" providerId="LiveId" clId="{CF1FAA12-072C-4ED5-BA76-0FFFAEFDB88A}" dt="2026-01-31T20:22:16.404" v="878"/>
+          <ac:spMkLst>
+            <pc:docMk/>
+            <pc:sldMk cId="3667235539" sldId="1277"/>
+            <ac:spMk id="7" creationId="{A5AD0FD4-2A9B-1F65-4688-F3E0A31F9C57}"/>
+          </ac:spMkLst>
+        </pc:spChg>
+        <pc:spChg chg="add mod">
+          <ac:chgData name="Zonghua Gu" userId="9a7e1853e1951ef5" providerId="LiveId" clId="{CF1FAA12-072C-4ED5-BA76-0FFFAEFDB88A}" dt="2026-01-31T20:22:16.404" v="878"/>
+          <ac:spMkLst>
+            <pc:docMk/>
+            <pc:sldMk cId="3667235539" sldId="1277"/>
+            <ac:spMk id="10" creationId="{B4923693-B3C5-3B54-2E93-3C46AE43E6D1}"/>
+          </ac:spMkLst>
+        </pc:spChg>
+        <pc:spChg chg="add mod">
+          <ac:chgData name="Zonghua Gu" userId="9a7e1853e1951ef5" providerId="LiveId" clId="{CF1FAA12-072C-4ED5-BA76-0FFFAEFDB88A}" dt="2026-01-31T20:22:16.404" v="878"/>
+          <ac:spMkLst>
+            <pc:docMk/>
+            <pc:sldMk cId="3667235539" sldId="1277"/>
+            <ac:spMk id="11" creationId="{AC1F019A-7E25-8AC6-8CAE-45BFFD139C60}"/>
+          </ac:spMkLst>
+        </pc:spChg>
+        <pc:spChg chg="add mod">
+          <ac:chgData name="Zonghua Gu" userId="9a7e1853e1951ef5" providerId="LiveId" clId="{CF1FAA12-072C-4ED5-BA76-0FFFAEFDB88A}" dt="2026-01-31T20:22:16.404" v="878"/>
+          <ac:spMkLst>
+            <pc:docMk/>
+            <pc:sldMk cId="3667235539" sldId="1277"/>
+            <ac:spMk id="12" creationId="{B1D0054B-FA41-EEFF-95C5-D7F4E3E1B9C1}"/>
+          </ac:spMkLst>
+        </pc:spChg>
+        <pc:spChg chg="add mod">
+          <ac:chgData name="Zonghua Gu" userId="9a7e1853e1951ef5" providerId="LiveId" clId="{CF1FAA12-072C-4ED5-BA76-0FFFAEFDB88A}" dt="2026-01-31T20:22:16.404" v="878"/>
+          <ac:spMkLst>
+            <pc:docMk/>
+            <pc:sldMk cId="3667235539" sldId="1277"/>
+            <ac:spMk id="15" creationId="{4F280DD1-8DA3-A3BA-9EA3-7305752E9E2F}"/>
+          </ac:spMkLst>
+        </pc:spChg>
+        <pc:picChg chg="add del mod">
+          <ac:chgData name="Zonghua Gu" userId="9a7e1853e1951ef5" providerId="LiveId" clId="{CF1FAA12-072C-4ED5-BA76-0FFFAEFDB88A}" dt="2026-01-31T20:22:28.269" v="886" actId="21"/>
+          <ac:picMkLst>
+            <pc:docMk/>
+            <pc:sldMk cId="3667235539" sldId="1277"/>
+            <ac:picMk id="5" creationId="{B3A8F6A5-3C65-BE86-97C7-3F4FC96D1F1F}"/>
+          </ac:picMkLst>
+        </pc:picChg>
+        <pc:picChg chg="add mod">
+          <ac:chgData name="Zonghua Gu" userId="9a7e1853e1951ef5" providerId="LiveId" clId="{CF1FAA12-072C-4ED5-BA76-0FFFAEFDB88A}" dt="2026-01-31T20:22:16.404" v="878"/>
+          <ac:picMkLst>
+            <pc:docMk/>
+            <pc:sldMk cId="3667235539" sldId="1277"/>
+            <ac:picMk id="6" creationId="{8349F06B-ECEB-0A02-8E14-BE0480E7B438}"/>
+          </ac:picMkLst>
+        </pc:picChg>
+        <pc:cxnChg chg="add mod">
+          <ac:chgData name="Zonghua Gu" userId="9a7e1853e1951ef5" providerId="LiveId" clId="{CF1FAA12-072C-4ED5-BA76-0FFFAEFDB88A}" dt="2026-01-31T20:22:16.404" v="878"/>
+          <ac:cxnSpMkLst>
+            <pc:docMk/>
+            <pc:sldMk cId="3667235539" sldId="1277"/>
+            <ac:cxnSpMk id="8" creationId="{345164F4-39D4-200E-8C10-8EA838558E5F}"/>
+          </ac:cxnSpMkLst>
+        </pc:cxnChg>
+        <pc:cxnChg chg="add mod">
+          <ac:chgData name="Zonghua Gu" userId="9a7e1853e1951ef5" providerId="LiveId" clId="{CF1FAA12-072C-4ED5-BA76-0FFFAEFDB88A}" dt="2026-01-31T20:22:16.404" v="878"/>
+          <ac:cxnSpMkLst>
+            <pc:docMk/>
+            <pc:sldMk cId="3667235539" sldId="1277"/>
+            <ac:cxnSpMk id="9" creationId="{D1A9A81B-FF7F-02D0-E20A-099A7FD54F2E}"/>
+          </ac:cxnSpMkLst>
+        </pc:cxnChg>
+        <pc:cxnChg chg="add mod">
+          <ac:chgData name="Zonghua Gu" userId="9a7e1853e1951ef5" providerId="LiveId" clId="{CF1FAA12-072C-4ED5-BA76-0FFFAEFDB88A}" dt="2026-01-31T20:22:16.404" v="878"/>
+          <ac:cxnSpMkLst>
+            <pc:docMk/>
+            <pc:sldMk cId="3667235539" sldId="1277"/>
+            <ac:cxnSpMk id="13" creationId="{D72F38C0-9042-353F-2D7E-31D99E7216C5}"/>
+          </ac:cxnSpMkLst>
+        </pc:cxnChg>
+        <pc:cxnChg chg="add mod">
+          <ac:chgData name="Zonghua Gu" userId="9a7e1853e1951ef5" providerId="LiveId" clId="{CF1FAA12-072C-4ED5-BA76-0FFFAEFDB88A}" dt="2026-01-31T20:22:16.404" v="878"/>
+          <ac:cxnSpMkLst>
+            <pc:docMk/>
+            <pc:sldMk cId="3667235539" sldId="1277"/>
+            <ac:cxnSpMk id="14" creationId="{7C3144E0-2D60-B7DE-02FB-5676DBA2D770}"/>
+          </ac:cxnSpMkLst>
+        </pc:cxnChg>
+      </pc:sldChg>
+      <pc:sldChg chg="addSp delSp modSp new mod">
+        <pc:chgData name="Zonghua Gu" userId="9a7e1853e1951ef5" providerId="LiveId" clId="{CF1FAA12-072C-4ED5-BA76-0FFFAEFDB88A}" dt="2026-01-31T20:23:13.580" v="899" actId="14100"/>
+        <pc:sldMkLst>
+          <pc:docMk/>
+          <pc:sldMk cId="1323721031" sldId="1278"/>
+        </pc:sldMkLst>
+        <pc:spChg chg="mod">
+          <ac:chgData name="Zonghua Gu" userId="9a7e1853e1951ef5" providerId="LiveId" clId="{CF1FAA12-072C-4ED5-BA76-0FFFAEFDB88A}" dt="2026-01-31T20:22:26.248" v="885" actId="20577"/>
+          <ac:spMkLst>
+            <pc:docMk/>
+            <pc:sldMk cId="1323721031" sldId="1278"/>
+            <ac:spMk id="2" creationId="{842EA774-90F9-6C97-B576-0BDDDE3540C7}"/>
+          </ac:spMkLst>
+        </pc:spChg>
+        <pc:spChg chg="add del mod">
+          <ac:chgData name="Zonghua Gu" userId="9a7e1853e1951ef5" providerId="LiveId" clId="{CF1FAA12-072C-4ED5-BA76-0FFFAEFDB88A}" dt="2026-01-31T20:22:49.575" v="892" actId="478"/>
+          <ac:spMkLst>
+            <pc:docMk/>
+            <pc:sldMk cId="1323721031" sldId="1278"/>
+            <ac:spMk id="5" creationId="{46A620C5-9293-5A86-A8DE-021C7B584302}"/>
+          </ac:spMkLst>
+        </pc:spChg>
+        <pc:spChg chg="add del mod">
+          <ac:chgData name="Zonghua Gu" userId="9a7e1853e1951ef5" providerId="LiveId" clId="{CF1FAA12-072C-4ED5-BA76-0FFFAEFDB88A}" dt="2026-01-31T20:22:49.575" v="892" actId="478"/>
+          <ac:spMkLst>
+            <pc:docMk/>
+            <pc:sldMk cId="1323721031" sldId="1278"/>
+            <ac:spMk id="8" creationId="{11D761E3-21BD-C0BB-CADE-6B3D1F64A2A5}"/>
+          </ac:spMkLst>
+        </pc:spChg>
+        <pc:spChg chg="add del mod">
+          <ac:chgData name="Zonghua Gu" userId="9a7e1853e1951ef5" providerId="LiveId" clId="{CF1FAA12-072C-4ED5-BA76-0FFFAEFDB88A}" dt="2026-01-31T20:22:49.575" v="892" actId="478"/>
+          <ac:spMkLst>
+            <pc:docMk/>
+            <pc:sldMk cId="1323721031" sldId="1278"/>
+            <ac:spMk id="9" creationId="{D4FAD135-C563-BF5C-054E-13C9C507FD34}"/>
+          </ac:spMkLst>
+        </pc:spChg>
+        <pc:spChg chg="add del mod">
+          <ac:chgData name="Zonghua Gu" userId="9a7e1853e1951ef5" providerId="LiveId" clId="{CF1FAA12-072C-4ED5-BA76-0FFFAEFDB88A}" dt="2026-01-31T20:22:49.575" v="892" actId="478"/>
+          <ac:spMkLst>
+            <pc:docMk/>
+            <pc:sldMk cId="1323721031" sldId="1278"/>
+            <ac:spMk id="10" creationId="{BC5EAF66-D1AC-9838-E3CF-7D35C7A949A9}"/>
+          </ac:spMkLst>
+        </pc:spChg>
+        <pc:spChg chg="add del mod">
+          <ac:chgData name="Zonghua Gu" userId="9a7e1853e1951ef5" providerId="LiveId" clId="{CF1FAA12-072C-4ED5-BA76-0FFFAEFDB88A}" dt="2026-01-31T20:22:49.575" v="892" actId="478"/>
+          <ac:spMkLst>
+            <pc:docMk/>
+            <pc:sldMk cId="1323721031" sldId="1278"/>
+            <ac:spMk id="13" creationId="{B06043BA-2D13-A9E1-803A-2ECA12DD8121}"/>
+          </ac:spMkLst>
+        </pc:spChg>
+        <pc:picChg chg="add del mod">
+          <ac:chgData name="Zonghua Gu" userId="9a7e1853e1951ef5" providerId="LiveId" clId="{CF1FAA12-072C-4ED5-BA76-0FFFAEFDB88A}" dt="2026-01-31T20:22:49.575" v="892" actId="478"/>
+          <ac:picMkLst>
+            <pc:docMk/>
+            <pc:sldMk cId="1323721031" sldId="1278"/>
+            <ac:picMk id="4" creationId="{BF52088D-14BB-2A74-5F2F-399C5B3AA594}"/>
+          </ac:picMkLst>
+        </pc:picChg>
+        <pc:picChg chg="add mod">
+          <ac:chgData name="Zonghua Gu" userId="9a7e1853e1951ef5" providerId="LiveId" clId="{CF1FAA12-072C-4ED5-BA76-0FFFAEFDB88A}" dt="2026-01-31T20:23:13.580" v="899" actId="14100"/>
+          <ac:picMkLst>
+            <pc:docMk/>
+            <pc:sldMk cId="1323721031" sldId="1278"/>
+            <ac:picMk id="14" creationId="{B3A8F6A5-3C65-BE86-97C7-3F4FC96D1F1F}"/>
+          </ac:picMkLst>
+        </pc:picChg>
+        <pc:cxnChg chg="add del mod">
+          <ac:chgData name="Zonghua Gu" userId="9a7e1853e1951ef5" providerId="LiveId" clId="{CF1FAA12-072C-4ED5-BA76-0FFFAEFDB88A}" dt="2026-01-31T20:22:49.575" v="892" actId="478"/>
+          <ac:cxnSpMkLst>
+            <pc:docMk/>
+            <pc:sldMk cId="1323721031" sldId="1278"/>
+            <ac:cxnSpMk id="6" creationId="{CC00E61E-358C-3A85-EF94-96147C9BFC15}"/>
+          </ac:cxnSpMkLst>
+        </pc:cxnChg>
+        <pc:cxnChg chg="add del mod">
+          <ac:chgData name="Zonghua Gu" userId="9a7e1853e1951ef5" providerId="LiveId" clId="{CF1FAA12-072C-4ED5-BA76-0FFFAEFDB88A}" dt="2026-01-31T20:22:49.575" v="892" actId="478"/>
+          <ac:cxnSpMkLst>
+            <pc:docMk/>
+            <pc:sldMk cId="1323721031" sldId="1278"/>
+            <ac:cxnSpMk id="7" creationId="{5E5899ED-54C8-7FDA-8D5E-7683ED96B7A7}"/>
+          </ac:cxnSpMkLst>
+        </pc:cxnChg>
+        <pc:cxnChg chg="add del mod">
+          <ac:chgData name="Zonghua Gu" userId="9a7e1853e1951ef5" providerId="LiveId" clId="{CF1FAA12-072C-4ED5-BA76-0FFFAEFDB88A}" dt="2026-01-31T20:22:49.575" v="892" actId="478"/>
+          <ac:cxnSpMkLst>
+            <pc:docMk/>
+            <pc:sldMk cId="1323721031" sldId="1278"/>
+            <ac:cxnSpMk id="11" creationId="{4E11DF5A-D6DB-6FE4-B58C-215F458E130D}"/>
+          </ac:cxnSpMkLst>
+        </pc:cxnChg>
+        <pc:cxnChg chg="add del mod">
+          <ac:chgData name="Zonghua Gu" userId="9a7e1853e1951ef5" providerId="LiveId" clId="{CF1FAA12-072C-4ED5-BA76-0FFFAEFDB88A}" dt="2026-01-31T20:22:49.575" v="892" actId="478"/>
+          <ac:cxnSpMkLst>
+            <pc:docMk/>
+            <pc:sldMk cId="1323721031" sldId="1278"/>
+            <ac:cxnSpMk id="12" creationId="{82712FAB-6D5A-830A-9FDF-F8A79A64FB5C}"/>
+          </ac:cxnSpMkLst>
+        </pc:cxnChg>
+      </pc:sldChg>
+      <pc:sldChg chg="addSp modSp new mod">
+        <pc:chgData name="Zonghua Gu" userId="9a7e1853e1951ef5" providerId="LiveId" clId="{CF1FAA12-072C-4ED5-BA76-0FFFAEFDB88A}" dt="2026-01-31T20:26:34.698" v="973" actId="20577"/>
+        <pc:sldMkLst>
+          <pc:docMk/>
+          <pc:sldMk cId="1647334518" sldId="1279"/>
+        </pc:sldMkLst>
+        <pc:spChg chg="mod">
+          <ac:chgData name="Zonghua Gu" userId="9a7e1853e1951ef5" providerId="LiveId" clId="{CF1FAA12-072C-4ED5-BA76-0FFFAEFDB88A}" dt="2026-01-31T20:24:05.777" v="920" actId="20577"/>
+          <ac:spMkLst>
+            <pc:docMk/>
+            <pc:sldMk cId="1647334518" sldId="1279"/>
+            <ac:spMk id="2" creationId="{1C07845D-E7DF-D1AD-8307-0574E1926F85}"/>
+          </ac:spMkLst>
+        </pc:spChg>
+        <pc:spChg chg="mod">
+          <ac:chgData name="Zonghua Gu" userId="9a7e1853e1951ef5" providerId="LiveId" clId="{CF1FAA12-072C-4ED5-BA76-0FFFAEFDB88A}" dt="2026-01-31T20:26:34.698" v="973" actId="20577"/>
+          <ac:spMkLst>
+            <pc:docMk/>
+            <pc:sldMk cId="1647334518" sldId="1279"/>
+            <ac:spMk id="3" creationId="{6CD96C1D-4FA5-25B3-0C7B-CFC748D74975}"/>
+          </ac:spMkLst>
+        </pc:spChg>
+        <pc:picChg chg="add mod">
+          <ac:chgData name="Zonghua Gu" userId="9a7e1853e1951ef5" providerId="LiveId" clId="{CF1FAA12-072C-4ED5-BA76-0FFFAEFDB88A}" dt="2026-01-31T20:24:56.532" v="929" actId="1076"/>
+          <ac:picMkLst>
+            <pc:docMk/>
+            <pc:sldMk cId="1647334518" sldId="1279"/>
+            <ac:picMk id="5" creationId="{2BDF6A44-67A8-969C-B6DF-57BD2436B50E}"/>
+          </ac:picMkLst>
+        </pc:picChg>
+      </pc:sldChg>
+      <pc:sldChg chg="addSp modSp new mod">
+        <pc:chgData name="Zonghua Gu" userId="9a7e1853e1951ef5" providerId="LiveId" clId="{CF1FAA12-072C-4ED5-BA76-0FFFAEFDB88A}" dt="2026-01-31T21:33:34.221" v="1015" actId="1076"/>
+        <pc:sldMkLst>
+          <pc:docMk/>
+          <pc:sldMk cId="123181104" sldId="1280"/>
+        </pc:sldMkLst>
+        <pc:spChg chg="mod">
+          <ac:chgData name="Zonghua Gu" userId="9a7e1853e1951ef5" providerId="LiveId" clId="{CF1FAA12-072C-4ED5-BA76-0FFFAEFDB88A}" dt="2026-01-31T20:26:09.113" v="964" actId="20577"/>
+          <ac:spMkLst>
+            <pc:docMk/>
+            <pc:sldMk cId="123181104" sldId="1280"/>
+            <ac:spMk id="2" creationId="{74F62C4D-4EE8-AAE2-EB14-79A241A2E932}"/>
+          </ac:spMkLst>
+        </pc:spChg>
+        <pc:spChg chg="mod">
+          <ac:chgData name="Zonghua Gu" userId="9a7e1853e1951ef5" providerId="LiveId" clId="{CF1FAA12-072C-4ED5-BA76-0FFFAEFDB88A}" dt="2026-01-31T20:28:44.845" v="1014" actId="27636"/>
+          <ac:spMkLst>
+            <pc:docMk/>
+            <pc:sldMk cId="123181104" sldId="1280"/>
+            <ac:spMk id="3" creationId="{E265822C-0E79-B5AC-4810-824DA6C111E8}"/>
+          </ac:spMkLst>
+        </pc:spChg>
+        <pc:picChg chg="add mod">
+          <ac:chgData name="Zonghua Gu" userId="9a7e1853e1951ef5" providerId="LiveId" clId="{CF1FAA12-072C-4ED5-BA76-0FFFAEFDB88A}" dt="2026-01-31T21:33:34.221" v="1015" actId="1076"/>
+          <ac:picMkLst>
+            <pc:docMk/>
+            <pc:sldMk cId="123181104" sldId="1280"/>
+            <ac:picMk id="4" creationId="{566E91D9-FA32-EF31-9486-A6D43C39C87F}"/>
+          </ac:picMkLst>
+        </pc:picChg>
       </pc:sldChg>
       <pc:sldMasterChg chg="delSldLayout">
         <pc:chgData name="Zonghua Gu" userId="9a7e1853e1951ef5" providerId="LiveId" clId="{CF1FAA12-072C-4ED5-BA76-0FFFAEFDB88A}" dt="2026-01-30T01:51:02.624" v="1" actId="47"/>
@@ -873,85 +1701,7 @@
           <inkml:channelProperty channel="Y" name="resolution" value="1000" units="1/cm"/>
         </inkml:channelProperties>
       </inkml:inkSource>
-      <inkml:timestamp xml:id="ts0" timeString="2024-10-21T23:16:05.330"/>
-    </inkml:context>
-    <inkml:brush xml:id="br0">
-      <inkml:brushProperty name="width" value="0.05" units="cm"/>
-      <inkml:brushProperty name="height" value="0.05" units="cm"/>
-      <inkml:brushProperty name="ignorePressure" value="1"/>
-    </inkml:brush>
-  </inkml:definitions>
-  <inkml:trace contextRef="#ctx0" brushRef="#br0">0 1,'0'0</inkml:trace>
-</inkml:ink>
-</file>
-
-<file path=ppt/ink/ink2.xml><?xml version="1.0" encoding="utf-8"?>
-<inkml:ink xmlns:inkml="http://www.w3.org/2003/InkML">
-  <inkml:definitions>
-    <inkml:context xml:id="ctx0">
-      <inkml:inkSource xml:id="inkSrc0">
-        <inkml:traceFormat>
-          <inkml:channel name="X" type="integer" min="-2.14748E9" max="2.14748E9" units="cm"/>
-          <inkml:channel name="Y" type="integer" min="-2.14748E9" max="2.14748E9" units="cm"/>
-        </inkml:traceFormat>
-        <inkml:channelProperties>
-          <inkml:channelProperty channel="X" name="resolution" value="1000" units="1/cm"/>
-          <inkml:channelProperty channel="Y" name="resolution" value="1000" units="1/cm"/>
-        </inkml:channelProperties>
-      </inkml:inkSource>
-      <inkml:timestamp xml:id="ts0" timeString="2024-10-21T23:16:06.290"/>
-    </inkml:context>
-    <inkml:brush xml:id="br0">
-      <inkml:brushProperty name="width" value="0.05" units="cm"/>
-      <inkml:brushProperty name="height" value="0.05" units="cm"/>
-      <inkml:brushProperty name="ignorePressure" value="1"/>
-    </inkml:brush>
-  </inkml:definitions>
-  <inkml:trace contextRef="#ctx0" brushRef="#br0">0 1,'0'0</inkml:trace>
-</inkml:ink>
-</file>
-
-<file path=ppt/ink/ink3.xml><?xml version="1.0" encoding="utf-8"?>
-<inkml:ink xmlns:inkml="http://www.w3.org/2003/InkML">
-  <inkml:definitions>
-    <inkml:context xml:id="ctx0">
-      <inkml:inkSource xml:id="inkSrc0">
-        <inkml:traceFormat>
-          <inkml:channel name="X" type="integer" min="-2.14748E9" max="2.14748E9" units="cm"/>
-          <inkml:channel name="Y" type="integer" min="-2.14748E9" max="2.14748E9" units="cm"/>
-        </inkml:traceFormat>
-        <inkml:channelProperties>
-          <inkml:channelProperty channel="X" name="resolution" value="1000" units="1/cm"/>
-          <inkml:channelProperty channel="Y" name="resolution" value="1000" units="1/cm"/>
-        </inkml:channelProperties>
-      </inkml:inkSource>
-      <inkml:timestamp xml:id="ts0" timeString="2024-10-21T23:16:07.146"/>
-    </inkml:context>
-    <inkml:brush xml:id="br0">
-      <inkml:brushProperty name="width" value="0.05" units="cm"/>
-      <inkml:brushProperty name="height" value="0.05" units="cm"/>
-      <inkml:brushProperty name="ignorePressure" value="1"/>
-    </inkml:brush>
-  </inkml:definitions>
-  <inkml:trace contextRef="#ctx0" brushRef="#br0">0 0,'0'0</inkml:trace>
-</inkml:ink>
-</file>
-
-<file path=ppt/ink/ink4.xml><?xml version="1.0" encoding="utf-8"?>
-<inkml:ink xmlns:inkml="http://www.w3.org/2003/InkML">
-  <inkml:definitions>
-    <inkml:context xml:id="ctx0">
-      <inkml:inkSource xml:id="inkSrc0">
-        <inkml:traceFormat>
-          <inkml:channel name="X" type="integer" min="-2.14748E9" max="2.14748E9" units="cm"/>
-          <inkml:channel name="Y" type="integer" min="-2.14748E9" max="2.14748E9" units="cm"/>
-        </inkml:traceFormat>
-        <inkml:channelProperties>
-          <inkml:channelProperty channel="X" name="resolution" value="1000" units="1/cm"/>
-          <inkml:channelProperty channel="Y" name="resolution" value="1000" units="1/cm"/>
-        </inkml:channelProperties>
-      </inkml:inkSource>
-      <inkml:timestamp xml:id="ts0" timeString="2024-10-21T23:16:08.010"/>
+      <inkml:timestamp xml:id="ts0" timeString="2026-01-31T19:50:41.643"/>
     </inkml:context>
     <inkml:brush xml:id="br0">
       <inkml:brushProperty name="width" value="0.05" units="cm"/>
@@ -2030,6 +2780,487 @@
 </file>
 
 <file path=ppt/notesSlides/notesSlide3.xml><?xml version="1.0" encoding="utf-8"?>
+<p:notes xmlns:a="http://schemas.openxmlformats.org/drawingml/2006/main" xmlns:r="http://schemas.openxmlformats.org/officeDocument/2006/relationships" xmlns:p="http://schemas.openxmlformats.org/presentationml/2006/main" showMasterSp="0" showMasterPhAnim="0">
+  <p:cSld>
+    <p:spTree>
+      <p:nvGrpSpPr>
+        <p:cNvPr id="1" name="Shape 1597"/>
+        <p:cNvGrpSpPr/>
+        <p:nvPr/>
+      </p:nvGrpSpPr>
+      <p:grpSpPr>
+        <a:xfrm>
+          <a:off x="0" y="0"/>
+          <a:ext cx="0" cy="0"/>
+          <a:chOff x="0" y="0"/>
+          <a:chExt cx="0" cy="0"/>
+        </a:xfrm>
+      </p:grpSpPr>
+      <p:sp>
+        <p:nvSpPr>
+          <p:cNvPr id="1598" name="Google Shape;1598;g2efee653596_0_699:notes"/>
+          <p:cNvSpPr>
+            <a:spLocks noGrp="1" noRot="1" noChangeAspect="1"/>
+          </p:cNvSpPr>
+          <p:nvPr>
+            <p:ph type="sldImg" idx="2"/>
+          </p:nvPr>
+        </p:nvSpPr>
+        <p:spPr>
+          <a:xfrm>
+            <a:off x="381000" y="685800"/>
+            <a:ext cx="6096000" cy="3429000"/>
+          </a:xfrm>
+          <a:custGeom>
+            <a:avLst/>
+            <a:gdLst/>
+            <a:ahLst/>
+            <a:cxnLst/>
+            <a:rect l="l" t="t" r="r" b="b"/>
+            <a:pathLst>
+              <a:path w="120000" h="120000" extrusionOk="0">
+                <a:moveTo>
+                  <a:pt x="0" y="0"/>
+                </a:moveTo>
+                <a:lnTo>
+                  <a:pt x="120000" y="0"/>
+                </a:lnTo>
+                <a:lnTo>
+                  <a:pt x="120000" y="120000"/>
+                </a:lnTo>
+                <a:lnTo>
+                  <a:pt x="0" y="120000"/>
+                </a:lnTo>
+                <a:close/>
+              </a:path>
+            </a:pathLst>
+          </a:custGeom>
+        </p:spPr>
+      </p:sp>
+      <p:sp>
+        <p:nvSpPr>
+          <p:cNvPr id="1599" name="Google Shape;1599;g2efee653596_0_699:notes"/>
+          <p:cNvSpPr txBox="1">
+            <a:spLocks noGrp="1"/>
+          </p:cNvSpPr>
+          <p:nvPr>
+            <p:ph type="body" idx="1"/>
+          </p:nvPr>
+        </p:nvSpPr>
+        <p:spPr>
+          <a:xfrm>
+            <a:off x="685800" y="4343400"/>
+            <a:ext cx="5486400" cy="4114800"/>
+          </a:xfrm>
+          <a:prstGeom prst="rect">
+            <a:avLst/>
+          </a:prstGeom>
+        </p:spPr>
+        <p:txBody>
+          <a:bodyPr spcFirstLastPara="1" wrap="square" lIns="91425" tIns="91425" rIns="91425" bIns="91425" anchor="t" anchorCtr="0">
+            <a:noAutofit/>
+          </a:bodyPr>
+          <a:lstStyle/>
+          <a:p>
+            <a:pPr marL="0" lvl="0" indent="0" algn="l" rtl="0">
+              <a:spcBef>
+                <a:spcPts val="0"/>
+              </a:spcBef>
+              <a:spcAft>
+                <a:spcPts val="0"/>
+              </a:spcAft>
+              <a:buClr>
+                <a:schemeClr val="dk1"/>
+              </a:buClr>
+              <a:buSzPts val="1100"/>
+              <a:buFont typeface="Arial"/>
+              <a:buNone/>
+            </a:pPr>
+            <a:r>
+              <a:rPr lang="en">
+                <a:solidFill>
+                  <a:schemeClr val="dk1"/>
+                </a:solidFill>
+              </a:rPr>
+              <a:t>so what's going to happen is A1 and B1 both arrive we arbitrarily choose to send out A1 and</a:t>
+            </a:r>
+            <a:endParaRPr>
+              <a:solidFill>
+                <a:schemeClr val="dk1"/>
+              </a:solidFill>
+            </a:endParaRPr>
+          </a:p>
+          <a:p>
+            <a:pPr marL="0" lvl="0" indent="0" algn="l" rtl="0">
+              <a:spcBef>
+                <a:spcPts val="0"/>
+              </a:spcBef>
+              <a:spcAft>
+                <a:spcPts val="0"/>
+              </a:spcAft>
+              <a:buClr>
+                <a:schemeClr val="dk1"/>
+              </a:buClr>
+              <a:buSzPts val="1100"/>
+              <a:buFont typeface="Arial"/>
+              <a:buNone/>
+            </a:pPr>
+            <a:r>
+              <a:rPr lang="en">
+                <a:solidFill>
+                  <a:schemeClr val="dk1"/>
+                </a:solidFill>
+              </a:rPr>
+              <a:t>1:20:31</a:t>
+            </a:r>
+            <a:endParaRPr>
+              <a:solidFill>
+                <a:schemeClr val="dk1"/>
+              </a:solidFill>
+            </a:endParaRPr>
+          </a:p>
+          <a:p>
+            <a:pPr marL="0" lvl="0" indent="0" algn="l" rtl="0">
+              <a:spcBef>
+                <a:spcPts val="0"/>
+              </a:spcBef>
+              <a:spcAft>
+                <a:spcPts val="0"/>
+              </a:spcAft>
+              <a:buClr>
+                <a:schemeClr val="dk1"/>
+              </a:buClr>
+              <a:buSzPts val="1100"/>
+              <a:buFont typeface="Arial"/>
+              <a:buNone/>
+            </a:pPr>
+            <a:r>
+              <a:rPr lang="en">
+                <a:solidFill>
+                  <a:schemeClr val="dk1"/>
+                </a:solidFill>
+              </a:rPr>
+              <a:t>process it and B1 get stuck in the que how did I choose A1 over B1 open question we'll talk about it some other</a:t>
+            </a:r>
+            <a:endParaRPr>
+              <a:solidFill>
+                <a:schemeClr val="dk1"/>
+              </a:solidFill>
+            </a:endParaRPr>
+          </a:p>
+          <a:p>
+            <a:pPr marL="0" lvl="0" indent="0" algn="l" rtl="0">
+              <a:spcBef>
+                <a:spcPts val="0"/>
+              </a:spcBef>
+              <a:spcAft>
+                <a:spcPts val="0"/>
+              </a:spcAft>
+              <a:buClr>
+                <a:schemeClr val="dk1"/>
+              </a:buClr>
+              <a:buSzPts val="1100"/>
+              <a:buFont typeface="Arial"/>
+              <a:buNone/>
+            </a:pPr>
+            <a:r>
+              <a:rPr lang="en">
+                <a:solidFill>
+                  <a:schemeClr val="dk1"/>
+                </a:solidFill>
+              </a:rPr>
+              <a:t>1:20:37</a:t>
+            </a:r>
+            <a:endParaRPr>
+              <a:solidFill>
+                <a:schemeClr val="dk1"/>
+              </a:solidFill>
+            </a:endParaRPr>
+          </a:p>
+          <a:p>
+            <a:pPr marL="0" lvl="0" indent="0" algn="l" rtl="0">
+              <a:spcBef>
+                <a:spcPts val="0"/>
+              </a:spcBef>
+              <a:spcAft>
+                <a:spcPts val="0"/>
+              </a:spcAft>
+              <a:buClr>
+                <a:schemeClr val="dk1"/>
+              </a:buClr>
+              <a:buSzPts val="1100"/>
+              <a:buFont typeface="Arial"/>
+              <a:buNone/>
+            </a:pPr>
+            <a:r>
+              <a:rPr lang="en">
+                <a:solidFill>
+                  <a:schemeClr val="dk1"/>
+                </a:solidFill>
+              </a:rPr>
+              <a:t>day but for now assume that one of them was chosen and at the next time step uh oh we have some trouble A2 and B2 are</a:t>
+            </a:r>
+            <a:endParaRPr>
+              <a:solidFill>
+                <a:schemeClr val="dk1"/>
+              </a:solidFill>
+            </a:endParaRPr>
+          </a:p>
+          <a:p>
+            <a:pPr marL="0" lvl="0" indent="0" algn="l" rtl="0">
+              <a:spcBef>
+                <a:spcPts val="0"/>
+              </a:spcBef>
+              <a:spcAft>
+                <a:spcPts val="0"/>
+              </a:spcAft>
+              <a:buClr>
+                <a:schemeClr val="dk1"/>
+              </a:buClr>
+              <a:buSzPts val="1100"/>
+              <a:buFont typeface="Arial"/>
+              <a:buNone/>
+            </a:pPr>
+            <a:r>
+              <a:rPr lang="en">
+                <a:solidFill>
+                  <a:schemeClr val="dk1"/>
+                </a:solidFill>
+              </a:rPr>
+              <a:t>1:20:44</a:t>
+            </a:r>
+            <a:endParaRPr>
+              <a:solidFill>
+                <a:schemeClr val="dk1"/>
+              </a:solidFill>
+            </a:endParaRPr>
+          </a:p>
+          <a:p>
+            <a:pPr marL="0" lvl="0" indent="0" algn="l" rtl="0">
+              <a:spcBef>
+                <a:spcPts val="0"/>
+              </a:spcBef>
+              <a:spcAft>
+                <a:spcPts val="0"/>
+              </a:spcAft>
+              <a:buClr>
+                <a:schemeClr val="dk1"/>
+              </a:buClr>
+              <a:buSzPts val="1100"/>
+              <a:buFont typeface="Arial"/>
+              <a:buNone/>
+            </a:pPr>
+            <a:r>
+              <a:rPr lang="en">
+                <a:solidFill>
+                  <a:schemeClr val="dk1"/>
+                </a:solidFill>
+              </a:rPr>
+              <a:t>also arriving at the same time so the router is going to take both of them and</a:t>
+            </a:r>
+            <a:endParaRPr>
+              <a:solidFill>
+                <a:schemeClr val="dk1"/>
+              </a:solidFill>
+            </a:endParaRPr>
+          </a:p>
+          <a:p>
+            <a:pPr marL="0" lvl="0" indent="0" algn="l" rtl="0">
+              <a:spcBef>
+                <a:spcPts val="0"/>
+              </a:spcBef>
+              <a:spcAft>
+                <a:spcPts val="0"/>
+              </a:spcAft>
+              <a:buClr>
+                <a:schemeClr val="dk1"/>
+              </a:buClr>
+              <a:buSzPts val="1100"/>
+              <a:buFont typeface="Arial"/>
+              <a:buNone/>
+            </a:pPr>
+            <a:r>
+              <a:rPr lang="en">
+                <a:solidFill>
+                  <a:schemeClr val="dk1"/>
+                </a:solidFill>
+              </a:rPr>
+              <a:t>1:20:49</a:t>
+            </a:r>
+            <a:endParaRPr>
+              <a:solidFill>
+                <a:schemeClr val="dk1"/>
+              </a:solidFill>
+            </a:endParaRPr>
+          </a:p>
+          <a:p>
+            <a:pPr marL="0" lvl="0" indent="0" algn="l" rtl="0">
+              <a:spcBef>
+                <a:spcPts val="0"/>
+              </a:spcBef>
+              <a:spcAft>
+                <a:spcPts val="0"/>
+              </a:spcAft>
+              <a:buClr>
+                <a:schemeClr val="dk1"/>
+              </a:buClr>
+              <a:buSzPts val="1100"/>
+              <a:buFont typeface="Arial"/>
+              <a:buNone/>
+            </a:pPr>
+            <a:r>
+              <a:rPr lang="en">
+                <a:solidFill>
+                  <a:schemeClr val="dk1"/>
+                </a:solidFill>
+              </a:rPr>
+              <a:t>shove them in the que and in the queue they take B1 and process that one so so</a:t>
+            </a:r>
+            <a:endParaRPr>
+              <a:solidFill>
+                <a:schemeClr val="dk1"/>
+              </a:solidFill>
+            </a:endParaRPr>
+          </a:p>
+          <a:p>
+            <a:pPr marL="0" lvl="0" indent="0" algn="l" rtl="0">
+              <a:spcBef>
+                <a:spcPts val="0"/>
+              </a:spcBef>
+              <a:spcAft>
+                <a:spcPts val="0"/>
+              </a:spcAft>
+              <a:buClr>
+                <a:schemeClr val="dk1"/>
+              </a:buClr>
+              <a:buSzPts val="1100"/>
+              <a:buFont typeface="Arial"/>
+              <a:buNone/>
+            </a:pPr>
+            <a:r>
+              <a:rPr lang="en">
+                <a:solidFill>
+                  <a:schemeClr val="dk1"/>
+                </a:solidFill>
+              </a:rPr>
+              <a:t>1:20:55</a:t>
+            </a:r>
+            <a:endParaRPr>
+              <a:solidFill>
+                <a:schemeClr val="dk1"/>
+              </a:solidFill>
+            </a:endParaRPr>
+          </a:p>
+          <a:p>
+            <a:pPr marL="0" lvl="0" indent="0" algn="l" rtl="0">
+              <a:spcBef>
+                <a:spcPts val="0"/>
+              </a:spcBef>
+              <a:spcAft>
+                <a:spcPts val="0"/>
+              </a:spcAft>
+              <a:buClr>
+                <a:schemeClr val="dk1"/>
+              </a:buClr>
+              <a:buSzPts val="1100"/>
+              <a:buFont typeface="Arial"/>
+              <a:buNone/>
+            </a:pPr>
+            <a:r>
+              <a:rPr lang="en">
+                <a:solidFill>
+                  <a:schemeClr val="dk1"/>
+                </a:solidFill>
+              </a:rPr>
+              <a:t>again the exact way that the router figures out what to get queued and what to process is a bit beyond the scope for right for right now but the important</a:t>
+            </a:r>
+            <a:endParaRPr>
+              <a:solidFill>
+                <a:schemeClr val="dk1"/>
+              </a:solidFill>
+            </a:endParaRPr>
+          </a:p>
+          <a:p>
+            <a:pPr marL="0" lvl="0" indent="0" algn="l" rtl="0">
+              <a:spcBef>
+                <a:spcPts val="0"/>
+              </a:spcBef>
+              <a:spcAft>
+                <a:spcPts val="0"/>
+              </a:spcAft>
+              <a:buClr>
+                <a:schemeClr val="dk1"/>
+              </a:buClr>
+              <a:buSzPts val="1100"/>
+              <a:buFont typeface="Arial"/>
+              <a:buNone/>
+            </a:pPr>
+            <a:r>
+              <a:rPr lang="en">
+                <a:solidFill>
+                  <a:schemeClr val="dk1"/>
+                </a:solidFill>
+              </a:rPr>
+              <a:t>1:21:01</a:t>
+            </a:r>
+            <a:endParaRPr>
+              <a:solidFill>
+                <a:schemeClr val="dk1"/>
+              </a:solidFill>
+            </a:endParaRPr>
+          </a:p>
+          <a:p>
+            <a:pPr marL="0" lvl="0" indent="0" algn="l" rtl="0">
+              <a:spcBef>
+                <a:spcPts val="0"/>
+              </a:spcBef>
+              <a:spcAft>
+                <a:spcPts val="0"/>
+              </a:spcAft>
+              <a:buClr>
+                <a:schemeClr val="dk1"/>
+              </a:buClr>
+              <a:buSzPts val="1100"/>
+              <a:buFont typeface="Arial"/>
+              <a:buNone/>
+            </a:pPr>
+            <a:r>
+              <a:rPr lang="en">
+                <a:solidFill>
+                  <a:schemeClr val="dk1"/>
+                </a:solidFill>
+              </a:rPr>
+              <a:t>thing is that when packets arrive they first enter the que look A2 and B2 enter</a:t>
+            </a:r>
+            <a:endParaRPr>
+              <a:solidFill>
+                <a:schemeClr val="dk1"/>
+              </a:solidFill>
+            </a:endParaRPr>
+          </a:p>
+          <a:p>
+            <a:pPr marL="0" lvl="0" indent="0" algn="l" rtl="0">
+              <a:spcBef>
+                <a:spcPts val="0"/>
+              </a:spcBef>
+              <a:spcAft>
+                <a:spcPts val="0"/>
+              </a:spcAft>
+              <a:buNone/>
+            </a:pPr>
+            <a:endParaRPr/>
+          </a:p>
+        </p:txBody>
+      </p:sp>
+    </p:spTree>
+  </p:cSld>
+  <p:clrMapOvr>
+    <a:masterClrMapping/>
+  </p:clrMapOvr>
+</p:notes>
+</file>
+
+<file path=ppt/notesSlides/notesSlide4.xml><?xml version="1.0" encoding="utf-8"?>
 <p:notes xmlns:a="http://schemas.openxmlformats.org/drawingml/2006/main" xmlns:r="http://schemas.openxmlformats.org/officeDocument/2006/relationships" xmlns:p="http://schemas.openxmlformats.org/presentationml/2006/main">
   <p:cSld>
     <p:spTree>
@@ -2056,12 +3287,7 @@
             <p:ph type="sldImg"/>
           </p:nvPr>
         </p:nvSpPr>
-        <p:spPr>
-          <a:xfrm>
-            <a:off x="381000" y="685800"/>
-            <a:ext cx="6096000" cy="3429000"/>
-          </a:xfrm>
-        </p:spPr>
+        <p:spPr/>
       </p:sp>
       <p:sp>
         <p:nvSpPr>
@@ -2105,96 +3331,18 @@
           <a:p>
             <a:endParaRPr lang="en-US" dirty="0"/>
           </a:p>
-        </p:txBody>
-      </p:sp>
-    </p:spTree>
-    <p:extLst>
-      <p:ext uri="{BB962C8B-B14F-4D97-AF65-F5344CB8AC3E}">
-        <p14:creationId xmlns:p14="http://schemas.microsoft.com/office/powerpoint/2010/main" val="1031469877"/>
-      </p:ext>
-    </p:extLst>
-  </p:cSld>
-  <p:clrMapOvr>
-    <a:masterClrMapping/>
-  </p:clrMapOvr>
-</p:notes>
-</file>
-
-<file path=ppt/notesSlides/notesSlide4.xml><?xml version="1.0" encoding="utf-8"?>
-<p:notes xmlns:a="http://schemas.openxmlformats.org/drawingml/2006/main" xmlns:r="http://schemas.openxmlformats.org/officeDocument/2006/relationships" xmlns:p="http://schemas.openxmlformats.org/presentationml/2006/main">
-  <p:cSld>
-    <p:spTree>
-      <p:nvGrpSpPr>
-        <p:cNvPr id="1" name="">
-          <a:extLst>
-            <a:ext uri="{FF2B5EF4-FFF2-40B4-BE49-F238E27FC236}">
-              <a16:creationId xmlns:a16="http://schemas.microsoft.com/office/drawing/2014/main" id="{A9F5CE25-3C64-269B-682C-2F157F7F71C2}"/>
-            </a:ext>
-          </a:extLst>
-        </p:cNvPr>
-        <p:cNvGrpSpPr/>
-        <p:nvPr/>
-      </p:nvGrpSpPr>
-      <p:grpSpPr>
-        <a:xfrm>
-          <a:off x="0" y="0"/>
-          <a:ext cx="0" cy="0"/>
-          <a:chOff x="0" y="0"/>
-          <a:chExt cx="0" cy="0"/>
-        </a:xfrm>
-      </p:grpSpPr>
-      <p:sp>
-        <p:nvSpPr>
-          <p:cNvPr id="2" name="Slide Image Placeholder 1">
-            <a:extLst>
-              <a:ext uri="{FF2B5EF4-FFF2-40B4-BE49-F238E27FC236}">
-                <a16:creationId xmlns:a16="http://schemas.microsoft.com/office/drawing/2014/main" id="{9E112ACE-4700-456F-7A92-38115258EB38}"/>
-              </a:ext>
-            </a:extLst>
-          </p:cNvPr>
-          <p:cNvSpPr>
-            <a:spLocks noGrp="1" noRot="1" noChangeAspect="1"/>
-          </p:cNvSpPr>
-          <p:nvPr>
-            <p:ph type="sldImg"/>
-          </p:nvPr>
-        </p:nvSpPr>
-        <p:spPr>
-          <a:xfrm>
-            <a:off x="381000" y="685800"/>
-            <a:ext cx="6096000" cy="3429000"/>
-          </a:xfrm>
-        </p:spPr>
-      </p:sp>
-      <p:sp>
-        <p:nvSpPr>
-          <p:cNvPr id="3" name="Notes Placeholder 2">
-            <a:extLst>
-              <a:ext uri="{FF2B5EF4-FFF2-40B4-BE49-F238E27FC236}">
-                <a16:creationId xmlns:a16="http://schemas.microsoft.com/office/drawing/2014/main" id="{E224E7CA-097C-86E0-BC7F-831AEDD644E6}"/>
-              </a:ext>
-            </a:extLst>
-          </p:cNvPr>
-          <p:cNvSpPr>
-            <a:spLocks noGrp="1"/>
-          </p:cNvSpPr>
-          <p:nvPr>
-            <p:ph type="body" idx="1"/>
-          </p:nvPr>
-        </p:nvSpPr>
-        <p:spPr/>
-        <p:txBody>
-          <a:bodyPr/>
-          <a:lstStyle/>
           <a:p>
-            <a:endParaRPr lang="en-US"/>
+            <a:endParaRPr lang="en-US" dirty="0"/>
+          </a:p>
+          <a:p>
+            <a:endParaRPr lang="en-US" dirty="0"/>
           </a:p>
         </p:txBody>
       </p:sp>
     </p:spTree>
     <p:extLst>
       <p:ext uri="{BB962C8B-B14F-4D97-AF65-F5344CB8AC3E}">
-        <p14:creationId xmlns:p14="http://schemas.microsoft.com/office/powerpoint/2010/main" val="2710998546"/>
+        <p14:creationId xmlns:p14="http://schemas.microsoft.com/office/powerpoint/2010/main" val="2689281121"/>
       </p:ext>
     </p:extLst>
   </p:cSld>
@@ -2231,12 +3379,7 @@
             <p:ph type="sldImg"/>
           </p:nvPr>
         </p:nvSpPr>
-        <p:spPr>
-          <a:xfrm>
-            <a:off x="381000" y="685800"/>
-            <a:ext cx="6096000" cy="3429000"/>
-          </a:xfrm>
-        </p:spPr>
+        <p:spPr/>
       </p:sp>
       <p:sp>
         <p:nvSpPr>
@@ -2288,12 +3431,15 @@
           <a:p>
             <a:endParaRPr lang="en-US" dirty="0"/>
           </a:p>
+          <a:p>
+            <a:endParaRPr lang="en-US" dirty="0"/>
+          </a:p>
         </p:txBody>
       </p:sp>
     </p:spTree>
     <p:extLst>
       <p:ext uri="{BB962C8B-B14F-4D97-AF65-F5344CB8AC3E}">
-        <p14:creationId xmlns:p14="http://schemas.microsoft.com/office/powerpoint/2010/main" val="4028432011"/>
+        <p14:creationId xmlns:p14="http://schemas.microsoft.com/office/powerpoint/2010/main" val="704971779"/>
       </p:ext>
     </p:extLst>
   </p:cSld>
@@ -8215,6 +9361,399 @@
 </p:sldLayout>
 </file>
 
+<file path=ppt/slideLayouts/slideLayout21.xml><?xml version="1.0" encoding="utf-8"?>
+<p:sldLayout xmlns:a="http://schemas.openxmlformats.org/drawingml/2006/main" xmlns:r="http://schemas.openxmlformats.org/officeDocument/2006/relationships" xmlns:p="http://schemas.openxmlformats.org/presentationml/2006/main" matchingName="Title and body" type="tx">
+  <p:cSld name="Title and body">
+    <p:spTree>
+      <p:nvGrpSpPr>
+        <p:cNvPr id="1" name="Shape 17"/>
+        <p:cNvGrpSpPr/>
+        <p:nvPr/>
+      </p:nvGrpSpPr>
+      <p:grpSpPr>
+        <a:xfrm>
+          <a:off x="0" y="0"/>
+          <a:ext cx="0" cy="0"/>
+          <a:chOff x="0" y="0"/>
+          <a:chExt cx="0" cy="0"/>
+        </a:xfrm>
+      </p:grpSpPr>
+      <p:sp>
+        <p:nvSpPr>
+          <p:cNvPr id="18" name="Google Shape;18;p4"/>
+          <p:cNvSpPr txBox="1">
+            <a:spLocks noGrp="1"/>
+          </p:cNvSpPr>
+          <p:nvPr>
+            <p:ph type="title"/>
+          </p:nvPr>
+        </p:nvSpPr>
+        <p:spPr>
+          <a:xfrm>
+            <a:off x="0" y="0"/>
+            <a:ext cx="9144000" cy="393600"/>
+          </a:xfrm>
+          <a:prstGeom prst="rect">
+            <a:avLst/>
+          </a:prstGeom>
+        </p:spPr>
+        <p:txBody>
+          <a:bodyPr spcFirstLastPara="1" wrap="square" lIns="91425" tIns="91425" rIns="91425" bIns="91425" anchor="t" anchorCtr="0">
+            <a:noAutofit/>
+          </a:bodyPr>
+          <a:lstStyle>
+            <a:lvl1pPr lvl="0" rtl="0">
+              <a:spcBef>
+                <a:spcPts val="0"/>
+              </a:spcBef>
+              <a:spcAft>
+                <a:spcPts val="0"/>
+              </a:spcAft>
+              <a:buSzPts val="1600"/>
+              <a:buNone/>
+              <a:defRPr b="0"/>
+            </a:lvl1pPr>
+            <a:lvl2pPr lvl="1" rtl="0">
+              <a:spcBef>
+                <a:spcPts val="0"/>
+              </a:spcBef>
+              <a:spcAft>
+                <a:spcPts val="0"/>
+              </a:spcAft>
+              <a:buSzPts val="2800"/>
+              <a:buNone/>
+              <a:defRPr/>
+            </a:lvl2pPr>
+            <a:lvl3pPr lvl="2" rtl="0">
+              <a:spcBef>
+                <a:spcPts val="0"/>
+              </a:spcBef>
+              <a:spcAft>
+                <a:spcPts val="0"/>
+              </a:spcAft>
+              <a:buSzPts val="2800"/>
+              <a:buNone/>
+              <a:defRPr/>
+            </a:lvl3pPr>
+            <a:lvl4pPr lvl="3" rtl="0">
+              <a:spcBef>
+                <a:spcPts val="0"/>
+              </a:spcBef>
+              <a:spcAft>
+                <a:spcPts val="0"/>
+              </a:spcAft>
+              <a:buSzPts val="2800"/>
+              <a:buNone/>
+              <a:defRPr/>
+            </a:lvl4pPr>
+            <a:lvl5pPr lvl="4" rtl="0">
+              <a:spcBef>
+                <a:spcPts val="0"/>
+              </a:spcBef>
+              <a:spcAft>
+                <a:spcPts val="0"/>
+              </a:spcAft>
+              <a:buSzPts val="2800"/>
+              <a:buNone/>
+              <a:defRPr/>
+            </a:lvl5pPr>
+            <a:lvl6pPr lvl="5" rtl="0">
+              <a:spcBef>
+                <a:spcPts val="0"/>
+              </a:spcBef>
+              <a:spcAft>
+                <a:spcPts val="0"/>
+              </a:spcAft>
+              <a:buSzPts val="2800"/>
+              <a:buNone/>
+              <a:defRPr/>
+            </a:lvl6pPr>
+            <a:lvl7pPr lvl="6" rtl="0">
+              <a:spcBef>
+                <a:spcPts val="0"/>
+              </a:spcBef>
+              <a:spcAft>
+                <a:spcPts val="0"/>
+              </a:spcAft>
+              <a:buSzPts val="2800"/>
+              <a:buNone/>
+              <a:defRPr/>
+            </a:lvl7pPr>
+            <a:lvl8pPr lvl="7" rtl="0">
+              <a:spcBef>
+                <a:spcPts val="0"/>
+              </a:spcBef>
+              <a:spcAft>
+                <a:spcPts val="0"/>
+              </a:spcAft>
+              <a:buSzPts val="2800"/>
+              <a:buNone/>
+              <a:defRPr/>
+            </a:lvl8pPr>
+            <a:lvl9pPr lvl="8" rtl="0">
+              <a:spcBef>
+                <a:spcPts val="0"/>
+              </a:spcBef>
+              <a:spcAft>
+                <a:spcPts val="0"/>
+              </a:spcAft>
+              <a:buSzPts val="2800"/>
+              <a:buNone/>
+              <a:defRPr/>
+            </a:lvl9pPr>
+          </a:lstStyle>
+          <a:p>
+            <a:endParaRPr/>
+          </a:p>
+        </p:txBody>
+      </p:sp>
+      <p:sp>
+        <p:nvSpPr>
+          <p:cNvPr id="19" name="Google Shape;19;p4"/>
+          <p:cNvSpPr txBox="1">
+            <a:spLocks noGrp="1"/>
+          </p:cNvSpPr>
+          <p:nvPr>
+            <p:ph type="body" idx="1"/>
+          </p:nvPr>
+        </p:nvSpPr>
+        <p:spPr>
+          <a:xfrm>
+            <a:off x="107050" y="402200"/>
+            <a:ext cx="8909700" cy="4530600"/>
+          </a:xfrm>
+          <a:prstGeom prst="rect">
+            <a:avLst/>
+          </a:prstGeom>
+        </p:spPr>
+        <p:txBody>
+          <a:bodyPr spcFirstLastPara="1" wrap="square" lIns="91425" tIns="91425" rIns="91425" bIns="91425" anchor="t" anchorCtr="0">
+            <a:noAutofit/>
+          </a:bodyPr>
+          <a:lstStyle>
+            <a:lvl1pPr marL="457200" lvl="0" indent="-342900" rtl="0">
+              <a:spcBef>
+                <a:spcPts val="600"/>
+              </a:spcBef>
+              <a:spcAft>
+                <a:spcPts val="0"/>
+              </a:spcAft>
+              <a:buSzPts val="1800"/>
+              <a:buChar char="●"/>
+              <a:defRPr/>
+            </a:lvl1pPr>
+            <a:lvl2pPr marL="914400" lvl="1" indent="-342900" rtl="0">
+              <a:spcBef>
+                <a:spcPts val="600"/>
+              </a:spcBef>
+              <a:spcAft>
+                <a:spcPts val="0"/>
+              </a:spcAft>
+              <a:buSzPts val="1800"/>
+              <a:buChar char="○"/>
+              <a:defRPr/>
+            </a:lvl2pPr>
+            <a:lvl3pPr marL="1371600" lvl="2" indent="-342900" rtl="0">
+              <a:spcBef>
+                <a:spcPts val="600"/>
+              </a:spcBef>
+              <a:spcAft>
+                <a:spcPts val="0"/>
+              </a:spcAft>
+              <a:buSzPts val="1800"/>
+              <a:buChar char="■"/>
+              <a:defRPr/>
+            </a:lvl3pPr>
+            <a:lvl4pPr marL="1828800" lvl="3" indent="-342900" rtl="0">
+              <a:spcBef>
+                <a:spcPts val="600"/>
+              </a:spcBef>
+              <a:spcAft>
+                <a:spcPts val="0"/>
+              </a:spcAft>
+              <a:buSzPts val="1800"/>
+              <a:buChar char="●"/>
+              <a:defRPr/>
+            </a:lvl4pPr>
+            <a:lvl5pPr marL="2286000" lvl="4" indent="-342900" rtl="0">
+              <a:spcBef>
+                <a:spcPts val="600"/>
+              </a:spcBef>
+              <a:spcAft>
+                <a:spcPts val="0"/>
+              </a:spcAft>
+              <a:buSzPts val="1800"/>
+              <a:buChar char="○"/>
+              <a:defRPr/>
+            </a:lvl5pPr>
+            <a:lvl6pPr marL="2743200" lvl="5" indent="-342900" rtl="0">
+              <a:spcBef>
+                <a:spcPts val="600"/>
+              </a:spcBef>
+              <a:spcAft>
+                <a:spcPts val="0"/>
+              </a:spcAft>
+              <a:buSzPts val="1800"/>
+              <a:buChar char="■"/>
+              <a:defRPr/>
+            </a:lvl6pPr>
+            <a:lvl7pPr marL="3200400" lvl="6" indent="-342900" rtl="0">
+              <a:spcBef>
+                <a:spcPts val="600"/>
+              </a:spcBef>
+              <a:spcAft>
+                <a:spcPts val="0"/>
+              </a:spcAft>
+              <a:buSzPts val="1800"/>
+              <a:buChar char="●"/>
+              <a:defRPr/>
+            </a:lvl7pPr>
+            <a:lvl8pPr marL="3657600" lvl="7" indent="-342900" rtl="0">
+              <a:spcBef>
+                <a:spcPts val="600"/>
+              </a:spcBef>
+              <a:spcAft>
+                <a:spcPts val="0"/>
+              </a:spcAft>
+              <a:buSzPts val="1800"/>
+              <a:buChar char="○"/>
+              <a:defRPr/>
+            </a:lvl8pPr>
+            <a:lvl9pPr marL="4114800" lvl="8" indent="-342900" rtl="0">
+              <a:spcBef>
+                <a:spcPts val="600"/>
+              </a:spcBef>
+              <a:spcAft>
+                <a:spcPts val="0"/>
+              </a:spcAft>
+              <a:buSzPts val="1800"/>
+              <a:buChar char="■"/>
+              <a:defRPr/>
+            </a:lvl9pPr>
+          </a:lstStyle>
+          <a:p>
+            <a:endParaRPr/>
+          </a:p>
+        </p:txBody>
+      </p:sp>
+      <p:sp>
+        <p:nvSpPr>
+          <p:cNvPr id="20" name="Google Shape;20;p4"/>
+          <p:cNvSpPr txBox="1">
+            <a:spLocks noGrp="1"/>
+          </p:cNvSpPr>
+          <p:nvPr>
+            <p:ph type="sldNum" idx="12"/>
+          </p:nvPr>
+        </p:nvSpPr>
+        <p:spPr>
+          <a:xfrm>
+            <a:off x="8472458" y="4663217"/>
+            <a:ext cx="548700" cy="393600"/>
+          </a:xfrm>
+          <a:prstGeom prst="rect">
+            <a:avLst/>
+          </a:prstGeom>
+        </p:spPr>
+        <p:txBody>
+          <a:bodyPr spcFirstLastPara="1" wrap="square" lIns="91425" tIns="91425" rIns="91425" bIns="91425" anchor="ctr" anchorCtr="0">
+            <a:noAutofit/>
+          </a:bodyPr>
+          <a:lstStyle>
+            <a:lvl1pPr lvl="0" rtl="0">
+              <a:buNone/>
+              <a:defRPr/>
+            </a:lvl1pPr>
+            <a:lvl2pPr lvl="1" rtl="0">
+              <a:buNone/>
+              <a:defRPr/>
+            </a:lvl2pPr>
+            <a:lvl3pPr lvl="2" rtl="0">
+              <a:buNone/>
+              <a:defRPr/>
+            </a:lvl3pPr>
+            <a:lvl4pPr lvl="3" rtl="0">
+              <a:buNone/>
+              <a:defRPr/>
+            </a:lvl4pPr>
+            <a:lvl5pPr lvl="4" rtl="0">
+              <a:buNone/>
+              <a:defRPr/>
+            </a:lvl5pPr>
+            <a:lvl6pPr lvl="5" rtl="0">
+              <a:buNone/>
+              <a:defRPr/>
+            </a:lvl6pPr>
+            <a:lvl7pPr lvl="6" rtl="0">
+              <a:buNone/>
+              <a:defRPr/>
+            </a:lvl7pPr>
+            <a:lvl8pPr lvl="7" rtl="0">
+              <a:buNone/>
+              <a:defRPr/>
+            </a:lvl8pPr>
+            <a:lvl9pPr lvl="8" rtl="0">
+              <a:buNone/>
+              <a:defRPr/>
+            </a:lvl9pPr>
+          </a:lstStyle>
+          <a:p>
+            <a:pPr marL="0" lvl="0" indent="0" algn="r" rtl="0">
+              <a:spcBef>
+                <a:spcPts val="0"/>
+              </a:spcBef>
+              <a:spcAft>
+                <a:spcPts val="0"/>
+              </a:spcAft>
+              <a:buNone/>
+            </a:pPr>
+            <a:fld id="{00000000-1234-1234-1234-123412341234}" type="slidenum">
+              <a:rPr lang="en"/>
+              <a:t>‹#›</a:t>
+            </a:fld>
+            <a:endParaRPr/>
+          </a:p>
+        </p:txBody>
+      </p:sp>
+      <p:cxnSp>
+        <p:nvCxnSpPr>
+          <p:cNvPr id="21" name="Google Shape;21;p4"/>
+          <p:cNvCxnSpPr/>
+          <p:nvPr/>
+        </p:nvCxnSpPr>
+        <p:spPr>
+          <a:xfrm>
+            <a:off x="95431" y="402210"/>
+            <a:ext cx="8909700" cy="0"/>
+          </a:xfrm>
+          <a:prstGeom prst="straightConnector1">
+            <a:avLst/>
+          </a:prstGeom>
+          <a:noFill/>
+          <a:ln w="19050" cap="flat" cmpd="sng">
+            <a:solidFill>
+              <a:srgbClr val="BF9000"/>
+            </a:solidFill>
+            <a:prstDash val="solid"/>
+            <a:round/>
+            <a:headEnd type="none" w="med" len="med"/>
+            <a:tailEnd type="none" w="med" len="med"/>
+          </a:ln>
+        </p:spPr>
+      </p:cxnSp>
+    </p:spTree>
+    <p:extLst>
+      <p:ext uri="{BB962C8B-B14F-4D97-AF65-F5344CB8AC3E}">
+        <p14:creationId xmlns:p14="http://schemas.microsoft.com/office/powerpoint/2010/main" val="4114587256"/>
+      </p:ext>
+    </p:extLst>
+  </p:cSld>
+  <p:clrMapOvr>
+    <a:masterClrMapping/>
+  </p:clrMapOvr>
+</p:sldLayout>
+</file>
+
 <file path=ppt/slideLayouts/slideLayout3.xml><?xml version="1.0" encoding="utf-8"?>
 <p:sldLayout xmlns:a="http://schemas.openxmlformats.org/drawingml/2006/main" xmlns:r="http://schemas.openxmlformats.org/officeDocument/2006/relationships" xmlns:p="http://schemas.openxmlformats.org/presentationml/2006/main" matchingName="Demo slide right">
   <p:cSld name="SECTION_TITLE_AND_DESCRIPTION_2">
@@ -13378,6 +14917,7 @@
     <p:sldLayoutId id="2147483668" r:id="rId18"/>
     <p:sldLayoutId id="2147483669" r:id="rId19"/>
     <p:sldLayoutId id="2147483671" r:id="rId20"/>
+    <p:sldLayoutId id="2147483672" r:id="rId21"/>
   </p:sldLayoutIdLst>
   <p:hf sldNum="0" hdr="0" ftr="0" dt="0"/>
   <p:txStyles>
@@ -14405,6 +15945,1426 @@
         </p:txBody>
       </p:sp>
     </p:spTree>
+  </p:cSld>
+  <p:clrMapOvr>
+    <a:masterClrMapping/>
+  </p:clrMapOvr>
+</p:sld>
+</file>
+
+<file path=ppt/slides/slide10.xml><?xml version="1.0" encoding="utf-8"?>
+<p:sld xmlns:a="http://schemas.openxmlformats.org/drawingml/2006/main" xmlns:r="http://schemas.openxmlformats.org/officeDocument/2006/relationships" xmlns:p="http://schemas.openxmlformats.org/presentationml/2006/main">
+  <p:cSld>
+    <p:spTree>
+      <p:nvGrpSpPr>
+        <p:cNvPr id="1" name=""/>
+        <p:cNvGrpSpPr/>
+        <p:nvPr/>
+      </p:nvGrpSpPr>
+      <p:grpSpPr>
+        <a:xfrm>
+          <a:off x="0" y="0"/>
+          <a:ext cx="0" cy="0"/>
+          <a:chOff x="0" y="0"/>
+          <a:chExt cx="0" cy="0"/>
+        </a:xfrm>
+      </p:grpSpPr>
+      <p:pic>
+        <p:nvPicPr>
+          <p:cNvPr id="7" name="Picture 6">
+            <a:extLst>
+              <a:ext uri="{FF2B5EF4-FFF2-40B4-BE49-F238E27FC236}">
+                <a16:creationId xmlns:a16="http://schemas.microsoft.com/office/drawing/2014/main" id="{ADC47DEC-E55F-0CD3-997A-606765A0DEEE}"/>
+              </a:ext>
+            </a:extLst>
+          </p:cNvPr>
+          <p:cNvPicPr>
+            <a:picLocks noChangeAspect="1"/>
+          </p:cNvPicPr>
+          <p:nvPr/>
+        </p:nvPicPr>
+        <p:blipFill>
+          <a:blip r:embed="rId2"/>
+          <a:stretch>
+            <a:fillRect/>
+          </a:stretch>
+        </p:blipFill>
+        <p:spPr>
+          <a:xfrm>
+            <a:off x="86851" y="850864"/>
+            <a:ext cx="5556796" cy="3255309"/>
+          </a:xfrm>
+          <a:prstGeom prst="rect">
+            <a:avLst/>
+          </a:prstGeom>
+        </p:spPr>
+      </p:pic>
+      <p:sp>
+        <p:nvSpPr>
+          <p:cNvPr id="2" name="Title 1">
+            <a:extLst>
+              <a:ext uri="{FF2B5EF4-FFF2-40B4-BE49-F238E27FC236}">
+                <a16:creationId xmlns:a16="http://schemas.microsoft.com/office/drawing/2014/main" id="{58CB1762-CCC1-782A-571E-70717F9D62EA}"/>
+              </a:ext>
+            </a:extLst>
+          </p:cNvPr>
+          <p:cNvSpPr>
+            <a:spLocks noGrp="1"/>
+          </p:cNvSpPr>
+          <p:nvPr>
+            <p:ph type="title"/>
+          </p:nvPr>
+        </p:nvSpPr>
+        <p:spPr/>
+        <p:txBody>
+          <a:bodyPr/>
+          <a:lstStyle/>
+          <a:p>
+            <a:r>
+              <a:rPr lang="en-US" dirty="0"/>
+              <a:t>Q3.2 End-­to­‐end delay ANS</a:t>
+            </a:r>
+          </a:p>
+        </p:txBody>
+      </p:sp>
+      <p:sp>
+        <p:nvSpPr>
+          <p:cNvPr id="3" name="Text Placeholder 2">
+            <a:extLst>
+              <a:ext uri="{FF2B5EF4-FFF2-40B4-BE49-F238E27FC236}">
+                <a16:creationId xmlns:a16="http://schemas.microsoft.com/office/drawing/2014/main" id="{FFEA292F-B1D7-7C8C-3291-EBAC5C2C9788}"/>
+              </a:ext>
+            </a:extLst>
+          </p:cNvPr>
+          <p:cNvSpPr>
+            <a:spLocks noGrp="1"/>
+          </p:cNvSpPr>
+          <p:nvPr>
+            <p:ph type="body" idx="1"/>
+          </p:nvPr>
+        </p:nvSpPr>
+        <p:spPr>
+          <a:xfrm>
+            <a:off x="107050" y="402200"/>
+            <a:ext cx="8909700" cy="448665"/>
+          </a:xfrm>
+        </p:spPr>
+        <p:txBody>
+          <a:bodyPr/>
+          <a:lstStyle/>
+          <a:p>
+            <a:endParaRPr lang="en-US" dirty="0"/>
+          </a:p>
+        </p:txBody>
+      </p:sp>
+      <p:pic>
+        <p:nvPicPr>
+          <p:cNvPr id="5" name="Picture 4">
+            <a:extLst>
+              <a:ext uri="{FF2B5EF4-FFF2-40B4-BE49-F238E27FC236}">
+                <a16:creationId xmlns:a16="http://schemas.microsoft.com/office/drawing/2014/main" id="{0E3D6AB7-1900-7F4E-275F-B8B4CA004272}"/>
+              </a:ext>
+            </a:extLst>
+          </p:cNvPr>
+          <p:cNvPicPr>
+            <a:picLocks noChangeAspect="1"/>
+          </p:cNvPicPr>
+          <p:nvPr/>
+        </p:nvPicPr>
+        <p:blipFill>
+          <a:blip r:embed="rId3"/>
+          <a:stretch>
+            <a:fillRect/>
+          </a:stretch>
+        </p:blipFill>
+        <p:spPr>
+          <a:xfrm>
+            <a:off x="4905663" y="1153289"/>
+            <a:ext cx="3973066" cy="3028421"/>
+          </a:xfrm>
+          <a:prstGeom prst="rect">
+            <a:avLst/>
+          </a:prstGeom>
+        </p:spPr>
+      </p:pic>
+    </p:spTree>
+    <p:extLst>
+      <p:ext uri="{BB962C8B-B14F-4D97-AF65-F5344CB8AC3E}">
+        <p14:creationId xmlns:p14="http://schemas.microsoft.com/office/powerpoint/2010/main" val="1143496153"/>
+      </p:ext>
+    </p:extLst>
+  </p:cSld>
+  <p:clrMapOvr>
+    <a:masterClrMapping/>
+  </p:clrMapOvr>
+</p:sld>
+</file>
+
+<file path=ppt/slides/slide11.xml><?xml version="1.0" encoding="utf-8"?>
+<p:sld xmlns:a="http://schemas.openxmlformats.org/drawingml/2006/main" xmlns:r="http://schemas.openxmlformats.org/officeDocument/2006/relationships" xmlns:p="http://schemas.openxmlformats.org/presentationml/2006/main">
+  <p:cSld>
+    <p:spTree>
+      <p:nvGrpSpPr>
+        <p:cNvPr id="1" name=""/>
+        <p:cNvGrpSpPr/>
+        <p:nvPr/>
+      </p:nvGrpSpPr>
+      <p:grpSpPr>
+        <a:xfrm>
+          <a:off x="0" y="0"/>
+          <a:ext cx="0" cy="0"/>
+          <a:chOff x="0" y="0"/>
+          <a:chExt cx="0" cy="0"/>
+        </a:xfrm>
+      </p:grpSpPr>
+      <p:sp>
+        <p:nvSpPr>
+          <p:cNvPr id="2" name="Title 1">
+            <a:extLst>
+              <a:ext uri="{FF2B5EF4-FFF2-40B4-BE49-F238E27FC236}">
+                <a16:creationId xmlns:a16="http://schemas.microsoft.com/office/drawing/2014/main" id="{37A2676D-09E5-4F4A-9DA3-CF738CBC3F4B}"/>
+              </a:ext>
+            </a:extLst>
+          </p:cNvPr>
+          <p:cNvSpPr>
+            <a:spLocks noGrp="1"/>
+          </p:cNvSpPr>
+          <p:nvPr>
+            <p:ph type="title"/>
+          </p:nvPr>
+        </p:nvSpPr>
+        <p:spPr/>
+        <p:txBody>
+          <a:bodyPr/>
+          <a:lstStyle/>
+          <a:p>
+            <a:r>
+              <a:rPr lang="en-US" dirty="0"/>
+              <a:t>Q3.3 End-­to­‐end delay</a:t>
+            </a:r>
+          </a:p>
+        </p:txBody>
+      </p:sp>
+      <p:sp>
+        <p:nvSpPr>
+          <p:cNvPr id="3" name="Text Placeholder 2">
+            <a:extLst>
+              <a:ext uri="{FF2B5EF4-FFF2-40B4-BE49-F238E27FC236}">
+                <a16:creationId xmlns:a16="http://schemas.microsoft.com/office/drawing/2014/main" id="{6445057F-C8B5-F039-C0A2-F1FFE1D4B024}"/>
+              </a:ext>
+            </a:extLst>
+          </p:cNvPr>
+          <p:cNvSpPr>
+            <a:spLocks noGrp="1"/>
+          </p:cNvSpPr>
+          <p:nvPr>
+            <p:ph type="body" idx="1"/>
+          </p:nvPr>
+        </p:nvSpPr>
+        <p:spPr/>
+        <p:txBody>
+          <a:bodyPr/>
+          <a:lstStyle/>
+          <a:p>
+            <a:r>
+              <a:rPr lang="en-US" dirty="0"/>
+              <a:t>Node A sends two packets: Packet 𝑃</a:t>
+            </a:r>
+            <a:r>
+              <a:rPr lang="en-US" baseline="-25000" dirty="0"/>
+              <a:t>1</a:t>
+            </a:r>
+            <a:r>
+              <a:rPr lang="en-US" dirty="0"/>
+              <a:t> of size 𝐷</a:t>
+            </a:r>
+            <a:r>
+              <a:rPr lang="en-US" baseline="-25000" dirty="0"/>
+              <a:t>1</a:t>
+            </a:r>
+            <a:r>
+              <a:rPr lang="en-US" dirty="0"/>
+              <a:t> bytes. Packet 𝑃</a:t>
+            </a:r>
+            <a:r>
+              <a:rPr lang="en-US" baseline="-25000" dirty="0"/>
+              <a:t>2</a:t>
+            </a:r>
+            <a:r>
+              <a:rPr lang="en-US" dirty="0"/>
+              <a:t> of size 𝐷</a:t>
+            </a:r>
+            <a:r>
+              <a:rPr lang="en-US" baseline="-25000" dirty="0"/>
+              <a:t>2</a:t>
+            </a:r>
+            <a:r>
+              <a:rPr lang="en-US" dirty="0"/>
+              <a:t> bytes. Node A starts sending packet 𝑃</a:t>
+            </a:r>
+            <a:r>
+              <a:rPr lang="en-US" baseline="-25000" dirty="0"/>
+              <a:t>1</a:t>
+            </a:r>
+            <a:r>
+              <a:rPr lang="en-US" dirty="0"/>
+              <a:t> at 𝑡 = 0. Node A immediately starts sending packet 𝑃</a:t>
+            </a:r>
+            <a:r>
+              <a:rPr lang="en-US" baseline="-25000" dirty="0"/>
+              <a:t>2</a:t>
+            </a:r>
+            <a:r>
+              <a:rPr lang="en-US" dirty="0"/>
+              <a:t> after it finishes transmitting all the bits of 𝑃</a:t>
+            </a:r>
+            <a:r>
+              <a:rPr lang="en-US" baseline="-25000" dirty="0"/>
+              <a:t>1</a:t>
+            </a:r>
+            <a:r>
+              <a:rPr lang="en-US" dirty="0"/>
+              <a:t>.</a:t>
+            </a:r>
+          </a:p>
+          <a:p>
+            <a:r>
+              <a:rPr lang="en-US" dirty="0"/>
+              <a:t>When will Node C receive the last bit of packet 𝑃</a:t>
+            </a:r>
+            <a:r>
+              <a:rPr lang="en-US" baseline="-25000" dirty="0"/>
+              <a:t>2</a:t>
+            </a:r>
+            <a:r>
+              <a:rPr lang="en-US" dirty="0"/>
+              <a:t>?</a:t>
+            </a:r>
+          </a:p>
+        </p:txBody>
+      </p:sp>
+    </p:spTree>
+    <p:extLst>
+      <p:ext uri="{BB962C8B-B14F-4D97-AF65-F5344CB8AC3E}">
+        <p14:creationId xmlns:p14="http://schemas.microsoft.com/office/powerpoint/2010/main" val="567678026"/>
+      </p:ext>
+    </p:extLst>
+  </p:cSld>
+  <p:clrMapOvr>
+    <a:masterClrMapping/>
+  </p:clrMapOvr>
+</p:sld>
+</file>
+
+<file path=ppt/slides/slide12.xml><?xml version="1.0" encoding="utf-8"?>
+<p:sld xmlns:a="http://schemas.openxmlformats.org/drawingml/2006/main" xmlns:r="http://schemas.openxmlformats.org/officeDocument/2006/relationships" xmlns:p="http://schemas.openxmlformats.org/presentationml/2006/main">
+  <p:cSld>
+    <p:spTree>
+      <p:nvGrpSpPr>
+        <p:cNvPr id="1" name=""/>
+        <p:cNvGrpSpPr/>
+        <p:nvPr/>
+      </p:nvGrpSpPr>
+      <p:grpSpPr>
+        <a:xfrm>
+          <a:off x="0" y="0"/>
+          <a:ext cx="0" cy="0"/>
+          <a:chOff x="0" y="0"/>
+          <a:chExt cx="0" cy="0"/>
+        </a:xfrm>
+      </p:grpSpPr>
+      <p:sp>
+        <p:nvSpPr>
+          <p:cNvPr id="2" name="Title 1">
+            <a:extLst>
+              <a:ext uri="{FF2B5EF4-FFF2-40B4-BE49-F238E27FC236}">
+                <a16:creationId xmlns:a16="http://schemas.microsoft.com/office/drawing/2014/main" id="{49150401-4851-F7D7-E1BA-319CF046615B}"/>
+              </a:ext>
+            </a:extLst>
+          </p:cNvPr>
+          <p:cNvSpPr>
+            <a:spLocks noGrp="1"/>
+          </p:cNvSpPr>
+          <p:nvPr>
+            <p:ph type="title"/>
+          </p:nvPr>
+        </p:nvSpPr>
+        <p:spPr/>
+        <p:txBody>
+          <a:bodyPr/>
+          <a:lstStyle/>
+          <a:p>
+            <a:r>
+              <a:rPr lang="en-US" dirty="0"/>
+              <a:t>Q3.3 End-­to­‐end delay ANS</a:t>
+            </a:r>
+          </a:p>
+        </p:txBody>
+      </p:sp>
+      <p:sp>
+        <p:nvSpPr>
+          <p:cNvPr id="3" name="Text Placeholder 2">
+            <a:extLst>
+              <a:ext uri="{FF2B5EF4-FFF2-40B4-BE49-F238E27FC236}">
+                <a16:creationId xmlns:a16="http://schemas.microsoft.com/office/drawing/2014/main" id="{1F60497C-26A0-9845-56DD-7EC3CCBB4C52}"/>
+              </a:ext>
+            </a:extLst>
+          </p:cNvPr>
+          <p:cNvSpPr>
+            <a:spLocks noGrp="1"/>
+          </p:cNvSpPr>
+          <p:nvPr>
+            <p:ph type="body" idx="1"/>
+          </p:nvPr>
+        </p:nvSpPr>
+        <p:spPr/>
+        <p:txBody>
+          <a:bodyPr/>
+          <a:lstStyle/>
+          <a:p>
+            <a:endParaRPr lang="en-US" dirty="0"/>
+          </a:p>
+        </p:txBody>
+      </p:sp>
+      <p:pic>
+        <p:nvPicPr>
+          <p:cNvPr id="5" name="Picture 4">
+            <a:extLst>
+              <a:ext uri="{FF2B5EF4-FFF2-40B4-BE49-F238E27FC236}">
+                <a16:creationId xmlns:a16="http://schemas.microsoft.com/office/drawing/2014/main" id="{69EFC8D3-3FE6-C337-D8FB-C47D1581280A}"/>
+              </a:ext>
+            </a:extLst>
+          </p:cNvPr>
+          <p:cNvPicPr>
+            <a:picLocks noChangeAspect="1"/>
+          </p:cNvPicPr>
+          <p:nvPr/>
+        </p:nvPicPr>
+        <p:blipFill>
+          <a:blip r:embed="rId2"/>
+          <a:stretch>
+            <a:fillRect/>
+          </a:stretch>
+        </p:blipFill>
+        <p:spPr>
+          <a:xfrm>
+            <a:off x="107050" y="47445"/>
+            <a:ext cx="4723939" cy="5048609"/>
+          </a:xfrm>
+          <a:prstGeom prst="rect">
+            <a:avLst/>
+          </a:prstGeom>
+        </p:spPr>
+      </p:pic>
+      <p:pic>
+        <p:nvPicPr>
+          <p:cNvPr id="9" name="Picture 8">
+            <a:extLst>
+              <a:ext uri="{FF2B5EF4-FFF2-40B4-BE49-F238E27FC236}">
+                <a16:creationId xmlns:a16="http://schemas.microsoft.com/office/drawing/2014/main" id="{4659066D-83A4-F707-33E2-92C33805BBA1}"/>
+              </a:ext>
+            </a:extLst>
+          </p:cNvPr>
+          <p:cNvPicPr>
+            <a:picLocks noChangeAspect="1"/>
+          </p:cNvPicPr>
+          <p:nvPr/>
+        </p:nvPicPr>
+        <p:blipFill>
+          <a:blip r:embed="rId3"/>
+          <a:stretch>
+            <a:fillRect/>
+          </a:stretch>
+        </p:blipFill>
+        <p:spPr>
+          <a:xfrm>
+            <a:off x="5262492" y="23722"/>
+            <a:ext cx="2820458" cy="5096055"/>
+          </a:xfrm>
+          <a:prstGeom prst="rect">
+            <a:avLst/>
+          </a:prstGeom>
+        </p:spPr>
+      </p:pic>
+      <p:sp>
+        <p:nvSpPr>
+          <p:cNvPr id="10" name="TextBox 9">
+            <a:extLst>
+              <a:ext uri="{FF2B5EF4-FFF2-40B4-BE49-F238E27FC236}">
+                <a16:creationId xmlns:a16="http://schemas.microsoft.com/office/drawing/2014/main" id="{862069DA-1AB7-D39C-51B2-1D7851BCCC5C}"/>
+              </a:ext>
+            </a:extLst>
+          </p:cNvPr>
+          <p:cNvSpPr txBox="1"/>
+          <p:nvPr/>
+        </p:nvSpPr>
+        <p:spPr>
+          <a:xfrm>
+            <a:off x="5519005" y="1294760"/>
+            <a:ext cx="280790" cy="261610"/>
+          </a:xfrm>
+          <a:prstGeom prst="rect">
+            <a:avLst/>
+          </a:prstGeom>
+          <a:noFill/>
+        </p:spPr>
+        <p:txBody>
+          <a:bodyPr wrap="square" rtlCol="0">
+            <a:spAutoFit/>
+          </a:bodyPr>
+          <a:lstStyle/>
+          <a:p>
+            <a:r>
+              <a:rPr lang="en-US" sz="1100" i="1" dirty="0"/>
+              <a:t>t</a:t>
+            </a:r>
+            <a:r>
+              <a:rPr lang="en-US" sz="1100" i="1" baseline="-25000" dirty="0"/>
+              <a:t>1</a:t>
+            </a:r>
+            <a:endParaRPr lang="en-US" sz="1100" baseline="-25000" dirty="0">
+              <a:latin typeface="Roboto" panose="02000000000000000000" pitchFamily="2" charset="0"/>
+              <a:ea typeface="Roboto" panose="02000000000000000000" pitchFamily="2" charset="0"/>
+              <a:cs typeface="Roboto" panose="02000000000000000000" pitchFamily="2" charset="0"/>
+            </a:endParaRPr>
+          </a:p>
+        </p:txBody>
+      </p:sp>
+      <p:cxnSp>
+        <p:nvCxnSpPr>
+          <p:cNvPr id="16" name="Straight Arrow Connector 15">
+            <a:extLst>
+              <a:ext uri="{FF2B5EF4-FFF2-40B4-BE49-F238E27FC236}">
+                <a16:creationId xmlns:a16="http://schemas.microsoft.com/office/drawing/2014/main" id="{64F9513F-361C-079C-E7DC-917D6AE0054E}"/>
+              </a:ext>
+            </a:extLst>
+          </p:cNvPr>
+          <p:cNvCxnSpPr/>
+          <p:nvPr/>
+        </p:nvCxnSpPr>
+        <p:spPr>
+          <a:xfrm flipH="1" flipV="1">
+            <a:off x="5724144" y="1426464"/>
+            <a:ext cx="1213104" cy="52002"/>
+          </a:xfrm>
+          <a:prstGeom prst="straightConnector1">
+            <a:avLst/>
+          </a:prstGeom>
+          <a:ln w="6350">
+            <a:tailEnd type="triangle"/>
+          </a:ln>
+        </p:spPr>
+        <p:style>
+          <a:lnRef idx="1">
+            <a:schemeClr val="dk1"/>
+          </a:lnRef>
+          <a:fillRef idx="0">
+            <a:schemeClr val="dk1"/>
+          </a:fillRef>
+          <a:effectRef idx="0">
+            <a:schemeClr val="dk1"/>
+          </a:effectRef>
+          <a:fontRef idx="minor">
+            <a:schemeClr val="tx1"/>
+          </a:fontRef>
+        </p:style>
+      </p:cxnSp>
+      <p:cxnSp>
+        <p:nvCxnSpPr>
+          <p:cNvPr id="17" name="Straight Arrow Connector 16">
+            <a:extLst>
+              <a:ext uri="{FF2B5EF4-FFF2-40B4-BE49-F238E27FC236}">
+                <a16:creationId xmlns:a16="http://schemas.microsoft.com/office/drawing/2014/main" id="{29B5E608-8FE1-B957-0F39-AD5E4088891A}"/>
+              </a:ext>
+            </a:extLst>
+          </p:cNvPr>
+          <p:cNvCxnSpPr/>
+          <p:nvPr/>
+        </p:nvCxnSpPr>
+        <p:spPr>
+          <a:xfrm flipH="1" flipV="1">
+            <a:off x="5724144" y="1621463"/>
+            <a:ext cx="1213104" cy="52002"/>
+          </a:xfrm>
+          <a:prstGeom prst="straightConnector1">
+            <a:avLst/>
+          </a:prstGeom>
+          <a:ln w="6350">
+            <a:tailEnd type="triangle"/>
+          </a:ln>
+        </p:spPr>
+        <p:style>
+          <a:lnRef idx="1">
+            <a:schemeClr val="dk1"/>
+          </a:lnRef>
+          <a:fillRef idx="0">
+            <a:schemeClr val="dk1"/>
+          </a:fillRef>
+          <a:effectRef idx="0">
+            <a:schemeClr val="dk1"/>
+          </a:effectRef>
+          <a:fontRef idx="minor">
+            <a:schemeClr val="tx1"/>
+          </a:fontRef>
+        </p:style>
+      </p:cxnSp>
+      <p:sp>
+        <p:nvSpPr>
+          <p:cNvPr id="18" name="Rectangle 17">
+            <a:extLst>
+              <a:ext uri="{FF2B5EF4-FFF2-40B4-BE49-F238E27FC236}">
+                <a16:creationId xmlns:a16="http://schemas.microsoft.com/office/drawing/2014/main" id="{812818A7-84BA-AD2E-B180-44E5001177CD}"/>
+              </a:ext>
+            </a:extLst>
+          </p:cNvPr>
+          <p:cNvSpPr/>
+          <p:nvPr/>
+        </p:nvSpPr>
+        <p:spPr>
+          <a:xfrm>
+            <a:off x="8035921" y="1090548"/>
+            <a:ext cx="1045573" cy="1246276"/>
+          </a:xfrm>
+          <a:prstGeom prst="rect">
+            <a:avLst/>
+          </a:prstGeom>
+        </p:spPr>
+        <p:style>
+          <a:lnRef idx="1">
+            <a:schemeClr val="dk1"/>
+          </a:lnRef>
+          <a:fillRef idx="2">
+            <a:schemeClr val="dk1"/>
+          </a:fillRef>
+          <a:effectRef idx="1">
+            <a:schemeClr val="dk1"/>
+          </a:effectRef>
+          <a:fontRef idx="minor">
+            <a:schemeClr val="dk1"/>
+          </a:fontRef>
+        </p:style>
+        <p:txBody>
+          <a:bodyPr rtlCol="0" anchor="ctr"/>
+          <a:lstStyle/>
+          <a:p>
+            <a:r>
+              <a:rPr lang="en-US" sz="1000" i="1" dirty="0"/>
+              <a:t>t</a:t>
+            </a:r>
+            <a:r>
+              <a:rPr lang="en-US" sz="1000" i="1" baseline="-25000" dirty="0"/>
+              <a:t>1</a:t>
+            </a:r>
+            <a:r>
+              <a:rPr lang="en-US" sz="1000" dirty="0">
+                <a:latin typeface="Roboto" panose="02000000000000000000" pitchFamily="2" charset="0"/>
+                <a:ea typeface="Roboto" panose="02000000000000000000" pitchFamily="2" charset="0"/>
+                <a:cs typeface="Roboto" panose="02000000000000000000" pitchFamily="2" charset="0"/>
+              </a:rPr>
+              <a:t>: when P</a:t>
+            </a:r>
+            <a:r>
+              <a:rPr lang="en-US" sz="1000" baseline="-25000" dirty="0">
+                <a:latin typeface="Roboto" panose="02000000000000000000" pitchFamily="2" charset="0"/>
+                <a:ea typeface="Roboto" panose="02000000000000000000" pitchFamily="2" charset="0"/>
+                <a:cs typeface="Roboto" panose="02000000000000000000" pitchFamily="2" charset="0"/>
+              </a:rPr>
+              <a:t>1</a:t>
+            </a:r>
+            <a:r>
+              <a:rPr lang="en-US" sz="1000" dirty="0">
+                <a:latin typeface="Roboto" panose="02000000000000000000" pitchFamily="2" charset="0"/>
+                <a:ea typeface="Roboto" panose="02000000000000000000" pitchFamily="2" charset="0"/>
+                <a:cs typeface="Roboto" panose="02000000000000000000" pitchFamily="2" charset="0"/>
+              </a:rPr>
+              <a:t> leaves Node B</a:t>
+            </a:r>
+            <a:endParaRPr lang="en-US" sz="1000" baseline="-25000" dirty="0">
+              <a:latin typeface="Roboto" panose="02000000000000000000" pitchFamily="2" charset="0"/>
+              <a:ea typeface="Roboto" panose="02000000000000000000" pitchFamily="2" charset="0"/>
+              <a:cs typeface="Roboto" panose="02000000000000000000" pitchFamily="2" charset="0"/>
+            </a:endParaRPr>
+          </a:p>
+          <a:p>
+            <a:r>
+              <a:rPr lang="en-US" sz="1000" i="1" dirty="0"/>
+              <a:t>t</a:t>
+            </a:r>
+            <a:r>
+              <a:rPr lang="en-US" sz="1000" i="1" baseline="-25000" dirty="0"/>
+              <a:t>2</a:t>
+            </a:r>
+            <a:r>
+              <a:rPr lang="en-US" sz="1000" dirty="0">
+                <a:latin typeface="Roboto" panose="02000000000000000000" pitchFamily="2" charset="0"/>
+                <a:ea typeface="Roboto" panose="02000000000000000000" pitchFamily="2" charset="0"/>
+                <a:cs typeface="Roboto" panose="02000000000000000000" pitchFamily="2" charset="0"/>
+              </a:rPr>
+              <a:t>: when P</a:t>
+            </a:r>
+            <a:r>
+              <a:rPr lang="en-US" sz="1000" baseline="-25000" dirty="0">
+                <a:latin typeface="Roboto" panose="02000000000000000000" pitchFamily="2" charset="0"/>
+                <a:ea typeface="Roboto" panose="02000000000000000000" pitchFamily="2" charset="0"/>
+                <a:cs typeface="Roboto" panose="02000000000000000000" pitchFamily="2" charset="0"/>
+              </a:rPr>
+              <a:t>2</a:t>
+            </a:r>
+            <a:r>
+              <a:rPr lang="en-US" sz="1000" dirty="0">
+                <a:latin typeface="Roboto" panose="02000000000000000000" pitchFamily="2" charset="0"/>
+                <a:ea typeface="Roboto" panose="02000000000000000000" pitchFamily="2" charset="0"/>
+                <a:cs typeface="Roboto" panose="02000000000000000000" pitchFamily="2" charset="0"/>
+              </a:rPr>
+              <a:t> has fully arrived at Node B, and is ready to transmitted to Node C</a:t>
+            </a:r>
+            <a:endParaRPr lang="en-US" sz="1000" baseline="-25000" dirty="0">
+              <a:latin typeface="Roboto" panose="02000000000000000000" pitchFamily="2" charset="0"/>
+              <a:ea typeface="Roboto" panose="02000000000000000000" pitchFamily="2" charset="0"/>
+              <a:cs typeface="Roboto" panose="02000000000000000000" pitchFamily="2" charset="0"/>
+            </a:endParaRPr>
+          </a:p>
+        </p:txBody>
+      </p:sp>
+      <p:sp>
+        <p:nvSpPr>
+          <p:cNvPr id="19" name="TextBox 18">
+            <a:extLst>
+              <a:ext uri="{FF2B5EF4-FFF2-40B4-BE49-F238E27FC236}">
+                <a16:creationId xmlns:a16="http://schemas.microsoft.com/office/drawing/2014/main" id="{98D2B209-437A-C414-0CC4-52B5739E4710}"/>
+              </a:ext>
+            </a:extLst>
+          </p:cNvPr>
+          <p:cNvSpPr txBox="1"/>
+          <p:nvPr/>
+        </p:nvSpPr>
+        <p:spPr>
+          <a:xfrm>
+            <a:off x="5519005" y="1464657"/>
+            <a:ext cx="280790" cy="261610"/>
+          </a:xfrm>
+          <a:prstGeom prst="rect">
+            <a:avLst/>
+          </a:prstGeom>
+          <a:noFill/>
+        </p:spPr>
+        <p:txBody>
+          <a:bodyPr wrap="square" rtlCol="0">
+            <a:spAutoFit/>
+          </a:bodyPr>
+          <a:lstStyle/>
+          <a:p>
+            <a:r>
+              <a:rPr lang="en-US" sz="1100" i="1" dirty="0"/>
+              <a:t>t</a:t>
+            </a:r>
+            <a:r>
+              <a:rPr lang="en-US" sz="1100" i="1" baseline="-25000" dirty="0"/>
+              <a:t>2</a:t>
+            </a:r>
+            <a:endParaRPr lang="en-US" sz="1100" baseline="-25000" dirty="0">
+              <a:latin typeface="Roboto" panose="02000000000000000000" pitchFamily="2" charset="0"/>
+              <a:ea typeface="Roboto" panose="02000000000000000000" pitchFamily="2" charset="0"/>
+              <a:cs typeface="Roboto" panose="02000000000000000000" pitchFamily="2" charset="0"/>
+            </a:endParaRPr>
+          </a:p>
+        </p:txBody>
+      </p:sp>
+      <p:sp>
+        <p:nvSpPr>
+          <p:cNvPr id="24" name="TextBox 23">
+            <a:extLst>
+              <a:ext uri="{FF2B5EF4-FFF2-40B4-BE49-F238E27FC236}">
+                <a16:creationId xmlns:a16="http://schemas.microsoft.com/office/drawing/2014/main" id="{2D64191C-E83A-4D6C-4464-5B8C0FDBDFB1}"/>
+              </a:ext>
+            </a:extLst>
+          </p:cNvPr>
+          <p:cNvSpPr txBox="1"/>
+          <p:nvPr/>
+        </p:nvSpPr>
+        <p:spPr>
+          <a:xfrm>
+            <a:off x="5519005" y="3704752"/>
+            <a:ext cx="280790" cy="261610"/>
+          </a:xfrm>
+          <a:prstGeom prst="rect">
+            <a:avLst/>
+          </a:prstGeom>
+          <a:noFill/>
+        </p:spPr>
+        <p:txBody>
+          <a:bodyPr wrap="square" rtlCol="0">
+            <a:spAutoFit/>
+          </a:bodyPr>
+          <a:lstStyle/>
+          <a:p>
+            <a:r>
+              <a:rPr lang="en-US" sz="1100" i="1" dirty="0"/>
+              <a:t>t</a:t>
+            </a:r>
+            <a:r>
+              <a:rPr lang="en-US" sz="1100" i="1" baseline="-25000" dirty="0"/>
+              <a:t>2</a:t>
+            </a:r>
+            <a:endParaRPr lang="en-US" sz="1100" baseline="-25000" dirty="0">
+              <a:latin typeface="Roboto" panose="02000000000000000000" pitchFamily="2" charset="0"/>
+              <a:ea typeface="Roboto" panose="02000000000000000000" pitchFamily="2" charset="0"/>
+              <a:cs typeface="Roboto" panose="02000000000000000000" pitchFamily="2" charset="0"/>
+            </a:endParaRPr>
+          </a:p>
+        </p:txBody>
+      </p:sp>
+      <p:cxnSp>
+        <p:nvCxnSpPr>
+          <p:cNvPr id="25" name="Straight Arrow Connector 24">
+            <a:extLst>
+              <a:ext uri="{FF2B5EF4-FFF2-40B4-BE49-F238E27FC236}">
+                <a16:creationId xmlns:a16="http://schemas.microsoft.com/office/drawing/2014/main" id="{45C5E587-9DF1-D543-4542-E01DACFC4FF9}"/>
+              </a:ext>
+            </a:extLst>
+          </p:cNvPr>
+          <p:cNvCxnSpPr/>
+          <p:nvPr/>
+        </p:nvCxnSpPr>
+        <p:spPr>
+          <a:xfrm flipH="1" flipV="1">
+            <a:off x="5724144" y="3848648"/>
+            <a:ext cx="1213104" cy="52002"/>
+          </a:xfrm>
+          <a:prstGeom prst="straightConnector1">
+            <a:avLst/>
+          </a:prstGeom>
+          <a:ln w="6350">
+            <a:tailEnd type="triangle"/>
+          </a:ln>
+        </p:spPr>
+        <p:style>
+          <a:lnRef idx="1">
+            <a:schemeClr val="dk1"/>
+          </a:lnRef>
+          <a:fillRef idx="0">
+            <a:schemeClr val="dk1"/>
+          </a:fillRef>
+          <a:effectRef idx="0">
+            <a:schemeClr val="dk1"/>
+          </a:effectRef>
+          <a:fontRef idx="minor">
+            <a:schemeClr val="tx1"/>
+          </a:fontRef>
+        </p:style>
+      </p:cxnSp>
+      <p:cxnSp>
+        <p:nvCxnSpPr>
+          <p:cNvPr id="26" name="Straight Arrow Connector 25">
+            <a:extLst>
+              <a:ext uri="{FF2B5EF4-FFF2-40B4-BE49-F238E27FC236}">
+                <a16:creationId xmlns:a16="http://schemas.microsoft.com/office/drawing/2014/main" id="{069E87CE-CB6E-33FE-0BB6-04245114AF64}"/>
+              </a:ext>
+            </a:extLst>
+          </p:cNvPr>
+          <p:cNvCxnSpPr/>
+          <p:nvPr/>
+        </p:nvCxnSpPr>
+        <p:spPr>
+          <a:xfrm flipH="1" flipV="1">
+            <a:off x="5724144" y="4031455"/>
+            <a:ext cx="1213104" cy="52002"/>
+          </a:xfrm>
+          <a:prstGeom prst="straightConnector1">
+            <a:avLst/>
+          </a:prstGeom>
+          <a:ln w="6350">
+            <a:tailEnd type="triangle"/>
+          </a:ln>
+        </p:spPr>
+        <p:style>
+          <a:lnRef idx="1">
+            <a:schemeClr val="dk1"/>
+          </a:lnRef>
+          <a:fillRef idx="0">
+            <a:schemeClr val="dk1"/>
+          </a:fillRef>
+          <a:effectRef idx="0">
+            <a:schemeClr val="dk1"/>
+          </a:effectRef>
+          <a:fontRef idx="minor">
+            <a:schemeClr val="tx1"/>
+          </a:fontRef>
+        </p:style>
+      </p:cxnSp>
+      <p:sp>
+        <p:nvSpPr>
+          <p:cNvPr id="27" name="TextBox 26">
+            <a:extLst>
+              <a:ext uri="{FF2B5EF4-FFF2-40B4-BE49-F238E27FC236}">
+                <a16:creationId xmlns:a16="http://schemas.microsoft.com/office/drawing/2014/main" id="{C9C8429B-A74A-1FEF-3DDF-138393CA9189}"/>
+              </a:ext>
+            </a:extLst>
+          </p:cNvPr>
+          <p:cNvSpPr txBox="1"/>
+          <p:nvPr/>
+        </p:nvSpPr>
+        <p:spPr>
+          <a:xfrm>
+            <a:off x="5519005" y="3874649"/>
+            <a:ext cx="280790" cy="261610"/>
+          </a:xfrm>
+          <a:prstGeom prst="rect">
+            <a:avLst/>
+          </a:prstGeom>
+          <a:noFill/>
+        </p:spPr>
+        <p:txBody>
+          <a:bodyPr wrap="square" rtlCol="0">
+            <a:spAutoFit/>
+          </a:bodyPr>
+          <a:lstStyle/>
+          <a:p>
+            <a:r>
+              <a:rPr lang="en-US" sz="1100" i="1" dirty="0"/>
+              <a:t>t</a:t>
+            </a:r>
+            <a:r>
+              <a:rPr lang="en-US" sz="1100" i="1" baseline="-25000" dirty="0"/>
+              <a:t>1</a:t>
+            </a:r>
+            <a:endParaRPr lang="en-US" sz="1100" baseline="-25000" dirty="0">
+              <a:latin typeface="Roboto" panose="02000000000000000000" pitchFamily="2" charset="0"/>
+              <a:ea typeface="Roboto" panose="02000000000000000000" pitchFamily="2" charset="0"/>
+              <a:cs typeface="Roboto" panose="02000000000000000000" pitchFamily="2" charset="0"/>
+            </a:endParaRPr>
+          </a:p>
+        </p:txBody>
+      </p:sp>
+    </p:spTree>
+    <p:extLst>
+      <p:ext uri="{BB962C8B-B14F-4D97-AF65-F5344CB8AC3E}">
+        <p14:creationId xmlns:p14="http://schemas.microsoft.com/office/powerpoint/2010/main" val="984938217"/>
+      </p:ext>
+    </p:extLst>
+  </p:cSld>
+  <p:clrMapOvr>
+    <a:masterClrMapping/>
+  </p:clrMapOvr>
+</p:sld>
+</file>
+
+<file path=ppt/slides/slide13.xml><?xml version="1.0" encoding="utf-8"?>
+<p:sld xmlns:a="http://schemas.openxmlformats.org/drawingml/2006/main" xmlns:r="http://schemas.openxmlformats.org/officeDocument/2006/relationships" xmlns:p="http://schemas.openxmlformats.org/presentationml/2006/main">
+  <p:cSld>
+    <p:spTree>
+      <p:nvGrpSpPr>
+        <p:cNvPr id="1" name=""/>
+        <p:cNvGrpSpPr/>
+        <p:nvPr/>
+      </p:nvGrpSpPr>
+      <p:grpSpPr>
+        <a:xfrm>
+          <a:off x="0" y="0"/>
+          <a:ext cx="0" cy="0"/>
+          <a:chOff x="0" y="0"/>
+          <a:chExt cx="0" cy="0"/>
+        </a:xfrm>
+      </p:grpSpPr>
+      <p:sp>
+        <p:nvSpPr>
+          <p:cNvPr id="2" name="Title 1">
+            <a:extLst>
+              <a:ext uri="{FF2B5EF4-FFF2-40B4-BE49-F238E27FC236}">
+                <a16:creationId xmlns:a16="http://schemas.microsoft.com/office/drawing/2014/main" id="{BB4C8372-AB9E-EDBC-4908-264C9CE9C5A8}"/>
+              </a:ext>
+            </a:extLst>
+          </p:cNvPr>
+          <p:cNvSpPr>
+            <a:spLocks noGrp="1"/>
+          </p:cNvSpPr>
+          <p:nvPr>
+            <p:ph type="title"/>
+          </p:nvPr>
+        </p:nvSpPr>
+        <p:spPr/>
+        <p:txBody>
+          <a:bodyPr/>
+          <a:lstStyle/>
+          <a:p>
+            <a:r>
+              <a:rPr lang="en-US" dirty="0"/>
+              <a:t>Q3.4 End-­to­‐end delay</a:t>
+            </a:r>
+          </a:p>
+        </p:txBody>
+      </p:sp>
+      <p:sp>
+        <p:nvSpPr>
+          <p:cNvPr id="3" name="Text Placeholder 2">
+            <a:extLst>
+              <a:ext uri="{FF2B5EF4-FFF2-40B4-BE49-F238E27FC236}">
+                <a16:creationId xmlns:a16="http://schemas.microsoft.com/office/drawing/2014/main" id="{7338710D-4DD3-2A35-EE10-58E7B7432179}"/>
+              </a:ext>
+            </a:extLst>
+          </p:cNvPr>
+          <p:cNvSpPr>
+            <a:spLocks noGrp="1"/>
+          </p:cNvSpPr>
+          <p:nvPr>
+            <p:ph type="body" idx="1"/>
+          </p:nvPr>
+        </p:nvSpPr>
+        <p:spPr/>
+        <p:txBody>
+          <a:bodyPr/>
+          <a:lstStyle/>
+          <a:p>
+            <a:r>
+              <a:rPr lang="en-US" dirty="0"/>
+              <a:t>Find the variable relations that need to be satisfied in order to have no queuing delays for part (c).</a:t>
+            </a:r>
+          </a:p>
+        </p:txBody>
+      </p:sp>
+    </p:spTree>
+    <p:extLst>
+      <p:ext uri="{BB962C8B-B14F-4D97-AF65-F5344CB8AC3E}">
+        <p14:creationId xmlns:p14="http://schemas.microsoft.com/office/powerpoint/2010/main" val="3667235539"/>
+      </p:ext>
+    </p:extLst>
+  </p:cSld>
+  <p:clrMapOvr>
+    <a:masterClrMapping/>
+  </p:clrMapOvr>
+</p:sld>
+</file>
+
+<file path=ppt/slides/slide14.xml><?xml version="1.0" encoding="utf-8"?>
+<p:sld xmlns:a="http://schemas.openxmlformats.org/drawingml/2006/main" xmlns:r="http://schemas.openxmlformats.org/officeDocument/2006/relationships" xmlns:p="http://schemas.openxmlformats.org/presentationml/2006/main">
+  <p:cSld>
+    <p:spTree>
+      <p:nvGrpSpPr>
+        <p:cNvPr id="1" name=""/>
+        <p:cNvGrpSpPr/>
+        <p:nvPr/>
+      </p:nvGrpSpPr>
+      <p:grpSpPr>
+        <a:xfrm>
+          <a:off x="0" y="0"/>
+          <a:ext cx="0" cy="0"/>
+          <a:chOff x="0" y="0"/>
+          <a:chExt cx="0" cy="0"/>
+        </a:xfrm>
+      </p:grpSpPr>
+      <p:sp>
+        <p:nvSpPr>
+          <p:cNvPr id="2" name="Title 1">
+            <a:extLst>
+              <a:ext uri="{FF2B5EF4-FFF2-40B4-BE49-F238E27FC236}">
+                <a16:creationId xmlns:a16="http://schemas.microsoft.com/office/drawing/2014/main" id="{842EA774-90F9-6C97-B576-0BDDDE3540C7}"/>
+              </a:ext>
+            </a:extLst>
+          </p:cNvPr>
+          <p:cNvSpPr>
+            <a:spLocks noGrp="1"/>
+          </p:cNvSpPr>
+          <p:nvPr>
+            <p:ph type="title"/>
+          </p:nvPr>
+        </p:nvSpPr>
+        <p:spPr/>
+        <p:txBody>
+          <a:bodyPr/>
+          <a:lstStyle/>
+          <a:p>
+            <a:r>
+              <a:rPr lang="en-US" dirty="0"/>
+              <a:t>Q3.4 End-­to­‐end delay ANS</a:t>
+            </a:r>
+          </a:p>
+        </p:txBody>
+      </p:sp>
+      <p:sp>
+        <p:nvSpPr>
+          <p:cNvPr id="3" name="Text Placeholder 2">
+            <a:extLst>
+              <a:ext uri="{FF2B5EF4-FFF2-40B4-BE49-F238E27FC236}">
+                <a16:creationId xmlns:a16="http://schemas.microsoft.com/office/drawing/2014/main" id="{C131163C-7EDF-0426-EEB4-0EBA93838756}"/>
+              </a:ext>
+            </a:extLst>
+          </p:cNvPr>
+          <p:cNvSpPr>
+            <a:spLocks noGrp="1"/>
+          </p:cNvSpPr>
+          <p:nvPr>
+            <p:ph type="body" idx="1"/>
+          </p:nvPr>
+        </p:nvSpPr>
+        <p:spPr/>
+        <p:txBody>
+          <a:bodyPr/>
+          <a:lstStyle/>
+          <a:p>
+            <a:endParaRPr lang="en-US"/>
+          </a:p>
+        </p:txBody>
+      </p:sp>
+      <p:pic>
+        <p:nvPicPr>
+          <p:cNvPr id="14" name="Picture 13">
+            <a:extLst>
+              <a:ext uri="{FF2B5EF4-FFF2-40B4-BE49-F238E27FC236}">
+                <a16:creationId xmlns:a16="http://schemas.microsoft.com/office/drawing/2014/main" id="{B3A8F6A5-3C65-BE86-97C7-3F4FC96D1F1F}"/>
+              </a:ext>
+            </a:extLst>
+          </p:cNvPr>
+          <p:cNvPicPr>
+            <a:picLocks noChangeAspect="1"/>
+          </p:cNvPicPr>
+          <p:nvPr/>
+        </p:nvPicPr>
+        <p:blipFill>
+          <a:blip r:embed="rId2"/>
+          <a:stretch>
+            <a:fillRect/>
+          </a:stretch>
+        </p:blipFill>
+        <p:spPr>
+          <a:xfrm>
+            <a:off x="127249" y="594895"/>
+            <a:ext cx="8889501" cy="1901366"/>
+          </a:xfrm>
+          <a:prstGeom prst="rect">
+            <a:avLst/>
+          </a:prstGeom>
+        </p:spPr>
+      </p:pic>
+    </p:spTree>
+    <p:extLst>
+      <p:ext uri="{BB962C8B-B14F-4D97-AF65-F5344CB8AC3E}">
+        <p14:creationId xmlns:p14="http://schemas.microsoft.com/office/powerpoint/2010/main" val="1323721031"/>
+      </p:ext>
+    </p:extLst>
+  </p:cSld>
+  <p:clrMapOvr>
+    <a:masterClrMapping/>
+  </p:clrMapOvr>
+</p:sld>
+</file>
+
+<file path=ppt/slides/slide15.xml><?xml version="1.0" encoding="utf-8"?>
+<p:sld xmlns:a="http://schemas.openxmlformats.org/drawingml/2006/main" xmlns:r="http://schemas.openxmlformats.org/officeDocument/2006/relationships" xmlns:p="http://schemas.openxmlformats.org/presentationml/2006/main">
+  <p:cSld>
+    <p:spTree>
+      <p:nvGrpSpPr>
+        <p:cNvPr id="1" name=""/>
+        <p:cNvGrpSpPr/>
+        <p:nvPr/>
+      </p:nvGrpSpPr>
+      <p:grpSpPr>
+        <a:xfrm>
+          <a:off x="0" y="0"/>
+          <a:ext cx="0" cy="0"/>
+          <a:chOff x="0" y="0"/>
+          <a:chExt cx="0" cy="0"/>
+        </a:xfrm>
+      </p:grpSpPr>
+      <p:sp>
+        <p:nvSpPr>
+          <p:cNvPr id="2" name="Title 1">
+            <a:extLst>
+              <a:ext uri="{FF2B5EF4-FFF2-40B4-BE49-F238E27FC236}">
+                <a16:creationId xmlns:a16="http://schemas.microsoft.com/office/drawing/2014/main" id="{1C07845D-E7DF-D1AD-8307-0574E1926F85}"/>
+              </a:ext>
+            </a:extLst>
+          </p:cNvPr>
+          <p:cNvSpPr>
+            <a:spLocks noGrp="1"/>
+          </p:cNvSpPr>
+          <p:nvPr>
+            <p:ph type="title"/>
+          </p:nvPr>
+        </p:nvSpPr>
+        <p:spPr/>
+        <p:txBody>
+          <a:bodyPr/>
+          <a:lstStyle/>
+          <a:p>
+            <a:r>
+              <a:rPr lang="en-US" dirty="0"/>
+              <a:t>Q4. Statistical Multiplexing</a:t>
+            </a:r>
+          </a:p>
+        </p:txBody>
+      </p:sp>
+      <p:sp>
+        <p:nvSpPr>
+          <p:cNvPr id="3" name="Text Placeholder 2">
+            <a:extLst>
+              <a:ext uri="{FF2B5EF4-FFF2-40B4-BE49-F238E27FC236}">
+                <a16:creationId xmlns:a16="http://schemas.microsoft.com/office/drawing/2014/main" id="{6CD96C1D-4FA5-25B3-0C7B-CFC748D74975}"/>
+              </a:ext>
+            </a:extLst>
+          </p:cNvPr>
+          <p:cNvSpPr>
+            <a:spLocks noGrp="1"/>
+          </p:cNvSpPr>
+          <p:nvPr>
+            <p:ph type="body" idx="1"/>
+          </p:nvPr>
+        </p:nvSpPr>
+        <p:spPr>
+          <a:xfrm>
+            <a:off x="117150" y="293846"/>
+            <a:ext cx="8909700" cy="2970920"/>
+          </a:xfrm>
+        </p:spPr>
+        <p:txBody>
+          <a:bodyPr>
+            <a:normAutofit fontScale="92500" lnSpcReduction="20000"/>
+          </a:bodyPr>
+          <a:lstStyle/>
+          <a:p>
+            <a:r>
+              <a:rPr lang="en-US" dirty="0"/>
+              <a:t>Consider three flows 𝐹</a:t>
+            </a:r>
+            <a:r>
+              <a:rPr lang="en-US" baseline="-25000" dirty="0"/>
+              <a:t>1</a:t>
+            </a:r>
+            <a:r>
+              <a:rPr lang="en-US" dirty="0"/>
+              <a:t>, 𝐹</a:t>
+            </a:r>
+            <a:r>
+              <a:rPr lang="en-US" baseline="-25000" dirty="0"/>
+              <a:t>2</a:t>
+            </a:r>
+            <a:r>
+              <a:rPr lang="en-US" dirty="0"/>
+              <a:t>, 𝐹</a:t>
+            </a:r>
+            <a:r>
+              <a:rPr lang="en-US" baseline="-25000" dirty="0"/>
+              <a:t>3</a:t>
+            </a:r>
+            <a:r>
+              <a:rPr lang="en-US" dirty="0"/>
+              <a:t> sending packets over a single link. The sending pattern of each flow is described by how many packets it sends within each one-second interval; the table below shows these numbers for the first ten intervals. A perfectly smooth (i.e., non-bursty) flow would send the same number of packets in each interval, but our three flows are very bursty, with highly varying numbers of packets in each interval:</a:t>
+            </a:r>
+          </a:p>
+          <a:p>
+            <a:r>
+              <a:rPr lang="en-US" dirty="0"/>
+              <a:t>1) What is the peak rate of each flow? What is the sum of the peak rates?</a:t>
+            </a:r>
+          </a:p>
+          <a:p>
+            <a:r>
+              <a:rPr lang="en-US" dirty="0"/>
+              <a:t>2) Now consider all packets to be in the same aggregate flow. What is the peak rate of this aggregate flow?</a:t>
+            </a:r>
+          </a:p>
+          <a:p>
+            <a:r>
+              <a:rPr lang="en-US" dirty="0"/>
+              <a:t>3) Which is higher - the sum of the peaks, or the peak of the aggregate?</a:t>
+            </a:r>
+          </a:p>
+        </p:txBody>
+      </p:sp>
+      <p:pic>
+        <p:nvPicPr>
+          <p:cNvPr id="5" name="Picture 4">
+            <a:extLst>
+              <a:ext uri="{FF2B5EF4-FFF2-40B4-BE49-F238E27FC236}">
+                <a16:creationId xmlns:a16="http://schemas.microsoft.com/office/drawing/2014/main" id="{2BDF6A44-67A8-969C-B6DF-57BD2436B50E}"/>
+              </a:ext>
+            </a:extLst>
+          </p:cNvPr>
+          <p:cNvPicPr>
+            <a:picLocks noChangeAspect="1"/>
+          </p:cNvPicPr>
+          <p:nvPr/>
+        </p:nvPicPr>
+        <p:blipFill>
+          <a:blip r:embed="rId2"/>
+          <a:stretch>
+            <a:fillRect/>
+          </a:stretch>
+        </p:blipFill>
+        <p:spPr>
+          <a:xfrm>
+            <a:off x="1866501" y="3264766"/>
+            <a:ext cx="5715798" cy="1676634"/>
+          </a:xfrm>
+          <a:prstGeom prst="rect">
+            <a:avLst/>
+          </a:prstGeom>
+        </p:spPr>
+      </p:pic>
+    </p:spTree>
+    <p:extLst>
+      <p:ext uri="{BB962C8B-B14F-4D97-AF65-F5344CB8AC3E}">
+        <p14:creationId xmlns:p14="http://schemas.microsoft.com/office/powerpoint/2010/main" val="1647334518"/>
+      </p:ext>
+    </p:extLst>
+  </p:cSld>
+  <p:clrMapOvr>
+    <a:masterClrMapping/>
+  </p:clrMapOvr>
+</p:sld>
+</file>
+
+<file path=ppt/slides/slide16.xml><?xml version="1.0" encoding="utf-8"?>
+<p:sld xmlns:a="http://schemas.openxmlformats.org/drawingml/2006/main" xmlns:r="http://schemas.openxmlformats.org/officeDocument/2006/relationships" xmlns:p="http://schemas.openxmlformats.org/presentationml/2006/main">
+  <p:cSld>
+    <p:spTree>
+      <p:nvGrpSpPr>
+        <p:cNvPr id="1" name=""/>
+        <p:cNvGrpSpPr/>
+        <p:nvPr/>
+      </p:nvGrpSpPr>
+      <p:grpSpPr>
+        <a:xfrm>
+          <a:off x="0" y="0"/>
+          <a:ext cx="0" cy="0"/>
+          <a:chOff x="0" y="0"/>
+          <a:chExt cx="0" cy="0"/>
+        </a:xfrm>
+      </p:grpSpPr>
+      <p:sp>
+        <p:nvSpPr>
+          <p:cNvPr id="2" name="Title 1">
+            <a:extLst>
+              <a:ext uri="{FF2B5EF4-FFF2-40B4-BE49-F238E27FC236}">
+                <a16:creationId xmlns:a16="http://schemas.microsoft.com/office/drawing/2014/main" id="{74F62C4D-4EE8-AAE2-EB14-79A241A2E932}"/>
+              </a:ext>
+            </a:extLst>
+          </p:cNvPr>
+          <p:cNvSpPr>
+            <a:spLocks noGrp="1"/>
+          </p:cNvSpPr>
+          <p:nvPr>
+            <p:ph type="title"/>
+          </p:nvPr>
+        </p:nvSpPr>
+        <p:spPr/>
+        <p:txBody>
+          <a:bodyPr/>
+          <a:lstStyle/>
+          <a:p>
+            <a:r>
+              <a:rPr lang="en-US" dirty="0"/>
+              <a:t>Q4. Statistical Multiplexing ANS</a:t>
+            </a:r>
+          </a:p>
+        </p:txBody>
+      </p:sp>
+      <p:sp>
+        <p:nvSpPr>
+          <p:cNvPr id="3" name="Text Placeholder 2">
+            <a:extLst>
+              <a:ext uri="{FF2B5EF4-FFF2-40B4-BE49-F238E27FC236}">
+                <a16:creationId xmlns:a16="http://schemas.microsoft.com/office/drawing/2014/main" id="{E265822C-0E79-B5AC-4810-824DA6C111E8}"/>
+              </a:ext>
+            </a:extLst>
+          </p:cNvPr>
+          <p:cNvSpPr>
+            <a:spLocks noGrp="1"/>
+          </p:cNvSpPr>
+          <p:nvPr>
+            <p:ph type="body" idx="1"/>
+          </p:nvPr>
+        </p:nvSpPr>
+        <p:spPr>
+          <a:xfrm>
+            <a:off x="107050" y="402200"/>
+            <a:ext cx="8909700" cy="3103000"/>
+          </a:xfrm>
+        </p:spPr>
+        <p:txBody>
+          <a:bodyPr>
+            <a:normAutofit fontScale="92500" lnSpcReduction="20000"/>
+          </a:bodyPr>
+          <a:lstStyle/>
+          <a:p>
+            <a:r>
+              <a:rPr lang="en-US" dirty="0"/>
+              <a:t>1) The peak rate is the highest the flow gets throughout the whole period. The peak rate of 𝐹</a:t>
+            </a:r>
+            <a:r>
+              <a:rPr lang="en-US" baseline="-25000" dirty="0"/>
+              <a:t>1</a:t>
+            </a:r>
+            <a:r>
+              <a:rPr lang="en-US" dirty="0"/>
+              <a:t> is 34, of 𝐹</a:t>
+            </a:r>
+            <a:r>
+              <a:rPr lang="en-US" baseline="-25000" dirty="0"/>
+              <a:t>2</a:t>
+            </a:r>
+            <a:r>
+              <a:rPr lang="en-US" dirty="0"/>
+              <a:t> is 40, and of 𝐹</a:t>
+            </a:r>
+            <a:r>
+              <a:rPr lang="en-US" baseline="-25000" dirty="0"/>
+              <a:t>3</a:t>
+            </a:r>
+            <a:r>
+              <a:rPr lang="en-US" dirty="0"/>
+              <a:t> is 45.The sum of their peaks is 34 + 40 + 45 = 119.</a:t>
+            </a:r>
+          </a:p>
+          <a:p>
+            <a:r>
+              <a:rPr lang="en-US" dirty="0"/>
+              <a:t>2) Summing the flows together, we get the following values for an aggregate flow. The peak of the aggregate flow happens at 1s, where it is 52.</a:t>
+            </a:r>
+          </a:p>
+          <a:p>
+            <a:r>
+              <a:rPr lang="en-US" dirty="0"/>
+              <a:t>3) The sum of the peaks is 119, whereas the peak of the aggregate is 52, so the sum of the peaks is much higher. This is the insight from Statistical Multiplexing. The peak of the aggregate can only be at most the sum of the peaks, but that only happens in the case that all of the peaks happen at the same time. This is very unlikely, so usually, the peak of the aggregate is much lower than the sum of the peaks.</a:t>
+            </a:r>
+          </a:p>
+        </p:txBody>
+      </p:sp>
+      <p:pic>
+        <p:nvPicPr>
+          <p:cNvPr id="4" name="Picture 3">
+            <a:extLst>
+              <a:ext uri="{FF2B5EF4-FFF2-40B4-BE49-F238E27FC236}">
+                <a16:creationId xmlns:a16="http://schemas.microsoft.com/office/drawing/2014/main" id="{566E91D9-FA32-EF31-9486-A6D43C39C87F}"/>
+              </a:ext>
+            </a:extLst>
+          </p:cNvPr>
+          <p:cNvPicPr>
+            <a:picLocks noChangeAspect="1"/>
+          </p:cNvPicPr>
+          <p:nvPr/>
+        </p:nvPicPr>
+        <p:blipFill>
+          <a:blip r:embed="rId2"/>
+          <a:stretch>
+            <a:fillRect/>
+          </a:stretch>
+        </p:blipFill>
+        <p:spPr>
+          <a:xfrm>
+            <a:off x="1714101" y="3346046"/>
+            <a:ext cx="5715798" cy="1676634"/>
+          </a:xfrm>
+          <a:prstGeom prst="rect">
+            <a:avLst/>
+          </a:prstGeom>
+        </p:spPr>
+      </p:pic>
+    </p:spTree>
+    <p:extLst>
+      <p:ext uri="{BB962C8B-B14F-4D97-AF65-F5344CB8AC3E}">
+        <p14:creationId xmlns:p14="http://schemas.microsoft.com/office/powerpoint/2010/main" val="123181104"/>
+      </p:ext>
+    </p:extLst>
   </p:cSld>
   <p:clrMapOvr>
     <a:masterClrMapping/>
@@ -17211,14 +20171,14 @@
           </a:ln>
           <a:extLst>
             <a:ext uri="{909E8E84-426E-40dd-AFC4-6F175D3DCCD1}">
-              <a14:hiddenFill xmlns:a14="http://schemas.microsoft.com/office/drawing/2010/main" xmlns="">
+              <a14:hiddenFill xmlns="" xmlns:a14="http://schemas.microsoft.com/office/drawing/2010/main">
                 <a:solidFill>
                   <a:srgbClr val="FFFFFF"/>
                 </a:solidFill>
               </a14:hiddenFill>
             </a:ext>
             <a:ext uri="{91240B29-F687-4f45-9708-019B960494DF}">
-              <a14:hiddenLine xmlns:a14="http://schemas.microsoft.com/office/drawing/2010/main" xmlns="" w="9525">
+              <a14:hiddenLine xmlns="" xmlns:a14="http://schemas.microsoft.com/office/drawing/2010/main" w="9525">
                 <a:solidFill>
                   <a:srgbClr val="000000"/>
                 </a:solidFill>
@@ -22975,14 +25935,14 @@
           </a:ln>
           <a:extLst>
             <a:ext uri="{909E8E84-426E-40dd-AFC4-6F175D3DCCD1}">
-              <a14:hiddenFill xmlns:a14="http://schemas.microsoft.com/office/drawing/2010/main" xmlns="">
+              <a14:hiddenFill xmlns="" xmlns:a14="http://schemas.microsoft.com/office/drawing/2010/main">
                 <a:solidFill>
                   <a:srgbClr val="FFFFFF"/>
                 </a:solidFill>
               </a14:hiddenFill>
             </a:ext>
             <a:ext uri="{91240B29-F687-4f45-9708-019B960494DF}">
-              <a14:hiddenLine xmlns:a14="http://schemas.microsoft.com/office/drawing/2010/main" xmlns="" w="9525">
+              <a14:hiddenLine xmlns="" xmlns:a14="http://schemas.microsoft.com/office/drawing/2010/main" w="9525">
                 <a:solidFill>
                   <a:srgbClr val="000000"/>
                 </a:solidFill>
@@ -23203,14 +26163,14 @@
           </a:ln>
           <a:extLst>
             <a:ext uri="{909E8E84-426E-40dd-AFC4-6F175D3DCCD1}">
-              <a14:hiddenFill xmlns:a14="http://schemas.microsoft.com/office/drawing/2010/main" xmlns="">
+              <a14:hiddenFill xmlns="" xmlns:a14="http://schemas.microsoft.com/office/drawing/2010/main">
                 <a:solidFill>
                   <a:srgbClr val="FFFFFF"/>
                 </a:solidFill>
               </a14:hiddenFill>
             </a:ext>
             <a:ext uri="{91240B29-F687-4f45-9708-019B960494DF}">
-              <a14:hiddenLine xmlns:a14="http://schemas.microsoft.com/office/drawing/2010/main" xmlns="" w="9525">
+              <a14:hiddenLine xmlns="" xmlns:a14="http://schemas.microsoft.com/office/drawing/2010/main" w="9525">
                 <a:solidFill>
                   <a:srgbClr val="000000"/>
                 </a:solidFill>
@@ -23876,6 +26836,175 @@
   <p:cSld>
     <p:spTree>
       <p:nvGrpSpPr>
+        <p:cNvPr id="1" name="Shape 1600"/>
+        <p:cNvGrpSpPr/>
+        <p:nvPr/>
+      </p:nvGrpSpPr>
+      <p:grpSpPr>
+        <a:xfrm>
+          <a:off x="0" y="0"/>
+          <a:ext cx="0" cy="0"/>
+          <a:chOff x="0" y="0"/>
+          <a:chExt cx="0" cy="0"/>
+        </a:xfrm>
+      </p:grpSpPr>
+      <p:sp>
+        <p:nvSpPr>
+          <p:cNvPr id="1601" name="Google Shape;1601;p44"/>
+          <p:cNvSpPr txBox="1">
+            <a:spLocks noGrp="1"/>
+          </p:cNvSpPr>
+          <p:nvPr>
+            <p:ph type="title"/>
+          </p:nvPr>
+        </p:nvSpPr>
+        <p:spPr>
+          <a:xfrm>
+            <a:off x="0" y="0"/>
+            <a:ext cx="9144000" cy="393600"/>
+          </a:xfrm>
+          <a:prstGeom prst="rect">
+            <a:avLst/>
+          </a:prstGeom>
+        </p:spPr>
+        <p:txBody>
+          <a:bodyPr spcFirstLastPara="1" wrap="square" lIns="91425" tIns="91425" rIns="91425" bIns="91425" anchor="t" anchorCtr="0">
+            <a:noAutofit/>
+          </a:bodyPr>
+          <a:lstStyle/>
+          <a:p>
+            <a:pPr lvl="0"/>
+            <a:r>
+              <a:rPr lang="en-US" dirty="0"/>
+              <a:t>Q1 End-­to­‐end delay </a:t>
+            </a:r>
+            <a:endParaRPr dirty="0"/>
+          </a:p>
+        </p:txBody>
+      </p:sp>
+      <p:sp>
+        <p:nvSpPr>
+          <p:cNvPr id="1602" name="Google Shape;1602;p44"/>
+          <p:cNvSpPr txBox="1">
+            <a:spLocks noGrp="1"/>
+          </p:cNvSpPr>
+          <p:nvPr>
+            <p:ph type="body" idx="1"/>
+          </p:nvPr>
+        </p:nvSpPr>
+        <p:spPr>
+          <a:xfrm>
+            <a:off x="107050" y="402200"/>
+            <a:ext cx="8909700" cy="1742100"/>
+          </a:xfrm>
+          <a:prstGeom prst="rect">
+            <a:avLst/>
+          </a:prstGeom>
+        </p:spPr>
+        <p:txBody>
+          <a:bodyPr spcFirstLastPara="1" wrap="square" lIns="91425" tIns="91425" rIns="91425" bIns="91425" anchor="t" anchorCtr="0">
+            <a:noAutofit/>
+          </a:bodyPr>
+          <a:lstStyle/>
+          <a:p>
+            <a:pPr marL="114300" indent="0">
+              <a:buNone/>
+            </a:pPr>
+            <a:r>
+              <a:rPr lang="en-US" dirty="0"/>
+              <a:t>Consider the network shown in the figure, with three links, each with a transmission rate of 1 Mbps, and a propagation delay of 1 msec per link. Assume the length of a packet is 1000 bits.</a:t>
+            </a:r>
+          </a:p>
+          <a:p>
+            <a:r>
+              <a:rPr lang="en-US" dirty="0"/>
+              <a:t>What is the end-end delay of a packet from when it first begins transmission on link 1, until is it received in full by the server at the end of link 3.  Assume that queueing delays are zero. </a:t>
+            </a:r>
+            <a:endParaRPr dirty="0"/>
+          </a:p>
+        </p:txBody>
+      </p:sp>
+      <p:sp>
+        <p:nvSpPr>
+          <p:cNvPr id="2" name="Slide Number Placeholder 1">
+            <a:extLst>
+              <a:ext uri="{FF2B5EF4-FFF2-40B4-BE49-F238E27FC236}">
+                <a16:creationId xmlns:a16="http://schemas.microsoft.com/office/drawing/2014/main" id="{8A040F7E-0A41-C99F-0608-1327011D8192}"/>
+              </a:ext>
+            </a:extLst>
+          </p:cNvPr>
+          <p:cNvSpPr>
+            <a:spLocks noGrp="1"/>
+          </p:cNvSpPr>
+          <p:nvPr>
+            <p:ph type="sldNum" idx="12"/>
+          </p:nvPr>
+        </p:nvSpPr>
+        <p:spPr/>
+        <p:txBody>
+          <a:bodyPr/>
+          <a:lstStyle/>
+          <a:p>
+            <a:pPr marL="0" lvl="0" indent="0" algn="r" rtl="0">
+              <a:spcBef>
+                <a:spcPts val="0"/>
+              </a:spcBef>
+              <a:spcAft>
+                <a:spcPts val="0"/>
+              </a:spcAft>
+              <a:buNone/>
+            </a:pPr>
+            <a:fld id="{00000000-1234-1234-1234-123412341234}" type="slidenum">
+              <a:rPr lang="en" smtClean="0"/>
+              <a:t>3</a:t>
+            </a:fld>
+            <a:endParaRPr lang="en"/>
+          </a:p>
+        </p:txBody>
+      </p:sp>
+      <p:pic>
+        <p:nvPicPr>
+          <p:cNvPr id="3" name="Picture 2">
+            <a:extLst>
+              <a:ext uri="{FF2B5EF4-FFF2-40B4-BE49-F238E27FC236}">
+                <a16:creationId xmlns:a16="http://schemas.microsoft.com/office/drawing/2014/main" id="{9633A34F-1978-7574-E3B7-AE9705F992F7}"/>
+              </a:ext>
+            </a:extLst>
+          </p:cNvPr>
+          <p:cNvPicPr>
+            <a:picLocks noChangeAspect="1"/>
+          </p:cNvPicPr>
+          <p:nvPr/>
+        </p:nvPicPr>
+        <p:blipFill>
+          <a:blip r:embed="rId3"/>
+          <a:stretch>
+            <a:fillRect/>
+          </a:stretch>
+        </p:blipFill>
+        <p:spPr>
+          <a:xfrm>
+            <a:off x="1061687" y="2792339"/>
+            <a:ext cx="7020625" cy="1564000"/>
+          </a:xfrm>
+          <a:prstGeom prst="rect">
+            <a:avLst/>
+          </a:prstGeom>
+        </p:spPr>
+      </p:pic>
+    </p:spTree>
+  </p:cSld>
+  <p:clrMapOvr>
+    <a:masterClrMapping/>
+  </p:clrMapOvr>
+</p:sld>
+</file>
+
+<file path=ppt/slides/slide4.xml><?xml version="1.0" encoding="utf-8"?>
+<p:sld xmlns:a="http://schemas.openxmlformats.org/drawingml/2006/main" xmlns:r="http://schemas.openxmlformats.org/officeDocument/2006/relationships" xmlns:p="http://schemas.openxmlformats.org/presentationml/2006/main">
+  <p:cSld>
+    <p:spTree>
+      <p:nvGrpSpPr>
         <p:cNvPr id="1" name=""/>
         <p:cNvGrpSpPr/>
         <p:nvPr/>
@@ -23893,7 +27022,7 @@
           <p:cNvPr id="2" name="Title 1">
             <a:extLst>
               <a:ext uri="{FF2B5EF4-FFF2-40B4-BE49-F238E27FC236}">
-                <a16:creationId xmlns:a16="http://schemas.microsoft.com/office/drawing/2014/main" id="{EAC914B2-C161-4BFE-80A6-71DC7F5DA392}"/>
+                <a16:creationId xmlns:a16="http://schemas.microsoft.com/office/drawing/2014/main" id="{8E07A7B8-5F5E-9C46-A02A-45A4953A2C5E}"/>
               </a:ext>
             </a:extLst>
           </p:cNvPr>
@@ -23904,174 +27033,26 @@
             <p:ph type="title"/>
           </p:nvPr>
         </p:nvSpPr>
-        <p:spPr>
-          <a:xfrm>
-            <a:off x="637277" y="226180"/>
-            <a:ext cx="4486275" cy="670967"/>
-          </a:xfrm>
-        </p:spPr>
-        <p:txBody>
-          <a:bodyPr>
-            <a:normAutofit fontScale="90000"/>
-          </a:bodyPr>
-          <a:lstStyle/>
-          <a:p>
-            <a:r>
-              <a:rPr lang="en-US" dirty="0"/>
-              <a:t>Q1 End-­to­‐end delay </a:t>
-            </a:r>
-          </a:p>
-        </p:txBody>
-      </p:sp>
-      <p:sp>
-        <p:nvSpPr>
-          <p:cNvPr id="3" name="Content Placeholder 2">
-            <a:extLst>
-              <a:ext uri="{FF2B5EF4-FFF2-40B4-BE49-F238E27FC236}">
-                <a16:creationId xmlns:a16="http://schemas.microsoft.com/office/drawing/2014/main" id="{14A8C199-202B-428F-BCFF-DE6A5AABCDCD}"/>
-              </a:ext>
-            </a:extLst>
-          </p:cNvPr>
-          <p:cNvSpPr>
-            <a:spLocks noGrp="1"/>
-          </p:cNvSpPr>
-          <p:nvPr>
-            <p:ph sz="half" idx="1"/>
-          </p:nvPr>
-        </p:nvSpPr>
-        <p:spPr>
-          <a:xfrm>
-            <a:off x="267419" y="897147"/>
-            <a:ext cx="4247431" cy="3735576"/>
-          </a:xfrm>
-        </p:spPr>
-        <p:txBody>
-          <a:bodyPr>
-            <a:normAutofit fontScale="92500" lnSpcReduction="10000"/>
-          </a:bodyPr>
-          <a:lstStyle/>
-          <a:p>
-            <a:r>
-              <a:rPr lang="en-US" dirty="0"/>
-              <a:t>Consider the network shown in the figure, with three links, each with a transmission rate of 1 Mbps, and a propagation delay of 1 msec per link. Assume the length of a packet is 1000 bits.</a:t>
-            </a:r>
-          </a:p>
-          <a:p>
-            <a:r>
-              <a:rPr lang="en-US" dirty="0"/>
-              <a:t>What is the end-end delay of a packet from when it first begins transmission on link 1, until is it received in full by the server at the end of link 3.  Assume that queueing delays are zero.</a:t>
-            </a:r>
-          </a:p>
-        </p:txBody>
-      </p:sp>
-      <p:sp>
-        <p:nvSpPr>
-          <p:cNvPr id="5" name="Slide Number Placeholder 4">
-            <a:extLst>
-              <a:ext uri="{FF2B5EF4-FFF2-40B4-BE49-F238E27FC236}">
-                <a16:creationId xmlns:a16="http://schemas.microsoft.com/office/drawing/2014/main" id="{1D0B0DF4-D0B4-4369-972D-BE8AFA559C49}"/>
-              </a:ext>
-            </a:extLst>
-          </p:cNvPr>
-          <p:cNvSpPr>
-            <a:spLocks noGrp="1"/>
-          </p:cNvSpPr>
-          <p:nvPr>
-            <p:ph type="sldNum" sz="quarter" idx="4"/>
-          </p:nvPr>
-        </p:nvSpPr>
         <p:spPr/>
         <p:txBody>
           <a:bodyPr/>
           <a:lstStyle/>
           <a:p>
             <a:r>
-              <a:rPr lang="en-US"/>
-              <a:t>Introduction: 1-</a:t>
+              <a:rPr lang="en-US" dirty="0"/>
+              <a:t>Q1 End-­to­‐end delay ANS</a:t>
             </a:r>
-            <a:fld id="{C4204591-24BD-A542-B9D5-F8D8A88D2FEE}" type="slidenum">
-              <a:rPr lang="en-US" smtClean="0"/>
-              <a:pPr/>
-              <a:t>3</a:t>
-            </a:fld>
-            <a:endParaRPr lang="en-US" dirty="0"/>
           </a:p>
         </p:txBody>
       </p:sp>
-      <p:pic>
-        <p:nvPicPr>
-          <p:cNvPr id="6" name="Picture 5">
-            <a:extLst>
-              <a:ext uri="{FF2B5EF4-FFF2-40B4-BE49-F238E27FC236}">
-                <a16:creationId xmlns:a16="http://schemas.microsoft.com/office/drawing/2014/main" id="{DF20A3C5-C68E-4D7F-9BC3-42DE800C88DC}"/>
-              </a:ext>
-            </a:extLst>
-          </p:cNvPr>
-          <p:cNvPicPr>
-            <a:picLocks noChangeAspect="1"/>
-          </p:cNvPicPr>
-          <p:nvPr/>
-        </p:nvPicPr>
-        <p:blipFill>
-          <a:blip r:embed="rId3"/>
-          <a:stretch>
-            <a:fillRect/>
-          </a:stretch>
-        </p:blipFill>
-        <p:spPr>
-          <a:xfrm>
-            <a:off x="4514850" y="1990084"/>
-            <a:ext cx="4529138" cy="1008966"/>
-          </a:xfrm>
-          <a:prstGeom prst="rect">
-            <a:avLst/>
-          </a:prstGeom>
-        </p:spPr>
-      </p:pic>
-    </p:spTree>
-    <p:extLst>
-      <p:ext uri="{BB962C8B-B14F-4D97-AF65-F5344CB8AC3E}">
-        <p14:creationId xmlns:p14="http://schemas.microsoft.com/office/powerpoint/2010/main" val="1660582021"/>
-      </p:ext>
-    </p:extLst>
-  </p:cSld>
-  <p:clrMapOvr>
-    <a:masterClrMapping/>
-  </p:clrMapOvr>
-</p:sld>
-</file>
-
-<file path=ppt/slides/slide4.xml><?xml version="1.0" encoding="utf-8"?>
-<p:sld xmlns:a="http://schemas.openxmlformats.org/drawingml/2006/main" xmlns:r="http://schemas.openxmlformats.org/officeDocument/2006/relationships" xmlns:p="http://schemas.openxmlformats.org/presentationml/2006/main">
-  <p:cSld>
-    <p:spTree>
-      <p:nvGrpSpPr>
-        <p:cNvPr id="1" name="">
-          <a:extLst>
-            <a:ext uri="{FF2B5EF4-FFF2-40B4-BE49-F238E27FC236}">
-              <a16:creationId xmlns:a16="http://schemas.microsoft.com/office/drawing/2014/main" id="{5474445D-91D8-0A91-E5F6-EFB7107A4AE4}"/>
-            </a:ext>
-          </a:extLst>
-        </p:cNvPr>
-        <p:cNvGrpSpPr/>
-        <p:nvPr/>
-      </p:nvGrpSpPr>
-      <p:grpSpPr>
-        <a:xfrm>
-          <a:off x="0" y="0"/>
-          <a:ext cx="0" cy="0"/>
-          <a:chOff x="0" y="0"/>
-          <a:chExt cx="0" cy="0"/>
-        </a:xfrm>
-      </p:grpSpPr>
       <mc:AlternateContent xmlns:mc="http://schemas.openxmlformats.org/markup-compatibility/2006">
         <mc:Choice xmlns:a14="http://schemas.microsoft.com/office/drawing/2010/main" Requires="a14">
           <p:sp>
             <p:nvSpPr>
-              <p:cNvPr id="5" name="Content Placeholder 3">
+              <p:cNvPr id="3" name="Text Placeholder 2">
                 <a:extLst>
                   <a:ext uri="{FF2B5EF4-FFF2-40B4-BE49-F238E27FC236}">
-                    <a16:creationId xmlns:a16="http://schemas.microsoft.com/office/drawing/2014/main" id="{E81B0F1B-178E-A3B4-B3D2-DD0E379F8F84}"/>
+                    <a16:creationId xmlns:a16="http://schemas.microsoft.com/office/drawing/2014/main" id="{063C74B7-C656-C241-21CB-F1DEC9FF912D}"/>
                   </a:ext>
                 </a:extLst>
               </p:cNvPr>
@@ -24079,19 +27060,12 @@
                 <a:spLocks noGrp="1"/>
               </p:cNvSpPr>
               <p:nvPr>
-                <p:ph sz="half" idx="2"/>
+                <p:ph type="body" idx="1"/>
               </p:nvPr>
             </p:nvSpPr>
-            <p:spPr>
-              <a:xfrm>
-                <a:off x="237905" y="1009832"/>
-                <a:ext cx="8400770" cy="3553541"/>
-              </a:xfrm>
-            </p:spPr>
+            <p:spPr/>
             <p:txBody>
-              <a:bodyPr>
-                <a:normAutofit/>
-              </a:bodyPr>
+              <a:bodyPr/>
               <a:lstStyle/>
               <a:p>
                 <a:r>
@@ -24113,7 +27087,7 @@
                       <m:t>=</m:t>
                     </m:r>
                     <m:r>
-                      <a:rPr lang="en-US">
+                      <a:rPr lang="en-US" i="1">
                         <a:latin typeface="Cambria Math" panose="02040503050406030204" pitchFamily="18" charset="0"/>
                       </a:rPr>
                       <m:t>1000</m:t>
@@ -24139,7 +27113,7 @@
                       <m:t>=</m:t>
                     </m:r>
                     <m:r>
-                      <a:rPr lang="en-US">
+                      <a:rPr lang="en-US" i="1">
                         <a:latin typeface="Cambria Math" panose="02040503050406030204" pitchFamily="18" charset="0"/>
                       </a:rPr>
                       <m:t>1</m:t>
@@ -24150,11 +27124,14 @@
                   <a:rPr lang="en-US" dirty="0"/>
                   <a:t>Mbps → transmission delay per link</a:t>
                 </a:r>
-                <a:br>
-                  <a:rPr lang="en-US" dirty="0"/>
-                </a:br>
                 <a14:m>
                   <m:oMath xmlns:m="http://schemas.openxmlformats.org/officeDocument/2006/math">
+                    <m:r>
+                      <a:rPr lang="en-US">
+                        <a:latin typeface="Cambria Math" panose="02040503050406030204" pitchFamily="18" charset="0"/>
+                      </a:rPr>
+                      <m:t> </m:t>
+                    </m:r>
                     <m:sSub>
                       <m:sSubPr>
                         <m:ctrlPr>
@@ -24211,7 +27188,7 @@
                       <m:t>=</m:t>
                     </m:r>
                     <m:r>
-                      <a:rPr lang="ar-AE">
+                      <a:rPr lang="ar-AE" i="1">
                         <a:latin typeface="Cambria Math" panose="02040503050406030204" pitchFamily="18" charset="0"/>
                       </a:rPr>
                       <m:t>1000</m:t>
@@ -24223,7 +27200,7 @@
                       <m:t>/</m:t>
                     </m:r>
                     <m:r>
-                      <a:rPr lang="ar-AE">
+                      <a:rPr lang="ar-AE" i="1">
                         <a:latin typeface="Cambria Math" panose="02040503050406030204" pitchFamily="18" charset="0"/>
                       </a:rPr>
                       <m:t>1</m:t>
@@ -24235,7 +27212,7 @@
                       <m:t>,</m:t>
                     </m:r>
                     <m:r>
-                      <a:rPr lang="ar-AE">
+                      <a:rPr lang="ar-AE" i="1">
                         <a:latin typeface="Cambria Math" panose="02040503050406030204" pitchFamily="18" charset="0"/>
                       </a:rPr>
                       <m:t>000</m:t>
@@ -24247,7 +27224,7 @@
                       <m:t>,</m:t>
                     </m:r>
                     <m:r>
-                      <a:rPr lang="ar-AE">
+                      <a:rPr lang="ar-AE" i="1">
                         <a:latin typeface="Cambria Math" panose="02040503050406030204" pitchFamily="18" charset="0"/>
                       </a:rPr>
                       <m:t>000</m:t>
@@ -24259,7 +27236,7 @@
                       <m:t>=</m:t>
                     </m:r>
                     <m:r>
-                      <a:rPr lang="ar-AE">
+                      <a:rPr lang="ar-AE" i="1">
                         <a:latin typeface="Cambria Math" panose="02040503050406030204" pitchFamily="18" charset="0"/>
                       </a:rPr>
                       <m:t>0</m:t>
@@ -24271,7 +27248,7 @@
                       <m:t>.</m:t>
                     </m:r>
                     <m:r>
-                      <a:rPr lang="ar-AE">
+                      <a:rPr lang="ar-AE" i="1">
                         <a:latin typeface="Cambria Math" panose="02040503050406030204" pitchFamily="18" charset="0"/>
                       </a:rPr>
                       <m:t>001</m:t>
@@ -24280,34 +27257,58 @@
                 </a14:m>
                 <a:r>
                   <a:rPr lang="en-US" dirty="0"/>
-                  <a:t>s = </a:t>
+                  <a:t>s = 1ms.</a:t>
                 </a:r>
-                <a:r>
-                  <a:rPr lang="en-US" b="1" dirty="0"/>
-                  <a:t>1 </a:t>
-                </a:r>
-                <a:r>
-                  <a:rPr lang="en-US" b="1" dirty="0" err="1"/>
-                  <a:t>ms</a:t>
-                </a:r>
-                <a:r>
-                  <a:rPr lang="en-US" dirty="0" err="1"/>
-                  <a:t>.</a:t>
-                </a:r>
-                <a:endParaRPr lang="en-US" dirty="0"/>
               </a:p>
               <a:p>
                 <a:r>
                   <a:rPr lang="en-US" dirty="0"/>
-                  <a:t>Propagation delay per link = </a:t>
+                  <a:t>Propagation delay per link </a:t>
                 </a:r>
+                <a14:m>
+                  <m:oMath xmlns:m="http://schemas.openxmlformats.org/officeDocument/2006/math">
+                    <m:sSub>
+                      <m:sSubPr>
+                        <m:ctrlPr>
+                          <a:rPr lang="ar-AE" i="1">
+                            <a:latin typeface="Cambria Math" panose="02040503050406030204" pitchFamily="18" charset="0"/>
+                          </a:rPr>
+                        </m:ctrlPr>
+                      </m:sSubPr>
+                      <m:e>
+                        <m:r>
+                          <a:rPr lang="ar-AE" i="1">
+                            <a:latin typeface="Cambria Math" panose="02040503050406030204" pitchFamily="18" charset="0"/>
+                          </a:rPr>
+                          <m:t>𝑡</m:t>
+                        </m:r>
+                      </m:e>
+                      <m:sub>
+                        <m:r>
+                          <a:rPr lang="ar-AE" i="1">
+                            <a:latin typeface="Cambria Math" panose="02040503050406030204" pitchFamily="18" charset="0"/>
+                          </a:rPr>
+                          <m:t>𝑝𝑟𝑜𝑝</m:t>
+                        </m:r>
+                      </m:sub>
+                    </m:sSub>
+                    <m:r>
+                      <a:rPr lang="ar-AE">
+                        <a:latin typeface="Cambria Math" panose="02040503050406030204" pitchFamily="18" charset="0"/>
+                      </a:rPr>
+                      <m:t>=</m:t>
+                    </m:r>
+                    <m:r>
+                      <a:rPr lang="ar-AE" i="1">
+                        <a:latin typeface="Cambria Math" panose="02040503050406030204" pitchFamily="18" charset="0"/>
+                      </a:rPr>
+                      <m:t> </m:t>
+                    </m:r>
+                  </m:oMath>
+                </a14:m>
                 <a:r>
-                  <a:rPr lang="en-US" b="1" dirty="0"/>
-                  <a:t>1 </a:t>
-                </a:r>
-                <a:r>
-                  <a:rPr lang="en-US" b="1" dirty="0" err="1"/>
-                  <a:t>ms</a:t>
+                  <a:rPr lang="en-US" dirty="0"/>
+                  <a:t>1ms</a:t>
                 </a:r>
                 <a:r>
                   <a:rPr lang="en-US" dirty="0" err="1"/>
@@ -24385,7 +27386,7 @@
                       <m:t>=</m:t>
                     </m:r>
                     <m:r>
-                      <a:rPr lang="ar-AE">
+                      <a:rPr lang="ar-AE" i="1">
                         <a:latin typeface="Cambria Math" panose="02040503050406030204" pitchFamily="18" charset="0"/>
                       </a:rPr>
                       <m:t>1</m:t>
@@ -24397,7 +27398,7 @@
                       <m:t>+</m:t>
                     </m:r>
                     <m:r>
-                      <a:rPr lang="ar-AE">
+                      <a:rPr lang="ar-AE" i="1">
                         <a:latin typeface="Cambria Math" panose="02040503050406030204" pitchFamily="18" charset="0"/>
                       </a:rPr>
                       <m:t>1</m:t>
@@ -24409,7 +27410,7 @@
                       <m:t>=</m:t>
                     </m:r>
                     <m:r>
-                      <a:rPr lang="ar-AE">
+                      <a:rPr lang="ar-AE" i="1">
                         <a:latin typeface="Cambria Math" panose="02040503050406030204" pitchFamily="18" charset="0"/>
                       </a:rPr>
                       <m:t>2</m:t>
@@ -24430,7 +27431,7 @@
                 <a14:m>
                   <m:oMath xmlns:m="http://schemas.openxmlformats.org/officeDocument/2006/math">
                     <m:r>
-                      <a:rPr lang="en-US">
+                      <a:rPr lang="en-US" i="1">
                         <a:latin typeface="Cambria Math" panose="02040503050406030204" pitchFamily="18" charset="0"/>
                       </a:rPr>
                       <m:t>3</m:t>
@@ -24442,7 +27443,7 @@
                       <m:t>×</m:t>
                     </m:r>
                     <m:r>
-                      <a:rPr lang="en-US">
+                      <a:rPr lang="en-US" i="1">
                         <a:latin typeface="Cambria Math" panose="02040503050406030204" pitchFamily="18" charset="0"/>
                       </a:rPr>
                       <m:t>2</m:t>
@@ -24455,24 +27456,8 @@
                 </a:r>
                 <a:r>
                   <a:rPr lang="en-US" dirty="0"/>
-                  <a:t> = </a:t>
+                  <a:t> = 6ms.</a:t>
                 </a:r>
-                <a:r>
-                  <a:rPr lang="en-US" b="1" dirty="0"/>
-                  <a:t>6 </a:t>
-                </a:r>
-                <a:r>
-                  <a:rPr lang="en-US" b="1" dirty="0" err="1"/>
-                  <a:t>ms</a:t>
-                </a:r>
-                <a:r>
-                  <a:rPr lang="en-US" dirty="0" err="1"/>
-                  <a:t>.</a:t>
-                </a:r>
-                <a:endParaRPr lang="en-US" dirty="0"/>
-              </a:p>
-              <a:p>
-                <a:endParaRPr lang="en-US" dirty="0"/>
               </a:p>
             </p:txBody>
           </p:sp>
@@ -24480,10 +27465,10 @@
         <mc:Fallback>
           <p:sp>
             <p:nvSpPr>
-              <p:cNvPr id="5" name="Content Placeholder 3">
+              <p:cNvPr id="3" name="Text Placeholder 2">
                 <a:extLst>
                   <a:ext uri="{FF2B5EF4-FFF2-40B4-BE49-F238E27FC236}">
-                    <a16:creationId xmlns:a16="http://schemas.microsoft.com/office/drawing/2014/main" id="{E81B0F1B-178E-A3B4-B3D2-DD0E379F8F84}"/>
+                    <a16:creationId xmlns:a16="http://schemas.microsoft.com/office/drawing/2014/main" id="{063C74B7-C656-C241-21CB-F1DEC9FF912D}"/>
                   </a:ext>
                 </a:extLst>
               </p:cNvPr>
@@ -24491,14 +27476,10 @@
                 <a:spLocks noGrp="1" noRot="1" noChangeAspect="1" noMove="1" noResize="1" noEditPoints="1" noAdjustHandles="1" noChangeArrowheads="1" noChangeShapeType="1" noTextEdit="1"/>
               </p:cNvSpPr>
               <p:nvPr>
-                <p:ph sz="half" idx="2"/>
+                <p:ph type="body" idx="1"/>
               </p:nvPr>
             </p:nvSpPr>
             <p:spPr>
-              <a:xfrm>
-                <a:off x="237905" y="1009832"/>
-                <a:ext cx="8400770" cy="3553541"/>
-              </a:xfrm>
               <a:blipFill>
                 <a:blip r:embed="rId3"/>
                 <a:stretch>
@@ -24521,45 +27502,10 @@
           </p:sp>
         </mc:Fallback>
       </mc:AlternateContent>
-      <p:sp>
-        <p:nvSpPr>
-          <p:cNvPr id="8" name="Title 1">
-            <a:extLst>
-              <a:ext uri="{FF2B5EF4-FFF2-40B4-BE49-F238E27FC236}">
-                <a16:creationId xmlns:a16="http://schemas.microsoft.com/office/drawing/2014/main" id="{99A64FE7-8119-8F18-0BDB-51A11BC03AA0}"/>
-              </a:ext>
-            </a:extLst>
-          </p:cNvPr>
-          <p:cNvSpPr>
-            <a:spLocks noGrp="1"/>
-          </p:cNvSpPr>
-          <p:nvPr>
-            <p:ph type="title"/>
-          </p:nvPr>
-        </p:nvSpPr>
-        <p:spPr>
-          <a:xfrm>
-            <a:off x="505325" y="338866"/>
-            <a:ext cx="4705029" cy="670967"/>
-          </a:xfrm>
-        </p:spPr>
-        <p:txBody>
-          <a:bodyPr>
-            <a:normAutofit fontScale="90000"/>
-          </a:bodyPr>
-          <a:lstStyle/>
-          <a:p>
-            <a:r>
-              <a:rPr lang="en-US" dirty="0"/>
-              <a:t>Q1 End-­to­‐end delay ANS </a:t>
-            </a:r>
-          </a:p>
-        </p:txBody>
-      </p:sp>
     </p:spTree>
     <p:extLst>
       <p:ext uri="{BB962C8B-B14F-4D97-AF65-F5344CB8AC3E}">
-        <p14:creationId xmlns:p14="http://schemas.microsoft.com/office/powerpoint/2010/main" val="1519989677"/>
+        <p14:creationId xmlns:p14="http://schemas.microsoft.com/office/powerpoint/2010/main" val="3467535441"/>
       </p:ext>
     </p:extLst>
   </p:cSld>
@@ -24591,7 +27537,7 @@
           <p:cNvPr id="2" name="Title 1">
             <a:extLst>
               <a:ext uri="{FF2B5EF4-FFF2-40B4-BE49-F238E27FC236}">
-                <a16:creationId xmlns:a16="http://schemas.microsoft.com/office/drawing/2014/main" id="{897F22ED-37E6-4035-812B-1E8BC9C40AD6}"/>
+                <a16:creationId xmlns:a16="http://schemas.microsoft.com/office/drawing/2014/main" id="{EB1D09C4-5A46-5A12-632F-94F7DD6A4680}"/>
               </a:ext>
             </a:extLst>
           </p:cNvPr>
@@ -24602,31 +27548,24 @@
             <p:ph type="title"/>
           </p:nvPr>
         </p:nvSpPr>
-        <p:spPr>
-          <a:xfrm>
-            <a:off x="505326" y="338866"/>
-            <a:ext cx="4247148" cy="670967"/>
-          </a:xfrm>
-        </p:spPr>
+        <p:spPr/>
         <p:txBody>
-          <a:bodyPr>
-            <a:normAutofit fontScale="90000"/>
-          </a:bodyPr>
+          <a:bodyPr/>
           <a:lstStyle/>
           <a:p>
             <a:r>
               <a:rPr lang="en-US" dirty="0"/>
-              <a:t>Q2 End-­to­‐end delay </a:t>
+              <a:t>Q2 End-­to­‐end delay</a:t>
             </a:r>
           </a:p>
         </p:txBody>
       </p:sp>
       <p:sp>
         <p:nvSpPr>
-          <p:cNvPr id="3" name="Content Placeholder 2">
+          <p:cNvPr id="3" name="Text Placeholder 2">
             <a:extLst>
               <a:ext uri="{FF2B5EF4-FFF2-40B4-BE49-F238E27FC236}">
-                <a16:creationId xmlns:a16="http://schemas.microsoft.com/office/drawing/2014/main" id="{F2B8676C-9679-44F2-BCB3-BE98A23F06B6}"/>
+                <a16:creationId xmlns:a16="http://schemas.microsoft.com/office/drawing/2014/main" id="{F556D2C4-EF61-AAE9-7C6B-5EA12DEB7D4D}"/>
               </a:ext>
             </a:extLst>
           </p:cNvPr>
@@ -24634,13 +27573,13 @@
             <a:spLocks noGrp="1"/>
           </p:cNvSpPr>
           <p:nvPr>
-            <p:ph sz="half" idx="1"/>
+            <p:ph type="body" idx="1"/>
           </p:nvPr>
         </p:nvSpPr>
         <p:spPr>
           <a:xfrm>
-            <a:off x="0" y="1009833"/>
-            <a:ext cx="4514850" cy="4133667"/>
+            <a:off x="107050" y="306449"/>
+            <a:ext cx="4766875" cy="4627859"/>
           </a:xfrm>
         </p:spPr>
         <p:txBody>
@@ -24649,22 +27588,25 @@
           </a:bodyPr>
           <a:lstStyle/>
           <a:p>
+            <a:pPr marL="114300" indent="0">
+              <a:buNone/>
+            </a:pPr>
             <a:r>
-              <a:rPr lang="en-US" sz="1600" dirty="0"/>
-              <a:t>Consider the scenario shown in Figure 1: a server is connected to a router by a 100Mbps link with a 50ms propagation delay. This router is connected to two other routers, each over a 50Mbps link with a 200ms propagation delay. A 1Gbps link connects each host to each of these routers with 0 propagation delay. All packets in the network are 20,000 bits long.</a:t>
+              <a:rPr lang="en-US" dirty="0"/>
+              <a:t>Consider the scenario shown in Figure 1: a server is connected to a router by a 100Mbps link with a 50ms propagation delay. This router is connected to two other routers, each over a 50Mbps link with a 200ms propagation delay. A 1Gbps link connects each client to each of these routers with 0 propagation delay. (Ignore the cache.) All packets in the network are 20,000 bits long.</a:t>
             </a:r>
           </a:p>
           <a:p>
             <a:r>
-              <a:rPr lang="en-US" sz="1600" dirty="0"/>
+              <a:rPr lang="en-US" dirty="0"/>
               <a:t>What is the end-­to­‐end delay (in </a:t>
             </a:r>
             <a:r>
-              <a:rPr lang="en-US" sz="1600" dirty="0" err="1"/>
+              <a:rPr lang="en-US" dirty="0" err="1"/>
               <a:t>ms</a:t>
             </a:r>
             <a:r>
-              <a:rPr lang="en-US" sz="1600" dirty="0"/>
+              <a:rPr lang="en-US" dirty="0"/>
               <a:t>) from when a packet is transmitted by the server to when it is received by the client? Assume there’s no queuing delay at the routers. </a:t>
             </a:r>
           </a:p>
@@ -24674,10 +27616,10 @@
         <mc:Choice xmlns:p14="http://schemas.microsoft.com/office/powerpoint/2010/main" Requires="p14">
           <p:contentPart p14:bwMode="auto" r:id="rId2">
             <p14:nvContentPartPr>
-              <p14:cNvPr id="6" name="Ink 5">
+              <p14:cNvPr id="4" name="Ink 3">
                 <a:extLst>
                   <a:ext uri="{FF2B5EF4-FFF2-40B4-BE49-F238E27FC236}">
-                    <a16:creationId xmlns:a16="http://schemas.microsoft.com/office/drawing/2014/main" id="{96D8F998-432C-4A41-BBEF-67AB4A478786}"/>
+                    <a16:creationId xmlns:a16="http://schemas.microsoft.com/office/drawing/2014/main" id="{454AEAF8-F473-455B-BC8D-93520F3D869D}"/>
                   </a:ext>
                 </a:extLst>
               </p14:cNvPr>
@@ -24685,7 +27627,7 @@
               <p14:nvPr/>
             </p14:nvContentPartPr>
             <p14:xfrm>
-              <a:off x="4162524" y="468673"/>
+              <a:off x="4431136" y="568316"/>
               <a:ext cx="270" cy="270"/>
             </p14:xfrm>
           </p:contentPart>
@@ -24693,10 +27635,10 @@
         <mc:Fallback>
           <p:pic>
             <p:nvPicPr>
-              <p:cNvPr id="6" name="Ink 5">
+              <p:cNvPr id="4" name="Ink 3">
                 <a:extLst>
                   <a:ext uri="{FF2B5EF4-FFF2-40B4-BE49-F238E27FC236}">
-                    <a16:creationId xmlns:a16="http://schemas.microsoft.com/office/drawing/2014/main" id="{96D8F998-432C-4A41-BBEF-67AB4A478786}"/>
+                    <a16:creationId xmlns:a16="http://schemas.microsoft.com/office/drawing/2014/main" id="{454AEAF8-F473-455B-BC8D-93520F3D869D}"/>
                   </a:ext>
                 </a:extLst>
               </p:cNvPr>
@@ -24711,7 +27653,7 @@
             </p:blipFill>
             <p:spPr>
               <a:xfrm>
-                <a:off x="4155774" y="461923"/>
+                <a:off x="4424386" y="561566"/>
                 <a:ext cx="13500" cy="13500"/>
               </a:xfrm>
               <a:prstGeom prst="rect">
@@ -24721,210 +27663,12 @@
           </p:pic>
         </mc:Fallback>
       </mc:AlternateContent>
-      <mc:AlternateContent xmlns:mc="http://schemas.openxmlformats.org/markup-compatibility/2006">
-        <mc:Choice xmlns:p14="http://schemas.microsoft.com/office/powerpoint/2010/main" Requires="p14">
-          <p:contentPart p14:bwMode="auto" r:id="rId4">
-            <p14:nvContentPartPr>
-              <p14:cNvPr id="7" name="Ink 6">
-                <a:extLst>
-                  <a:ext uri="{FF2B5EF4-FFF2-40B4-BE49-F238E27FC236}">
-                    <a16:creationId xmlns:a16="http://schemas.microsoft.com/office/drawing/2014/main" id="{640A62D0-82F8-4CD4-9F6F-1195B827C41B}"/>
-                  </a:ext>
-                </a:extLst>
-              </p14:cNvPr>
-              <p14:cNvContentPartPr/>
-              <p14:nvPr/>
-            </p14:nvContentPartPr>
-            <p14:xfrm>
-              <a:off x="4355304" y="576943"/>
-              <a:ext cx="270" cy="270"/>
-            </p14:xfrm>
-          </p:contentPart>
-        </mc:Choice>
-        <mc:Fallback>
-          <p:pic>
-            <p:nvPicPr>
-              <p:cNvPr id="7" name="Ink 6">
-                <a:extLst>
-                  <a:ext uri="{FF2B5EF4-FFF2-40B4-BE49-F238E27FC236}">
-                    <a16:creationId xmlns:a16="http://schemas.microsoft.com/office/drawing/2014/main" id="{640A62D0-82F8-4CD4-9F6F-1195B827C41B}"/>
-                  </a:ext>
-                </a:extLst>
-              </p:cNvPr>
-              <p:cNvPicPr/>
-              <p:nvPr/>
-            </p:nvPicPr>
-            <p:blipFill>
-              <a:blip r:embed="rId3"/>
-              <a:stretch>
-                <a:fillRect/>
-              </a:stretch>
-            </p:blipFill>
-            <p:spPr>
-              <a:xfrm>
-                <a:off x="4348554" y="570193"/>
-                <a:ext cx="13500" cy="13500"/>
-              </a:xfrm>
-              <a:prstGeom prst="rect">
-                <a:avLst/>
-              </a:prstGeom>
-            </p:spPr>
-          </p:pic>
-        </mc:Fallback>
-      </mc:AlternateContent>
-      <mc:AlternateContent xmlns:mc="http://schemas.openxmlformats.org/markup-compatibility/2006">
-        <mc:Choice xmlns:p14="http://schemas.microsoft.com/office/powerpoint/2010/main" Requires="p14">
-          <p:contentPart p14:bwMode="auto" r:id="rId5">
-            <p14:nvContentPartPr>
-              <p14:cNvPr id="8" name="Ink 7">
-                <a:extLst>
-                  <a:ext uri="{FF2B5EF4-FFF2-40B4-BE49-F238E27FC236}">
-                    <a16:creationId xmlns:a16="http://schemas.microsoft.com/office/drawing/2014/main" id="{DE675B20-89E1-4D27-933B-98606F59FBD5}"/>
-                  </a:ext>
-                </a:extLst>
-              </p14:cNvPr>
-              <p14:cNvContentPartPr/>
-              <p14:nvPr/>
-            </p14:nvContentPartPr>
-            <p14:xfrm>
-              <a:off x="2394024" y="1900753"/>
-              <a:ext cx="270" cy="270"/>
-            </p14:xfrm>
-          </p:contentPart>
-        </mc:Choice>
-        <mc:Fallback>
-          <p:pic>
-            <p:nvPicPr>
-              <p:cNvPr id="8" name="Ink 7">
-                <a:extLst>
-                  <a:ext uri="{FF2B5EF4-FFF2-40B4-BE49-F238E27FC236}">
-                    <a16:creationId xmlns:a16="http://schemas.microsoft.com/office/drawing/2014/main" id="{DE675B20-89E1-4D27-933B-98606F59FBD5}"/>
-                  </a:ext>
-                </a:extLst>
-              </p:cNvPr>
-              <p:cNvPicPr/>
-              <p:nvPr/>
-            </p:nvPicPr>
-            <p:blipFill>
-              <a:blip r:embed="rId3"/>
-              <a:stretch>
-                <a:fillRect/>
-              </a:stretch>
-            </p:blipFill>
-            <p:spPr>
-              <a:xfrm>
-                <a:off x="2387274" y="1894003"/>
-                <a:ext cx="13500" cy="13500"/>
-              </a:xfrm>
-              <a:prstGeom prst="rect">
-                <a:avLst/>
-              </a:prstGeom>
-            </p:spPr>
-          </p:pic>
-        </mc:Fallback>
-      </mc:AlternateContent>
-      <mc:AlternateContent xmlns:mc="http://schemas.openxmlformats.org/markup-compatibility/2006">
-        <mc:Choice xmlns:p14="http://schemas.microsoft.com/office/powerpoint/2010/main" Requires="p14">
-          <p:contentPart p14:bwMode="auto" r:id="rId6">
-            <p14:nvContentPartPr>
-              <p14:cNvPr id="9" name="Ink 8">
-                <a:extLst>
-                  <a:ext uri="{FF2B5EF4-FFF2-40B4-BE49-F238E27FC236}">
-                    <a16:creationId xmlns:a16="http://schemas.microsoft.com/office/drawing/2014/main" id="{C0089B61-CEF3-4A8A-B3DC-36179B12D810}"/>
-                  </a:ext>
-                </a:extLst>
-              </p14:cNvPr>
-              <p14:cNvContentPartPr/>
-              <p14:nvPr/>
-            </p14:nvContentPartPr>
-            <p14:xfrm>
-              <a:off x="1142574" y="1551373"/>
-              <a:ext cx="270" cy="270"/>
-            </p14:xfrm>
-          </p:contentPart>
-        </mc:Choice>
-        <mc:Fallback>
-          <p:pic>
-            <p:nvPicPr>
-              <p:cNvPr id="9" name="Ink 8">
-                <a:extLst>
-                  <a:ext uri="{FF2B5EF4-FFF2-40B4-BE49-F238E27FC236}">
-                    <a16:creationId xmlns:a16="http://schemas.microsoft.com/office/drawing/2014/main" id="{C0089B61-CEF3-4A8A-B3DC-36179B12D810}"/>
-                  </a:ext>
-                </a:extLst>
-              </p:cNvPr>
-              <p:cNvPicPr/>
-              <p:nvPr/>
-            </p:nvPicPr>
-            <p:blipFill>
-              <a:blip r:embed="rId3"/>
-              <a:stretch>
-                <a:fillRect/>
-              </a:stretch>
-            </p:blipFill>
-            <p:spPr>
-              <a:xfrm>
-                <a:off x="1135824" y="1544623"/>
-                <a:ext cx="13500" cy="13500"/>
-              </a:xfrm>
-              <a:prstGeom prst="rect">
-                <a:avLst/>
-              </a:prstGeom>
-            </p:spPr>
-          </p:pic>
-        </mc:Fallback>
-      </mc:AlternateContent>
-      <p:sp>
-        <p:nvSpPr>
-          <p:cNvPr id="12" name="AutoShape 4">
+      <p:pic>
+        <p:nvPicPr>
+          <p:cNvPr id="5" name="Picture 4">
             <a:extLst>
               <a:ext uri="{FF2B5EF4-FFF2-40B4-BE49-F238E27FC236}">
-                <a16:creationId xmlns:a16="http://schemas.microsoft.com/office/drawing/2014/main" id="{6B92C2C3-DB8F-435E-88E5-BDB35A55DC5D}"/>
-              </a:ext>
-            </a:extLst>
-          </p:cNvPr>
-          <p:cNvSpPr>
-            <a:spLocks noChangeAspect="1" noChangeArrowheads="1"/>
-          </p:cNvSpPr>
-          <p:nvPr/>
-        </p:nvSpPr>
-        <p:spPr bwMode="auto">
-          <a:xfrm>
-            <a:off x="3239691" y="1325166"/>
-            <a:ext cx="2664619" cy="2493169"/>
-          </a:xfrm>
-          <a:prstGeom prst="rect">
-            <a:avLst/>
-          </a:prstGeom>
-          <a:noFill/>
-          <a:extLst>
-            <a:ext uri="{909E8E84-426E-40DD-AFC4-6F175D3DCCD1}">
-              <a14:hiddenFill xmlns:a14="http://schemas.microsoft.com/office/drawing/2010/main">
-                <a:solidFill>
-                  <a:srgbClr val="FFFFFF"/>
-                </a:solidFill>
-              </a14:hiddenFill>
-            </a:ext>
-          </a:extLst>
-        </p:spPr>
-        <p:txBody>
-          <a:bodyPr vert="horz" wrap="square" lIns="68580" tIns="34290" rIns="68580" bIns="34290" numCol="1" anchor="t" anchorCtr="0" compatLnSpc="1">
-            <a:prstTxWarp prst="textNoShape">
-              <a:avLst/>
-            </a:prstTxWarp>
-          </a:bodyPr>
-          <a:lstStyle/>
-          <a:p>
-            <a:endParaRPr lang="en-US" sz="1050"/>
-          </a:p>
-        </p:txBody>
-      </p:sp>
-      <p:pic>
-        <p:nvPicPr>
-          <p:cNvPr id="16" name="Picture 15">
-            <a:extLst>
-              <a:ext uri="{FF2B5EF4-FFF2-40B4-BE49-F238E27FC236}">
-                <a16:creationId xmlns:a16="http://schemas.microsoft.com/office/drawing/2014/main" id="{AC1F5761-15A8-42FC-ACC1-15EF84C22131}"/>
+                <a16:creationId xmlns:a16="http://schemas.microsoft.com/office/drawing/2014/main" id="{93081B88-98BE-0B42-A066-2BC3243648F2}"/>
               </a:ext>
             </a:extLst>
           </p:cNvPr>
@@ -24934,14 +27678,14 @@
           <p:nvPr/>
         </p:nvPicPr>
         <p:blipFill>
-          <a:blip r:embed="rId7"/>
+          <a:blip r:embed="rId4"/>
           <a:stretch>
             <a:fillRect/>
           </a:stretch>
         </p:blipFill>
         <p:spPr>
           <a:xfrm>
-            <a:off x="4737524" y="674349"/>
+            <a:off x="4813356" y="665722"/>
             <a:ext cx="4223594" cy="3954819"/>
           </a:xfrm>
           <a:prstGeom prst="rect">
@@ -24952,7 +27696,7 @@
     </p:spTree>
     <p:extLst>
       <p:ext uri="{BB962C8B-B14F-4D97-AF65-F5344CB8AC3E}">
-        <p14:creationId xmlns:p14="http://schemas.microsoft.com/office/powerpoint/2010/main" val="1533311895"/>
+        <p14:creationId xmlns:p14="http://schemas.microsoft.com/office/powerpoint/2010/main" val="2452000653"/>
       </p:ext>
     </p:extLst>
   </p:cSld>
@@ -24979,14 +27723,42 @@
           <a:chExt cx="0" cy="0"/>
         </a:xfrm>
       </p:grpSpPr>
+      <p:sp>
+        <p:nvSpPr>
+          <p:cNvPr id="2" name="Title 1">
+            <a:extLst>
+              <a:ext uri="{FF2B5EF4-FFF2-40B4-BE49-F238E27FC236}">
+                <a16:creationId xmlns:a16="http://schemas.microsoft.com/office/drawing/2014/main" id="{1CF72EB5-4F43-2195-7F16-4D7C32E0D553}"/>
+              </a:ext>
+            </a:extLst>
+          </p:cNvPr>
+          <p:cNvSpPr>
+            <a:spLocks noGrp="1"/>
+          </p:cNvSpPr>
+          <p:nvPr>
+            <p:ph type="title"/>
+          </p:nvPr>
+        </p:nvSpPr>
+        <p:spPr/>
+        <p:txBody>
+          <a:bodyPr/>
+          <a:lstStyle/>
+          <a:p>
+            <a:r>
+              <a:rPr lang="en-US" dirty="0"/>
+              <a:t>Q2 End-­to­‐end delay ANS</a:t>
+            </a:r>
+          </a:p>
+        </p:txBody>
+      </p:sp>
       <mc:AlternateContent xmlns:mc="http://schemas.openxmlformats.org/markup-compatibility/2006">
         <mc:Choice xmlns:a14="http://schemas.microsoft.com/office/drawing/2010/main" Requires="a14">
           <p:sp>
             <p:nvSpPr>
-              <p:cNvPr id="3" name="Content Placeholder 2">
+              <p:cNvPr id="3" name="Text Placeholder 2">
                 <a:extLst>
                   <a:ext uri="{FF2B5EF4-FFF2-40B4-BE49-F238E27FC236}">
-                    <a16:creationId xmlns:a16="http://schemas.microsoft.com/office/drawing/2014/main" id="{AAF29413-F7B6-95BF-4926-E80D77CE1F99}"/>
+                    <a16:creationId xmlns:a16="http://schemas.microsoft.com/office/drawing/2014/main" id="{FF8F2B28-F620-3212-5941-AABA6E623EC4}"/>
                   </a:ext>
                 </a:extLst>
               </p:cNvPr>
@@ -24994,17 +27766,14 @@
                 <a:spLocks noGrp="1"/>
               </p:cNvSpPr>
               <p:nvPr>
-                <p:ph sz="half" idx="1"/>
+                <p:ph type="body" idx="1"/>
               </p:nvPr>
             </p:nvSpPr>
-            <p:spPr>
-              <a:xfrm>
-                <a:off x="362309" y="873424"/>
-                <a:ext cx="8117457" cy="4270076"/>
-              </a:xfrm>
-            </p:spPr>
+            <p:spPr/>
             <p:txBody>
-              <a:bodyPr/>
+              <a:bodyPr>
+                <a:normAutofit/>
+              </a:bodyPr>
               <a:lstStyle/>
               <a:p>
                 <a:pPr>
@@ -25013,7 +27782,7 @@
                   </a:lnSpc>
                 </a:pPr>
                 <a:r>
-                  <a:rPr lang="en-US" sz="1200" b="1" dirty="0"/>
+                  <a:rPr lang="en-US" b="1" dirty="0"/>
                   <a:t>Transmission delays:</a:t>
                 </a:r>
               </a:p>
@@ -25024,89 +27793,46 @@
                   </a:lnSpc>
                 </a:pPr>
                 <a:r>
-                  <a:rPr lang="en-US" sz="1200" b="1" dirty="0"/>
+                  <a:rPr lang="en-US" b="1" dirty="0"/>
                   <a:t>100 Mbps link</a:t>
                 </a:r>
                 <a:r>
-                  <a:rPr lang="en-US" sz="1200" dirty="0"/>
+                  <a:rPr lang="en-US" dirty="0"/>
                   <a:t>:</a:t>
                 </a:r>
-                <a:br>
-                  <a:rPr lang="en-US" sz="1200" dirty="0"/>
-                </a:br>
                 <a14:m>
                   <m:oMath xmlns:m="http://schemas.openxmlformats.org/officeDocument/2006/math">
                     <m:r>
-                      <a:rPr lang="en-US" sz="1200"/>
-                      <m:t>20</m:t>
+                      <a:rPr lang="en-US" b="0" i="0" smtClean="0">
+                        <a:latin typeface="Cambria Math" panose="02040503050406030204" pitchFamily="18" charset="0"/>
+                      </a:rPr>
+                      <m:t> </m:t>
                     </m:r>
                     <m:r>
-                      <a:rPr lang="en-US" sz="1200"/>
-                      <m:t>,</m:t>
-                    </m:r>
-                    <m:r>
-                      <a:rPr lang="en-US" sz="1200"/>
-                      <m:t>000</m:t>
-                    </m:r>
-                    <m:r>
-                      <a:rPr lang="en-US" sz="1200"/>
-                      <m:t>/</m:t>
-                    </m:r>
-                    <m:r>
-                      <a:rPr lang="en-US" sz="1200"/>
-                      <m:t>100</m:t>
-                    </m:r>
-                    <m:r>
-                      <a:rPr lang="en-US" sz="1200"/>
-                      <m:t>,</m:t>
-                    </m:r>
-                    <m:r>
-                      <a:rPr lang="en-US" sz="1200"/>
-                      <m:t>000</m:t>
-                    </m:r>
-                    <m:r>
-                      <a:rPr lang="en-US" sz="1200"/>
-                      <m:t>,</m:t>
-                    </m:r>
-                    <m:r>
-                      <a:rPr lang="en-US" sz="1200"/>
-                      <m:t>000</m:t>
-                    </m:r>
-                    <m:r>
-                      <a:rPr lang="en-US" sz="1200"/>
-                      <m:t>=</m:t>
-                    </m:r>
-                    <m:r>
-                      <a:rPr lang="en-US" sz="1200"/>
-                      <m:t>0</m:t>
-                    </m:r>
-                    <m:r>
-                      <a:rPr lang="en-US" sz="1200"/>
-                      <m:t>.</m:t>
-                    </m:r>
-                    <m:r>
-                      <a:rPr lang="en-US" sz="1200"/>
-                      <m:t>0002</m:t>
+                      <a:rPr lang="en-US">
+                        <a:latin typeface="Cambria Math" panose="02040503050406030204" pitchFamily="18" charset="0"/>
+                      </a:rPr>
+                      <m:t>20,000/100,000,000=0.0002</m:t>
                     </m:r>
                   </m:oMath>
                 </a14:m>
                 <a:r>
-                  <a:rPr lang="en-US" sz="1200" dirty="0"/>
+                  <a:rPr lang="en-US" dirty="0"/>
                   <a:t>s = </a:t>
                 </a:r>
                 <a:r>
-                  <a:rPr lang="en-US" sz="1200" b="1" dirty="0"/>
+                  <a:rPr lang="en-US" b="1" dirty="0"/>
                   <a:t>200 </a:t>
                 </a:r>
                 <a:r>
-                  <a:rPr lang="el-GR" sz="1200" b="1" dirty="0"/>
+                  <a:rPr lang="el-GR" b="1" dirty="0"/>
                   <a:t>μ</a:t>
                 </a:r>
                 <a:r>
-                  <a:rPr lang="en-US" sz="1200" b="1" dirty="0"/>
+                  <a:rPr lang="en-US" b="1" dirty="0"/>
                   <a:t>s</a:t>
                 </a:r>
-                <a:endParaRPr lang="en-US" sz="1200" dirty="0"/>
+                <a:endParaRPr lang="en-US" dirty="0"/>
               </a:p>
               <a:p>
                 <a:pPr>
@@ -25115,89 +27841,46 @@
                   </a:lnSpc>
                 </a:pPr>
                 <a:r>
-                  <a:rPr lang="en-US" sz="1200" b="1" dirty="0"/>
+                  <a:rPr lang="en-US" b="1" dirty="0"/>
                   <a:t>50 Mbps link</a:t>
                 </a:r>
                 <a:r>
-                  <a:rPr lang="en-US" sz="1200" dirty="0"/>
+                  <a:rPr lang="en-US" dirty="0"/>
                   <a:t>:</a:t>
                 </a:r>
-                <a:br>
-                  <a:rPr lang="en-US" sz="1200" dirty="0"/>
-                </a:br>
                 <a14:m>
                   <m:oMath xmlns:m="http://schemas.openxmlformats.org/officeDocument/2006/math">
                     <m:r>
-                      <a:rPr lang="en-US" sz="1200"/>
-                      <m:t>20</m:t>
+                      <a:rPr lang="en-US" b="0" i="0" smtClean="0">
+                        <a:latin typeface="Cambria Math" panose="02040503050406030204" pitchFamily="18" charset="0"/>
+                      </a:rPr>
+                      <m:t> </m:t>
                     </m:r>
                     <m:r>
-                      <a:rPr lang="en-US" sz="1200"/>
-                      <m:t>,</m:t>
-                    </m:r>
-                    <m:r>
-                      <a:rPr lang="en-US" sz="1200"/>
-                      <m:t>000</m:t>
-                    </m:r>
-                    <m:r>
-                      <a:rPr lang="en-US" sz="1200"/>
-                      <m:t>/</m:t>
-                    </m:r>
-                    <m:r>
-                      <a:rPr lang="en-US" sz="1200"/>
-                      <m:t>50</m:t>
-                    </m:r>
-                    <m:r>
-                      <a:rPr lang="en-US" sz="1200"/>
-                      <m:t>,</m:t>
-                    </m:r>
-                    <m:r>
-                      <a:rPr lang="en-US" sz="1200"/>
-                      <m:t>000</m:t>
-                    </m:r>
-                    <m:r>
-                      <a:rPr lang="en-US" sz="1200"/>
-                      <m:t>,</m:t>
-                    </m:r>
-                    <m:r>
-                      <a:rPr lang="en-US" sz="1200"/>
-                      <m:t>000</m:t>
-                    </m:r>
-                    <m:r>
-                      <a:rPr lang="en-US" sz="1200"/>
-                      <m:t>=</m:t>
-                    </m:r>
-                    <m:r>
-                      <a:rPr lang="en-US" sz="1200"/>
-                      <m:t>0</m:t>
-                    </m:r>
-                    <m:r>
-                      <a:rPr lang="en-US" sz="1200"/>
-                      <m:t>.</m:t>
-                    </m:r>
-                    <m:r>
-                      <a:rPr lang="en-US" sz="1200"/>
-                      <m:t>0004</m:t>
+                      <a:rPr lang="en-US">
+                        <a:latin typeface="Cambria Math" panose="02040503050406030204" pitchFamily="18" charset="0"/>
+                      </a:rPr>
+                      <m:t>20,000/50,000,000=0.0004</m:t>
                     </m:r>
                   </m:oMath>
                 </a14:m>
                 <a:r>
-                  <a:rPr lang="en-US" sz="1200" dirty="0"/>
+                  <a:rPr lang="en-US" dirty="0"/>
                   <a:t>s = </a:t>
                 </a:r>
                 <a:r>
-                  <a:rPr lang="en-US" sz="1200" b="1" dirty="0"/>
+                  <a:rPr lang="en-US" b="1" dirty="0"/>
                   <a:t>400 </a:t>
                 </a:r>
                 <a:r>
-                  <a:rPr lang="el-GR" sz="1200" b="1" dirty="0"/>
+                  <a:rPr lang="el-GR" b="1" dirty="0"/>
                   <a:t>μ</a:t>
                 </a:r>
                 <a:r>
-                  <a:rPr lang="en-US" sz="1200" b="1" dirty="0"/>
+                  <a:rPr lang="en-US" b="1" dirty="0"/>
                   <a:t>s</a:t>
                 </a:r>
-                <a:endParaRPr lang="en-US" sz="1200" dirty="0"/>
+                <a:endParaRPr lang="en-US" dirty="0"/>
               </a:p>
               <a:p>
                 <a:pPr>
@@ -25206,97 +27889,46 @@
                   </a:lnSpc>
                 </a:pPr>
                 <a:r>
-                  <a:rPr lang="en-US" sz="1200" b="1" dirty="0"/>
+                  <a:rPr lang="en-US" b="1" dirty="0"/>
                   <a:t>1 Gbps link</a:t>
                 </a:r>
                 <a:r>
-                  <a:rPr lang="en-US" sz="1200" dirty="0"/>
+                  <a:rPr lang="en-US" dirty="0"/>
                   <a:t>:</a:t>
                 </a:r>
-                <a:br>
-                  <a:rPr lang="en-US" sz="1200" dirty="0"/>
-                </a:br>
                 <a14:m>
                   <m:oMath xmlns:m="http://schemas.openxmlformats.org/officeDocument/2006/math">
                     <m:r>
-                      <a:rPr lang="en-US" sz="1200"/>
-                      <m:t>20</m:t>
+                      <a:rPr lang="en-US" b="0" i="0" smtClean="0">
+                        <a:latin typeface="Cambria Math" panose="02040503050406030204" pitchFamily="18" charset="0"/>
+                      </a:rPr>
+                      <m:t> </m:t>
                     </m:r>
                     <m:r>
-                      <a:rPr lang="en-US" sz="1200"/>
-                      <m:t>,</m:t>
-                    </m:r>
-                    <m:r>
-                      <a:rPr lang="en-US" sz="1200"/>
-                      <m:t>000</m:t>
-                    </m:r>
-                    <m:r>
-                      <a:rPr lang="en-US" sz="1200"/>
-                      <m:t>/</m:t>
-                    </m:r>
-                    <m:r>
-                      <a:rPr lang="en-US" sz="1200"/>
-                      <m:t>1</m:t>
-                    </m:r>
-                    <m:r>
-                      <a:rPr lang="en-US" sz="1200"/>
-                      <m:t>,</m:t>
-                    </m:r>
-                    <m:r>
-                      <a:rPr lang="en-US" sz="1200"/>
-                      <m:t>000</m:t>
-                    </m:r>
-                    <m:r>
-                      <a:rPr lang="en-US" sz="1200"/>
-                      <m:t>,</m:t>
-                    </m:r>
-                    <m:r>
-                      <a:rPr lang="en-US" sz="1200"/>
-                      <m:t>000</m:t>
-                    </m:r>
-                    <m:r>
-                      <a:rPr lang="en-US" sz="1200"/>
-                      <m:t>,</m:t>
-                    </m:r>
-                    <m:r>
-                      <a:rPr lang="en-US" sz="1200"/>
-                      <m:t>000</m:t>
-                    </m:r>
-                    <m:r>
-                      <a:rPr lang="en-US" sz="1200"/>
-                      <m:t>=</m:t>
-                    </m:r>
-                    <m:r>
-                      <a:rPr lang="en-US" sz="1200"/>
-                      <m:t>0</m:t>
-                    </m:r>
-                    <m:r>
-                      <a:rPr lang="en-US" sz="1200"/>
-                      <m:t>.</m:t>
-                    </m:r>
-                    <m:r>
-                      <a:rPr lang="en-US" sz="1200"/>
-                      <m:t>00002</m:t>
+                      <a:rPr lang="en-US">
+                        <a:latin typeface="Cambria Math" panose="02040503050406030204" pitchFamily="18" charset="0"/>
+                      </a:rPr>
+                      <m:t>20,000/1,000,000,000=0.00002</m:t>
                     </m:r>
                   </m:oMath>
                 </a14:m>
                 <a:r>
-                  <a:rPr lang="en-US" sz="1200" dirty="0"/>
+                  <a:rPr lang="en-US" dirty="0"/>
                   <a:t>s = </a:t>
                 </a:r>
                 <a:r>
-                  <a:rPr lang="en-US" sz="1200" b="1" dirty="0"/>
+                  <a:rPr lang="en-US" b="1" dirty="0"/>
                   <a:t>20 </a:t>
                 </a:r>
                 <a:r>
-                  <a:rPr lang="el-GR" sz="1200" b="1" dirty="0"/>
+                  <a:rPr lang="el-GR" b="1" dirty="0"/>
                   <a:t>μ</a:t>
                 </a:r>
                 <a:r>
-                  <a:rPr lang="en-US" sz="1200" b="1" dirty="0"/>
+                  <a:rPr lang="en-US" b="1" dirty="0"/>
                   <a:t>s</a:t>
                 </a:r>
-                <a:endParaRPr lang="en-US" sz="1200" dirty="0"/>
+                <a:endParaRPr lang="en-US" dirty="0"/>
               </a:p>
               <a:p>
                 <a:pPr>
@@ -25305,61 +27937,42 @@
                   </a:lnSpc>
                 </a:pPr>
                 <a:r>
-                  <a:rPr lang="en-US" sz="1200" dirty="0"/>
+                  <a:rPr lang="en-US" dirty="0"/>
                   <a:t>Total transmission delay:</a:t>
                 </a:r>
-                <a:br>
-                  <a:rPr lang="en-US" sz="1200" dirty="0"/>
-                </a:br>
                 <a14:m>
                   <m:oMath xmlns:m="http://schemas.openxmlformats.org/officeDocument/2006/math">
                     <m:r>
-                      <a:rPr lang="en-US" sz="1200"/>
-                      <m:t>200</m:t>
+                      <a:rPr lang="en-US" b="0" i="0" smtClean="0">
+                        <a:latin typeface="Cambria Math" panose="02040503050406030204" pitchFamily="18" charset="0"/>
+                      </a:rPr>
+                      <m:t> </m:t>
                     </m:r>
                     <m:r>
-                      <a:rPr lang="en-US" sz="1200"/>
-                      <m:t>+</m:t>
-                    </m:r>
-                    <m:r>
-                      <a:rPr lang="en-US" sz="1200"/>
-                      <m:t>400</m:t>
-                    </m:r>
-                    <m:r>
-                      <a:rPr lang="en-US" sz="1200"/>
-                      <m:t>+</m:t>
-                    </m:r>
-                    <m:r>
-                      <a:rPr lang="en-US" sz="1200"/>
-                      <m:t>20</m:t>
-                    </m:r>
-                    <m:r>
-                      <a:rPr lang="en-US" sz="1200"/>
-                      <m:t>=</m:t>
-                    </m:r>
-                    <m:r>
-                      <a:rPr lang="en-US" sz="1200"/>
-                      <m:t>620</m:t>
+                      <a:rPr lang="en-US">
+                        <a:latin typeface="Cambria Math" panose="02040503050406030204" pitchFamily="18" charset="0"/>
+                      </a:rPr>
+                      <m:t>200+400+20=620</m:t>
                     </m:r>
                   </m:oMath>
                 </a14:m>
                 <a:r>
-                  <a:rPr lang="el-GR" sz="1200" dirty="0"/>
+                  <a:rPr lang="el-GR" dirty="0"/>
                   <a:t>μ</a:t>
                 </a:r>
                 <a:r>
-                  <a:rPr lang="en-US" sz="1200" dirty="0"/>
+                  <a:rPr lang="en-US" dirty="0"/>
                   <a:t>s = </a:t>
                 </a:r>
                 <a:r>
-                  <a:rPr lang="en-US" sz="1200" b="1" dirty="0"/>
+                  <a:rPr lang="en-US" b="1" dirty="0"/>
                   <a:t>0.62 </a:t>
                 </a:r>
                 <a:r>
-                  <a:rPr lang="en-US" sz="1200" b="1" dirty="0" err="1"/>
+                  <a:rPr lang="en-US" b="1" dirty="0" err="1"/>
                   <a:t>ms</a:t>
                 </a:r>
-                <a:endParaRPr lang="en-US" sz="1200" dirty="0"/>
+                <a:endParaRPr lang="en-US" dirty="0"/>
               </a:p>
               <a:p>
                 <a:pPr>
@@ -25368,7 +27981,7 @@
                   </a:lnSpc>
                 </a:pPr>
                 <a:r>
-                  <a:rPr lang="en-US" sz="1200" b="1" dirty="0"/>
+                  <a:rPr lang="en-US" b="1" dirty="0"/>
                   <a:t>Propagation delays:</a:t>
                 </a:r>
               </a:p>
@@ -25379,18 +27992,18 @@
                   </a:lnSpc>
                 </a:pPr>
                 <a:r>
-                  <a:rPr lang="en-US" sz="1200" dirty="0"/>
+                  <a:rPr lang="en-US" dirty="0"/>
                   <a:t>Server → router: </a:t>
                 </a:r>
                 <a:r>
-                  <a:rPr lang="en-US" sz="1200" b="1" dirty="0"/>
+                  <a:rPr lang="en-US" b="1" dirty="0"/>
                   <a:t>50 </a:t>
                 </a:r>
                 <a:r>
-                  <a:rPr lang="en-US" sz="1200" b="1" dirty="0" err="1"/>
+                  <a:rPr lang="en-US" b="1" dirty="0" err="1"/>
                   <a:t>ms</a:t>
                 </a:r>
-                <a:endParaRPr lang="en-US" sz="1200" dirty="0"/>
+                <a:endParaRPr lang="en-US" dirty="0"/>
               </a:p>
               <a:p>
                 <a:pPr>
@@ -25399,18 +28012,18 @@
                   </a:lnSpc>
                 </a:pPr>
                 <a:r>
-                  <a:rPr lang="en-US" sz="1200" dirty="0"/>
+                  <a:rPr lang="en-US" dirty="0"/>
                   <a:t>Router → router: </a:t>
                 </a:r>
                 <a:r>
-                  <a:rPr lang="en-US" sz="1200" b="1" dirty="0"/>
+                  <a:rPr lang="en-US" b="1" dirty="0"/>
                   <a:t>200 </a:t>
                 </a:r>
                 <a:r>
-                  <a:rPr lang="en-US" sz="1200" b="1" dirty="0" err="1"/>
+                  <a:rPr lang="en-US" b="1" dirty="0" err="1"/>
                   <a:t>ms</a:t>
                 </a:r>
-                <a:endParaRPr lang="en-US" sz="1200" dirty="0"/>
+                <a:endParaRPr lang="en-US" dirty="0"/>
               </a:p>
               <a:p>
                 <a:pPr>
@@ -25419,18 +28032,18 @@
                   </a:lnSpc>
                 </a:pPr>
                 <a:r>
-                  <a:rPr lang="en-US" sz="1200" dirty="0"/>
+                  <a:rPr lang="en-US" dirty="0"/>
                   <a:t>Router → client: </a:t>
                 </a:r>
                 <a:r>
-                  <a:rPr lang="en-US" sz="1200" b="1" dirty="0"/>
+                  <a:rPr lang="en-US" b="1" dirty="0"/>
                   <a:t>0 </a:t>
                 </a:r>
                 <a:r>
-                  <a:rPr lang="en-US" sz="1200" b="1" dirty="0" err="1"/>
+                  <a:rPr lang="en-US" b="1" dirty="0" err="1"/>
                   <a:t>ms</a:t>
                 </a:r>
-                <a:endParaRPr lang="en-US" sz="1200" dirty="0"/>
+                <a:endParaRPr lang="en-US" dirty="0"/>
               </a:p>
               <a:p>
                 <a:pPr>
@@ -25439,41 +28052,30 @@
                   </a:lnSpc>
                 </a:pPr>
                 <a:r>
-                  <a:rPr lang="en-US" sz="1200" dirty="0"/>
+                  <a:rPr lang="en-US" dirty="0"/>
                   <a:t>Total propagation delay:</a:t>
                 </a:r>
-                <a:br>
-                  <a:rPr lang="en-US" sz="1200" dirty="0"/>
-                </a:br>
                 <a14:m>
                   <m:oMath xmlns:m="http://schemas.openxmlformats.org/officeDocument/2006/math">
                     <m:r>
-                      <a:rPr lang="en-US" sz="1200"/>
-                      <m:t>50</m:t>
+                      <a:rPr lang="en-US" b="0" i="0" smtClean="0">
+                        <a:latin typeface="Cambria Math" panose="02040503050406030204" pitchFamily="18" charset="0"/>
+                      </a:rPr>
+                      <m:t> </m:t>
                     </m:r>
                     <m:r>
-                      <a:rPr lang="en-US" sz="1200"/>
-                      <m:t>+</m:t>
-                    </m:r>
-                    <m:r>
-                      <a:rPr lang="en-US" sz="1200"/>
-                      <m:t>200</m:t>
-                    </m:r>
-                    <m:r>
-                      <a:rPr lang="en-US" sz="1200"/>
-                      <m:t>=</m:t>
-                    </m:r>
-                    <m:r>
-                      <a:rPr lang="en-US" sz="1200"/>
-                      <m:t>250</m:t>
+                      <a:rPr lang="en-US">
+                        <a:latin typeface="Cambria Math" panose="02040503050406030204" pitchFamily="18" charset="0"/>
+                      </a:rPr>
+                      <m:t>50+200=250</m:t>
                     </m:r>
                   </m:oMath>
                 </a14:m>
                 <a:r>
-                  <a:rPr lang="en-US" sz="1200" dirty="0" err="1"/>
+                  <a:rPr lang="en-US" dirty="0" err="1"/>
                   <a:t>ms</a:t>
                 </a:r>
-                <a:endParaRPr lang="en-US" sz="1200" dirty="0"/>
+                <a:endParaRPr lang="en-US" dirty="0"/>
               </a:p>
               <a:p>
                 <a:pPr>
@@ -25482,113 +28084,100 @@
                   </a:lnSpc>
                 </a:pPr>
                 <a:r>
-                  <a:rPr lang="en-US" sz="1200" b="1" dirty="0"/>
-                  <a:t>End-to-end delay</a:t>
+                  <a:rPr lang="en-US" b="1" dirty="0"/>
+                  <a:t>End-to-end delay:</a:t>
                 </a:r>
-              </a:p>
-              <a:p>
-                <a:pPr>
-                  <a:lnSpc>
-                    <a:spcPct val="100000"/>
-                  </a:lnSpc>
-                </a:pPr>
                 <a14:m>
                   <m:oMath xmlns:m="http://schemas.openxmlformats.org/officeDocument/2006/math">
                     <m:r>
-                      <a:rPr lang="en-US" sz="1200"/>
+                      <a:rPr lang="en-US" b="1" i="0" smtClean="0">
+                        <a:latin typeface="Cambria Math" panose="02040503050406030204" pitchFamily="18" charset="0"/>
+                      </a:rPr>
+                      <m:t> </m:t>
+                    </m:r>
+                    <m:r>
+                      <a:rPr lang="en-US">
+                        <a:latin typeface="Cambria Math" panose="02040503050406030204" pitchFamily="18" charset="0"/>
+                      </a:rPr>
                       <m:t>250</m:t>
                     </m:r>
                     <m:r>
                       <m:rPr>
                         <m:nor/>
                       </m:rPr>
-                      <a:rPr lang="en-US" sz="1200" i="1"/>
+                      <a:rPr lang="en-US" i="1"/>
                       <m:t> </m:t>
                     </m:r>
                     <m:r>
                       <m:rPr>
                         <m:nor/>
                       </m:rPr>
-                      <a:rPr lang="en-US" sz="1200" i="1"/>
+                      <a:rPr lang="en-US" i="1"/>
                       <m:t>ms</m:t>
                     </m:r>
                     <m:r>
-                      <a:rPr lang="en-US" sz="1200"/>
-                      <m:t>+</m:t>
-                    </m:r>
-                    <m:r>
-                      <a:rPr lang="en-US" sz="1200"/>
-                      <m:t>0</m:t>
-                    </m:r>
-                    <m:r>
-                      <a:rPr lang="en-US" sz="1200"/>
-                      <m:t>.</m:t>
-                    </m:r>
-                    <m:r>
-                      <a:rPr lang="en-US" sz="1200"/>
-                      <m:t>62</m:t>
+                      <a:rPr lang="en-US">
+                        <a:latin typeface="Cambria Math" panose="02040503050406030204" pitchFamily="18" charset="0"/>
+                      </a:rPr>
+                      <m:t>+0.62</m:t>
                     </m:r>
                     <m:r>
                       <m:rPr>
                         <m:nor/>
                       </m:rPr>
-                      <a:rPr lang="en-US" sz="1200" i="1"/>
+                      <a:rPr lang="en-US" i="1"/>
                       <m:t> </m:t>
                     </m:r>
                     <m:r>
                       <m:rPr>
                         <m:nor/>
                       </m:rPr>
-                      <a:rPr lang="en-US" sz="1200" i="1"/>
+                      <a:rPr lang="en-US" i="1"/>
                       <m:t>ms</m:t>
                     </m:r>
                     <m:r>
-                      <a:rPr lang="en-US" sz="1200"/>
+                      <a:rPr lang="en-US">
+                        <a:latin typeface="Cambria Math" panose="02040503050406030204" pitchFamily="18" charset="0"/>
+                      </a:rPr>
                       <m:t>=</m:t>
                     </m:r>
                   </m:oMath>
                 </a14:m>
                 <a:r>
-                  <a:rPr lang="en-US" sz="1200" dirty="0"/>
+                  <a:rPr lang="en-US" dirty="0"/>
                   <a:t> </a:t>
                 </a:r>
                 <a14:m>
                   <m:oMath xmlns:m="http://schemas.openxmlformats.org/officeDocument/2006/math">
                     <m:r>
-                      <a:rPr lang="en-US" sz="1200">
+                      <a:rPr lang="en-US">
                         <a:latin typeface="Cambria Math" panose="02040503050406030204" pitchFamily="18" charset="0"/>
                       </a:rPr>
                       <m:t>250</m:t>
                     </m:r>
                     <m:r>
-                      <a:rPr lang="en-US" sz="1200" b="0" i="0" smtClean="0">
+                      <a:rPr lang="en-US">
                         <a:latin typeface="Cambria Math" panose="02040503050406030204" pitchFamily="18" charset="0"/>
                       </a:rPr>
-                      <m:t>.</m:t>
-                    </m:r>
-                    <m:r>
-                      <a:rPr lang="en-US" sz="1200" b="0" i="0" smtClean="0">
-                        <a:latin typeface="Cambria Math" panose="02040503050406030204" pitchFamily="18" charset="0"/>
-                      </a:rPr>
-                      <m:t>62</m:t>
+                      <m:t>.62</m:t>
                     </m:r>
                     <m:r>
                       <m:rPr>
                         <m:nor/>
                       </m:rPr>
-                      <a:rPr lang="en-US" sz="1200" i="1"/>
+                      <a:rPr lang="en-US" i="1"/>
                       <m:t> </m:t>
                     </m:r>
                     <m:r>
                       <m:rPr>
                         <m:nor/>
                       </m:rPr>
-                      <a:rPr lang="en-US" sz="1200" i="1"/>
+                      <a:rPr lang="en-US" i="1"/>
                       <m:t>ms</m:t>
                     </m:r>
                   </m:oMath>
                 </a14:m>
-                <a:endParaRPr lang="en-US" sz="1200" dirty="0"/>
+                <a:endParaRPr lang="en-US" dirty="0"/>
               </a:p>
             </p:txBody>
           </p:sp>
@@ -25596,10 +28185,10 @@
         <mc:Fallback>
           <p:sp>
             <p:nvSpPr>
-              <p:cNvPr id="3" name="Content Placeholder 2">
+              <p:cNvPr id="3" name="Text Placeholder 2">
                 <a:extLst>
                   <a:ext uri="{FF2B5EF4-FFF2-40B4-BE49-F238E27FC236}">
-                    <a16:creationId xmlns:a16="http://schemas.microsoft.com/office/drawing/2014/main" id="{AAF29413-F7B6-95BF-4926-E80D77CE1F99}"/>
+                    <a16:creationId xmlns:a16="http://schemas.microsoft.com/office/drawing/2014/main" id="{FF8F2B28-F620-3212-5941-AABA6E623EC4}"/>
                   </a:ext>
                 </a:extLst>
               </p:cNvPr>
@@ -25607,18 +28196,14 @@
                 <a:spLocks noGrp="1" noRot="1" noChangeAspect="1" noMove="1" noResize="1" noEditPoints="1" noAdjustHandles="1" noChangeArrowheads="1" noChangeShapeType="1" noTextEdit="1"/>
               </p:cNvSpPr>
               <p:nvPr>
-                <p:ph sz="half" idx="1"/>
+                <p:ph type="body" idx="1"/>
               </p:nvPr>
             </p:nvSpPr>
             <p:spPr>
-              <a:xfrm>
-                <a:off x="362309" y="873424"/>
-                <a:ext cx="8117457" cy="4270076"/>
-              </a:xfrm>
               <a:blipFill>
                 <a:blip r:embed="rId3"/>
                 <a:stretch>
-                  <a:fillRect b="-285"/>
+                  <a:fillRect/>
                 </a:stretch>
               </a:blipFill>
             </p:spPr>
@@ -25637,12 +28222,42 @@
           </p:sp>
         </mc:Fallback>
       </mc:AlternateContent>
+    </p:spTree>
+    <p:extLst>
+      <p:ext uri="{BB962C8B-B14F-4D97-AF65-F5344CB8AC3E}">
+        <p14:creationId xmlns:p14="http://schemas.microsoft.com/office/powerpoint/2010/main" val="2009370128"/>
+      </p:ext>
+    </p:extLst>
+  </p:cSld>
+  <p:clrMapOvr>
+    <a:masterClrMapping/>
+  </p:clrMapOvr>
+</p:sld>
+</file>
+
+<file path=ppt/slides/slide7.xml><?xml version="1.0" encoding="utf-8"?>
+<p:sld xmlns:a="http://schemas.openxmlformats.org/drawingml/2006/main" xmlns:r="http://schemas.openxmlformats.org/officeDocument/2006/relationships" xmlns:p="http://schemas.openxmlformats.org/presentationml/2006/main">
+  <p:cSld>
+    <p:spTree>
+      <p:nvGrpSpPr>
+        <p:cNvPr id="1" name=""/>
+        <p:cNvGrpSpPr/>
+        <p:nvPr/>
+      </p:nvGrpSpPr>
+      <p:grpSpPr>
+        <a:xfrm>
+          <a:off x="0" y="0"/>
+          <a:ext cx="0" cy="0"/>
+          <a:chOff x="0" y="0"/>
+          <a:chExt cx="0" cy="0"/>
+        </a:xfrm>
+      </p:grpSpPr>
       <p:sp>
         <p:nvSpPr>
-          <p:cNvPr id="8" name="Title 1">
+          <p:cNvPr id="2" name="Title 1">
             <a:extLst>
               <a:ext uri="{FF2B5EF4-FFF2-40B4-BE49-F238E27FC236}">
-                <a16:creationId xmlns:a16="http://schemas.microsoft.com/office/drawing/2014/main" id="{57B04D29-7352-8C5B-7844-EF4BA6701978}"/>
+                <a16:creationId xmlns:a16="http://schemas.microsoft.com/office/drawing/2014/main" id="{6147EF64-7949-83C0-0604-F9FF057C8563}"/>
               </a:ext>
             </a:extLst>
           </p:cNvPr>
@@ -25653,21 +28268,356 @@
             <p:ph type="title"/>
           </p:nvPr>
         </p:nvSpPr>
-        <p:spPr>
-          <a:xfrm>
-            <a:off x="505325" y="338866"/>
-            <a:ext cx="4705029" cy="670967"/>
-          </a:xfrm>
-        </p:spPr>
+        <p:spPr/>
         <p:txBody>
-          <a:bodyPr>
-            <a:normAutofit fontScale="90000"/>
-          </a:bodyPr>
+          <a:bodyPr/>
           <a:lstStyle/>
           <a:p>
             <a:r>
               <a:rPr lang="en-US" dirty="0"/>
-              <a:t>Q1 End-­to­‐end delay ANS </a:t>
+              <a:t>Q3.1 End-­to­‐end delay</a:t>
+            </a:r>
+          </a:p>
+        </p:txBody>
+      </p:sp>
+      <p:sp>
+        <p:nvSpPr>
+          <p:cNvPr id="3" name="Text Placeholder 2">
+            <a:extLst>
+              <a:ext uri="{FF2B5EF4-FFF2-40B4-BE49-F238E27FC236}">
+                <a16:creationId xmlns:a16="http://schemas.microsoft.com/office/drawing/2014/main" id="{F290FA34-8079-10F5-B27C-4818DB98B73E}"/>
+              </a:ext>
+            </a:extLst>
+          </p:cNvPr>
+          <p:cNvSpPr>
+            <a:spLocks noGrp="1"/>
+          </p:cNvSpPr>
+          <p:nvPr>
+            <p:ph type="body" idx="1"/>
+          </p:nvPr>
+        </p:nvSpPr>
+        <p:spPr/>
+        <p:txBody>
+          <a:bodyPr/>
+          <a:lstStyle/>
+          <a:p>
+            <a:r>
+              <a:rPr lang="en-US" dirty="0"/>
+              <a:t>In the diagram below, we have two different links, each with different physical properties.</a:t>
+            </a:r>
+          </a:p>
+          <a:p>
+            <a:pPr lvl="1"/>
+            <a:r>
+              <a:rPr lang="en-US" dirty="0"/>
+              <a:t>Suppose 𝑇</a:t>
+            </a:r>
+            <a:r>
+              <a:rPr lang="en-US" baseline="-25000" dirty="0"/>
+              <a:t>1</a:t>
+            </a:r>
+            <a:r>
+              <a:rPr lang="en-US" dirty="0"/>
+              <a:t> = 10000, 𝐿</a:t>
+            </a:r>
+            <a:r>
+              <a:rPr lang="en-US" baseline="-25000" dirty="0"/>
+              <a:t>1</a:t>
+            </a:r>
+            <a:r>
+              <a:rPr lang="en-US" dirty="0"/>
+              <a:t> = 100000, and </a:t>
+            </a:r>
+            <a:r>
+              <a:rPr lang="en-US" i="1" dirty="0"/>
+              <a:t>S</a:t>
+            </a:r>
+            <a:r>
+              <a:rPr lang="en-US" baseline="-25000" dirty="0"/>
+              <a:t>1</a:t>
+            </a:r>
+            <a:r>
+              <a:rPr lang="en-US" dirty="0"/>
+              <a:t> = 2.5 × 10</a:t>
+            </a:r>
+            <a:r>
+              <a:rPr lang="en-US" baseline="30000" dirty="0"/>
+              <a:t>8</a:t>
+            </a:r>
+            <a:r>
+              <a:rPr lang="en-US" dirty="0"/>
+              <a:t>. How long does it take to send a 500-byte packet from Node A to Node B?</a:t>
+            </a:r>
+          </a:p>
+        </p:txBody>
+      </p:sp>
+      <p:pic>
+        <p:nvPicPr>
+          <p:cNvPr id="5" name="Picture 4">
+            <a:extLst>
+              <a:ext uri="{FF2B5EF4-FFF2-40B4-BE49-F238E27FC236}">
+                <a16:creationId xmlns:a16="http://schemas.microsoft.com/office/drawing/2014/main" id="{14960E0B-7C86-DD16-04C2-A7258E9CFCB7}"/>
+              </a:ext>
+            </a:extLst>
+          </p:cNvPr>
+          <p:cNvPicPr>
+            <a:picLocks noChangeAspect="1"/>
+          </p:cNvPicPr>
+          <p:nvPr/>
+        </p:nvPicPr>
+        <p:blipFill>
+          <a:blip r:embed="rId2"/>
+          <a:stretch>
+            <a:fillRect/>
+          </a:stretch>
+        </p:blipFill>
+        <p:spPr>
+          <a:xfrm>
+            <a:off x="1828308" y="2309367"/>
+            <a:ext cx="4960681" cy="524766"/>
+          </a:xfrm>
+          <a:prstGeom prst="rect">
+            <a:avLst/>
+          </a:prstGeom>
+        </p:spPr>
+      </p:pic>
+      <p:pic>
+        <p:nvPicPr>
+          <p:cNvPr id="7" name="Picture 6">
+            <a:extLst>
+              <a:ext uri="{FF2B5EF4-FFF2-40B4-BE49-F238E27FC236}">
+                <a16:creationId xmlns:a16="http://schemas.microsoft.com/office/drawing/2014/main" id="{BF21AC61-E5A9-5EDB-833D-82CF0D156426}"/>
+              </a:ext>
+            </a:extLst>
+          </p:cNvPr>
+          <p:cNvPicPr>
+            <a:picLocks noChangeAspect="1"/>
+          </p:cNvPicPr>
+          <p:nvPr/>
+        </p:nvPicPr>
+        <p:blipFill>
+          <a:blip r:embed="rId3"/>
+          <a:stretch>
+            <a:fillRect/>
+          </a:stretch>
+        </p:blipFill>
+        <p:spPr>
+          <a:xfrm>
+            <a:off x="1631269" y="2921531"/>
+            <a:ext cx="5273359" cy="1386530"/>
+          </a:xfrm>
+          <a:prstGeom prst="rect">
+            <a:avLst/>
+          </a:prstGeom>
+        </p:spPr>
+      </p:pic>
+    </p:spTree>
+    <p:extLst>
+      <p:ext uri="{BB962C8B-B14F-4D97-AF65-F5344CB8AC3E}">
+        <p14:creationId xmlns:p14="http://schemas.microsoft.com/office/powerpoint/2010/main" val="2368817847"/>
+      </p:ext>
+    </p:extLst>
+  </p:cSld>
+  <p:clrMapOvr>
+    <a:masterClrMapping/>
+  </p:clrMapOvr>
+</p:sld>
+</file>
+
+<file path=ppt/slides/slide8.xml><?xml version="1.0" encoding="utf-8"?>
+<p:sld xmlns:a="http://schemas.openxmlformats.org/drawingml/2006/main" xmlns:r="http://schemas.openxmlformats.org/officeDocument/2006/relationships" xmlns:p="http://schemas.openxmlformats.org/presentationml/2006/main">
+  <p:cSld>
+    <p:spTree>
+      <p:nvGrpSpPr>
+        <p:cNvPr id="1" name=""/>
+        <p:cNvGrpSpPr/>
+        <p:nvPr/>
+      </p:nvGrpSpPr>
+      <p:grpSpPr>
+        <a:xfrm>
+          <a:off x="0" y="0"/>
+          <a:ext cx="0" cy="0"/>
+          <a:chOff x="0" y="0"/>
+          <a:chExt cx="0" cy="0"/>
+        </a:xfrm>
+      </p:grpSpPr>
+      <p:sp>
+        <p:nvSpPr>
+          <p:cNvPr id="2" name="Title 1">
+            <a:extLst>
+              <a:ext uri="{FF2B5EF4-FFF2-40B4-BE49-F238E27FC236}">
+                <a16:creationId xmlns:a16="http://schemas.microsoft.com/office/drawing/2014/main" id="{D376C843-1D5A-2E2C-E4D6-4818C73AE3FA}"/>
+              </a:ext>
+            </a:extLst>
+          </p:cNvPr>
+          <p:cNvSpPr>
+            <a:spLocks noGrp="1"/>
+          </p:cNvSpPr>
+          <p:nvPr>
+            <p:ph type="title"/>
+          </p:nvPr>
+        </p:nvSpPr>
+        <p:spPr/>
+        <p:txBody>
+          <a:bodyPr/>
+          <a:lstStyle/>
+          <a:p>
+            <a:r>
+              <a:rPr lang="en-US" dirty="0"/>
+              <a:t>Q3.1 End-­to­‐end delay ANS</a:t>
+            </a:r>
+          </a:p>
+        </p:txBody>
+      </p:sp>
+      <p:sp>
+        <p:nvSpPr>
+          <p:cNvPr id="3" name="Text Placeholder 2">
+            <a:extLst>
+              <a:ext uri="{FF2B5EF4-FFF2-40B4-BE49-F238E27FC236}">
+                <a16:creationId xmlns:a16="http://schemas.microsoft.com/office/drawing/2014/main" id="{2F11D8D9-718D-6D2C-1D19-DFB5023A1D84}"/>
+              </a:ext>
+            </a:extLst>
+          </p:cNvPr>
+          <p:cNvSpPr>
+            <a:spLocks noGrp="1"/>
+          </p:cNvSpPr>
+          <p:nvPr>
+            <p:ph type="body" idx="1"/>
+          </p:nvPr>
+        </p:nvSpPr>
+        <p:spPr/>
+        <p:txBody>
+          <a:bodyPr/>
+          <a:lstStyle/>
+          <a:p>
+            <a:endParaRPr lang="en-US"/>
+          </a:p>
+        </p:txBody>
+      </p:sp>
+      <p:pic>
+        <p:nvPicPr>
+          <p:cNvPr id="5" name="Picture 4">
+            <a:extLst>
+              <a:ext uri="{FF2B5EF4-FFF2-40B4-BE49-F238E27FC236}">
+                <a16:creationId xmlns:a16="http://schemas.microsoft.com/office/drawing/2014/main" id="{E5B00580-102C-DEF3-8A7A-36A03E13916F}"/>
+              </a:ext>
+            </a:extLst>
+          </p:cNvPr>
+          <p:cNvPicPr>
+            <a:picLocks noChangeAspect="1"/>
+          </p:cNvPicPr>
+          <p:nvPr/>
+        </p:nvPicPr>
+        <p:blipFill>
+          <a:blip r:embed="rId2"/>
+          <a:stretch>
+            <a:fillRect/>
+          </a:stretch>
+        </p:blipFill>
+        <p:spPr>
+          <a:xfrm>
+            <a:off x="0" y="680735"/>
+            <a:ext cx="9144000" cy="3782030"/>
+          </a:xfrm>
+          <a:prstGeom prst="rect">
+            <a:avLst/>
+          </a:prstGeom>
+        </p:spPr>
+      </p:pic>
+    </p:spTree>
+    <p:extLst>
+      <p:ext uri="{BB962C8B-B14F-4D97-AF65-F5344CB8AC3E}">
+        <p14:creationId xmlns:p14="http://schemas.microsoft.com/office/powerpoint/2010/main" val="1216499002"/>
+      </p:ext>
+    </p:extLst>
+  </p:cSld>
+  <p:clrMapOvr>
+    <a:masterClrMapping/>
+  </p:clrMapOvr>
+</p:sld>
+</file>
+
+<file path=ppt/slides/slide9.xml><?xml version="1.0" encoding="utf-8"?>
+<p:sld xmlns:a="http://schemas.openxmlformats.org/drawingml/2006/main" xmlns:r="http://schemas.openxmlformats.org/officeDocument/2006/relationships" xmlns:p="http://schemas.openxmlformats.org/presentationml/2006/main">
+  <p:cSld>
+    <p:spTree>
+      <p:nvGrpSpPr>
+        <p:cNvPr id="1" name=""/>
+        <p:cNvGrpSpPr/>
+        <p:nvPr/>
+      </p:nvGrpSpPr>
+      <p:grpSpPr>
+        <a:xfrm>
+          <a:off x="0" y="0"/>
+          <a:ext cx="0" cy="0"/>
+          <a:chOff x="0" y="0"/>
+          <a:chExt cx="0" cy="0"/>
+        </a:xfrm>
+      </p:grpSpPr>
+      <p:sp>
+        <p:nvSpPr>
+          <p:cNvPr id="2" name="Title 1">
+            <a:extLst>
+              <a:ext uri="{FF2B5EF4-FFF2-40B4-BE49-F238E27FC236}">
+                <a16:creationId xmlns:a16="http://schemas.microsoft.com/office/drawing/2014/main" id="{4ACDFEBF-4EE6-5F37-EA61-D00D7CD5B76F}"/>
+              </a:ext>
+            </a:extLst>
+          </p:cNvPr>
+          <p:cNvSpPr>
+            <a:spLocks noGrp="1"/>
+          </p:cNvSpPr>
+          <p:nvPr>
+            <p:ph type="title"/>
+          </p:nvPr>
+        </p:nvSpPr>
+        <p:spPr/>
+        <p:txBody>
+          <a:bodyPr/>
+          <a:lstStyle/>
+          <a:p>
+            <a:r>
+              <a:rPr lang="en-US" dirty="0"/>
+              <a:t>Q3.2 End-­to­‐end delay</a:t>
+            </a:r>
+          </a:p>
+        </p:txBody>
+      </p:sp>
+      <p:sp>
+        <p:nvSpPr>
+          <p:cNvPr id="3" name="Text Placeholder 2">
+            <a:extLst>
+              <a:ext uri="{FF2B5EF4-FFF2-40B4-BE49-F238E27FC236}">
+                <a16:creationId xmlns:a16="http://schemas.microsoft.com/office/drawing/2014/main" id="{B430C32A-C044-33BA-A0B9-58AD8EBDEFE5}"/>
+              </a:ext>
+            </a:extLst>
+          </p:cNvPr>
+          <p:cNvSpPr>
+            <a:spLocks noGrp="1"/>
+          </p:cNvSpPr>
+          <p:nvPr>
+            <p:ph type="body" idx="1"/>
+          </p:nvPr>
+        </p:nvSpPr>
+        <p:spPr/>
+        <p:txBody>
+          <a:bodyPr/>
+          <a:lstStyle/>
+          <a:p>
+            <a:r>
+              <a:rPr lang="en-US" dirty="0"/>
+              <a:t>The RTT (Round Trip Time) is the time it takes to send a packet (from source to destination) and receive a response (from destination to source). Count from the time the source transmits the first byte, to the time the source receives the last byte of the response. </a:t>
+            </a:r>
+          </a:p>
+          <a:p>
+            <a:r>
+              <a:rPr lang="en-US" dirty="0"/>
+              <a:t>Node A sends a 𝑥-byte packet to Node C. Then, Node C sends an 𝑥-byte response back to Node A. What is the RTT for this exchange?</a:t>
+            </a:r>
+          </a:p>
+          <a:p>
+            <a:r>
+              <a:rPr lang="en-US" dirty="0"/>
+              <a:t>Note: Since there is only one packet, there is no queuing delays. We assume processing delay is negligible, so Node C starts transmitting the response immediately after it receives the last byte of the packet. </a:t>
             </a:r>
           </a:p>
         </p:txBody>
@@ -25675,7 +28625,7 @@
     </p:spTree>
     <p:extLst>
       <p:ext uri="{BB962C8B-B14F-4D97-AF65-F5344CB8AC3E}">
-        <p14:creationId xmlns:p14="http://schemas.microsoft.com/office/powerpoint/2010/main" val="547263288"/>
+        <p14:creationId xmlns:p14="http://schemas.microsoft.com/office/powerpoint/2010/main" val="3511070162"/>
       </p:ext>
     </p:extLst>
   </p:cSld>

--- a/PPTs/Lecture 3 - Links Exercises ANS.pptx
+++ b/PPTs/Lecture 3 - Links Exercises ANS.pptx
@@ -298,7 +298,7 @@
 <file path=ppt/revisionInfo.xml><?xml version="1.0" encoding="utf-8"?>
 <p1510:revInfo xmlns:a="http://schemas.openxmlformats.org/drawingml/2006/main" xmlns:r="http://schemas.openxmlformats.org/officeDocument/2006/relationships" xmlns:p1510="http://schemas.microsoft.com/office/powerpoint/2015/10/main">
   <p1510:revLst>
-    <p1510:client id="{C039B89F-B73B-4A52-B89B-C3185D261259}" v="138" dt="2026-01-31T20:28:34.917"/>
+    <p1510:client id="{C039B89F-B73B-4A52-B89B-C3185D261259}" v="269" dt="2026-02-03T21:30:20.975"/>
   </p1510:revLst>
 </p1510:revInfo>
 </file>
@@ -308,7 +308,7 @@
   <pc:docChgLst>
     <pc:chgData name="Zonghua Gu" userId="9a7e1853e1951ef5" providerId="LiveId" clId="{CF1FAA12-072C-4ED5-BA76-0FFFAEFDB88A}"/>
     <pc:docChg chg="undo redo custSel addSld delSld modSld">
-      <pc:chgData name="Zonghua Gu" userId="9a7e1853e1951ef5" providerId="LiveId" clId="{CF1FAA12-072C-4ED5-BA76-0FFFAEFDB88A}" dt="2026-01-31T21:33:34.221" v="1015" actId="1076"/>
+      <pc:chgData name="Zonghua Gu" userId="9a7e1853e1951ef5" providerId="LiveId" clId="{CF1FAA12-072C-4ED5-BA76-0FFFAEFDB88A}" dt="2026-02-03T21:30:20.975" v="1436" actId="20577"/>
       <pc:docMkLst>
         <pc:docMk/>
       </pc:docMkLst>
@@ -335,118 +335,6 @@
           </ac:spMkLst>
         </pc:spChg>
       </pc:sldChg>
-      <pc:sldChg chg="del">
-        <pc:chgData name="Zonghua Gu" userId="9a7e1853e1951ef5" providerId="LiveId" clId="{CF1FAA12-072C-4ED5-BA76-0FFFAEFDB88A}" dt="2026-01-30T01:51:02.624" v="1" actId="47"/>
-        <pc:sldMkLst>
-          <pc:docMk/>
-          <pc:sldMk cId="0" sldId="258"/>
-        </pc:sldMkLst>
-      </pc:sldChg>
-      <pc:sldChg chg="del">
-        <pc:chgData name="Zonghua Gu" userId="9a7e1853e1951ef5" providerId="LiveId" clId="{CF1FAA12-072C-4ED5-BA76-0FFFAEFDB88A}" dt="2026-01-30T01:51:02.624" v="1" actId="47"/>
-        <pc:sldMkLst>
-          <pc:docMk/>
-          <pc:sldMk cId="0" sldId="259"/>
-        </pc:sldMkLst>
-      </pc:sldChg>
-      <pc:sldChg chg="del">
-        <pc:chgData name="Zonghua Gu" userId="9a7e1853e1951ef5" providerId="LiveId" clId="{CF1FAA12-072C-4ED5-BA76-0FFFAEFDB88A}" dt="2026-01-30T01:51:02.624" v="1" actId="47"/>
-        <pc:sldMkLst>
-          <pc:docMk/>
-          <pc:sldMk cId="0" sldId="260"/>
-        </pc:sldMkLst>
-      </pc:sldChg>
-      <pc:sldChg chg="del">
-        <pc:chgData name="Zonghua Gu" userId="9a7e1853e1951ef5" providerId="LiveId" clId="{CF1FAA12-072C-4ED5-BA76-0FFFAEFDB88A}" dt="2026-01-30T01:51:02.624" v="1" actId="47"/>
-        <pc:sldMkLst>
-          <pc:docMk/>
-          <pc:sldMk cId="0" sldId="261"/>
-        </pc:sldMkLst>
-      </pc:sldChg>
-      <pc:sldChg chg="del">
-        <pc:chgData name="Zonghua Gu" userId="9a7e1853e1951ef5" providerId="LiveId" clId="{CF1FAA12-072C-4ED5-BA76-0FFFAEFDB88A}" dt="2026-01-30T01:51:02.624" v="1" actId="47"/>
-        <pc:sldMkLst>
-          <pc:docMk/>
-          <pc:sldMk cId="0" sldId="262"/>
-        </pc:sldMkLst>
-      </pc:sldChg>
-      <pc:sldChg chg="del">
-        <pc:chgData name="Zonghua Gu" userId="9a7e1853e1951ef5" providerId="LiveId" clId="{CF1FAA12-072C-4ED5-BA76-0FFFAEFDB88A}" dt="2026-01-30T01:51:02.624" v="1" actId="47"/>
-        <pc:sldMkLst>
-          <pc:docMk/>
-          <pc:sldMk cId="0" sldId="263"/>
-        </pc:sldMkLst>
-      </pc:sldChg>
-      <pc:sldChg chg="del">
-        <pc:chgData name="Zonghua Gu" userId="9a7e1853e1951ef5" providerId="LiveId" clId="{CF1FAA12-072C-4ED5-BA76-0FFFAEFDB88A}" dt="2026-01-30T01:51:02.624" v="1" actId="47"/>
-        <pc:sldMkLst>
-          <pc:docMk/>
-          <pc:sldMk cId="0" sldId="264"/>
-        </pc:sldMkLst>
-      </pc:sldChg>
-      <pc:sldChg chg="del">
-        <pc:chgData name="Zonghua Gu" userId="9a7e1853e1951ef5" providerId="LiveId" clId="{CF1FAA12-072C-4ED5-BA76-0FFFAEFDB88A}" dt="2026-01-30T01:51:02.624" v="1" actId="47"/>
-        <pc:sldMkLst>
-          <pc:docMk/>
-          <pc:sldMk cId="0" sldId="265"/>
-        </pc:sldMkLst>
-      </pc:sldChg>
-      <pc:sldChg chg="del">
-        <pc:chgData name="Zonghua Gu" userId="9a7e1853e1951ef5" providerId="LiveId" clId="{CF1FAA12-072C-4ED5-BA76-0FFFAEFDB88A}" dt="2026-01-30T01:51:02.624" v="1" actId="47"/>
-        <pc:sldMkLst>
-          <pc:docMk/>
-          <pc:sldMk cId="0" sldId="266"/>
-        </pc:sldMkLst>
-      </pc:sldChg>
-      <pc:sldChg chg="del">
-        <pc:chgData name="Zonghua Gu" userId="9a7e1853e1951ef5" providerId="LiveId" clId="{CF1FAA12-072C-4ED5-BA76-0FFFAEFDB88A}" dt="2026-01-30T01:51:02.624" v="1" actId="47"/>
-        <pc:sldMkLst>
-          <pc:docMk/>
-          <pc:sldMk cId="0" sldId="267"/>
-        </pc:sldMkLst>
-      </pc:sldChg>
-      <pc:sldChg chg="del">
-        <pc:chgData name="Zonghua Gu" userId="9a7e1853e1951ef5" providerId="LiveId" clId="{CF1FAA12-072C-4ED5-BA76-0FFFAEFDB88A}" dt="2026-01-30T01:51:02.624" v="1" actId="47"/>
-        <pc:sldMkLst>
-          <pc:docMk/>
-          <pc:sldMk cId="0" sldId="268"/>
-        </pc:sldMkLst>
-      </pc:sldChg>
-      <pc:sldChg chg="del">
-        <pc:chgData name="Zonghua Gu" userId="9a7e1853e1951ef5" providerId="LiveId" clId="{CF1FAA12-072C-4ED5-BA76-0FFFAEFDB88A}" dt="2026-01-30T01:51:02.624" v="1" actId="47"/>
-        <pc:sldMkLst>
-          <pc:docMk/>
-          <pc:sldMk cId="0" sldId="271"/>
-        </pc:sldMkLst>
-      </pc:sldChg>
-      <pc:sldChg chg="del">
-        <pc:chgData name="Zonghua Gu" userId="9a7e1853e1951ef5" providerId="LiveId" clId="{CF1FAA12-072C-4ED5-BA76-0FFFAEFDB88A}" dt="2026-01-30T01:51:02.624" v="1" actId="47"/>
-        <pc:sldMkLst>
-          <pc:docMk/>
-          <pc:sldMk cId="0" sldId="272"/>
-        </pc:sldMkLst>
-      </pc:sldChg>
-      <pc:sldChg chg="del">
-        <pc:chgData name="Zonghua Gu" userId="9a7e1853e1951ef5" providerId="LiveId" clId="{CF1FAA12-072C-4ED5-BA76-0FFFAEFDB88A}" dt="2026-01-30T01:51:02.624" v="1" actId="47"/>
-        <pc:sldMkLst>
-          <pc:docMk/>
-          <pc:sldMk cId="0" sldId="273"/>
-        </pc:sldMkLst>
-      </pc:sldChg>
-      <pc:sldChg chg="del">
-        <pc:chgData name="Zonghua Gu" userId="9a7e1853e1951ef5" providerId="LiveId" clId="{CF1FAA12-072C-4ED5-BA76-0FFFAEFDB88A}" dt="2026-01-30T01:51:02.624" v="1" actId="47"/>
-        <pc:sldMkLst>
-          <pc:docMk/>
-          <pc:sldMk cId="0" sldId="274"/>
-        </pc:sldMkLst>
-      </pc:sldChg>
-      <pc:sldChg chg="del">
-        <pc:chgData name="Zonghua Gu" userId="9a7e1853e1951ef5" providerId="LiveId" clId="{CF1FAA12-072C-4ED5-BA76-0FFFAEFDB88A}" dt="2026-01-30T01:51:02.624" v="1" actId="47"/>
-        <pc:sldMkLst>
-          <pc:docMk/>
-          <pc:sldMk cId="0" sldId="275"/>
-        </pc:sldMkLst>
-      </pc:sldChg>
       <pc:sldChg chg="addSp delSp modSp add del mod">
         <pc:chgData name="Zonghua Gu" userId="9a7e1853e1951ef5" providerId="LiveId" clId="{CF1FAA12-072C-4ED5-BA76-0FFFAEFDB88A}" dt="2026-01-31T19:48:31.719" v="368" actId="1076"/>
         <pc:sldMkLst>
@@ -469,86 +357,6 @@
             <ac:spMk id="1602" creationId="{00000000-0000-0000-0000-000000000000}"/>
           </ac:spMkLst>
         </pc:spChg>
-        <pc:spChg chg="del">
-          <ac:chgData name="Zonghua Gu" userId="9a7e1853e1951ef5" providerId="LiveId" clId="{CF1FAA12-072C-4ED5-BA76-0FFFAEFDB88A}" dt="2026-01-31T19:48:21.416" v="364" actId="478"/>
-          <ac:spMkLst>
-            <pc:docMk/>
-            <pc:sldMk cId="0" sldId="276"/>
-            <ac:spMk id="1603" creationId="{00000000-0000-0000-0000-000000000000}"/>
-          </ac:spMkLst>
-        </pc:spChg>
-        <pc:spChg chg="del">
-          <ac:chgData name="Zonghua Gu" userId="9a7e1853e1951ef5" providerId="LiveId" clId="{CF1FAA12-072C-4ED5-BA76-0FFFAEFDB88A}" dt="2026-01-31T19:48:21.416" v="364" actId="478"/>
-          <ac:spMkLst>
-            <pc:docMk/>
-            <pc:sldMk cId="0" sldId="276"/>
-            <ac:spMk id="1604" creationId="{00000000-0000-0000-0000-000000000000}"/>
-          </ac:spMkLst>
-        </pc:spChg>
-        <pc:spChg chg="del">
-          <ac:chgData name="Zonghua Gu" userId="9a7e1853e1951ef5" providerId="LiveId" clId="{CF1FAA12-072C-4ED5-BA76-0FFFAEFDB88A}" dt="2026-01-31T19:48:21.416" v="364" actId="478"/>
-          <ac:spMkLst>
-            <pc:docMk/>
-            <pc:sldMk cId="0" sldId="276"/>
-            <ac:spMk id="1614" creationId="{00000000-0000-0000-0000-000000000000}"/>
-          </ac:spMkLst>
-        </pc:spChg>
-        <pc:spChg chg="del">
-          <ac:chgData name="Zonghua Gu" userId="9a7e1853e1951ef5" providerId="LiveId" clId="{CF1FAA12-072C-4ED5-BA76-0FFFAEFDB88A}" dt="2026-01-31T19:48:21.416" v="364" actId="478"/>
-          <ac:spMkLst>
-            <pc:docMk/>
-            <pc:sldMk cId="0" sldId="276"/>
-            <ac:spMk id="1615" creationId="{00000000-0000-0000-0000-000000000000}"/>
-          </ac:spMkLst>
-        </pc:spChg>
-        <pc:spChg chg="del">
-          <ac:chgData name="Zonghua Gu" userId="9a7e1853e1951ef5" providerId="LiveId" clId="{CF1FAA12-072C-4ED5-BA76-0FFFAEFDB88A}" dt="2026-01-31T19:48:21.416" v="364" actId="478"/>
-          <ac:spMkLst>
-            <pc:docMk/>
-            <pc:sldMk cId="0" sldId="276"/>
-            <ac:spMk id="1616" creationId="{00000000-0000-0000-0000-000000000000}"/>
-          </ac:spMkLst>
-        </pc:spChg>
-        <pc:spChg chg="del">
-          <ac:chgData name="Zonghua Gu" userId="9a7e1853e1951ef5" providerId="LiveId" clId="{CF1FAA12-072C-4ED5-BA76-0FFFAEFDB88A}" dt="2026-01-31T19:48:21.416" v="364" actId="478"/>
-          <ac:spMkLst>
-            <pc:docMk/>
-            <pc:sldMk cId="0" sldId="276"/>
-            <ac:spMk id="1617" creationId="{00000000-0000-0000-0000-000000000000}"/>
-          </ac:spMkLst>
-        </pc:spChg>
-        <pc:spChg chg="del">
-          <ac:chgData name="Zonghua Gu" userId="9a7e1853e1951ef5" providerId="LiveId" clId="{CF1FAA12-072C-4ED5-BA76-0FFFAEFDB88A}" dt="2026-01-31T19:48:21.416" v="364" actId="478"/>
-          <ac:spMkLst>
-            <pc:docMk/>
-            <pc:sldMk cId="0" sldId="276"/>
-            <ac:spMk id="1618" creationId="{00000000-0000-0000-0000-000000000000}"/>
-          </ac:spMkLst>
-        </pc:spChg>
-        <pc:spChg chg="del">
-          <ac:chgData name="Zonghua Gu" userId="9a7e1853e1951ef5" providerId="LiveId" clId="{CF1FAA12-072C-4ED5-BA76-0FFFAEFDB88A}" dt="2026-01-31T19:48:21.416" v="364" actId="478"/>
-          <ac:spMkLst>
-            <pc:docMk/>
-            <pc:sldMk cId="0" sldId="276"/>
-            <ac:spMk id="1619" creationId="{00000000-0000-0000-0000-000000000000}"/>
-          </ac:spMkLst>
-        </pc:spChg>
-        <pc:spChg chg="del">
-          <ac:chgData name="Zonghua Gu" userId="9a7e1853e1951ef5" providerId="LiveId" clId="{CF1FAA12-072C-4ED5-BA76-0FFFAEFDB88A}" dt="2026-01-31T19:48:21.416" v="364" actId="478"/>
-          <ac:spMkLst>
-            <pc:docMk/>
-            <pc:sldMk cId="0" sldId="276"/>
-            <ac:spMk id="1620" creationId="{00000000-0000-0000-0000-000000000000}"/>
-          </ac:spMkLst>
-        </pc:spChg>
-        <pc:spChg chg="del">
-          <ac:chgData name="Zonghua Gu" userId="9a7e1853e1951ef5" providerId="LiveId" clId="{CF1FAA12-072C-4ED5-BA76-0FFFAEFDB88A}" dt="2026-01-31T19:48:21.416" v="364" actId="478"/>
-          <ac:spMkLst>
-            <pc:docMk/>
-            <pc:sldMk cId="0" sldId="276"/>
-            <ac:spMk id="1621" creationId="{00000000-0000-0000-0000-000000000000}"/>
-          </ac:spMkLst>
-        </pc:spChg>
         <pc:picChg chg="add mod">
           <ac:chgData name="Zonghua Gu" userId="9a7e1853e1951ef5" providerId="LiveId" clId="{CF1FAA12-072C-4ED5-BA76-0FFFAEFDB88A}" dt="2026-01-31T19:48:31.719" v="368" actId="1076"/>
           <ac:picMkLst>
@@ -557,83 +365,6 @@
             <ac:picMk id="3" creationId="{9633A34F-1978-7574-E3B7-AE9705F992F7}"/>
           </ac:picMkLst>
         </pc:picChg>
-      </pc:sldChg>
-      <pc:sldChg chg="del">
-        <pc:chgData name="Zonghua Gu" userId="9a7e1853e1951ef5" providerId="LiveId" clId="{CF1FAA12-072C-4ED5-BA76-0FFFAEFDB88A}" dt="2026-01-30T01:51:02.624" v="1" actId="47"/>
-        <pc:sldMkLst>
-          <pc:docMk/>
-          <pc:sldMk cId="0" sldId="277"/>
-        </pc:sldMkLst>
-      </pc:sldChg>
-      <pc:sldChg chg="del">
-        <pc:chgData name="Zonghua Gu" userId="9a7e1853e1951ef5" providerId="LiveId" clId="{CF1FAA12-072C-4ED5-BA76-0FFFAEFDB88A}" dt="2026-01-30T01:51:02.624" v="1" actId="47"/>
-        <pc:sldMkLst>
-          <pc:docMk/>
-          <pc:sldMk cId="0" sldId="278"/>
-        </pc:sldMkLst>
-      </pc:sldChg>
-      <pc:sldChg chg="del">
-        <pc:chgData name="Zonghua Gu" userId="9a7e1853e1951ef5" providerId="LiveId" clId="{CF1FAA12-072C-4ED5-BA76-0FFFAEFDB88A}" dt="2026-01-30T01:51:02.624" v="1" actId="47"/>
-        <pc:sldMkLst>
-          <pc:docMk/>
-          <pc:sldMk cId="0" sldId="279"/>
-        </pc:sldMkLst>
-      </pc:sldChg>
-      <pc:sldChg chg="del">
-        <pc:chgData name="Zonghua Gu" userId="9a7e1853e1951ef5" providerId="LiveId" clId="{CF1FAA12-072C-4ED5-BA76-0FFFAEFDB88A}" dt="2026-01-30T01:51:02.624" v="1" actId="47"/>
-        <pc:sldMkLst>
-          <pc:docMk/>
-          <pc:sldMk cId="0" sldId="280"/>
-        </pc:sldMkLst>
-      </pc:sldChg>
-      <pc:sldChg chg="del">
-        <pc:chgData name="Zonghua Gu" userId="9a7e1853e1951ef5" providerId="LiveId" clId="{CF1FAA12-072C-4ED5-BA76-0FFFAEFDB88A}" dt="2026-01-30T01:51:02.624" v="1" actId="47"/>
-        <pc:sldMkLst>
-          <pc:docMk/>
-          <pc:sldMk cId="0" sldId="281"/>
-        </pc:sldMkLst>
-      </pc:sldChg>
-      <pc:sldChg chg="del">
-        <pc:chgData name="Zonghua Gu" userId="9a7e1853e1951ef5" providerId="LiveId" clId="{CF1FAA12-072C-4ED5-BA76-0FFFAEFDB88A}" dt="2026-01-30T01:51:02.624" v="1" actId="47"/>
-        <pc:sldMkLst>
-          <pc:docMk/>
-          <pc:sldMk cId="0" sldId="282"/>
-        </pc:sldMkLst>
-      </pc:sldChg>
-      <pc:sldChg chg="del">
-        <pc:chgData name="Zonghua Gu" userId="9a7e1853e1951ef5" providerId="LiveId" clId="{CF1FAA12-072C-4ED5-BA76-0FFFAEFDB88A}" dt="2026-01-30T01:50:57.647" v="0" actId="47"/>
-        <pc:sldMkLst>
-          <pc:docMk/>
-          <pc:sldMk cId="0" sldId="283"/>
-        </pc:sldMkLst>
-      </pc:sldChg>
-      <pc:sldChg chg="del">
-        <pc:chgData name="Zonghua Gu" userId="9a7e1853e1951ef5" providerId="LiveId" clId="{CF1FAA12-072C-4ED5-BA76-0FFFAEFDB88A}" dt="2026-01-30T01:50:57.647" v="0" actId="47"/>
-        <pc:sldMkLst>
-          <pc:docMk/>
-          <pc:sldMk cId="0" sldId="284"/>
-        </pc:sldMkLst>
-      </pc:sldChg>
-      <pc:sldChg chg="del">
-        <pc:chgData name="Zonghua Gu" userId="9a7e1853e1951ef5" providerId="LiveId" clId="{CF1FAA12-072C-4ED5-BA76-0FFFAEFDB88A}" dt="2026-01-30T01:50:57.647" v="0" actId="47"/>
-        <pc:sldMkLst>
-          <pc:docMk/>
-          <pc:sldMk cId="0" sldId="285"/>
-        </pc:sldMkLst>
-      </pc:sldChg>
-      <pc:sldChg chg="del">
-        <pc:chgData name="Zonghua Gu" userId="9a7e1853e1951ef5" providerId="LiveId" clId="{CF1FAA12-072C-4ED5-BA76-0FFFAEFDB88A}" dt="2026-01-30T01:50:57.647" v="0" actId="47"/>
-        <pc:sldMkLst>
-          <pc:docMk/>
-          <pc:sldMk cId="0" sldId="286"/>
-        </pc:sldMkLst>
-      </pc:sldChg>
-      <pc:sldChg chg="del">
-        <pc:chgData name="Zonghua Gu" userId="9a7e1853e1951ef5" providerId="LiveId" clId="{CF1FAA12-072C-4ED5-BA76-0FFFAEFDB88A}" dt="2026-01-30T01:50:57.647" v="0" actId="47"/>
-        <pc:sldMkLst>
-          <pc:docMk/>
-          <pc:sldMk cId="0" sldId="287"/>
-        </pc:sldMkLst>
       </pc:sldChg>
       <pc:sldChg chg="modSp">
         <pc:chgData name="Zonghua Gu" userId="9a7e1853e1951ef5" providerId="LiveId" clId="{CF1FAA12-072C-4ED5-BA76-0FFFAEFDB88A}" dt="2026-01-30T02:09:38.284" v="298" actId="20577"/>
@@ -655,308 +386,6 @@
             <pc:docMk/>
             <pc:sldMk cId="453457216" sldId="1004"/>
             <ac:spMk id="75" creationId="{9033E5DB-6EA3-CE4C-B1A8-C9C804BDCB3F}"/>
-          </ac:spMkLst>
-        </pc:spChg>
-      </pc:sldChg>
-      <pc:sldChg chg="modSp new del mod">
-        <pc:chgData name="Zonghua Gu" userId="9a7e1853e1951ef5" providerId="LiveId" clId="{CF1FAA12-072C-4ED5-BA76-0FFFAEFDB88A}" dt="2026-01-30T02:14:01.754" v="340" actId="47"/>
-        <pc:sldMkLst>
-          <pc:docMk/>
-          <pc:sldMk cId="776083228" sldId="1005"/>
-        </pc:sldMkLst>
-        <pc:spChg chg="mod">
-          <ac:chgData name="Zonghua Gu" userId="9a7e1853e1951ef5" providerId="LiveId" clId="{CF1FAA12-072C-4ED5-BA76-0FFFAEFDB88A}" dt="2026-01-30T01:52:14.813" v="25" actId="27636"/>
-          <ac:spMkLst>
-            <pc:docMk/>
-            <pc:sldMk cId="776083228" sldId="1005"/>
-            <ac:spMk id="2" creationId="{B5ACEECD-F4AB-B661-4F1E-15A8C345B081}"/>
-          </ac:spMkLst>
-        </pc:spChg>
-      </pc:sldChg>
-      <pc:sldChg chg="del">
-        <pc:chgData name="Zonghua Gu" userId="9a7e1853e1951ef5" providerId="LiveId" clId="{CF1FAA12-072C-4ED5-BA76-0FFFAEFDB88A}" dt="2026-01-30T01:51:02.624" v="1" actId="47"/>
-        <pc:sldMkLst>
-          <pc:docMk/>
-          <pc:sldMk cId="90131839" sldId="1006"/>
-        </pc:sldMkLst>
-      </pc:sldChg>
-      <pc:sldChg chg="new del">
-        <pc:chgData name="Zonghua Gu" userId="9a7e1853e1951ef5" providerId="LiveId" clId="{CF1FAA12-072C-4ED5-BA76-0FFFAEFDB88A}" dt="2026-01-30T01:51:45.166" v="19" actId="680"/>
-        <pc:sldMkLst>
-          <pc:docMk/>
-          <pc:sldMk cId="3098061888" sldId="1006"/>
-        </pc:sldMkLst>
-      </pc:sldChg>
-      <pc:sldChg chg="addSp delSp modSp add del mod">
-        <pc:chgData name="Zonghua Gu" userId="9a7e1853e1951ef5" providerId="LiveId" clId="{CF1FAA12-072C-4ED5-BA76-0FFFAEFDB88A}" dt="2026-01-31T19:51:29.779" v="429" actId="47"/>
-        <pc:sldMkLst>
-          <pc:docMk/>
-          <pc:sldMk cId="1533311895" sldId="1259"/>
-        </pc:sldMkLst>
-        <pc:spChg chg="mod">
-          <ac:chgData name="Zonghua Gu" userId="9a7e1853e1951ef5" providerId="LiveId" clId="{CF1FAA12-072C-4ED5-BA76-0FFFAEFDB88A}" dt="2026-01-30T02:05:33.921" v="261" actId="20577"/>
-          <ac:spMkLst>
-            <pc:docMk/>
-            <pc:sldMk cId="1533311895" sldId="1259"/>
-            <ac:spMk id="2" creationId="{897F22ED-37E6-4035-812B-1E8BC9C40AD6}"/>
-          </ac:spMkLst>
-        </pc:spChg>
-        <pc:spChg chg="mod">
-          <ac:chgData name="Zonghua Gu" userId="9a7e1853e1951ef5" providerId="LiveId" clId="{CF1FAA12-072C-4ED5-BA76-0FFFAEFDB88A}" dt="2026-01-30T02:02:04.786" v="132" actId="27636"/>
-          <ac:spMkLst>
-            <pc:docMk/>
-            <pc:sldMk cId="1533311895" sldId="1259"/>
-            <ac:spMk id="3" creationId="{F2B8676C-9679-44F2-BCB3-BE98A23F06B6}"/>
-          </ac:spMkLst>
-        </pc:spChg>
-        <pc:spChg chg="del mod">
-          <ac:chgData name="Zonghua Gu" userId="9a7e1853e1951ef5" providerId="LiveId" clId="{CF1FAA12-072C-4ED5-BA76-0FFFAEFDB88A}" dt="2026-01-30T02:01:51.420" v="123" actId="478"/>
-          <ac:spMkLst>
-            <pc:docMk/>
-            <pc:sldMk cId="1533311895" sldId="1259"/>
-            <ac:spMk id="4" creationId="{F7F685AB-D027-4B53-B120-FDB2B98FA496}"/>
-          </ac:spMkLst>
-        </pc:spChg>
-        <pc:spChg chg="del mod">
-          <ac:chgData name="Zonghua Gu" userId="9a7e1853e1951ef5" providerId="LiveId" clId="{CF1FAA12-072C-4ED5-BA76-0FFFAEFDB88A}" dt="2026-01-30T02:01:59.543" v="129" actId="478"/>
-          <ac:spMkLst>
-            <pc:docMk/>
-            <pc:sldMk cId="1533311895" sldId="1259"/>
-            <ac:spMk id="5" creationId="{C26BE9EC-68F9-4414-BE16-054B52230776}"/>
-          </ac:spMkLst>
-        </pc:spChg>
-        <pc:spChg chg="add del mod">
-          <ac:chgData name="Zonghua Gu" userId="9a7e1853e1951ef5" providerId="LiveId" clId="{CF1FAA12-072C-4ED5-BA76-0FFFAEFDB88A}" dt="2026-01-30T02:01:53.311" v="124" actId="478"/>
-          <ac:spMkLst>
-            <pc:docMk/>
-            <pc:sldMk cId="1533311895" sldId="1259"/>
-            <ac:spMk id="11" creationId="{8C31141E-3B9F-F981-66F5-4ADF3E806281}"/>
-          </ac:spMkLst>
-        </pc:spChg>
-        <pc:picChg chg="mod">
-          <ac:chgData name="Zonghua Gu" userId="9a7e1853e1951ef5" providerId="LiveId" clId="{CF1FAA12-072C-4ED5-BA76-0FFFAEFDB88A}" dt="2026-01-30T02:02:01.430" v="130" actId="1076"/>
-          <ac:picMkLst>
-            <pc:docMk/>
-            <pc:sldMk cId="1533311895" sldId="1259"/>
-            <ac:picMk id="16" creationId="{AC1F5761-15A8-42FC-ACC1-15EF84C22131}"/>
-          </ac:picMkLst>
-        </pc:picChg>
-      </pc:sldChg>
-      <pc:sldChg chg="addSp delSp modSp add del mod modNotes">
-        <pc:chgData name="Zonghua Gu" userId="9a7e1853e1951ef5" providerId="LiveId" clId="{CF1FAA12-072C-4ED5-BA76-0FFFAEFDB88A}" dt="2026-01-31T19:48:46.745" v="371" actId="47"/>
-        <pc:sldMkLst>
-          <pc:docMk/>
-          <pc:sldMk cId="1660582021" sldId="1263"/>
-        </pc:sldMkLst>
-        <pc:spChg chg="mod">
-          <ac:chgData name="Zonghua Gu" userId="9a7e1853e1951ef5" providerId="LiveId" clId="{CF1FAA12-072C-4ED5-BA76-0FFFAEFDB88A}" dt="2026-01-30T02:05:53.011" v="267" actId="1076"/>
-          <ac:spMkLst>
-            <pc:docMk/>
-            <pc:sldMk cId="1660582021" sldId="1263"/>
-            <ac:spMk id="2" creationId="{EAC914B2-C161-4BFE-80A6-71DC7F5DA392}"/>
-          </ac:spMkLst>
-        </pc:spChg>
-        <pc:spChg chg="mod">
-          <ac:chgData name="Zonghua Gu" userId="9a7e1853e1951ef5" providerId="LiveId" clId="{CF1FAA12-072C-4ED5-BA76-0FFFAEFDB88A}" dt="2026-01-30T02:05:47.857" v="266" actId="27636"/>
-          <ac:spMkLst>
-            <pc:docMk/>
-            <pc:sldMk cId="1660582021" sldId="1263"/>
-            <ac:spMk id="3" creationId="{14A8C199-202B-428F-BCFF-DE6A5AABCDCD}"/>
-          </ac:spMkLst>
-        </pc:spChg>
-        <pc:spChg chg="add del mod">
-          <ac:chgData name="Zonghua Gu" userId="9a7e1853e1951ef5" providerId="LiveId" clId="{CF1FAA12-072C-4ED5-BA76-0FFFAEFDB88A}" dt="2026-01-30T02:05:18.998" v="257" actId="478"/>
-          <ac:spMkLst>
-            <pc:docMk/>
-            <pc:sldMk cId="1660582021" sldId="1263"/>
-            <ac:spMk id="4" creationId="{12DEC841-A29A-4EB9-8C03-6AF7348C59F1}"/>
-          </ac:spMkLst>
-        </pc:spChg>
-        <pc:spChg chg="add mod">
-          <ac:chgData name="Zonghua Gu" userId="9a7e1853e1951ef5" providerId="LiveId" clId="{CF1FAA12-072C-4ED5-BA76-0FFFAEFDB88A}" dt="2026-01-30T02:05:15.895" v="256"/>
-          <ac:spMkLst>
-            <pc:docMk/>
-            <pc:sldMk cId="1660582021" sldId="1263"/>
-            <ac:spMk id="7" creationId="{13E7623E-A2FB-7DF0-8900-8FF8EABCCEAC}"/>
-          </ac:spMkLst>
-        </pc:spChg>
-        <pc:picChg chg="mod">
-          <ac:chgData name="Zonghua Gu" userId="9a7e1853e1951ef5" providerId="LiveId" clId="{CF1FAA12-072C-4ED5-BA76-0FFFAEFDB88A}" dt="2026-01-30T02:05:22.660" v="258" actId="1076"/>
-          <ac:picMkLst>
-            <pc:docMk/>
-            <pc:sldMk cId="1660582021" sldId="1263"/>
-            <ac:picMk id="6" creationId="{DF20A3C5-C68E-4D7F-9BC3-42DE800C88DC}"/>
-          </ac:picMkLst>
-        </pc:picChg>
-      </pc:sldChg>
-      <pc:sldChg chg="modSp new del mod">
-        <pc:chgData name="Zonghua Gu" userId="9a7e1853e1951ef5" providerId="LiveId" clId="{CF1FAA12-072C-4ED5-BA76-0FFFAEFDB88A}" dt="2026-01-30T02:14:01.754" v="340" actId="47"/>
-        <pc:sldMkLst>
-          <pc:docMk/>
-          <pc:sldMk cId="3208675320" sldId="1264"/>
-        </pc:sldMkLst>
-        <pc:spChg chg="mod">
-          <ac:chgData name="Zonghua Gu" userId="9a7e1853e1951ef5" providerId="LiveId" clId="{CF1FAA12-072C-4ED5-BA76-0FFFAEFDB88A}" dt="2026-01-30T01:57:13.245" v="48" actId="27636"/>
-          <ac:spMkLst>
-            <pc:docMk/>
-            <pc:sldMk cId="3208675320" sldId="1264"/>
-            <ac:spMk id="2" creationId="{350EABED-AC21-DB48-A90B-A2160B9D069E}"/>
-          </ac:spMkLst>
-        </pc:spChg>
-      </pc:sldChg>
-      <pc:sldChg chg="addSp delSp modSp new del mod modNotes">
-        <pc:chgData name="Zonghua Gu" userId="9a7e1853e1951ef5" providerId="LiveId" clId="{CF1FAA12-072C-4ED5-BA76-0FFFAEFDB88A}" dt="2026-01-31T19:52:31.150" v="456" actId="47"/>
-        <pc:sldMkLst>
-          <pc:docMk/>
-          <pc:sldMk cId="547263288" sldId="1265"/>
-        </pc:sldMkLst>
-        <pc:spChg chg="del mod">
-          <ac:chgData name="Zonghua Gu" userId="9a7e1853e1951ef5" providerId="LiveId" clId="{CF1FAA12-072C-4ED5-BA76-0FFFAEFDB88A}" dt="2026-01-30T02:02:22.798" v="139" actId="478"/>
-          <ac:spMkLst>
-            <pc:docMk/>
-            <pc:sldMk cId="547263288" sldId="1265"/>
-            <ac:spMk id="2" creationId="{52A12F14-5988-6A1B-FA55-4A03309348EC}"/>
-          </ac:spMkLst>
-        </pc:spChg>
-        <pc:spChg chg="mod">
-          <ac:chgData name="Zonghua Gu" userId="9a7e1853e1951ef5" providerId="LiveId" clId="{CF1FAA12-072C-4ED5-BA76-0FFFAEFDB88A}" dt="2026-01-31T19:51:40.701" v="433" actId="21"/>
-          <ac:spMkLst>
-            <pc:docMk/>
-            <pc:sldMk cId="547263288" sldId="1265"/>
-            <ac:spMk id="3" creationId="{AAF29413-F7B6-95BF-4926-E80D77CE1F99}"/>
-          </ac:spMkLst>
-        </pc:spChg>
-        <pc:spChg chg="del">
-          <ac:chgData name="Zonghua Gu" userId="9a7e1853e1951ef5" providerId="LiveId" clId="{CF1FAA12-072C-4ED5-BA76-0FFFAEFDB88A}" dt="2026-01-30T01:59:50.305" v="88" actId="478"/>
-          <ac:spMkLst>
-            <pc:docMk/>
-            <pc:sldMk cId="547263288" sldId="1265"/>
-            <ac:spMk id="4" creationId="{6CB56154-6C17-8163-CA8F-2CF2783B8F35}"/>
-          </ac:spMkLst>
-        </pc:spChg>
-        <pc:spChg chg="add del mod">
-          <ac:chgData name="Zonghua Gu" userId="9a7e1853e1951ef5" providerId="LiveId" clId="{CF1FAA12-072C-4ED5-BA76-0FFFAEFDB88A}" dt="2026-01-30T02:11:50.202" v="335" actId="478"/>
-          <ac:spMkLst>
-            <pc:docMk/>
-            <pc:sldMk cId="547263288" sldId="1265"/>
-            <ac:spMk id="5" creationId="{531B68C6-BFFD-3179-2A95-0846E0CD0311}"/>
-          </ac:spMkLst>
-        </pc:spChg>
-        <pc:spChg chg="add del mod">
-          <ac:chgData name="Zonghua Gu" userId="9a7e1853e1951ef5" providerId="LiveId" clId="{CF1FAA12-072C-4ED5-BA76-0FFFAEFDB88A}" dt="2026-01-30T02:02:24.786" v="141" actId="478"/>
-          <ac:spMkLst>
-            <pc:docMk/>
-            <pc:sldMk cId="547263288" sldId="1265"/>
-            <ac:spMk id="7" creationId="{2643D1DE-05D0-168C-08DB-01FA1A13483A}"/>
-          </ac:spMkLst>
-        </pc:spChg>
-        <pc:spChg chg="add mod">
-          <ac:chgData name="Zonghua Gu" userId="9a7e1853e1951ef5" providerId="LiveId" clId="{CF1FAA12-072C-4ED5-BA76-0FFFAEFDB88A}" dt="2026-01-31T19:46:50.529" v="341" actId="20577"/>
-          <ac:spMkLst>
-            <pc:docMk/>
-            <pc:sldMk cId="547263288" sldId="1265"/>
-            <ac:spMk id="8" creationId="{57B04D29-7352-8C5B-7844-EF4BA6701978}"/>
-          </ac:spMkLst>
-        </pc:spChg>
-      </pc:sldChg>
-      <pc:sldChg chg="addSp delSp modSp add del mod">
-        <pc:chgData name="Zonghua Gu" userId="9a7e1853e1951ef5" providerId="LiveId" clId="{CF1FAA12-072C-4ED5-BA76-0FFFAEFDB88A}" dt="2026-01-31T19:50:03.864" v="389" actId="47"/>
-        <pc:sldMkLst>
-          <pc:docMk/>
-          <pc:sldMk cId="1519989677" sldId="1266"/>
-        </pc:sldMkLst>
-        <pc:spChg chg="add">
-          <ac:chgData name="Zonghua Gu" userId="9a7e1853e1951ef5" providerId="LiveId" clId="{CF1FAA12-072C-4ED5-BA76-0FFFAEFDB88A}" dt="2026-01-30T02:06:05.146" v="268"/>
-          <ac:spMkLst>
-            <pc:docMk/>
-            <pc:sldMk cId="1519989677" sldId="1266"/>
-            <ac:spMk id="2" creationId="{32F46B07-6072-95C2-CA2B-B854CF12F3D2}"/>
-          </ac:spMkLst>
-        </pc:spChg>
-        <pc:spChg chg="del mod">
-          <ac:chgData name="Zonghua Gu" userId="9a7e1853e1951ef5" providerId="LiveId" clId="{CF1FAA12-072C-4ED5-BA76-0FFFAEFDB88A}" dt="2026-01-30T02:07:11.551" v="292" actId="478"/>
-          <ac:spMkLst>
-            <pc:docMk/>
-            <pc:sldMk cId="1519989677" sldId="1266"/>
-            <ac:spMk id="3" creationId="{E54AB79D-1F6D-E649-C730-EF792723F4C9}"/>
-          </ac:spMkLst>
-        </pc:spChg>
-        <pc:spChg chg="add">
-          <ac:chgData name="Zonghua Gu" userId="9a7e1853e1951ef5" providerId="LiveId" clId="{CF1FAA12-072C-4ED5-BA76-0FFFAEFDB88A}" dt="2026-01-30T02:06:10.300" v="274"/>
-          <ac:spMkLst>
-            <pc:docMk/>
-            <pc:sldMk cId="1519989677" sldId="1266"/>
-            <ac:spMk id="4" creationId="{2252E98A-E5CF-B4A0-C55F-72EA8E57A9AC}"/>
-          </ac:spMkLst>
-        </pc:spChg>
-        <pc:spChg chg="mod">
-          <ac:chgData name="Zonghua Gu" userId="9a7e1853e1951ef5" providerId="LiveId" clId="{CF1FAA12-072C-4ED5-BA76-0FFFAEFDB88A}" dt="2026-01-31T19:49:34.174" v="382" actId="20577"/>
-          <ac:spMkLst>
-            <pc:docMk/>
-            <pc:sldMk cId="1519989677" sldId="1266"/>
-            <ac:spMk id="5" creationId="{E81B0F1B-178E-A3B4-B3D2-DD0E379F8F84}"/>
-          </ac:spMkLst>
-        </pc:spChg>
-        <pc:spChg chg="add">
-          <ac:chgData name="Zonghua Gu" userId="9a7e1853e1951ef5" providerId="LiveId" clId="{CF1FAA12-072C-4ED5-BA76-0FFFAEFDB88A}" dt="2026-01-30T02:06:23.964" v="277"/>
-          <ac:spMkLst>
-            <pc:docMk/>
-            <pc:sldMk cId="1519989677" sldId="1266"/>
-            <ac:spMk id="6" creationId="{A92ED87E-2148-A9C7-125B-C2B5CC1ACCC8}"/>
-          </ac:spMkLst>
-        </pc:spChg>
-        <pc:spChg chg="add del mod">
-          <ac:chgData name="Zonghua Gu" userId="9a7e1853e1951ef5" providerId="LiveId" clId="{CF1FAA12-072C-4ED5-BA76-0FFFAEFDB88A}" dt="2026-01-30T02:08:46.731" v="294" actId="478"/>
-          <ac:spMkLst>
-            <pc:docMk/>
-            <pc:sldMk cId="1519989677" sldId="1266"/>
-            <ac:spMk id="9" creationId="{2CEBB505-7C7F-0132-5A2E-70DEB47F8ECF}"/>
-          </ac:spMkLst>
-        </pc:spChg>
-      </pc:sldChg>
-      <pc:sldChg chg="modSp new del mod">
-        <pc:chgData name="Zonghua Gu" userId="9a7e1853e1951ef5" providerId="LiveId" clId="{CF1FAA12-072C-4ED5-BA76-0FFFAEFDB88A}" dt="2026-01-31T19:52:35.282" v="457" actId="47"/>
-        <pc:sldMkLst>
-          <pc:docMk/>
-          <pc:sldMk cId="3484712235" sldId="1267"/>
-        </pc:sldMkLst>
-        <pc:spChg chg="mod">
-          <ac:chgData name="Zonghua Gu" userId="9a7e1853e1951ef5" providerId="LiveId" clId="{CF1FAA12-072C-4ED5-BA76-0FFFAEFDB88A}" dt="2026-01-31T19:47:38.232" v="345" actId="27636"/>
-          <ac:spMkLst>
-            <pc:docMk/>
-            <pc:sldMk cId="3484712235" sldId="1267"/>
-            <ac:spMk id="2" creationId="{8AF3E2BA-2A72-20A1-C4AE-9D113A1EA50A}"/>
-          </ac:spMkLst>
-        </pc:spChg>
-      </pc:sldChg>
-      <pc:sldChg chg="addSp delSp modSp new del mod">
-        <pc:chgData name="Zonghua Gu" userId="9a7e1853e1951ef5" providerId="LiveId" clId="{CF1FAA12-072C-4ED5-BA76-0FFFAEFDB88A}" dt="2026-01-30T02:08:51.449" v="295" actId="47"/>
-        <pc:sldMkLst>
-          <pc:docMk/>
-          <pc:sldMk cId="3572010372" sldId="1267"/>
-        </pc:sldMkLst>
-        <pc:spChg chg="mod">
-          <ac:chgData name="Zonghua Gu" userId="9a7e1853e1951ef5" providerId="LiveId" clId="{CF1FAA12-072C-4ED5-BA76-0FFFAEFDB88A}" dt="2026-01-30T02:06:30.635" v="282" actId="27636"/>
-          <ac:spMkLst>
-            <pc:docMk/>
-            <pc:sldMk cId="3572010372" sldId="1267"/>
-            <ac:spMk id="2" creationId="{4F82ABBB-5119-0030-1291-7BCC2B1D7816}"/>
-          </ac:spMkLst>
-        </pc:spChg>
-        <pc:spChg chg="add del mod">
-          <ac:chgData name="Zonghua Gu" userId="9a7e1853e1951ef5" providerId="LiveId" clId="{CF1FAA12-072C-4ED5-BA76-0FFFAEFDB88A}" dt="2026-01-30T02:06:48.941" v="285" actId="21"/>
-          <ac:spMkLst>
-            <pc:docMk/>
-            <pc:sldMk cId="3572010372" sldId="1267"/>
-            <ac:spMk id="3" creationId="{CA3E53C2-4844-3FF2-CA85-EC4C0A0FA264}"/>
-          </ac:spMkLst>
-        </pc:spChg>
-        <pc:spChg chg="add mod">
-          <ac:chgData name="Zonghua Gu" userId="9a7e1853e1951ef5" providerId="LiveId" clId="{CF1FAA12-072C-4ED5-BA76-0FFFAEFDB88A}" dt="2026-01-30T02:06:30.602" v="281"/>
-          <ac:spMkLst>
-            <pc:docMk/>
-            <pc:sldMk cId="3572010372" sldId="1267"/>
-            <ac:spMk id="5" creationId="{D29273D3-6711-26DF-E974-BA7412969180}"/>
           </ac:spMkLst>
         </pc:spChg>
       </pc:sldChg>
@@ -1022,8 +451,8 @@
           </ac:inkMkLst>
         </pc:inkChg>
       </pc:sldChg>
-      <pc:sldChg chg="modSp new mod">
-        <pc:chgData name="Zonghua Gu" userId="9a7e1853e1951ef5" providerId="LiveId" clId="{CF1FAA12-072C-4ED5-BA76-0FFFAEFDB88A}" dt="2026-01-31T19:52:23.418" v="455" actId="20577"/>
+      <pc:sldChg chg="modSp new mod modNotes">
+        <pc:chgData name="Zonghua Gu" userId="9a7e1853e1951ef5" providerId="LiveId" clId="{CF1FAA12-072C-4ED5-BA76-0FFFAEFDB88A}" dt="2026-02-03T20:48:42.674" v="1065" actId="15"/>
         <pc:sldMkLst>
           <pc:docMk/>
           <pc:sldMk cId="2009370128" sldId="1270"/>
@@ -1037,7 +466,7 @@
           </ac:spMkLst>
         </pc:spChg>
         <pc:spChg chg="mod">
-          <ac:chgData name="Zonghua Gu" userId="9a7e1853e1951ef5" providerId="LiveId" clId="{CF1FAA12-072C-4ED5-BA76-0FFFAEFDB88A}" dt="2026-01-31T19:52:23.418" v="455" actId="20577"/>
+          <ac:chgData name="Zonghua Gu" userId="9a7e1853e1951ef5" providerId="LiveId" clId="{CF1FAA12-072C-4ED5-BA76-0FFFAEFDB88A}" dt="2026-02-03T20:48:42.674" v="1065" actId="15"/>
           <ac:spMkLst>
             <pc:docMk/>
             <pc:sldMk cId="2009370128" sldId="1270"/>
@@ -1129,14 +558,6 @@
             <ac:spMk id="3" creationId="{B430C32A-C044-33BA-A0B9-58AD8EBDEFE5}"/>
           </ac:spMkLst>
         </pc:spChg>
-        <pc:picChg chg="add del">
-          <ac:chgData name="Zonghua Gu" userId="9a7e1853e1951ef5" providerId="LiveId" clId="{CF1FAA12-072C-4ED5-BA76-0FFFAEFDB88A}" dt="2026-01-31T20:03:06.918" v="556" actId="22"/>
-          <ac:picMkLst>
-            <pc:docMk/>
-            <pc:sldMk cId="3511070162" sldId="1273"/>
-            <ac:picMk id="5" creationId="{C800A452-6ACD-D55E-406F-3B2994D076EE}"/>
-          </ac:picMkLst>
-        </pc:picChg>
       </pc:sldChg>
       <pc:sldChg chg="addSp modSp new mod">
         <pc:chgData name="Zonghua Gu" userId="9a7e1853e1951ef5" providerId="LiveId" clId="{CF1FAA12-072C-4ED5-BA76-0FFFAEFDB88A}" dt="2026-01-31T20:04:04.075" v="579" actId="14100"/>
@@ -1199,17 +620,9 @@
             <ac:spMk id="3" creationId="{6445057F-C8B5-F039-C0A2-F1FFE1D4B024}"/>
           </ac:spMkLst>
         </pc:spChg>
-        <pc:picChg chg="add del">
-          <ac:chgData name="Zonghua Gu" userId="9a7e1853e1951ef5" providerId="LiveId" clId="{CF1FAA12-072C-4ED5-BA76-0FFFAEFDB88A}" dt="2026-01-31T20:07:05.826" v="609" actId="22"/>
-          <ac:picMkLst>
-            <pc:docMk/>
-            <pc:sldMk cId="567678026" sldId="1275"/>
-            <ac:picMk id="5" creationId="{3014BCB6-F6B8-D5C2-AA0A-CCC9ACAC4017}"/>
-          </ac:picMkLst>
-        </pc:picChg>
       </pc:sldChg>
-      <pc:sldChg chg="addSp delSp modSp new mod">
-        <pc:chgData name="Zonghua Gu" userId="9a7e1853e1951ef5" providerId="LiveId" clId="{CF1FAA12-072C-4ED5-BA76-0FFFAEFDB88A}" dt="2026-01-31T20:21:12.253" v="870" actId="1035"/>
+      <pc:sldChg chg="addSp delSp modSp new mod modNotes">
+        <pc:chgData name="Zonghua Gu" userId="9a7e1853e1951ef5" providerId="LiveId" clId="{CF1FAA12-072C-4ED5-BA76-0FFFAEFDB88A}" dt="2026-02-03T21:30:20.975" v="1436" actId="20577"/>
         <pc:sldMkLst>
           <pc:docMk/>
           <pc:sldMk cId="984938217" sldId="1276"/>
@@ -1223,47 +636,23 @@
           </ac:spMkLst>
         </pc:spChg>
         <pc:spChg chg="add mod">
-          <ac:chgData name="Zonghua Gu" userId="9a7e1853e1951ef5" providerId="LiveId" clId="{CF1FAA12-072C-4ED5-BA76-0FFFAEFDB88A}" dt="2026-01-31T20:19:32.438" v="857" actId="1076"/>
+          <ac:chgData name="Zonghua Gu" userId="9a7e1853e1951ef5" providerId="LiveId" clId="{CF1FAA12-072C-4ED5-BA76-0FFFAEFDB88A}" dt="2026-02-03T21:30:20.975" v="1436" actId="20577"/>
+          <ac:spMkLst>
+            <pc:docMk/>
+            <pc:sldMk cId="984938217" sldId="1276"/>
+            <ac:spMk id="4" creationId="{3E877413-1616-A14B-00FE-20A83845719F}"/>
+          </ac:spMkLst>
+        </pc:spChg>
+        <pc:spChg chg="add mod">
+          <ac:chgData name="Zonghua Gu" userId="9a7e1853e1951ef5" providerId="LiveId" clId="{CF1FAA12-072C-4ED5-BA76-0FFFAEFDB88A}" dt="2026-02-03T21:29:22.749" v="1413" actId="1037"/>
           <ac:spMkLst>
             <pc:docMk/>
             <pc:sldMk cId="984938217" sldId="1276"/>
             <ac:spMk id="10" creationId="{862069DA-1AB7-D39C-51B2-1D7851BCCC5C}"/>
           </ac:spMkLst>
         </pc:spChg>
-        <pc:spChg chg="add del mod">
-          <ac:chgData name="Zonghua Gu" userId="9a7e1853e1951ef5" providerId="LiveId" clId="{CF1FAA12-072C-4ED5-BA76-0FFFAEFDB88A}" dt="2026-01-31T20:14:53.912" v="726" actId="478"/>
-          <ac:spMkLst>
-            <pc:docMk/>
-            <pc:sldMk cId="984938217" sldId="1276"/>
-            <ac:spMk id="11" creationId="{7C721454-3FCB-B2BE-8DE4-22D74C8B263B}"/>
-          </ac:spMkLst>
-        </pc:spChg>
-        <pc:spChg chg="add del mod">
-          <ac:chgData name="Zonghua Gu" userId="9a7e1853e1951ef5" providerId="LiveId" clId="{CF1FAA12-072C-4ED5-BA76-0FFFAEFDB88A}" dt="2026-01-31T20:20:22.199" v="868" actId="478"/>
-          <ac:spMkLst>
-            <pc:docMk/>
-            <pc:sldMk cId="984938217" sldId="1276"/>
-            <ac:spMk id="12" creationId="{395B6785-2150-FB42-794B-DA63BBB63446}"/>
-          </ac:spMkLst>
-        </pc:spChg>
-        <pc:spChg chg="add del mod">
-          <ac:chgData name="Zonghua Gu" userId="9a7e1853e1951ef5" providerId="LiveId" clId="{CF1FAA12-072C-4ED5-BA76-0FFFAEFDB88A}" dt="2026-01-31T20:20:22.199" v="868" actId="478"/>
-          <ac:spMkLst>
-            <pc:docMk/>
-            <pc:sldMk cId="984938217" sldId="1276"/>
-            <ac:spMk id="13" creationId="{2AF0D72A-BB62-42C3-1238-AF61E329B525}"/>
-          </ac:spMkLst>
-        </pc:spChg>
-        <pc:spChg chg="add del mod">
-          <ac:chgData name="Zonghua Gu" userId="9a7e1853e1951ef5" providerId="LiveId" clId="{CF1FAA12-072C-4ED5-BA76-0FFFAEFDB88A}" dt="2026-01-31T20:19:17.971" v="850" actId="478"/>
-          <ac:spMkLst>
-            <pc:docMk/>
-            <pc:sldMk cId="984938217" sldId="1276"/>
-            <ac:spMk id="14" creationId="{2F2FBDE1-1EFD-20E6-06A3-954F0C667F45}"/>
-          </ac:spMkLst>
-        </pc:spChg>
         <pc:spChg chg="add mod">
-          <ac:chgData name="Zonghua Gu" userId="9a7e1853e1951ef5" providerId="LiveId" clId="{CF1FAA12-072C-4ED5-BA76-0FFFAEFDB88A}" dt="2026-01-31T20:19:15.251" v="849" actId="1076"/>
+          <ac:chgData name="Zonghua Gu" userId="9a7e1853e1951ef5" providerId="LiveId" clId="{CF1FAA12-072C-4ED5-BA76-0FFFAEFDB88A}" dt="2026-02-03T21:30:00.998" v="1432" actId="14100"/>
           <ac:spMkLst>
             <pc:docMk/>
             <pc:sldMk cId="984938217" sldId="1276"/>
@@ -1271,7 +660,7 @@
           </ac:spMkLst>
         </pc:spChg>
         <pc:spChg chg="add mod">
-          <ac:chgData name="Zonghua Gu" userId="9a7e1853e1951ef5" providerId="LiveId" clId="{CF1FAA12-072C-4ED5-BA76-0FFFAEFDB88A}" dt="2026-01-31T20:19:37.437" v="859" actId="20577"/>
+          <ac:chgData name="Zonghua Gu" userId="9a7e1853e1951ef5" providerId="LiveId" clId="{CF1FAA12-072C-4ED5-BA76-0FFFAEFDB88A}" dt="2026-02-03T21:29:22.749" v="1413" actId="1037"/>
           <ac:spMkLst>
             <pc:docMk/>
             <pc:sldMk cId="984938217" sldId="1276"/>
@@ -1279,23 +668,7 @@
           </ac:spMkLst>
         </pc:spChg>
         <pc:spChg chg="add mod">
-          <ac:chgData name="Zonghua Gu" userId="9a7e1853e1951ef5" providerId="LiveId" clId="{CF1FAA12-072C-4ED5-BA76-0FFFAEFDB88A}" dt="2026-01-31T20:19:47.157" v="860"/>
-          <ac:spMkLst>
-            <pc:docMk/>
-            <pc:sldMk cId="984938217" sldId="1276"/>
-            <ac:spMk id="20" creationId="{1E5040AB-144C-CC75-7E9A-7B3D0DF4CE8E}"/>
-          </ac:spMkLst>
-        </pc:spChg>
-        <pc:spChg chg="add mod">
-          <ac:chgData name="Zonghua Gu" userId="9a7e1853e1951ef5" providerId="LiveId" clId="{CF1FAA12-072C-4ED5-BA76-0FFFAEFDB88A}" dt="2026-01-31T20:19:47.157" v="860"/>
-          <ac:spMkLst>
-            <pc:docMk/>
-            <pc:sldMk cId="984938217" sldId="1276"/>
-            <ac:spMk id="23" creationId="{9B7BDC74-F54F-C7AA-F0EE-CA0941E4679B}"/>
-          </ac:spMkLst>
-        </pc:spChg>
-        <pc:spChg chg="add mod">
-          <ac:chgData name="Zonghua Gu" userId="9a7e1853e1951ef5" providerId="LiveId" clId="{CF1FAA12-072C-4ED5-BA76-0FFFAEFDB88A}" dt="2026-01-31T20:20:11.815" v="866" actId="20577"/>
+          <ac:chgData name="Zonghua Gu" userId="9a7e1853e1951ef5" providerId="LiveId" clId="{CF1FAA12-072C-4ED5-BA76-0FFFAEFDB88A}" dt="2026-02-03T21:28:56.050" v="1357" actId="1076"/>
           <ac:spMkLst>
             <pc:docMk/>
             <pc:sldMk cId="984938217" sldId="1276"/>
@@ -1303,7 +676,7 @@
           </ac:spMkLst>
         </pc:spChg>
         <pc:spChg chg="add mod">
-          <ac:chgData name="Zonghua Gu" userId="9a7e1853e1951ef5" providerId="LiveId" clId="{CF1FAA12-072C-4ED5-BA76-0FFFAEFDB88A}" dt="2026-01-31T20:20:14.754" v="867" actId="20577"/>
+          <ac:chgData name="Zonghua Gu" userId="9a7e1853e1951ef5" providerId="LiveId" clId="{CF1FAA12-072C-4ED5-BA76-0FFFAEFDB88A}" dt="2026-02-03T21:28:56.050" v="1357" actId="1076"/>
           <ac:spMkLst>
             <pc:docMk/>
             <pc:sldMk cId="984938217" sldId="1276"/>
@@ -1318,14 +691,6 @@
             <ac:picMk id="5" creationId="{69EFC8D3-3FE6-C337-D8FB-C47D1581280A}"/>
           </ac:picMkLst>
         </pc:picChg>
-        <pc:picChg chg="add del mod">
-          <ac:chgData name="Zonghua Gu" userId="9a7e1853e1951ef5" providerId="LiveId" clId="{CF1FAA12-072C-4ED5-BA76-0FFFAEFDB88A}" dt="2026-01-31T20:08:21.275" v="622" actId="478"/>
-          <ac:picMkLst>
-            <pc:docMk/>
-            <pc:sldMk cId="984938217" sldId="1276"/>
-            <ac:picMk id="7" creationId="{920D7DB6-66CF-4216-55C5-F09C5AE36506}"/>
-          </ac:picMkLst>
-        </pc:picChg>
         <pc:picChg chg="add mod">
           <ac:chgData name="Zonghua Gu" userId="9a7e1853e1951ef5" providerId="LiveId" clId="{CF1FAA12-072C-4ED5-BA76-0FFFAEFDB88A}" dt="2026-01-31T20:15:44.953" v="731" actId="1076"/>
           <ac:picMkLst>
@@ -1335,7 +700,23 @@
           </ac:picMkLst>
         </pc:picChg>
         <pc:cxnChg chg="add mod">
-          <ac:chgData name="Zonghua Gu" userId="9a7e1853e1951ef5" providerId="LiveId" clId="{CF1FAA12-072C-4ED5-BA76-0FFFAEFDB88A}" dt="2026-01-31T20:21:12.253" v="870" actId="1035"/>
+          <ac:chgData name="Zonghua Gu" userId="9a7e1853e1951ef5" providerId="LiveId" clId="{CF1FAA12-072C-4ED5-BA76-0FFFAEFDB88A}" dt="2026-02-03T21:27:48.743" v="1321" actId="571"/>
+          <ac:cxnSpMkLst>
+            <pc:docMk/>
+            <pc:sldMk cId="984938217" sldId="1276"/>
+            <ac:cxnSpMk id="6" creationId="{99775B69-9359-BE05-FF05-41927C767D4C}"/>
+          </ac:cxnSpMkLst>
+        </pc:cxnChg>
+        <pc:cxnChg chg="add mod">
+          <ac:chgData name="Zonghua Gu" userId="9a7e1853e1951ef5" providerId="LiveId" clId="{CF1FAA12-072C-4ED5-BA76-0FFFAEFDB88A}" dt="2026-02-03T21:27:58.414" v="1323" actId="14100"/>
+          <ac:cxnSpMkLst>
+            <pc:docMk/>
+            <pc:sldMk cId="984938217" sldId="1276"/>
+            <ac:cxnSpMk id="7" creationId="{D2C2BD15-8ECB-52A4-A6BE-F726D81D00B0}"/>
+          </ac:cxnSpMkLst>
+        </pc:cxnChg>
+        <pc:cxnChg chg="add mod">
+          <ac:chgData name="Zonghua Gu" userId="9a7e1853e1951ef5" providerId="LiveId" clId="{CF1FAA12-072C-4ED5-BA76-0FFFAEFDB88A}" dt="2026-02-03T21:29:06.883" v="1380" actId="14100"/>
           <ac:cxnSpMkLst>
             <pc:docMk/>
             <pc:sldMk cId="984938217" sldId="1276"/>
@@ -1343,7 +724,7 @@
           </ac:cxnSpMkLst>
         </pc:cxnChg>
         <pc:cxnChg chg="add mod">
-          <ac:chgData name="Zonghua Gu" userId="9a7e1853e1951ef5" providerId="LiveId" clId="{CF1FAA12-072C-4ED5-BA76-0FFFAEFDB88A}" dt="2026-01-31T20:14:51.716" v="725" actId="571"/>
+          <ac:chgData name="Zonghua Gu" userId="9a7e1853e1951ef5" providerId="LiveId" clId="{CF1FAA12-072C-4ED5-BA76-0FFFAEFDB88A}" dt="2026-02-03T21:29:06.883" v="1380" actId="14100"/>
           <ac:cxnSpMkLst>
             <pc:docMk/>
             <pc:sldMk cId="984938217" sldId="1276"/>
@@ -1351,23 +732,7 @@
           </ac:cxnSpMkLst>
         </pc:cxnChg>
         <pc:cxnChg chg="add mod">
-          <ac:chgData name="Zonghua Gu" userId="9a7e1853e1951ef5" providerId="LiveId" clId="{CF1FAA12-072C-4ED5-BA76-0FFFAEFDB88A}" dt="2026-01-31T20:19:47.157" v="860"/>
-          <ac:cxnSpMkLst>
-            <pc:docMk/>
-            <pc:sldMk cId="984938217" sldId="1276"/>
-            <ac:cxnSpMk id="21" creationId="{EA24BE09-BD8B-FDB7-DDA4-5383BBEE2EE2}"/>
-          </ac:cxnSpMkLst>
-        </pc:cxnChg>
-        <pc:cxnChg chg="add mod">
-          <ac:chgData name="Zonghua Gu" userId="9a7e1853e1951ef5" providerId="LiveId" clId="{CF1FAA12-072C-4ED5-BA76-0FFFAEFDB88A}" dt="2026-01-31T20:19:47.157" v="860"/>
-          <ac:cxnSpMkLst>
-            <pc:docMk/>
-            <pc:sldMk cId="984938217" sldId="1276"/>
-            <ac:cxnSpMk id="22" creationId="{8BD13FCC-48E5-7C4F-FFFD-9DE6262C06FC}"/>
-          </ac:cxnSpMkLst>
-        </pc:cxnChg>
-        <pc:cxnChg chg="add mod">
-          <ac:chgData name="Zonghua Gu" userId="9a7e1853e1951ef5" providerId="LiveId" clId="{CF1FAA12-072C-4ED5-BA76-0FFFAEFDB88A}" dt="2026-01-31T20:20:08.247" v="865" actId="1076"/>
+          <ac:chgData name="Zonghua Gu" userId="9a7e1853e1951ef5" providerId="LiveId" clId="{CF1FAA12-072C-4ED5-BA76-0FFFAEFDB88A}" dt="2026-02-03T21:28:50.586" v="1356" actId="14100"/>
           <ac:cxnSpMkLst>
             <pc:docMk/>
             <pc:sldMk cId="984938217" sldId="1276"/>
@@ -1375,7 +740,7 @@
           </ac:cxnSpMkLst>
         </pc:cxnChg>
         <pc:cxnChg chg="add mod">
-          <ac:chgData name="Zonghua Gu" userId="9a7e1853e1951ef5" providerId="LiveId" clId="{CF1FAA12-072C-4ED5-BA76-0FFFAEFDB88A}" dt="2026-01-31T20:20:08.247" v="865" actId="1076"/>
+          <ac:chgData name="Zonghua Gu" userId="9a7e1853e1951ef5" providerId="LiveId" clId="{CF1FAA12-072C-4ED5-BA76-0FFFAEFDB88A}" dt="2026-02-03T21:28:50.586" v="1356" actId="14100"/>
           <ac:cxnSpMkLst>
             <pc:docMk/>
             <pc:sldMk cId="984938217" sldId="1276"/>
@@ -1405,94 +770,6 @@
             <ac:spMk id="3" creationId="{7338710D-4DD3-2A35-EE10-58E7B7432179}"/>
           </ac:spMkLst>
         </pc:spChg>
-        <pc:spChg chg="add mod">
-          <ac:chgData name="Zonghua Gu" userId="9a7e1853e1951ef5" providerId="LiveId" clId="{CF1FAA12-072C-4ED5-BA76-0FFFAEFDB88A}" dt="2026-01-31T20:22:16.404" v="878"/>
-          <ac:spMkLst>
-            <pc:docMk/>
-            <pc:sldMk cId="3667235539" sldId="1277"/>
-            <ac:spMk id="7" creationId="{A5AD0FD4-2A9B-1F65-4688-F3E0A31F9C57}"/>
-          </ac:spMkLst>
-        </pc:spChg>
-        <pc:spChg chg="add mod">
-          <ac:chgData name="Zonghua Gu" userId="9a7e1853e1951ef5" providerId="LiveId" clId="{CF1FAA12-072C-4ED5-BA76-0FFFAEFDB88A}" dt="2026-01-31T20:22:16.404" v="878"/>
-          <ac:spMkLst>
-            <pc:docMk/>
-            <pc:sldMk cId="3667235539" sldId="1277"/>
-            <ac:spMk id="10" creationId="{B4923693-B3C5-3B54-2E93-3C46AE43E6D1}"/>
-          </ac:spMkLst>
-        </pc:spChg>
-        <pc:spChg chg="add mod">
-          <ac:chgData name="Zonghua Gu" userId="9a7e1853e1951ef5" providerId="LiveId" clId="{CF1FAA12-072C-4ED5-BA76-0FFFAEFDB88A}" dt="2026-01-31T20:22:16.404" v="878"/>
-          <ac:spMkLst>
-            <pc:docMk/>
-            <pc:sldMk cId="3667235539" sldId="1277"/>
-            <ac:spMk id="11" creationId="{AC1F019A-7E25-8AC6-8CAE-45BFFD139C60}"/>
-          </ac:spMkLst>
-        </pc:spChg>
-        <pc:spChg chg="add mod">
-          <ac:chgData name="Zonghua Gu" userId="9a7e1853e1951ef5" providerId="LiveId" clId="{CF1FAA12-072C-4ED5-BA76-0FFFAEFDB88A}" dt="2026-01-31T20:22:16.404" v="878"/>
-          <ac:spMkLst>
-            <pc:docMk/>
-            <pc:sldMk cId="3667235539" sldId="1277"/>
-            <ac:spMk id="12" creationId="{B1D0054B-FA41-EEFF-95C5-D7F4E3E1B9C1}"/>
-          </ac:spMkLst>
-        </pc:spChg>
-        <pc:spChg chg="add mod">
-          <ac:chgData name="Zonghua Gu" userId="9a7e1853e1951ef5" providerId="LiveId" clId="{CF1FAA12-072C-4ED5-BA76-0FFFAEFDB88A}" dt="2026-01-31T20:22:16.404" v="878"/>
-          <ac:spMkLst>
-            <pc:docMk/>
-            <pc:sldMk cId="3667235539" sldId="1277"/>
-            <ac:spMk id="15" creationId="{4F280DD1-8DA3-A3BA-9EA3-7305752E9E2F}"/>
-          </ac:spMkLst>
-        </pc:spChg>
-        <pc:picChg chg="add del mod">
-          <ac:chgData name="Zonghua Gu" userId="9a7e1853e1951ef5" providerId="LiveId" clId="{CF1FAA12-072C-4ED5-BA76-0FFFAEFDB88A}" dt="2026-01-31T20:22:28.269" v="886" actId="21"/>
-          <ac:picMkLst>
-            <pc:docMk/>
-            <pc:sldMk cId="3667235539" sldId="1277"/>
-            <ac:picMk id="5" creationId="{B3A8F6A5-3C65-BE86-97C7-3F4FC96D1F1F}"/>
-          </ac:picMkLst>
-        </pc:picChg>
-        <pc:picChg chg="add mod">
-          <ac:chgData name="Zonghua Gu" userId="9a7e1853e1951ef5" providerId="LiveId" clId="{CF1FAA12-072C-4ED5-BA76-0FFFAEFDB88A}" dt="2026-01-31T20:22:16.404" v="878"/>
-          <ac:picMkLst>
-            <pc:docMk/>
-            <pc:sldMk cId="3667235539" sldId="1277"/>
-            <ac:picMk id="6" creationId="{8349F06B-ECEB-0A02-8E14-BE0480E7B438}"/>
-          </ac:picMkLst>
-        </pc:picChg>
-        <pc:cxnChg chg="add mod">
-          <ac:chgData name="Zonghua Gu" userId="9a7e1853e1951ef5" providerId="LiveId" clId="{CF1FAA12-072C-4ED5-BA76-0FFFAEFDB88A}" dt="2026-01-31T20:22:16.404" v="878"/>
-          <ac:cxnSpMkLst>
-            <pc:docMk/>
-            <pc:sldMk cId="3667235539" sldId="1277"/>
-            <ac:cxnSpMk id="8" creationId="{345164F4-39D4-200E-8C10-8EA838558E5F}"/>
-          </ac:cxnSpMkLst>
-        </pc:cxnChg>
-        <pc:cxnChg chg="add mod">
-          <ac:chgData name="Zonghua Gu" userId="9a7e1853e1951ef5" providerId="LiveId" clId="{CF1FAA12-072C-4ED5-BA76-0FFFAEFDB88A}" dt="2026-01-31T20:22:16.404" v="878"/>
-          <ac:cxnSpMkLst>
-            <pc:docMk/>
-            <pc:sldMk cId="3667235539" sldId="1277"/>
-            <ac:cxnSpMk id="9" creationId="{D1A9A81B-FF7F-02D0-E20A-099A7FD54F2E}"/>
-          </ac:cxnSpMkLst>
-        </pc:cxnChg>
-        <pc:cxnChg chg="add mod">
-          <ac:chgData name="Zonghua Gu" userId="9a7e1853e1951ef5" providerId="LiveId" clId="{CF1FAA12-072C-4ED5-BA76-0FFFAEFDB88A}" dt="2026-01-31T20:22:16.404" v="878"/>
-          <ac:cxnSpMkLst>
-            <pc:docMk/>
-            <pc:sldMk cId="3667235539" sldId="1277"/>
-            <ac:cxnSpMk id="13" creationId="{D72F38C0-9042-353F-2D7E-31D99E7216C5}"/>
-          </ac:cxnSpMkLst>
-        </pc:cxnChg>
-        <pc:cxnChg chg="add mod">
-          <ac:chgData name="Zonghua Gu" userId="9a7e1853e1951ef5" providerId="LiveId" clId="{CF1FAA12-072C-4ED5-BA76-0FFFAEFDB88A}" dt="2026-01-31T20:22:16.404" v="878"/>
-          <ac:cxnSpMkLst>
-            <pc:docMk/>
-            <pc:sldMk cId="3667235539" sldId="1277"/>
-            <ac:cxnSpMk id="14" creationId="{7C3144E0-2D60-B7DE-02FB-5676DBA2D770}"/>
-          </ac:cxnSpMkLst>
-        </pc:cxnChg>
       </pc:sldChg>
       <pc:sldChg chg="addSp delSp modSp new mod">
         <pc:chgData name="Zonghua Gu" userId="9a7e1853e1951ef5" providerId="LiveId" clId="{CF1FAA12-072C-4ED5-BA76-0FFFAEFDB88A}" dt="2026-01-31T20:23:13.580" v="899" actId="14100"/>
@@ -1508,54 +785,6 @@
             <ac:spMk id="2" creationId="{842EA774-90F9-6C97-B576-0BDDDE3540C7}"/>
           </ac:spMkLst>
         </pc:spChg>
-        <pc:spChg chg="add del mod">
-          <ac:chgData name="Zonghua Gu" userId="9a7e1853e1951ef5" providerId="LiveId" clId="{CF1FAA12-072C-4ED5-BA76-0FFFAEFDB88A}" dt="2026-01-31T20:22:49.575" v="892" actId="478"/>
-          <ac:spMkLst>
-            <pc:docMk/>
-            <pc:sldMk cId="1323721031" sldId="1278"/>
-            <ac:spMk id="5" creationId="{46A620C5-9293-5A86-A8DE-021C7B584302}"/>
-          </ac:spMkLst>
-        </pc:spChg>
-        <pc:spChg chg="add del mod">
-          <ac:chgData name="Zonghua Gu" userId="9a7e1853e1951ef5" providerId="LiveId" clId="{CF1FAA12-072C-4ED5-BA76-0FFFAEFDB88A}" dt="2026-01-31T20:22:49.575" v="892" actId="478"/>
-          <ac:spMkLst>
-            <pc:docMk/>
-            <pc:sldMk cId="1323721031" sldId="1278"/>
-            <ac:spMk id="8" creationId="{11D761E3-21BD-C0BB-CADE-6B3D1F64A2A5}"/>
-          </ac:spMkLst>
-        </pc:spChg>
-        <pc:spChg chg="add del mod">
-          <ac:chgData name="Zonghua Gu" userId="9a7e1853e1951ef5" providerId="LiveId" clId="{CF1FAA12-072C-4ED5-BA76-0FFFAEFDB88A}" dt="2026-01-31T20:22:49.575" v="892" actId="478"/>
-          <ac:spMkLst>
-            <pc:docMk/>
-            <pc:sldMk cId="1323721031" sldId="1278"/>
-            <ac:spMk id="9" creationId="{D4FAD135-C563-BF5C-054E-13C9C507FD34}"/>
-          </ac:spMkLst>
-        </pc:spChg>
-        <pc:spChg chg="add del mod">
-          <ac:chgData name="Zonghua Gu" userId="9a7e1853e1951ef5" providerId="LiveId" clId="{CF1FAA12-072C-4ED5-BA76-0FFFAEFDB88A}" dt="2026-01-31T20:22:49.575" v="892" actId="478"/>
-          <ac:spMkLst>
-            <pc:docMk/>
-            <pc:sldMk cId="1323721031" sldId="1278"/>
-            <ac:spMk id="10" creationId="{BC5EAF66-D1AC-9838-E3CF-7D35C7A949A9}"/>
-          </ac:spMkLst>
-        </pc:spChg>
-        <pc:spChg chg="add del mod">
-          <ac:chgData name="Zonghua Gu" userId="9a7e1853e1951ef5" providerId="LiveId" clId="{CF1FAA12-072C-4ED5-BA76-0FFFAEFDB88A}" dt="2026-01-31T20:22:49.575" v="892" actId="478"/>
-          <ac:spMkLst>
-            <pc:docMk/>
-            <pc:sldMk cId="1323721031" sldId="1278"/>
-            <ac:spMk id="13" creationId="{B06043BA-2D13-A9E1-803A-2ECA12DD8121}"/>
-          </ac:spMkLst>
-        </pc:spChg>
-        <pc:picChg chg="add del mod">
-          <ac:chgData name="Zonghua Gu" userId="9a7e1853e1951ef5" providerId="LiveId" clId="{CF1FAA12-072C-4ED5-BA76-0FFFAEFDB88A}" dt="2026-01-31T20:22:49.575" v="892" actId="478"/>
-          <ac:picMkLst>
-            <pc:docMk/>
-            <pc:sldMk cId="1323721031" sldId="1278"/>
-            <ac:picMk id="4" creationId="{BF52088D-14BB-2A74-5F2F-399C5B3AA594}"/>
-          </ac:picMkLst>
-        </pc:picChg>
         <pc:picChg chg="add mod">
           <ac:chgData name="Zonghua Gu" userId="9a7e1853e1951ef5" providerId="LiveId" clId="{CF1FAA12-072C-4ED5-BA76-0FFFAEFDB88A}" dt="2026-01-31T20:23:13.580" v="899" actId="14100"/>
           <ac:picMkLst>
@@ -1564,38 +793,6 @@
             <ac:picMk id="14" creationId="{B3A8F6A5-3C65-BE86-97C7-3F4FC96D1F1F}"/>
           </ac:picMkLst>
         </pc:picChg>
-        <pc:cxnChg chg="add del mod">
-          <ac:chgData name="Zonghua Gu" userId="9a7e1853e1951ef5" providerId="LiveId" clId="{CF1FAA12-072C-4ED5-BA76-0FFFAEFDB88A}" dt="2026-01-31T20:22:49.575" v="892" actId="478"/>
-          <ac:cxnSpMkLst>
-            <pc:docMk/>
-            <pc:sldMk cId="1323721031" sldId="1278"/>
-            <ac:cxnSpMk id="6" creationId="{CC00E61E-358C-3A85-EF94-96147C9BFC15}"/>
-          </ac:cxnSpMkLst>
-        </pc:cxnChg>
-        <pc:cxnChg chg="add del mod">
-          <ac:chgData name="Zonghua Gu" userId="9a7e1853e1951ef5" providerId="LiveId" clId="{CF1FAA12-072C-4ED5-BA76-0FFFAEFDB88A}" dt="2026-01-31T20:22:49.575" v="892" actId="478"/>
-          <ac:cxnSpMkLst>
-            <pc:docMk/>
-            <pc:sldMk cId="1323721031" sldId="1278"/>
-            <ac:cxnSpMk id="7" creationId="{5E5899ED-54C8-7FDA-8D5E-7683ED96B7A7}"/>
-          </ac:cxnSpMkLst>
-        </pc:cxnChg>
-        <pc:cxnChg chg="add del mod">
-          <ac:chgData name="Zonghua Gu" userId="9a7e1853e1951ef5" providerId="LiveId" clId="{CF1FAA12-072C-4ED5-BA76-0FFFAEFDB88A}" dt="2026-01-31T20:22:49.575" v="892" actId="478"/>
-          <ac:cxnSpMkLst>
-            <pc:docMk/>
-            <pc:sldMk cId="1323721031" sldId="1278"/>
-            <ac:cxnSpMk id="11" creationId="{4E11DF5A-D6DB-6FE4-B58C-215F458E130D}"/>
-          </ac:cxnSpMkLst>
-        </pc:cxnChg>
-        <pc:cxnChg chg="add del mod">
-          <ac:chgData name="Zonghua Gu" userId="9a7e1853e1951ef5" providerId="LiveId" clId="{CF1FAA12-072C-4ED5-BA76-0FFFAEFDB88A}" dt="2026-01-31T20:22:49.575" v="892" actId="478"/>
-          <ac:cxnSpMkLst>
-            <pc:docMk/>
-            <pc:sldMk cId="1323721031" sldId="1278"/>
-            <ac:cxnSpMk id="12" creationId="{82712FAB-6D5A-830A-9FDF-F8A79A64FB5C}"/>
-          </ac:cxnSpMkLst>
-        </pc:cxnChg>
       </pc:sldChg>
       <pc:sldChg chg="addSp modSp new mod">
         <pc:chgData name="Zonghua Gu" userId="9a7e1853e1951ef5" providerId="LiveId" clId="{CF1FAA12-072C-4ED5-BA76-0FFFAEFDB88A}" dt="2026-01-31T20:26:34.698" v="973" actId="20577"/>
@@ -1629,7 +826,7 @@
         </pc:picChg>
       </pc:sldChg>
       <pc:sldChg chg="addSp modSp new mod">
-        <pc:chgData name="Zonghua Gu" userId="9a7e1853e1951ef5" providerId="LiveId" clId="{CF1FAA12-072C-4ED5-BA76-0FFFAEFDB88A}" dt="2026-01-31T21:33:34.221" v="1015" actId="1076"/>
+        <pc:chgData name="Zonghua Gu" userId="9a7e1853e1951ef5" providerId="LiveId" clId="{CF1FAA12-072C-4ED5-BA76-0FFFAEFDB88A}" dt="2026-02-03T21:09:54.773" v="1305" actId="20577"/>
         <pc:sldMkLst>
           <pc:docMk/>
           <pc:sldMk cId="123181104" sldId="1280"/>
@@ -1643,7 +840,7 @@
           </ac:spMkLst>
         </pc:spChg>
         <pc:spChg chg="mod">
-          <ac:chgData name="Zonghua Gu" userId="9a7e1853e1951ef5" providerId="LiveId" clId="{CF1FAA12-072C-4ED5-BA76-0FFFAEFDB88A}" dt="2026-01-31T20:28:44.845" v="1014" actId="27636"/>
+          <ac:chgData name="Zonghua Gu" userId="9a7e1853e1951ef5" providerId="LiveId" clId="{CF1FAA12-072C-4ED5-BA76-0FFFAEFDB88A}" dt="2026-02-03T21:09:54.773" v="1305" actId="20577"/>
           <ac:spMkLst>
             <pc:docMk/>
             <pc:sldMk cId="123181104" sldId="1280"/>
@@ -1665,22 +862,6 @@
           <pc:docMk/>
           <pc:sldMasterMk cId="0" sldId="2147483670"/>
         </pc:sldMasterMkLst>
-        <pc:sldLayoutChg chg="del">
-          <pc:chgData name="Zonghua Gu" userId="9a7e1853e1951ef5" providerId="LiveId" clId="{CF1FAA12-072C-4ED5-BA76-0FFFAEFDB88A}" dt="2026-01-30T01:51:02.624" v="1" actId="47"/>
-          <pc:sldLayoutMkLst>
-            <pc:docMk/>
-            <pc:sldMasterMk cId="0" sldId="2147483670"/>
-            <pc:sldLayoutMk cId="0" sldId="2147483650"/>
-          </pc:sldLayoutMkLst>
-        </pc:sldLayoutChg>
-        <pc:sldLayoutChg chg="del">
-          <pc:chgData name="Zonghua Gu" userId="9a7e1853e1951ef5" providerId="LiveId" clId="{CF1FAA12-072C-4ED5-BA76-0FFFAEFDB88A}" dt="2026-01-30T01:51:02.624" v="1" actId="47"/>
-          <pc:sldLayoutMkLst>
-            <pc:docMk/>
-            <pc:sldMasterMk cId="0" sldId="2147483670"/>
-            <pc:sldLayoutMk cId="0" sldId="2147483658"/>
-          </pc:sldLayoutMkLst>
-        </pc:sldLayoutChg>
       </pc:sldMasterChg>
     </pc:docChg>
   </pc:docChgLst>
@@ -3379,7 +2560,12 @@
             <p:ph type="sldImg"/>
           </p:nvPr>
         </p:nvSpPr>
-        <p:spPr/>
+        <p:spPr>
+          <a:xfrm>
+            <a:off x="381000" y="685800"/>
+            <a:ext cx="6096000" cy="3429000"/>
+          </a:xfrm>
+        </p:spPr>
       </p:sp>
       <p:sp>
         <p:nvSpPr>
@@ -3440,6 +2626,72 @@
     <p:extLst>
       <p:ext uri="{BB962C8B-B14F-4D97-AF65-F5344CB8AC3E}">
         <p14:creationId xmlns:p14="http://schemas.microsoft.com/office/powerpoint/2010/main" val="704971779"/>
+      </p:ext>
+    </p:extLst>
+  </p:cSld>
+  <p:clrMapOvr>
+    <a:masterClrMapping/>
+  </p:clrMapOvr>
+</p:notes>
+</file>
+
+<file path=ppt/notesSlides/notesSlide6.xml><?xml version="1.0" encoding="utf-8"?>
+<p:notes xmlns:a="http://schemas.openxmlformats.org/drawingml/2006/main" xmlns:r="http://schemas.openxmlformats.org/officeDocument/2006/relationships" xmlns:p="http://schemas.openxmlformats.org/presentationml/2006/main">
+  <p:cSld>
+    <p:spTree>
+      <p:nvGrpSpPr>
+        <p:cNvPr id="1" name=""/>
+        <p:cNvGrpSpPr/>
+        <p:nvPr/>
+      </p:nvGrpSpPr>
+      <p:grpSpPr>
+        <a:xfrm>
+          <a:off x="0" y="0"/>
+          <a:ext cx="0" cy="0"/>
+          <a:chOff x="0" y="0"/>
+          <a:chExt cx="0" cy="0"/>
+        </a:xfrm>
+      </p:grpSpPr>
+      <p:sp>
+        <p:nvSpPr>
+          <p:cNvPr id="2" name="Slide Image Placeholder 1"/>
+          <p:cNvSpPr>
+            <a:spLocks noGrp="1" noRot="1" noChangeAspect="1"/>
+          </p:cNvSpPr>
+          <p:nvPr>
+            <p:ph type="sldImg"/>
+          </p:nvPr>
+        </p:nvSpPr>
+        <p:spPr>
+          <a:xfrm>
+            <a:off x="381000" y="685800"/>
+            <a:ext cx="6096000" cy="3429000"/>
+          </a:xfrm>
+        </p:spPr>
+      </p:sp>
+      <p:sp>
+        <p:nvSpPr>
+          <p:cNvPr id="3" name="Notes Placeholder 2"/>
+          <p:cNvSpPr>
+            <a:spLocks noGrp="1"/>
+          </p:cNvSpPr>
+          <p:nvPr>
+            <p:ph type="body" idx="1"/>
+          </p:nvPr>
+        </p:nvSpPr>
+        <p:spPr/>
+        <p:txBody>
+          <a:bodyPr/>
+          <a:lstStyle/>
+          <a:p>
+            <a:endParaRPr lang="en-US" dirty="0"/>
+          </a:p>
+        </p:txBody>
+      </p:sp>
+    </p:spTree>
+    <p:extLst>
+      <p:ext uri="{BB962C8B-B14F-4D97-AF65-F5344CB8AC3E}">
+        <p14:creationId xmlns:p14="http://schemas.microsoft.com/office/powerpoint/2010/main" val="2418610222"/>
       </p:ext>
     </p:extLst>
   </p:cSld>
@@ -16341,7 +15593,7 @@
           <p:nvPr/>
         </p:nvPicPr>
         <p:blipFill>
-          <a:blip r:embed="rId2"/>
+          <a:blip r:embed="rId3"/>
           <a:stretch>
             <a:fillRect/>
           </a:stretch>
@@ -16371,7 +15623,7 @@
           <p:nvPr/>
         </p:nvPicPr>
         <p:blipFill>
-          <a:blip r:embed="rId3"/>
+          <a:blip r:embed="rId4"/>
           <a:stretch>
             <a:fillRect/>
           </a:stretch>
@@ -16400,7 +15652,7 @@
         </p:nvSpPr>
         <p:spPr>
           <a:xfrm>
-            <a:off x="5519005" y="1294760"/>
+            <a:off x="5512909" y="1337432"/>
             <a:ext cx="280790" cy="261610"/>
           </a:xfrm>
           <a:prstGeom prst="rect">
@@ -16439,13 +15691,15 @@
               </a:ext>
             </a:extLst>
           </p:cNvPr>
-          <p:cNvCxnSpPr/>
+          <p:cNvCxnSpPr>
+            <a:cxnSpLocks/>
+          </p:cNvCxnSpPr>
           <p:nvPr/>
         </p:nvCxnSpPr>
         <p:spPr>
           <a:xfrm flipH="1" flipV="1">
-            <a:off x="5724144" y="1426464"/>
-            <a:ext cx="1213104" cy="52002"/>
+            <a:off x="5711723" y="1464657"/>
+            <a:ext cx="1225525" cy="13809"/>
           </a:xfrm>
           <a:prstGeom prst="straightConnector1">
             <a:avLst/>
@@ -16478,13 +15732,15 @@
               </a:ext>
             </a:extLst>
           </p:cNvPr>
-          <p:cNvCxnSpPr/>
+          <p:cNvCxnSpPr>
+            <a:cxnSpLocks/>
+          </p:cNvCxnSpPr>
           <p:nvPr/>
         </p:nvCxnSpPr>
         <p:spPr>
-          <a:xfrm flipH="1" flipV="1">
-            <a:off x="5724144" y="1621463"/>
-            <a:ext cx="1213104" cy="52002"/>
+          <a:xfrm flipH="1">
+            <a:off x="5711723" y="1673465"/>
+            <a:ext cx="1225525" cy="0"/>
           </a:xfrm>
           <a:prstGeom prst="straightConnector1">
             <a:avLst/>
@@ -16522,8 +15778,8 @@
         </p:nvSpPr>
         <p:spPr>
           <a:xfrm>
-            <a:off x="8035921" y="1090548"/>
-            <a:ext cx="1045573" cy="1246276"/>
+            <a:off x="8035921" y="808893"/>
+            <a:ext cx="1087879" cy="1367911"/>
           </a:xfrm>
           <a:prstGeom prst="rect">
             <a:avLst/>
@@ -16548,15 +15804,15 @@
           <a:lstStyle/>
           <a:p>
             <a:r>
-              <a:rPr lang="en-US" sz="1000" i="1" dirty="0"/>
+              <a:rPr lang="en-US" sz="1050" i="1" dirty="0"/>
               <a:t>t</a:t>
             </a:r>
             <a:r>
-              <a:rPr lang="en-US" sz="1000" i="1" baseline="-25000" dirty="0"/>
+              <a:rPr lang="en-US" sz="1050" i="1" baseline="-25000" dirty="0"/>
               <a:t>1</a:t>
             </a:r>
             <a:r>
-              <a:rPr lang="en-US" sz="1000" dirty="0">
+              <a:rPr lang="en-US" sz="1050" dirty="0">
                 <a:latin typeface="Roboto" panose="02000000000000000000" pitchFamily="2" charset="0"/>
                 <a:ea typeface="Roboto" panose="02000000000000000000" pitchFamily="2" charset="0"/>
                 <a:cs typeface="Roboto" panose="02000000000000000000" pitchFamily="2" charset="0"/>
@@ -16564,7 +15820,7 @@
               <a:t>: when P</a:t>
             </a:r>
             <a:r>
-              <a:rPr lang="en-US" sz="1000" baseline="-25000" dirty="0">
+              <a:rPr lang="en-US" sz="1050" baseline="-25000" dirty="0">
                 <a:latin typeface="Roboto" panose="02000000000000000000" pitchFamily="2" charset="0"/>
                 <a:ea typeface="Roboto" panose="02000000000000000000" pitchFamily="2" charset="0"/>
                 <a:cs typeface="Roboto" panose="02000000000000000000" pitchFamily="2" charset="0"/>
@@ -16572,14 +15828,14 @@
               <a:t>1</a:t>
             </a:r>
             <a:r>
-              <a:rPr lang="en-US" sz="1000" dirty="0">
+              <a:rPr lang="en-US" sz="1050" dirty="0">
                 <a:latin typeface="Roboto" panose="02000000000000000000" pitchFamily="2" charset="0"/>
                 <a:ea typeface="Roboto" panose="02000000000000000000" pitchFamily="2" charset="0"/>
                 <a:cs typeface="Roboto" panose="02000000000000000000" pitchFamily="2" charset="0"/>
               </a:rPr>
               <a:t> leaves Node B</a:t>
             </a:r>
-            <a:endParaRPr lang="en-US" sz="1000" baseline="-25000" dirty="0">
+            <a:endParaRPr lang="en-US" sz="1050" baseline="-25000" dirty="0">
               <a:latin typeface="Roboto" panose="02000000000000000000" pitchFamily="2" charset="0"/>
               <a:ea typeface="Roboto" panose="02000000000000000000" pitchFamily="2" charset="0"/>
               <a:cs typeface="Roboto" panose="02000000000000000000" pitchFamily="2" charset="0"/>
@@ -16587,15 +15843,15 @@
           </a:p>
           <a:p>
             <a:r>
-              <a:rPr lang="en-US" sz="1000" i="1" dirty="0"/>
+              <a:rPr lang="en-US" sz="1050" i="1" dirty="0"/>
               <a:t>t</a:t>
             </a:r>
             <a:r>
-              <a:rPr lang="en-US" sz="1000" i="1" baseline="-25000" dirty="0"/>
+              <a:rPr lang="en-US" sz="1050" i="1" baseline="-25000" dirty="0"/>
               <a:t>2</a:t>
             </a:r>
             <a:r>
-              <a:rPr lang="en-US" sz="1000" dirty="0">
+              <a:rPr lang="en-US" sz="1050" dirty="0">
                 <a:latin typeface="Roboto" panose="02000000000000000000" pitchFamily="2" charset="0"/>
                 <a:ea typeface="Roboto" panose="02000000000000000000" pitchFamily="2" charset="0"/>
                 <a:cs typeface="Roboto" panose="02000000000000000000" pitchFamily="2" charset="0"/>
@@ -16603,7 +15859,7 @@
               <a:t>: when P</a:t>
             </a:r>
             <a:r>
-              <a:rPr lang="en-US" sz="1000" baseline="-25000" dirty="0">
+              <a:rPr lang="en-US" sz="1050" baseline="-25000" dirty="0">
                 <a:latin typeface="Roboto" panose="02000000000000000000" pitchFamily="2" charset="0"/>
                 <a:ea typeface="Roboto" panose="02000000000000000000" pitchFamily="2" charset="0"/>
                 <a:cs typeface="Roboto" panose="02000000000000000000" pitchFamily="2" charset="0"/>
@@ -16611,14 +15867,14 @@
               <a:t>2</a:t>
             </a:r>
             <a:r>
-              <a:rPr lang="en-US" sz="1000" dirty="0">
+              <a:rPr lang="en-US" sz="1050" dirty="0">
                 <a:latin typeface="Roboto" panose="02000000000000000000" pitchFamily="2" charset="0"/>
                 <a:ea typeface="Roboto" panose="02000000000000000000" pitchFamily="2" charset="0"/>
                 <a:cs typeface="Roboto" panose="02000000000000000000" pitchFamily="2" charset="0"/>
               </a:rPr>
               <a:t> has fully arrived at Node B, and is ready to transmitted to Node C</a:t>
             </a:r>
-            <a:endParaRPr lang="en-US" sz="1000" baseline="-25000" dirty="0">
+            <a:endParaRPr lang="en-US" sz="1050" baseline="-25000" dirty="0">
               <a:latin typeface="Roboto" panose="02000000000000000000" pitchFamily="2" charset="0"/>
               <a:ea typeface="Roboto" panose="02000000000000000000" pitchFamily="2" charset="0"/>
               <a:cs typeface="Roboto" panose="02000000000000000000" pitchFamily="2" charset="0"/>
@@ -16640,7 +15896,7 @@
         </p:nvSpPr>
         <p:spPr>
           <a:xfrm>
-            <a:off x="5519005" y="1464657"/>
+            <a:off x="5512909" y="1507329"/>
             <a:ext cx="280790" cy="261610"/>
           </a:xfrm>
           <a:prstGeom prst="rect">
@@ -16684,7 +15940,7 @@
         </p:nvSpPr>
         <p:spPr>
           <a:xfrm>
-            <a:off x="5519005" y="3704752"/>
+            <a:off x="5506584" y="3765675"/>
             <a:ext cx="280790" cy="261610"/>
           </a:xfrm>
           <a:prstGeom prst="rect">
@@ -16723,13 +15979,15 @@
               </a:ext>
             </a:extLst>
           </p:cNvPr>
-          <p:cNvCxnSpPr/>
+          <p:cNvCxnSpPr>
+            <a:cxnSpLocks/>
+          </p:cNvCxnSpPr>
           <p:nvPr/>
         </p:nvCxnSpPr>
         <p:spPr>
           <a:xfrm flipH="1" flipV="1">
-            <a:off x="5724144" y="3848648"/>
-            <a:ext cx="1213104" cy="52002"/>
+            <a:off x="5711723" y="3896480"/>
+            <a:ext cx="1225525" cy="4170"/>
           </a:xfrm>
           <a:prstGeom prst="straightConnector1">
             <a:avLst/>
@@ -16762,13 +16020,15 @@
               </a:ext>
             </a:extLst>
           </p:cNvPr>
-          <p:cNvCxnSpPr/>
+          <p:cNvCxnSpPr>
+            <a:cxnSpLocks/>
+          </p:cNvCxnSpPr>
           <p:nvPr/>
         </p:nvCxnSpPr>
         <p:spPr>
-          <a:xfrm flipH="1" flipV="1">
-            <a:off x="5724144" y="4031455"/>
-            <a:ext cx="1213104" cy="52002"/>
+          <a:xfrm flipH="1">
+            <a:off x="5711723" y="4083457"/>
+            <a:ext cx="1225525" cy="0"/>
           </a:xfrm>
           <a:prstGeom prst="straightConnector1">
             <a:avLst/>
@@ -16806,7 +16066,7 @@
         </p:nvSpPr>
         <p:spPr>
           <a:xfrm>
-            <a:off x="5519005" y="3874649"/>
+            <a:off x="5506584" y="3935572"/>
             <a:ext cx="280790" cy="261610"/>
           </a:xfrm>
           <a:prstGeom prst="rect">
@@ -16836,6 +16096,487 @@
           </a:p>
         </p:txBody>
       </p:sp>
+      <mc:AlternateContent xmlns:mc="http://schemas.openxmlformats.org/markup-compatibility/2006">
+        <mc:Choice xmlns:a14="http://schemas.microsoft.com/office/drawing/2010/main" Requires="a14">
+          <p:sp>
+            <p:nvSpPr>
+              <p:cNvPr id="4" name="TextBox 3">
+                <a:extLst>
+                  <a:ext uri="{FF2B5EF4-FFF2-40B4-BE49-F238E27FC236}">
+                    <a16:creationId xmlns:a16="http://schemas.microsoft.com/office/drawing/2014/main" id="{3E877413-1616-A14B-00FE-20A83845719F}"/>
+                  </a:ext>
+                </a:extLst>
+              </p:cNvPr>
+              <p:cNvSpPr txBox="1"/>
+              <p:nvPr/>
+            </p:nvSpPr>
+            <p:spPr>
+              <a:xfrm>
+                <a:off x="6079899" y="2207058"/>
+                <a:ext cx="3043901" cy="860557"/>
+              </a:xfrm>
+              <a:prstGeom prst="rect">
+                <a:avLst/>
+              </a:prstGeom>
+              <a:solidFill>
+                <a:schemeClr val="bg1">
+                  <a:lumMod val="85000"/>
+                </a:schemeClr>
+              </a:solidFill>
+            </p:spPr>
+            <p:style>
+              <a:lnRef idx="1">
+                <a:schemeClr val="dk1"/>
+              </a:lnRef>
+              <a:fillRef idx="2">
+                <a:schemeClr val="dk1"/>
+              </a:fillRef>
+              <a:effectRef idx="1">
+                <a:schemeClr val="dk1"/>
+              </a:effectRef>
+              <a:fontRef idx="minor">
+                <a:schemeClr val="dk1"/>
+              </a:fontRef>
+            </p:style>
+            <p:txBody>
+              <a:bodyPr wrap="square" rtlCol="0">
+                <a:spAutoFit/>
+              </a:bodyPr>
+              <a:lstStyle/>
+              <a:p>
+                <a14:m>
+                  <m:oMath xmlns:m="http://schemas.openxmlformats.org/officeDocument/2006/math">
+                    <m:r>
+                      <a:rPr lang="en-US" sz="1100" b="0" i="1" dirty="0" smtClean="0">
+                        <a:latin typeface="Cambria Math" panose="02040503050406030204" pitchFamily="18" charset="0"/>
+                      </a:rPr>
+                      <m:t>8</m:t>
+                    </m:r>
+                    <m:sSub>
+                      <m:sSubPr>
+                        <m:ctrlPr>
+                          <a:rPr lang="en-US" sz="1100" b="0" i="1" dirty="0" smtClean="0">
+                            <a:latin typeface="Cambria Math" panose="02040503050406030204" pitchFamily="18" charset="0"/>
+                          </a:rPr>
+                        </m:ctrlPr>
+                      </m:sSubPr>
+                      <m:e>
+                        <m:r>
+                          <a:rPr lang="en-US" sz="1100" b="0" i="1" dirty="0" smtClean="0">
+                            <a:latin typeface="Cambria Math" panose="02040503050406030204" pitchFamily="18" charset="0"/>
+                          </a:rPr>
+                          <m:t>𝐷</m:t>
+                        </m:r>
+                      </m:e>
+                      <m:sub>
+                        <m:r>
+                          <a:rPr lang="en-US" sz="1100" b="0" i="1" dirty="0" smtClean="0">
+                            <a:latin typeface="Cambria Math" panose="02040503050406030204" pitchFamily="18" charset="0"/>
+                          </a:rPr>
+                          <m:t>1</m:t>
+                        </m:r>
+                      </m:sub>
+                    </m:sSub>
+                    <m:r>
+                      <a:rPr lang="en-US" sz="1100" b="0" i="1" dirty="0" smtClean="0">
+                        <a:latin typeface="Cambria Math" panose="02040503050406030204" pitchFamily="18" charset="0"/>
+                      </a:rPr>
+                      <m:t>/</m:t>
+                    </m:r>
+                    <m:sSub>
+                      <m:sSubPr>
+                        <m:ctrlPr>
+                          <a:rPr lang="en-US" sz="1100" b="0" i="1" dirty="0" smtClean="0">
+                            <a:latin typeface="Cambria Math" panose="02040503050406030204" pitchFamily="18" charset="0"/>
+                          </a:rPr>
+                        </m:ctrlPr>
+                      </m:sSubPr>
+                      <m:e>
+                        <m:r>
+                          <a:rPr lang="en-US" sz="1100" b="0" i="1" dirty="0" smtClean="0">
+                            <a:latin typeface="Cambria Math" panose="02040503050406030204" pitchFamily="18" charset="0"/>
+                          </a:rPr>
+                          <m:t>𝑇</m:t>
+                        </m:r>
+                      </m:e>
+                      <m:sub>
+                        <m:r>
+                          <a:rPr lang="en-US" sz="1100" b="0" i="1" dirty="0" smtClean="0">
+                            <a:latin typeface="Cambria Math" panose="02040503050406030204" pitchFamily="18" charset="0"/>
+                          </a:rPr>
+                          <m:t>2</m:t>
+                        </m:r>
+                      </m:sub>
+                    </m:sSub>
+                  </m:oMath>
+                </a14:m>
+                <a:r>
+                  <a:rPr lang="en-US" sz="1100" dirty="0"/>
+                  <a:t>: Trans. Delay of Packet 1 on Link 2</a:t>
+                </a:r>
+              </a:p>
+              <a:p>
+                <a14:m>
+                  <m:oMath xmlns:m="http://schemas.openxmlformats.org/officeDocument/2006/math">
+                    <m:r>
+                      <a:rPr lang="en-US" sz="1100" i="1" dirty="0">
+                        <a:latin typeface="Cambria Math" panose="02040503050406030204" pitchFamily="18" charset="0"/>
+                      </a:rPr>
+                      <m:t>8</m:t>
+                    </m:r>
+                    <m:sSub>
+                      <m:sSubPr>
+                        <m:ctrlPr>
+                          <a:rPr lang="en-US" sz="1100" i="1" dirty="0">
+                            <a:latin typeface="Cambria Math" panose="02040503050406030204" pitchFamily="18" charset="0"/>
+                          </a:rPr>
+                        </m:ctrlPr>
+                      </m:sSubPr>
+                      <m:e>
+                        <m:r>
+                          <a:rPr lang="en-US" sz="1100" i="1" dirty="0">
+                            <a:latin typeface="Cambria Math" panose="02040503050406030204" pitchFamily="18" charset="0"/>
+                          </a:rPr>
+                          <m:t>𝐷</m:t>
+                        </m:r>
+                      </m:e>
+                      <m:sub>
+                        <m:r>
+                          <a:rPr lang="en-US" sz="1100" b="0" i="1" dirty="0" smtClean="0">
+                            <a:latin typeface="Cambria Math" panose="02040503050406030204" pitchFamily="18" charset="0"/>
+                          </a:rPr>
+                          <m:t>2</m:t>
+                        </m:r>
+                      </m:sub>
+                    </m:sSub>
+                    <m:r>
+                      <a:rPr lang="en-US" sz="1100" i="1" dirty="0">
+                        <a:latin typeface="Cambria Math" panose="02040503050406030204" pitchFamily="18" charset="0"/>
+                      </a:rPr>
+                      <m:t>/</m:t>
+                    </m:r>
+                    <m:sSub>
+                      <m:sSubPr>
+                        <m:ctrlPr>
+                          <a:rPr lang="en-US" sz="1100" i="1" dirty="0">
+                            <a:latin typeface="Cambria Math" panose="02040503050406030204" pitchFamily="18" charset="0"/>
+                          </a:rPr>
+                        </m:ctrlPr>
+                      </m:sSubPr>
+                      <m:e>
+                        <m:r>
+                          <a:rPr lang="en-US" sz="1100" i="1" dirty="0">
+                            <a:latin typeface="Cambria Math" panose="02040503050406030204" pitchFamily="18" charset="0"/>
+                          </a:rPr>
+                          <m:t>𝑇</m:t>
+                        </m:r>
+                      </m:e>
+                      <m:sub>
+                        <m:r>
+                          <a:rPr lang="en-US" sz="1100" b="0" i="1" dirty="0" smtClean="0">
+                            <a:latin typeface="Cambria Math" panose="02040503050406030204" pitchFamily="18" charset="0"/>
+                          </a:rPr>
+                          <m:t>1</m:t>
+                        </m:r>
+                      </m:sub>
+                    </m:sSub>
+                  </m:oMath>
+                </a14:m>
+                <a:r>
+                  <a:rPr lang="en-US" sz="1100" dirty="0"/>
+                  <a:t>: Trans. Delay of Packet 2 on Link 1</a:t>
+                </a:r>
+              </a:p>
+              <a:p>
+                <a14:m>
+                  <m:oMath xmlns:m="http://schemas.openxmlformats.org/officeDocument/2006/math">
+                    <m:r>
+                      <m:rPr>
+                        <m:sty m:val="p"/>
+                      </m:rPr>
+                      <a:rPr lang="en-US" sz="1100" i="1" dirty="0" smtClean="0">
+                        <a:latin typeface="Cambria Math" panose="02040503050406030204" pitchFamily="18" charset="0"/>
+                      </a:rPr>
+                      <m:t>max</m:t>
+                    </m:r>
+                    <m:r>
+                      <a:rPr lang="en-US" sz="1100" i="1" dirty="0" smtClean="0">
+                        <a:latin typeface="Cambria Math" panose="02040503050406030204" pitchFamily="18" charset="0"/>
+                      </a:rPr>
+                      <m:t>⁡(</m:t>
+                    </m:r>
+                    <m:f>
+                      <m:fPr>
+                        <m:ctrlPr>
+                          <a:rPr lang="en-US" sz="1100" i="1" dirty="0" smtClean="0">
+                            <a:latin typeface="Cambria Math" panose="02040503050406030204" pitchFamily="18" charset="0"/>
+                          </a:rPr>
+                        </m:ctrlPr>
+                      </m:fPr>
+                      <m:num>
+                        <m:r>
+                          <a:rPr lang="en-US" sz="1100" i="1" dirty="0">
+                            <a:latin typeface="Cambria Math" panose="02040503050406030204" pitchFamily="18" charset="0"/>
+                          </a:rPr>
+                          <m:t>8</m:t>
+                        </m:r>
+                        <m:sSub>
+                          <m:sSubPr>
+                            <m:ctrlPr>
+                              <a:rPr lang="en-US" sz="1100" i="1" dirty="0">
+                                <a:latin typeface="Cambria Math" panose="02040503050406030204" pitchFamily="18" charset="0"/>
+                              </a:rPr>
+                            </m:ctrlPr>
+                          </m:sSubPr>
+                          <m:e>
+                            <m:r>
+                              <a:rPr lang="en-US" sz="1100" i="1" dirty="0">
+                                <a:latin typeface="Cambria Math" panose="02040503050406030204" pitchFamily="18" charset="0"/>
+                              </a:rPr>
+                              <m:t>𝐷</m:t>
+                            </m:r>
+                          </m:e>
+                          <m:sub>
+                            <m:r>
+                              <a:rPr lang="en-US" sz="1100" i="1" dirty="0">
+                                <a:latin typeface="Cambria Math" panose="02040503050406030204" pitchFamily="18" charset="0"/>
+                              </a:rPr>
+                              <m:t>1</m:t>
+                            </m:r>
+                          </m:sub>
+                        </m:sSub>
+                      </m:num>
+                      <m:den>
+                        <m:sSub>
+                          <m:sSubPr>
+                            <m:ctrlPr>
+                              <a:rPr lang="en-US" sz="1100" i="1" dirty="0">
+                                <a:latin typeface="Cambria Math" panose="02040503050406030204" pitchFamily="18" charset="0"/>
+                              </a:rPr>
+                            </m:ctrlPr>
+                          </m:sSubPr>
+                          <m:e>
+                            <m:r>
+                              <a:rPr lang="en-US" sz="1100" i="1" dirty="0">
+                                <a:latin typeface="Cambria Math" panose="02040503050406030204" pitchFamily="18" charset="0"/>
+                              </a:rPr>
+                              <m:t>𝑇</m:t>
+                            </m:r>
+                          </m:e>
+                          <m:sub>
+                            <m:r>
+                              <a:rPr lang="en-US" sz="1100" i="1" dirty="0">
+                                <a:latin typeface="Cambria Math" panose="02040503050406030204" pitchFamily="18" charset="0"/>
+                              </a:rPr>
+                              <m:t>2</m:t>
+                            </m:r>
+                          </m:sub>
+                        </m:sSub>
+                      </m:den>
+                    </m:f>
+                    <m:r>
+                      <a:rPr lang="en-US" sz="1100" i="1" dirty="0" smtClean="0">
+                        <a:latin typeface="Cambria Math" panose="02040503050406030204" pitchFamily="18" charset="0"/>
+                      </a:rPr>
+                      <m:t>–</m:t>
+                    </m:r>
+                    <m:f>
+                      <m:fPr>
+                        <m:ctrlPr>
+                          <a:rPr lang="en-US" sz="1100" i="1" dirty="0">
+                            <a:latin typeface="Cambria Math" panose="02040503050406030204" pitchFamily="18" charset="0"/>
+                          </a:rPr>
+                        </m:ctrlPr>
+                      </m:fPr>
+                      <m:num>
+                        <m:r>
+                          <a:rPr lang="en-US" sz="1100" i="1" dirty="0">
+                            <a:latin typeface="Cambria Math" panose="02040503050406030204" pitchFamily="18" charset="0"/>
+                          </a:rPr>
+                          <m:t>8</m:t>
+                        </m:r>
+                        <m:sSub>
+                          <m:sSubPr>
+                            <m:ctrlPr>
+                              <a:rPr lang="en-US" sz="1100" i="1" dirty="0">
+                                <a:latin typeface="Cambria Math" panose="02040503050406030204" pitchFamily="18" charset="0"/>
+                              </a:rPr>
+                            </m:ctrlPr>
+                          </m:sSubPr>
+                          <m:e>
+                            <m:r>
+                              <a:rPr lang="en-US" sz="1100" i="1" dirty="0">
+                                <a:latin typeface="Cambria Math" panose="02040503050406030204" pitchFamily="18" charset="0"/>
+                              </a:rPr>
+                              <m:t>𝐷</m:t>
+                            </m:r>
+                          </m:e>
+                          <m:sub>
+                            <m:r>
+                              <a:rPr lang="en-US" sz="1100" b="0" i="1" dirty="0" smtClean="0">
+                                <a:latin typeface="Cambria Math" panose="02040503050406030204" pitchFamily="18" charset="0"/>
+                              </a:rPr>
+                              <m:t>2</m:t>
+                            </m:r>
+                          </m:sub>
+                        </m:sSub>
+                      </m:num>
+                      <m:den>
+                        <m:sSub>
+                          <m:sSubPr>
+                            <m:ctrlPr>
+                              <a:rPr lang="en-US" sz="1100" i="1" dirty="0">
+                                <a:latin typeface="Cambria Math" panose="02040503050406030204" pitchFamily="18" charset="0"/>
+                              </a:rPr>
+                            </m:ctrlPr>
+                          </m:sSubPr>
+                          <m:e>
+                            <m:r>
+                              <a:rPr lang="en-US" sz="1100" i="1" dirty="0">
+                                <a:latin typeface="Cambria Math" panose="02040503050406030204" pitchFamily="18" charset="0"/>
+                              </a:rPr>
+                              <m:t>𝑇</m:t>
+                            </m:r>
+                          </m:e>
+                          <m:sub>
+                            <m:r>
+                              <a:rPr lang="en-US" sz="1100" b="0" i="1" dirty="0" smtClean="0">
+                                <a:latin typeface="Cambria Math" panose="02040503050406030204" pitchFamily="18" charset="0"/>
+                              </a:rPr>
+                              <m:t>1</m:t>
+                            </m:r>
+                          </m:sub>
+                        </m:sSub>
+                      </m:den>
+                    </m:f>
+                    <m:r>
+                      <a:rPr lang="en-US" sz="1100" i="1" dirty="0" smtClean="0">
+                        <a:latin typeface="Cambria Math" panose="02040503050406030204" pitchFamily="18" charset="0"/>
+                      </a:rPr>
+                      <m:t>,</m:t>
+                    </m:r>
+                    <m:r>
+                      <a:rPr lang="en-US" sz="1100" i="1" dirty="0">
+                        <a:latin typeface="Cambria Math" panose="02040503050406030204" pitchFamily="18" charset="0"/>
+                      </a:rPr>
+                      <m:t> </m:t>
+                    </m:r>
+                    <m:r>
+                      <a:rPr lang="en-US" sz="1100" i="1" dirty="0" smtClean="0">
+                        <a:latin typeface="Cambria Math" panose="02040503050406030204" pitchFamily="18" charset="0"/>
+                      </a:rPr>
+                      <m:t>0</m:t>
+                    </m:r>
+                    <m:r>
+                      <a:rPr lang="en-US" sz="1100" i="1" dirty="0" smtClean="0">
+                        <a:latin typeface="Cambria Math" panose="02040503050406030204" pitchFamily="18" charset="0"/>
+                      </a:rPr>
+                      <m:t>)</m:t>
+                    </m:r>
+                  </m:oMath>
+                </a14:m>
+                <a:r>
+                  <a:rPr lang="en-US" sz="1100" dirty="0"/>
+                  <a:t>: </a:t>
+                </a:r>
+                <a:r>
+                  <a:rPr lang="en-US" altLang="zh-CN" sz="1100" dirty="0"/>
+                  <a:t>Q</a:t>
+                </a:r>
+                <a:r>
+                  <a:rPr lang="en-US" sz="1100" dirty="0"/>
+                  <a:t>ueuing delay of Packet 2 at Node B due to Packet 1</a:t>
+                </a:r>
+              </a:p>
+            </p:txBody>
+          </p:sp>
+        </mc:Choice>
+        <mc:Fallback>
+          <p:sp>
+            <p:nvSpPr>
+              <p:cNvPr id="4" name="TextBox 3">
+                <a:extLst>
+                  <a:ext uri="{FF2B5EF4-FFF2-40B4-BE49-F238E27FC236}">
+                    <a16:creationId xmlns:a16="http://schemas.microsoft.com/office/drawing/2014/main" id="{3E877413-1616-A14B-00FE-20A83845719F}"/>
+                  </a:ext>
+                </a:extLst>
+              </p:cNvPr>
+              <p:cNvSpPr txBox="1">
+                <a:spLocks noRot="1" noChangeAspect="1" noMove="1" noResize="1" noEditPoints="1" noAdjustHandles="1" noChangeArrowheads="1" noChangeShapeType="1" noTextEdit="1"/>
+              </p:cNvSpPr>
+              <p:nvPr/>
+            </p:nvSpPr>
+            <p:spPr>
+              <a:xfrm>
+                <a:off x="6079899" y="2207058"/>
+                <a:ext cx="3043901" cy="860557"/>
+              </a:xfrm>
+              <a:prstGeom prst="rect">
+                <a:avLst/>
+              </a:prstGeom>
+              <a:blipFill>
+                <a:blip r:embed="rId5"/>
+                <a:stretch>
+                  <a:fillRect/>
+                </a:stretch>
+              </a:blipFill>
+            </p:spPr>
+            <p:txBody>
+              <a:bodyPr/>
+              <a:lstStyle/>
+              <a:p>
+                <a:r>
+                  <a:rPr lang="en-US">
+                    <a:noFill/>
+                  </a:rPr>
+                  <a:t> </a:t>
+                </a:r>
+              </a:p>
+            </p:txBody>
+          </p:sp>
+        </mc:Fallback>
+      </mc:AlternateContent>
+      <p:cxnSp>
+        <p:nvCxnSpPr>
+          <p:cNvPr id="7" name="Straight Arrow Connector 6">
+            <a:extLst>
+              <a:ext uri="{FF2B5EF4-FFF2-40B4-BE49-F238E27FC236}">
+                <a16:creationId xmlns:a16="http://schemas.microsoft.com/office/drawing/2014/main" id="{D2C2BD15-8ECB-52A4-A6BE-F726D81D00B0}"/>
+              </a:ext>
+            </a:extLst>
+          </p:cNvPr>
+          <p:cNvCxnSpPr>
+            <a:cxnSpLocks/>
+          </p:cNvCxnSpPr>
+          <p:nvPr/>
+        </p:nvCxnSpPr>
+        <p:spPr>
+          <a:xfrm flipH="1">
+            <a:off x="5519005" y="589498"/>
+            <a:ext cx="385436" cy="6545"/>
+          </a:xfrm>
+          <a:prstGeom prst="straightConnector1">
+            <a:avLst/>
+          </a:prstGeom>
+          <a:ln w="6350">
+            <a:tailEnd type="triangle"/>
+          </a:ln>
+        </p:spPr>
+        <p:style>
+          <a:lnRef idx="1">
+            <a:schemeClr val="dk1"/>
+          </a:lnRef>
+          <a:fillRef idx="0">
+            <a:schemeClr val="dk1"/>
+          </a:fillRef>
+          <a:effectRef idx="0">
+            <a:schemeClr val="dk1"/>
+          </a:effectRef>
+          <a:fontRef idx="minor">
+            <a:schemeClr val="tx1"/>
+          </a:fontRef>
+        </p:style>
+      </p:cxnSp>
     </p:spTree>
     <p:extLst>
       <p:ext uri="{BB962C8B-B14F-4D97-AF65-F5344CB8AC3E}">
@@ -17318,7 +17059,7 @@
           <a:p>
             <a:r>
               <a:rPr lang="en-US" dirty="0"/>
-              <a:t>2) Summing the flows together, we get the following values for an aggregate flow. The peak of the aggregate flow happens at 1s, where it is 52.</a:t>
+              <a:t>2) Summing the flows together column by column, we get the following values for an aggregate flow. The peak of the aggregate flow happens at 1s, where it is 52.</a:t>
             </a:r>
           </a:p>
           <a:p>
@@ -27045,8 +26786,8 @@
           </a:p>
         </p:txBody>
       </p:sp>
-      <mc:AlternateContent xmlns:mc="http://schemas.openxmlformats.org/markup-compatibility/2006">
-        <mc:Choice xmlns:a14="http://schemas.microsoft.com/office/drawing/2010/main" Requires="a14">
+      <mc:AlternateContent xmlns:mc="http://schemas.openxmlformats.org/markup-compatibility/2006" xmlns:a14="http://schemas.microsoft.com/office/drawing/2010/main">
+        <mc:Choice Requires="a14">
           <p:sp>
             <p:nvSpPr>
               <p:cNvPr id="3" name="Text Placeholder 2">
@@ -27462,7 +27203,7 @@
             </p:txBody>
           </p:sp>
         </mc:Choice>
-        <mc:Fallback>
+        <mc:Fallback xmlns="">
           <p:sp>
             <p:nvSpPr>
               <p:cNvPr id="3" name="Text Placeholder 2">
@@ -27612,8 +27353,8 @@
           </a:p>
         </p:txBody>
       </p:sp>
-      <mc:AlternateContent xmlns:mc="http://schemas.openxmlformats.org/markup-compatibility/2006">
-        <mc:Choice xmlns:p14="http://schemas.microsoft.com/office/powerpoint/2010/main" Requires="p14">
+      <mc:AlternateContent xmlns:mc="http://schemas.openxmlformats.org/markup-compatibility/2006" xmlns:p14="http://schemas.microsoft.com/office/powerpoint/2010/main">
+        <mc:Choice Requires="p14">
           <p:contentPart p14:bwMode="auto" r:id="rId2">
             <p14:nvContentPartPr>
               <p14:cNvPr id="4" name="Ink 3">
@@ -27632,7 +27373,7 @@
             </p14:xfrm>
           </p:contentPart>
         </mc:Choice>
-        <mc:Fallback>
+        <mc:Fallback xmlns="">
           <p:pic>
             <p:nvPicPr>
               <p:cNvPr id="4" name="Ink 3">
@@ -27751,8 +27492,8 @@
           </a:p>
         </p:txBody>
       </p:sp>
-      <mc:AlternateContent xmlns:mc="http://schemas.openxmlformats.org/markup-compatibility/2006">
-        <mc:Choice xmlns:a14="http://schemas.microsoft.com/office/drawing/2010/main" Requires="a14">
+      <mc:AlternateContent xmlns:mc="http://schemas.openxmlformats.org/markup-compatibility/2006" xmlns:a14="http://schemas.microsoft.com/office/drawing/2010/main">
+        <mc:Choice Requires="a14">
           <p:sp>
             <p:nvSpPr>
               <p:cNvPr id="3" name="Text Placeholder 2">
@@ -27782,23 +27523,19 @@
                   </a:lnSpc>
                 </a:pPr>
                 <a:r>
-                  <a:rPr lang="en-US" b="1" dirty="0"/>
+                  <a:rPr lang="en-US" dirty="0"/>
                   <a:t>Transmission delays:</a:t>
                 </a:r>
               </a:p>
               <a:p>
-                <a:pPr>
+                <a:pPr lvl="1">
                   <a:lnSpc>
                     <a:spcPct val="100000"/>
                   </a:lnSpc>
                 </a:pPr>
                 <a:r>
-                  <a:rPr lang="en-US" b="1" dirty="0"/>
-                  <a:t>100 Mbps link</a:t>
-                </a:r>
-                <a:r>
                   <a:rPr lang="en-US" dirty="0"/>
-                  <a:t>:</a:t>
+                  <a:t>100 Mbps link:</a:t>
                 </a:r>
                 <a14:m>
                   <m:oMath xmlns:m="http://schemas.openxmlformats.org/officeDocument/2006/math">
@@ -27809,44 +27546,99 @@
                       <m:t> </m:t>
                     </m:r>
                     <m:r>
-                      <a:rPr lang="en-US">
+                      <a:rPr lang="en-US" b="0" smtClean="0">
                         <a:latin typeface="Cambria Math" panose="02040503050406030204" pitchFamily="18" charset="0"/>
                       </a:rPr>
-                      <m:t>20,000/100,000,000=0.0002</m:t>
+                      <m:t>20</m:t>
+                    </m:r>
+                    <m:r>
+                      <a:rPr lang="en-US" b="0" smtClean="0">
+                        <a:latin typeface="Cambria Math" panose="02040503050406030204" pitchFamily="18" charset="0"/>
+                      </a:rPr>
+                      <m:t>,</m:t>
+                    </m:r>
+                    <m:r>
+                      <a:rPr lang="en-US" b="0" smtClean="0">
+                        <a:latin typeface="Cambria Math" panose="02040503050406030204" pitchFamily="18" charset="0"/>
+                      </a:rPr>
+                      <m:t>000</m:t>
+                    </m:r>
+                    <m:r>
+                      <a:rPr lang="en-US" b="0" smtClean="0">
+                        <a:latin typeface="Cambria Math" panose="02040503050406030204" pitchFamily="18" charset="0"/>
+                      </a:rPr>
+                      <m:t>/</m:t>
+                    </m:r>
+                    <m:r>
+                      <a:rPr lang="en-US" b="0" smtClean="0">
+                        <a:latin typeface="Cambria Math" panose="02040503050406030204" pitchFamily="18" charset="0"/>
+                      </a:rPr>
+                      <m:t>100</m:t>
+                    </m:r>
+                    <m:r>
+                      <a:rPr lang="en-US" b="0" smtClean="0">
+                        <a:latin typeface="Cambria Math" panose="02040503050406030204" pitchFamily="18" charset="0"/>
+                      </a:rPr>
+                      <m:t>,</m:t>
+                    </m:r>
+                    <m:r>
+                      <a:rPr lang="en-US" b="0" smtClean="0">
+                        <a:latin typeface="Cambria Math" panose="02040503050406030204" pitchFamily="18" charset="0"/>
+                      </a:rPr>
+                      <m:t>000</m:t>
+                    </m:r>
+                    <m:r>
+                      <a:rPr lang="en-US" b="0" smtClean="0">
+                        <a:latin typeface="Cambria Math" panose="02040503050406030204" pitchFamily="18" charset="0"/>
+                      </a:rPr>
+                      <m:t>,</m:t>
+                    </m:r>
+                    <m:r>
+                      <a:rPr lang="en-US" b="0" smtClean="0">
+                        <a:latin typeface="Cambria Math" panose="02040503050406030204" pitchFamily="18" charset="0"/>
+                      </a:rPr>
+                      <m:t>000</m:t>
+                    </m:r>
+                    <m:r>
+                      <a:rPr lang="en-US" b="0" smtClean="0">
+                        <a:latin typeface="Cambria Math" panose="02040503050406030204" pitchFamily="18" charset="0"/>
+                      </a:rPr>
+                      <m:t>=</m:t>
+                    </m:r>
+                    <m:r>
+                      <a:rPr lang="en-US" b="0" smtClean="0">
+                        <a:latin typeface="Cambria Math" panose="02040503050406030204" pitchFamily="18" charset="0"/>
+                      </a:rPr>
+                      <m:t>0</m:t>
+                    </m:r>
+                    <m:r>
+                      <a:rPr lang="en-US" b="0" smtClean="0">
+                        <a:latin typeface="Cambria Math" panose="02040503050406030204" pitchFamily="18" charset="0"/>
+                      </a:rPr>
+                      <m:t>.</m:t>
+                    </m:r>
+                    <m:r>
+                      <a:rPr lang="en-US" b="0" smtClean="0">
+                        <a:latin typeface="Cambria Math" panose="02040503050406030204" pitchFamily="18" charset="0"/>
+                      </a:rPr>
+                      <m:t>0002</m:t>
                     </m:r>
                   </m:oMath>
                 </a14:m>
                 <a:r>
                   <a:rPr lang="en-US" dirty="0"/>
-                  <a:t>s = </a:t>
+                  <a:t>s = 0.2ms</a:t>
                 </a:r>
-                <a:r>
-                  <a:rPr lang="en-US" b="1" dirty="0"/>
-                  <a:t>200 </a:t>
-                </a:r>
-                <a:r>
-                  <a:rPr lang="el-GR" b="1" dirty="0"/>
-                  <a:t>μ</a:t>
-                </a:r>
-                <a:r>
-                  <a:rPr lang="en-US" b="1" dirty="0"/>
-                  <a:t>s</a:t>
-                </a:r>
-                <a:endParaRPr lang="en-US" dirty="0"/>
               </a:p>
               <a:p>
-                <a:pPr>
+                <a:pPr lvl="1">
                   <a:lnSpc>
                     <a:spcPct val="100000"/>
                   </a:lnSpc>
                 </a:pPr>
                 <a:r>
-                  <a:rPr lang="en-US" b="1" dirty="0"/>
-                  <a:t>50 Mbps link</a:t>
-                </a:r>
-                <a:r>
                   <a:rPr lang="en-US" dirty="0"/>
-                  <a:t>:</a:t>
+                  <a:t>50 Mbps link:</a:t>
                 </a:r>
                 <a14:m>
                   <m:oMath xmlns:m="http://schemas.openxmlformats.org/officeDocument/2006/math">
@@ -27857,44 +27649,99 @@
                       <m:t> </m:t>
                     </m:r>
                     <m:r>
-                      <a:rPr lang="en-US">
+                      <a:rPr lang="en-US" b="0" smtClean="0">
                         <a:latin typeface="Cambria Math" panose="02040503050406030204" pitchFamily="18" charset="0"/>
                       </a:rPr>
-                      <m:t>20,000/50,000,000=0.0004</m:t>
+                      <m:t>20</m:t>
+                    </m:r>
+                    <m:r>
+                      <a:rPr lang="en-US" b="0" smtClean="0">
+                        <a:latin typeface="Cambria Math" panose="02040503050406030204" pitchFamily="18" charset="0"/>
+                      </a:rPr>
+                      <m:t>,</m:t>
+                    </m:r>
+                    <m:r>
+                      <a:rPr lang="en-US" b="0" smtClean="0">
+                        <a:latin typeface="Cambria Math" panose="02040503050406030204" pitchFamily="18" charset="0"/>
+                      </a:rPr>
+                      <m:t>000</m:t>
+                    </m:r>
+                    <m:r>
+                      <a:rPr lang="en-US" b="0" smtClean="0">
+                        <a:latin typeface="Cambria Math" panose="02040503050406030204" pitchFamily="18" charset="0"/>
+                      </a:rPr>
+                      <m:t>/</m:t>
+                    </m:r>
+                    <m:r>
+                      <a:rPr lang="en-US" b="0" smtClean="0">
+                        <a:latin typeface="Cambria Math" panose="02040503050406030204" pitchFamily="18" charset="0"/>
+                      </a:rPr>
+                      <m:t>50</m:t>
+                    </m:r>
+                    <m:r>
+                      <a:rPr lang="en-US" b="0" smtClean="0">
+                        <a:latin typeface="Cambria Math" panose="02040503050406030204" pitchFamily="18" charset="0"/>
+                      </a:rPr>
+                      <m:t>,</m:t>
+                    </m:r>
+                    <m:r>
+                      <a:rPr lang="en-US" b="0" smtClean="0">
+                        <a:latin typeface="Cambria Math" panose="02040503050406030204" pitchFamily="18" charset="0"/>
+                      </a:rPr>
+                      <m:t>000</m:t>
+                    </m:r>
+                    <m:r>
+                      <a:rPr lang="en-US" b="0" smtClean="0">
+                        <a:latin typeface="Cambria Math" panose="02040503050406030204" pitchFamily="18" charset="0"/>
+                      </a:rPr>
+                      <m:t>,</m:t>
+                    </m:r>
+                    <m:r>
+                      <a:rPr lang="en-US" b="0" smtClean="0">
+                        <a:latin typeface="Cambria Math" panose="02040503050406030204" pitchFamily="18" charset="0"/>
+                      </a:rPr>
+                      <m:t>000</m:t>
+                    </m:r>
+                    <m:r>
+                      <a:rPr lang="en-US" b="0" smtClean="0">
+                        <a:latin typeface="Cambria Math" panose="02040503050406030204" pitchFamily="18" charset="0"/>
+                      </a:rPr>
+                      <m:t>=</m:t>
+                    </m:r>
+                    <m:r>
+                      <a:rPr lang="en-US" b="0" smtClean="0">
+                        <a:latin typeface="Cambria Math" panose="02040503050406030204" pitchFamily="18" charset="0"/>
+                      </a:rPr>
+                      <m:t>0</m:t>
+                    </m:r>
+                    <m:r>
+                      <a:rPr lang="en-US" b="0" smtClean="0">
+                        <a:latin typeface="Cambria Math" panose="02040503050406030204" pitchFamily="18" charset="0"/>
+                      </a:rPr>
+                      <m:t>.</m:t>
+                    </m:r>
+                    <m:r>
+                      <a:rPr lang="en-US" b="0" smtClean="0">
+                        <a:latin typeface="Cambria Math" panose="02040503050406030204" pitchFamily="18" charset="0"/>
+                      </a:rPr>
+                      <m:t>0004</m:t>
                     </m:r>
                   </m:oMath>
                 </a14:m>
                 <a:r>
                   <a:rPr lang="en-US" dirty="0"/>
-                  <a:t>s = </a:t>
+                  <a:t>s = 0.4ms</a:t>
                 </a:r>
-                <a:r>
-                  <a:rPr lang="en-US" b="1" dirty="0"/>
-                  <a:t>400 </a:t>
-                </a:r>
-                <a:r>
-                  <a:rPr lang="el-GR" b="1" dirty="0"/>
-                  <a:t>μ</a:t>
-                </a:r>
-                <a:r>
-                  <a:rPr lang="en-US" b="1" dirty="0"/>
-                  <a:t>s</a:t>
-                </a:r>
-                <a:endParaRPr lang="en-US" dirty="0"/>
               </a:p>
               <a:p>
-                <a:pPr>
+                <a:pPr lvl="1">
                   <a:lnSpc>
                     <a:spcPct val="100000"/>
                   </a:lnSpc>
                 </a:pPr>
                 <a:r>
-                  <a:rPr lang="en-US" b="1" dirty="0"/>
-                  <a:t>1 Gbps link</a:t>
-                </a:r>
-                <a:r>
                   <a:rPr lang="en-US" dirty="0"/>
-                  <a:t>:</a:t>
+                  <a:t>1 Gbps link:</a:t>
                 </a:r>
                 <a14:m>
                   <m:oMath xmlns:m="http://schemas.openxmlformats.org/officeDocument/2006/math">
@@ -27905,33 +27752,104 @@
                       <m:t> </m:t>
                     </m:r>
                     <m:r>
-                      <a:rPr lang="en-US">
+                      <a:rPr lang="en-US" b="0" smtClean="0">
                         <a:latin typeface="Cambria Math" panose="02040503050406030204" pitchFamily="18" charset="0"/>
                       </a:rPr>
-                      <m:t>20,000/1,000,000,000=0.00002</m:t>
+                      <m:t>20</m:t>
+                    </m:r>
+                    <m:r>
+                      <a:rPr lang="en-US" b="0" smtClean="0">
+                        <a:latin typeface="Cambria Math" panose="02040503050406030204" pitchFamily="18" charset="0"/>
+                      </a:rPr>
+                      <m:t>,</m:t>
+                    </m:r>
+                    <m:r>
+                      <a:rPr lang="en-US" b="0" smtClean="0">
+                        <a:latin typeface="Cambria Math" panose="02040503050406030204" pitchFamily="18" charset="0"/>
+                      </a:rPr>
+                      <m:t>000</m:t>
+                    </m:r>
+                    <m:r>
+                      <a:rPr lang="en-US" b="0" smtClean="0">
+                        <a:latin typeface="Cambria Math" panose="02040503050406030204" pitchFamily="18" charset="0"/>
+                      </a:rPr>
+                      <m:t>/</m:t>
+                    </m:r>
+                    <m:r>
+                      <a:rPr lang="en-US" b="0" smtClean="0">
+                        <a:latin typeface="Cambria Math" panose="02040503050406030204" pitchFamily="18" charset="0"/>
+                      </a:rPr>
+                      <m:t>1</m:t>
+                    </m:r>
+                    <m:r>
+                      <a:rPr lang="en-US" b="0" smtClean="0">
+                        <a:latin typeface="Cambria Math" panose="02040503050406030204" pitchFamily="18" charset="0"/>
+                      </a:rPr>
+                      <m:t>,</m:t>
+                    </m:r>
+                    <m:r>
+                      <a:rPr lang="en-US" b="0" smtClean="0">
+                        <a:latin typeface="Cambria Math" panose="02040503050406030204" pitchFamily="18" charset="0"/>
+                      </a:rPr>
+                      <m:t>000</m:t>
+                    </m:r>
+                    <m:r>
+                      <a:rPr lang="en-US" b="0" smtClean="0">
+                        <a:latin typeface="Cambria Math" panose="02040503050406030204" pitchFamily="18" charset="0"/>
+                      </a:rPr>
+                      <m:t>,</m:t>
+                    </m:r>
+                    <m:r>
+                      <a:rPr lang="en-US" b="0" smtClean="0">
+                        <a:latin typeface="Cambria Math" panose="02040503050406030204" pitchFamily="18" charset="0"/>
+                      </a:rPr>
+                      <m:t>000</m:t>
+                    </m:r>
+                    <m:r>
+                      <a:rPr lang="en-US" b="0" smtClean="0">
+                        <a:latin typeface="Cambria Math" panose="02040503050406030204" pitchFamily="18" charset="0"/>
+                      </a:rPr>
+                      <m:t>,</m:t>
+                    </m:r>
+                    <m:r>
+                      <a:rPr lang="en-US" b="0" smtClean="0">
+                        <a:latin typeface="Cambria Math" panose="02040503050406030204" pitchFamily="18" charset="0"/>
+                      </a:rPr>
+                      <m:t>000</m:t>
+                    </m:r>
+                    <m:r>
+                      <a:rPr lang="en-US" b="0" smtClean="0">
+                        <a:latin typeface="Cambria Math" panose="02040503050406030204" pitchFamily="18" charset="0"/>
+                      </a:rPr>
+                      <m:t>=</m:t>
+                    </m:r>
+                    <m:r>
+                      <a:rPr lang="en-US" b="0" smtClean="0">
+                        <a:latin typeface="Cambria Math" panose="02040503050406030204" pitchFamily="18" charset="0"/>
+                      </a:rPr>
+                      <m:t>0</m:t>
+                    </m:r>
+                    <m:r>
+                      <a:rPr lang="en-US" b="0" smtClean="0">
+                        <a:latin typeface="Cambria Math" panose="02040503050406030204" pitchFamily="18" charset="0"/>
+                      </a:rPr>
+                      <m:t>.</m:t>
+                    </m:r>
+                    <m:r>
+                      <a:rPr lang="en-US" b="0" smtClean="0">
+                        <a:latin typeface="Cambria Math" panose="02040503050406030204" pitchFamily="18" charset="0"/>
+                      </a:rPr>
+                      <m:t>00002</m:t>
                     </m:r>
                   </m:oMath>
                 </a14:m>
                 <a:r>
                   <a:rPr lang="en-US" dirty="0"/>
-                  <a:t>s = </a:t>
+                  <a:t>s = 0.02ms</a:t>
                 </a:r>
-                <a:r>
-                  <a:rPr lang="en-US" b="1" dirty="0"/>
-                  <a:t>20 </a:t>
-                </a:r>
-                <a:r>
-                  <a:rPr lang="el-GR" b="1" dirty="0"/>
-                  <a:t>μ</a:t>
-                </a:r>
-                <a:r>
-                  <a:rPr lang="en-US" b="1" dirty="0"/>
-                  <a:t>s</a:t>
-                </a:r>
-                <a:endParaRPr lang="en-US" dirty="0"/>
               </a:p>
               <a:p>
-                <a:pPr>
+                <a:pPr lvl="1">
                   <a:lnSpc>
                     <a:spcPct val="100000"/>
                   </a:lnSpc>
@@ -27949,40 +27867,82 @@
                       <m:t> </m:t>
                     </m:r>
                     <m:r>
-                      <a:rPr lang="en-US">
+                      <a:rPr lang="en-US" b="0" smtClean="0">
                         <a:latin typeface="Cambria Math" panose="02040503050406030204" pitchFamily="18" charset="0"/>
                       </a:rPr>
-                      <m:t>200+400+20=620</m:t>
+                      <m:t>0</m:t>
+                    </m:r>
+                    <m:r>
+                      <a:rPr lang="en-US" b="0" i="0" smtClean="0">
+                        <a:latin typeface="Cambria Math" panose="02040503050406030204" pitchFamily="18" charset="0"/>
+                      </a:rPr>
+                      <m:t>.</m:t>
+                    </m:r>
+                    <m:r>
+                      <a:rPr lang="en-US" b="0" i="0" smtClean="0">
+                        <a:latin typeface="Cambria Math" panose="02040503050406030204" pitchFamily="18" charset="0"/>
+                      </a:rPr>
+                      <m:t>2</m:t>
+                    </m:r>
+                    <m:r>
+                      <a:rPr lang="en-US" b="0" smtClean="0">
+                        <a:latin typeface="Cambria Math" panose="02040503050406030204" pitchFamily="18" charset="0"/>
+                      </a:rPr>
+                      <m:t>+</m:t>
+                    </m:r>
+                    <m:r>
+                      <a:rPr lang="en-US" b="0" i="0" smtClean="0">
+                        <a:latin typeface="Cambria Math" panose="02040503050406030204" pitchFamily="18" charset="0"/>
+                      </a:rPr>
+                      <m:t>0</m:t>
+                    </m:r>
+                    <m:r>
+                      <a:rPr lang="en-US" b="0" i="0" smtClean="0">
+                        <a:latin typeface="Cambria Math" panose="02040503050406030204" pitchFamily="18" charset="0"/>
+                      </a:rPr>
+                      <m:t>.</m:t>
+                    </m:r>
+                    <m:r>
+                      <a:rPr lang="en-US" b="0" smtClean="0">
+                        <a:latin typeface="Cambria Math" panose="02040503050406030204" pitchFamily="18" charset="0"/>
+                      </a:rPr>
+                      <m:t>4</m:t>
+                    </m:r>
+                    <m:r>
+                      <a:rPr lang="en-US" b="0" smtClean="0">
+                        <a:latin typeface="Cambria Math" panose="02040503050406030204" pitchFamily="18" charset="0"/>
+                      </a:rPr>
+                      <m:t>+</m:t>
+                    </m:r>
+                    <m:r>
+                      <a:rPr lang="en-US" b="0" i="0" smtClean="0">
+                        <a:latin typeface="Cambria Math" panose="02040503050406030204" pitchFamily="18" charset="0"/>
+                      </a:rPr>
+                      <m:t>0</m:t>
+                    </m:r>
+                    <m:r>
+                      <a:rPr lang="en-US" b="0" i="0" smtClean="0">
+                        <a:latin typeface="Cambria Math" panose="02040503050406030204" pitchFamily="18" charset="0"/>
+                      </a:rPr>
+                      <m:t>.</m:t>
+                    </m:r>
+                    <m:r>
+                      <a:rPr lang="en-US" b="0" i="0" smtClean="0">
+                        <a:latin typeface="Cambria Math" panose="02040503050406030204" pitchFamily="18" charset="0"/>
+                      </a:rPr>
+                      <m:t>02</m:t>
+                    </m:r>
+                    <m:r>
+                      <a:rPr lang="en-US" b="0" smtClean="0">
+                        <a:latin typeface="Cambria Math" panose="02040503050406030204" pitchFamily="18" charset="0"/>
+                      </a:rPr>
+                      <m:t>=</m:t>
                     </m:r>
                   </m:oMath>
                 </a14:m>
                 <a:r>
-                  <a:rPr lang="el-GR" dirty="0"/>
-                  <a:t>μ</a:t>
-                </a:r>
-                <a:r>
                   <a:rPr lang="en-US" dirty="0"/>
-                  <a:t>s = </a:t>
-                </a:r>
-                <a:r>
-                  <a:rPr lang="en-US" b="1" dirty="0"/>
-                  <a:t>0.62 </a:t>
-                </a:r>
-                <a:r>
-                  <a:rPr lang="en-US" b="1" dirty="0" err="1"/>
-                  <a:t>ms</a:t>
-                </a:r>
-                <a:endParaRPr lang="en-US" dirty="0"/>
-              </a:p>
-              <a:p>
-                <a:pPr>
-                  <a:lnSpc>
-                    <a:spcPct val="100000"/>
-                  </a:lnSpc>
-                </a:pPr>
-                <a:r>
-                  <a:rPr lang="en-US" b="1" dirty="0"/>
-                  <a:t>Propagation delays:</a:t>
+                  <a:t> 0.62ms</a:t>
                 </a:r>
               </a:p>
               <a:p>
@@ -27993,60 +27953,59 @@
                 </a:pPr>
                 <a:r>
                   <a:rPr lang="en-US" dirty="0"/>
-                  <a:t>Server → router: </a:t>
+                  <a:t>Propagation delays:</a:t>
                 </a:r>
-                <a:r>
-                  <a:rPr lang="en-US" b="1" dirty="0"/>
-                  <a:t>50 </a:t>
-                </a:r>
-                <a:r>
-                  <a:rPr lang="en-US" b="1" dirty="0" err="1"/>
-                  <a:t>ms</a:t>
-                </a:r>
-                <a:endParaRPr lang="en-US" dirty="0"/>
               </a:p>
               <a:p>
-                <a:pPr>
+                <a:pPr lvl="1">
                   <a:lnSpc>
                     <a:spcPct val="100000"/>
                   </a:lnSpc>
                 </a:pPr>
                 <a:r>
                   <a:rPr lang="en-US" dirty="0"/>
-                  <a:t>Router → router: </a:t>
+                  <a:t>Server → router: 50 </a:t>
                 </a:r>
                 <a:r>
-                  <a:rPr lang="en-US" b="1" dirty="0"/>
-                  <a:t>200 </a:t>
-                </a:r>
-                <a:r>
-                  <a:rPr lang="en-US" b="1" dirty="0" err="1"/>
+                  <a:rPr lang="en-US" dirty="0" err="1"/>
                   <a:t>ms</a:t>
                 </a:r>
                 <a:endParaRPr lang="en-US" dirty="0"/>
               </a:p>
               <a:p>
-                <a:pPr>
+                <a:pPr lvl="1">
                   <a:lnSpc>
                     <a:spcPct val="100000"/>
                   </a:lnSpc>
                 </a:pPr>
                 <a:r>
                   <a:rPr lang="en-US" dirty="0"/>
-                  <a:t>Router → client: </a:t>
+                  <a:t>Router → router: 200 </a:t>
                 </a:r>
                 <a:r>
-                  <a:rPr lang="en-US" b="1" dirty="0"/>
-                  <a:t>0 </a:t>
-                </a:r>
-                <a:r>
-                  <a:rPr lang="en-US" b="1" dirty="0" err="1"/>
+                  <a:rPr lang="en-US" dirty="0" err="1"/>
                   <a:t>ms</a:t>
                 </a:r>
                 <a:endParaRPr lang="en-US" dirty="0"/>
               </a:p>
               <a:p>
-                <a:pPr>
+                <a:pPr lvl="1">
+                  <a:lnSpc>
+                    <a:spcPct val="100000"/>
+                  </a:lnSpc>
+                </a:pPr>
+                <a:r>
+                  <a:rPr lang="en-US" dirty="0"/>
+                  <a:t>Router → client: 0 </a:t>
+                </a:r>
+                <a:r>
+                  <a:rPr lang="en-US" dirty="0" err="1"/>
+                  <a:t>ms</a:t>
+                </a:r>
+                <a:endParaRPr lang="en-US" dirty="0"/>
+              </a:p>
+              <a:p>
+                <a:pPr lvl="1">
                   <a:lnSpc>
                     <a:spcPct val="100000"/>
                   </a:lnSpc>
@@ -28064,10 +28023,34 @@
                       <m:t> </m:t>
                     </m:r>
                     <m:r>
-                      <a:rPr lang="en-US">
+                      <a:rPr lang="en-US" b="0" smtClean="0">
                         <a:latin typeface="Cambria Math" panose="02040503050406030204" pitchFamily="18" charset="0"/>
                       </a:rPr>
-                      <m:t>50+200=250</m:t>
+                      <m:t>50</m:t>
+                    </m:r>
+                    <m:r>
+                      <a:rPr lang="en-US" b="0" smtClean="0">
+                        <a:latin typeface="Cambria Math" panose="02040503050406030204" pitchFamily="18" charset="0"/>
+                      </a:rPr>
+                      <m:t>+</m:t>
+                    </m:r>
+                    <m:r>
+                      <a:rPr lang="en-US" b="0" smtClean="0">
+                        <a:latin typeface="Cambria Math" panose="02040503050406030204" pitchFamily="18" charset="0"/>
+                      </a:rPr>
+                      <m:t>200</m:t>
+                    </m:r>
+                    <m:r>
+                      <a:rPr lang="en-US" b="0" smtClean="0">
+                        <a:latin typeface="Cambria Math" panose="02040503050406030204" pitchFamily="18" charset="0"/>
+                      </a:rPr>
+                      <m:t>=</m:t>
+                    </m:r>
+                    <m:r>
+                      <a:rPr lang="en-US" b="0" smtClean="0">
+                        <a:latin typeface="Cambria Math" panose="02040503050406030204" pitchFamily="18" charset="0"/>
+                      </a:rPr>
+                      <m:t>250</m:t>
                     </m:r>
                   </m:oMath>
                 </a14:m>
@@ -28084,19 +28067,19 @@
                   </a:lnSpc>
                 </a:pPr>
                 <a:r>
-                  <a:rPr lang="en-US" b="1" dirty="0"/>
+                  <a:rPr lang="en-US" dirty="0"/>
                   <a:t>End-to-end delay:</a:t>
                 </a:r>
                 <a14:m>
                   <m:oMath xmlns:m="http://schemas.openxmlformats.org/officeDocument/2006/math">
                     <m:r>
-                      <a:rPr lang="en-US" b="1" i="0" smtClean="0">
+                      <a:rPr lang="en-US" b="0" i="0" smtClean="0">
                         <a:latin typeface="Cambria Math" panose="02040503050406030204" pitchFamily="18" charset="0"/>
                       </a:rPr>
                       <m:t> </m:t>
                     </m:r>
                     <m:r>
-                      <a:rPr lang="en-US">
+                      <a:rPr lang="en-US" b="0" smtClean="0">
                         <a:latin typeface="Cambria Math" panose="02040503050406030204" pitchFamily="18" charset="0"/>
                       </a:rPr>
                       <m:t>250</m:t>
@@ -28116,10 +28099,28 @@
                       <m:t>ms</m:t>
                     </m:r>
                     <m:r>
-                      <a:rPr lang="en-US">
+                      <a:rPr lang="en-US" b="0" smtClean="0">
                         <a:latin typeface="Cambria Math" panose="02040503050406030204" pitchFamily="18" charset="0"/>
                       </a:rPr>
-                      <m:t>+0.62</m:t>
+                      <m:t>+</m:t>
+                    </m:r>
+                    <m:r>
+                      <a:rPr lang="en-US" b="0" smtClean="0">
+                        <a:latin typeface="Cambria Math" panose="02040503050406030204" pitchFamily="18" charset="0"/>
+                      </a:rPr>
+                      <m:t>0</m:t>
+                    </m:r>
+                    <m:r>
+                      <a:rPr lang="en-US" b="0" smtClean="0">
+                        <a:latin typeface="Cambria Math" panose="02040503050406030204" pitchFamily="18" charset="0"/>
+                      </a:rPr>
+                      <m:t>.</m:t>
+                    </m:r>
+                    <m:r>
+                      <a:rPr lang="en-US" b="0" smtClean="0">
+                        <a:latin typeface="Cambria Math" panose="02040503050406030204" pitchFamily="18" charset="0"/>
+                      </a:rPr>
+                      <m:t>62</m:t>
                     </m:r>
                     <m:r>
                       <m:rPr>
@@ -28136,7 +28137,7 @@
                       <m:t>ms</m:t>
                     </m:r>
                     <m:r>
-                      <a:rPr lang="en-US">
+                      <a:rPr lang="en-US" b="0" smtClean="0">
                         <a:latin typeface="Cambria Math" panose="02040503050406030204" pitchFamily="18" charset="0"/>
                       </a:rPr>
                       <m:t>=</m:t>
@@ -28150,16 +28151,22 @@
                 <a14:m>
                   <m:oMath xmlns:m="http://schemas.openxmlformats.org/officeDocument/2006/math">
                     <m:r>
-                      <a:rPr lang="en-US">
+                      <a:rPr lang="en-US" b="0" smtClean="0">
                         <a:latin typeface="Cambria Math" panose="02040503050406030204" pitchFamily="18" charset="0"/>
                       </a:rPr>
                       <m:t>250</m:t>
                     </m:r>
                     <m:r>
-                      <a:rPr lang="en-US">
+                      <a:rPr lang="en-US" b="0" smtClean="0">
                         <a:latin typeface="Cambria Math" panose="02040503050406030204" pitchFamily="18" charset="0"/>
                       </a:rPr>
-                      <m:t>.62</m:t>
+                      <m:t>.</m:t>
+                    </m:r>
+                    <m:r>
+                      <a:rPr lang="en-US" b="0" smtClean="0">
+                        <a:latin typeface="Cambria Math" panose="02040503050406030204" pitchFamily="18" charset="0"/>
+                      </a:rPr>
+                      <m:t>62</m:t>
                     </m:r>
                     <m:r>
                       <m:rPr>
@@ -28182,7 +28189,7 @@
             </p:txBody>
           </p:sp>
         </mc:Choice>
-        <mc:Fallback>
+        <mc:Fallback xmlns="">
           <p:sp>
             <p:nvSpPr>
               <p:cNvPr id="3" name="Text Placeholder 2">

--- a/PPTs/Lecture 3 - Links Exercises ANS.pptx
+++ b/PPTs/Lecture 3 - Links Exercises ANS.pptx
@@ -298,7 +298,7 @@
 <file path=ppt/revisionInfo.xml><?xml version="1.0" encoding="utf-8"?>
 <p1510:revInfo xmlns:a="http://schemas.openxmlformats.org/drawingml/2006/main" xmlns:r="http://schemas.openxmlformats.org/officeDocument/2006/relationships" xmlns:p1510="http://schemas.microsoft.com/office/powerpoint/2015/10/main">
   <p1510:revLst>
-    <p1510:client id="{C039B89F-B73B-4A52-B89B-C3185D261259}" v="269" dt="2026-02-03T21:30:20.975"/>
+    <p1510:client id="{C039B89F-B73B-4A52-B89B-C3185D261259}" v="271" dt="2026-02-04T02:37:49.590"/>
   </p1510:revLst>
 </p1510:revInfo>
 </file>
@@ -308,7 +308,7 @@
   <pc:docChgLst>
     <pc:chgData name="Zonghua Gu" userId="9a7e1853e1951ef5" providerId="LiveId" clId="{CF1FAA12-072C-4ED5-BA76-0FFFAEFDB88A}"/>
     <pc:docChg chg="undo redo custSel addSld delSld modSld">
-      <pc:chgData name="Zonghua Gu" userId="9a7e1853e1951ef5" providerId="LiveId" clId="{CF1FAA12-072C-4ED5-BA76-0FFFAEFDB88A}" dt="2026-02-03T21:30:20.975" v="1436" actId="20577"/>
+      <pc:chgData name="Zonghua Gu" userId="9a7e1853e1951ef5" providerId="LiveId" clId="{CF1FAA12-072C-4ED5-BA76-0FFFAEFDB88A}" dt="2026-02-04T02:37:49.590" v="1438"/>
       <pc:docMkLst>
         <pc:docMk/>
       </pc:docMkLst>
@@ -621,8 +621,8 @@
           </ac:spMkLst>
         </pc:spChg>
       </pc:sldChg>
-      <pc:sldChg chg="addSp delSp modSp new mod modNotes">
-        <pc:chgData name="Zonghua Gu" userId="9a7e1853e1951ef5" providerId="LiveId" clId="{CF1FAA12-072C-4ED5-BA76-0FFFAEFDB88A}" dt="2026-02-03T21:30:20.975" v="1436" actId="20577"/>
+      <pc:sldChg chg="addSp delSp modSp new mod modAnim modNotes">
+        <pc:chgData name="Zonghua Gu" userId="9a7e1853e1951ef5" providerId="LiveId" clId="{CF1FAA12-072C-4ED5-BA76-0FFFAEFDB88A}" dt="2026-02-04T02:37:49.590" v="1438"/>
         <pc:sldMkLst>
           <pc:docMk/>
           <pc:sldMk cId="984938217" sldId="1276"/>
@@ -863,6 +863,30 @@
           <pc:sldMasterMk cId="0" sldId="2147483670"/>
         </pc:sldMasterMkLst>
       </pc:sldMasterChg>
+    </pc:docChg>
+  </pc:docChgLst>
+  <pc:docChgLst>
+    <pc:chgData name="Zonghua Gu" userId="9a7e1853e1951ef5" providerId="LiveId" clId="{E5C75BF5-3A3B-45BA-A108-76224E8C35B7}"/>
+    <pc:docChg chg="modSld">
+      <pc:chgData name="Zonghua Gu" userId="9a7e1853e1951ef5" providerId="LiveId" clId="{E5C75BF5-3A3B-45BA-A108-76224E8C35B7}" dt="2026-02-04T13:22:18.261" v="40" actId="1076"/>
+      <pc:docMkLst>
+        <pc:docMk/>
+      </pc:docMkLst>
+      <pc:sldChg chg="addSp modSp mod">
+        <pc:chgData name="Zonghua Gu" userId="9a7e1853e1951ef5" providerId="LiveId" clId="{E5C75BF5-3A3B-45BA-A108-76224E8C35B7}" dt="2026-02-04T13:22:18.261" v="40" actId="1076"/>
+        <pc:sldMkLst>
+          <pc:docMk/>
+          <pc:sldMk cId="1143496153" sldId="1274"/>
+        </pc:sldMkLst>
+        <pc:spChg chg="add mod">
+          <ac:chgData name="Zonghua Gu" userId="9a7e1853e1951ef5" providerId="LiveId" clId="{E5C75BF5-3A3B-45BA-A108-76224E8C35B7}" dt="2026-02-04T13:22:18.261" v="40" actId="1076"/>
+          <ac:spMkLst>
+            <pc:docMk/>
+            <pc:sldMk cId="1143496153" sldId="1274"/>
+            <ac:spMk id="6" creationId="{227EDB8E-90DE-16B9-B2D6-36A81ABC3FAE}"/>
+          </ac:spMkLst>
+        </pc:spChg>
+      </pc:sldChg>
     </pc:docChg>
   </pc:docChgLst>
 </pc:chgInfo>
@@ -15339,6 +15363,76 @@
           </a:prstGeom>
         </p:spPr>
       </p:pic>
+      <p:sp>
+        <p:nvSpPr>
+          <p:cNvPr id="6" name="TextBox 5">
+            <a:extLst>
+              <a:ext uri="{FF2B5EF4-FFF2-40B4-BE49-F238E27FC236}">
+                <a16:creationId xmlns:a16="http://schemas.microsoft.com/office/drawing/2014/main" id="{227EDB8E-90DE-16B9-B2D6-36A81ABC3FAE}"/>
+              </a:ext>
+            </a:extLst>
+          </p:cNvPr>
+          <p:cNvSpPr txBox="1"/>
+          <p:nvPr/>
+        </p:nvSpPr>
+        <p:spPr>
+          <a:xfrm>
+            <a:off x="2335802" y="4408597"/>
+            <a:ext cx="4472396" cy="523220"/>
+          </a:xfrm>
+          <a:prstGeom prst="rect">
+            <a:avLst/>
+          </a:prstGeom>
+          <a:solidFill>
+            <a:schemeClr val="bg1">
+              <a:lumMod val="95000"/>
+            </a:schemeClr>
+          </a:solidFill>
+        </p:spPr>
+        <p:style>
+          <a:lnRef idx="1">
+            <a:schemeClr val="dk1"/>
+          </a:lnRef>
+          <a:fillRef idx="2">
+            <a:schemeClr val="dk1"/>
+          </a:fillRef>
+          <a:effectRef idx="1">
+            <a:schemeClr val="dk1"/>
+          </a:effectRef>
+          <a:fontRef idx="minor">
+            <a:schemeClr val="dk1"/>
+          </a:fontRef>
+        </p:style>
+        <p:txBody>
+          <a:bodyPr wrap="square">
+            <a:spAutoFit/>
+          </a:bodyPr>
+          <a:lstStyle/>
+          <a:p>
+            <a:pPr lvl="1">
+              <a:spcBef>
+                <a:spcPts val="0"/>
+              </a:spcBef>
+            </a:pPr>
+            <a:r>
+              <a:rPr lang="en-US" altLang="zh-CN" dirty="0">
+                <a:solidFill>
+                  <a:srgbClr val="C00000"/>
+                </a:solidFill>
+              </a:rPr>
+              <a:t>Store-and-forward</a:t>
+            </a:r>
+            <a:r>
+              <a:rPr lang="en-US" altLang="zh-CN" dirty="0">
+                <a:solidFill>
+                  <a:schemeClr val="tx1"/>
+                </a:solidFill>
+              </a:rPr>
+              <a:t>: A router can start forwarding a packet only after it has received all bytes of the packet.</a:t>
+            </a:r>
+          </a:p>
+        </p:txBody>
+      </p:sp>
     </p:spTree>
     <p:extLst>
       <p:ext uri="{BB962C8B-B14F-4D97-AF65-F5344CB8AC3E}">
@@ -16096,8 +16190,8 @@
           </a:p>
         </p:txBody>
       </p:sp>
-      <mc:AlternateContent xmlns:mc="http://schemas.openxmlformats.org/markup-compatibility/2006">
-        <mc:Choice xmlns:a14="http://schemas.microsoft.com/office/drawing/2010/main" Requires="a14">
+      <mc:AlternateContent xmlns:mc="http://schemas.openxmlformats.org/markup-compatibility/2006" xmlns:a14="http://schemas.microsoft.com/office/drawing/2010/main">
+        <mc:Choice Requires="a14">
           <p:sp>
             <p:nvSpPr>
               <p:cNvPr id="4" name="TextBox 3">
@@ -16465,13 +16559,7 @@
                       <a:rPr lang="en-US" sz="1100" i="1" dirty="0" smtClean="0">
                         <a:latin typeface="Cambria Math" panose="02040503050406030204" pitchFamily="18" charset="0"/>
                       </a:rPr>
-                      <m:t>0</m:t>
-                    </m:r>
-                    <m:r>
-                      <a:rPr lang="en-US" sz="1100" i="1" dirty="0" smtClean="0">
-                        <a:latin typeface="Cambria Math" panose="02040503050406030204" pitchFamily="18" charset="0"/>
-                      </a:rPr>
-                      <m:t>)</m:t>
+                      <m:t>0)</m:t>
                     </m:r>
                   </m:oMath>
                 </a14:m>
@@ -16491,7 +16579,7 @@
             </p:txBody>
           </p:sp>
         </mc:Choice>
-        <mc:Fallback>
+        <mc:Fallback xmlns="">
           <p:sp>
             <p:nvSpPr>
               <p:cNvPr id="4" name="TextBox 3">
@@ -16587,6 +16675,130 @@
   <p:clrMapOvr>
     <a:masterClrMapping/>
   </p:clrMapOvr>
+  <p:timing>
+    <p:tnLst>
+      <p:par>
+        <p:cTn id="1" dur="indefinite" restart="never" nodeType="tmRoot">
+          <p:childTnLst>
+            <p:seq concurrent="1" nextAc="seek">
+              <p:cTn id="2" dur="indefinite" nodeType="mainSeq">
+                <p:childTnLst>
+                  <p:par>
+                    <p:cTn id="3" fill="hold">
+                      <p:stCondLst>
+                        <p:cond delay="indefinite"/>
+                      </p:stCondLst>
+                      <p:childTnLst>
+                        <p:par>
+                          <p:cTn id="4" fill="hold">
+                            <p:stCondLst>
+                              <p:cond delay="0"/>
+                            </p:stCondLst>
+                            <p:childTnLst>
+                              <p:par>
+                                <p:cTn id="5" presetID="1" presetClass="entr" presetSubtype="0" fill="hold" grpId="0" nodeType="clickEffect">
+                                  <p:stCondLst>
+                                    <p:cond delay="0"/>
+                                  </p:stCondLst>
+                                  <p:childTnLst>
+                                    <p:set>
+                                      <p:cBhvr>
+                                        <p:cTn id="6" dur="1" fill="hold">
+                                          <p:stCondLst>
+                                            <p:cond delay="0"/>
+                                          </p:stCondLst>
+                                        </p:cTn>
+                                        <p:tgtEl>
+                                          <p:spTgt spid="18"/>
+                                        </p:tgtEl>
+                                        <p:attrNameLst>
+                                          <p:attrName>style.visibility</p:attrName>
+                                        </p:attrNameLst>
+                                      </p:cBhvr>
+                                      <p:to>
+                                        <p:strVal val="visible"/>
+                                      </p:to>
+                                    </p:set>
+                                  </p:childTnLst>
+                                </p:cTn>
+                              </p:par>
+                            </p:childTnLst>
+                          </p:cTn>
+                        </p:par>
+                      </p:childTnLst>
+                    </p:cTn>
+                  </p:par>
+                  <p:par>
+                    <p:cTn id="7" fill="hold">
+                      <p:stCondLst>
+                        <p:cond delay="indefinite"/>
+                      </p:stCondLst>
+                      <p:childTnLst>
+                        <p:par>
+                          <p:cTn id="8" fill="hold">
+                            <p:stCondLst>
+                              <p:cond delay="0"/>
+                            </p:stCondLst>
+                            <p:childTnLst>
+                              <p:par>
+                                <p:cTn id="9" presetID="1" presetClass="entr" presetSubtype="0" fill="hold" grpId="0" nodeType="clickEffect">
+                                  <p:stCondLst>
+                                    <p:cond delay="0"/>
+                                  </p:stCondLst>
+                                  <p:childTnLst>
+                                    <p:set>
+                                      <p:cBhvr>
+                                        <p:cTn id="10" dur="1" fill="hold">
+                                          <p:stCondLst>
+                                            <p:cond delay="0"/>
+                                          </p:stCondLst>
+                                        </p:cTn>
+                                        <p:tgtEl>
+                                          <p:spTgt spid="4"/>
+                                        </p:tgtEl>
+                                        <p:attrNameLst>
+                                          <p:attrName>style.visibility</p:attrName>
+                                        </p:attrNameLst>
+                                      </p:cBhvr>
+                                      <p:to>
+                                        <p:strVal val="visible"/>
+                                      </p:to>
+                                    </p:set>
+                                  </p:childTnLst>
+                                </p:cTn>
+                              </p:par>
+                            </p:childTnLst>
+                          </p:cTn>
+                        </p:par>
+                      </p:childTnLst>
+                    </p:cTn>
+                  </p:par>
+                </p:childTnLst>
+              </p:cTn>
+              <p:prevCondLst>
+                <p:cond evt="onPrev" delay="0">
+                  <p:tgtEl>
+                    <p:sldTgt/>
+                  </p:tgtEl>
+                </p:cond>
+              </p:prevCondLst>
+              <p:nextCondLst>
+                <p:cond evt="onNext" delay="0">
+                  <p:tgtEl>
+                    <p:sldTgt/>
+                  </p:tgtEl>
+                </p:cond>
+              </p:nextCondLst>
+            </p:seq>
+          </p:childTnLst>
+        </p:cTn>
+      </p:par>
+    </p:tnLst>
+    <p:bldLst>
+      <p:bldP spid="18" grpId="0" animBg="1"/>
+      <p:bldP spid="4" grpId="0" animBg="1"/>
+    </p:bldLst>
+  </p:timing>
 </p:sld>
 </file>
 
